--- a/threadpilot/docs/presentation/Presentation_GroupNN_Sprint1.pptx
+++ b/threadpilot/docs/presentation/Presentation_GroupNN_Sprint1.pptx
@@ -118,7 +118,7 @@
   <p:extLst>
     <p:ext uri="{521415D9-36F7-43E2-AB2F-B90AF26B5E84}">
       <p14:sectionLst xmlns:p14="http://schemas.microsoft.com/office/powerpoint/2010/main">
-        <p14:section name="Sprint 1" id="{fcb30445-5d55-d75d-b14c-09e6cc56e1c0}">
+        <p14:section name="Sprint 1" id="{60ae92fb-1fb9-a298-9173-dbdddce37335}">
           <p14:sldIdLst>
             <p14:sldId id="256"/>
             <p14:sldId id="257"/>
@@ -130,7 +130,7 @@
             <p14:sldId id="263"/>
           </p14:sldIdLst>
         </p14:section>
-        <p14:section name="Backup" id="{6a382a5d-9843-1574-fecb-8307fb1405a1}">
+        <p14:section name="Backup" id="{73031f1c-ca5c-b759-48ce-cae8b02ed0ad}">
           <p14:sldIdLst>
             <p14:sldId id="264"/>
             <p14:sldId id="265"/>
@@ -1795,7 +1795,7 @@
             <a:r>
               <a:rPr lang="en-US" dirty="0"/>
               <a:t>~35 seconds.
-Sprint 2 is about proving it, not adding features. First, run the live backend once on the 36 questions and report it as first pass. Second, each teammate adds ten blind questions. Third, bring the briefing onto the team's live data and cloud site.
+Sprint 2 is about proving it, not adding features. First, run the live backend once on the 36 questions and report it as first pass. Second, each teammate adds ten blind questions. Third, put the briefing on the team's cloud site. Fourth, settle on one feasibility method.
 Success criteria: the live result reported as it ran, at least 70 percent on blind questions against 69 on our own, no number without a source row, public links that open, and an owner for every feature.
 [Team: the success criteria and the 70 percent target are a proposal drawn from the repository's own results. Agree them and add an owner to each roadmap row before presenting.]</a:t>
             </a:r>
@@ -1886,7 +1886,7 @@
             <a:r>
               <a:rPr lang="en-US" dirty="0"/>
               <a:t>Backup. Use if asked about the tool set.
-The brief says the centre of the track is the tool set, so we specified every tool before building it: 36 entries in one table, 17 on the live backend and 19 in the dashboard chat, each with its limits. A test checks the live names against what the engine really calls.
+The brief says the centre of the track is the tool set, so we specified every tool before building it: 37 entries in one table, 18 on the live backend and 19 in the dashboard chat, each with its limits. A test checks the live names against what the engine really calls.
 Judgement is the one to remember: 'normal' is an explicit rule, the previous 8 same weekdays with Sundays closed, shared by the briefing, the chat and the dashboard, and a test holds them to identical numbers.
 The boundaries page (docs/tool_boundaries.md) records 27 questions that could plausibly go to two tools, with the tool that must answer and the one that must not; it is generated by running the real chat, and a test re-runs it.
 Stack: FastAPI, MySQL 8, a SQLite store for sessions and confirmations, the OpenAI API for understanding and wording only, and a LangChain read-only SQL agent.</a:t>
@@ -13060,7 +13060,7 @@
                             <a:schemeClr val="tx1"/>
                           </a:solidFill>
                         </a:rPr>
-                        <a:t>Briefing on the live data</a:t>
+                        <a:t>Briefing on the cloud site</a:t>
                       </a:r>
                       <a:endParaRPr lang="en-US" sz="1250" dirty="0"/>
                     </a:p>
@@ -13243,7 +13243,7 @@
                             <a:schemeClr val="tx1"/>
                           </a:solidFill>
                         </a:rPr>
-                        <a:t>Bring the 8 finding types onto MySQL and the team's cloud site (merge prepared).</a:t>
+                        <a:t>Merge and redeploy, so the briefing and live discovery run on the team's site.</a:t>
                       </a:r>
                       <a:endParaRPr lang="en-US" sz="1250" dirty="0"/>
                     </a:p>
@@ -13306,7 +13306,7 @@
                             <a:schemeClr val="tx1"/>
                           </a:solidFill>
                         </a:rPr>
-                        <a:t>Read-only SQL tool</a:t>
+                        <a:t>One feasibility method</a:t>
                       </a:r>
                       <a:endParaRPr lang="en-US" sz="1250" dirty="0"/>
                     </a:p>
@@ -13425,10 +13425,10 @@
                       <a:r>
                         <a:rPr lang="en-US" sz="1300" b="1" dirty="0">
                           <a:solidFill>
-                            <a:schemeClr val="tx1"/>
+                            <a:schemeClr val="bg1"/>
                           </a:solidFill>
                         </a:rPr>
-                        <a:t>Medium</a:t>
+                        <a:t>High</a:t>
                       </a:r>
                       <a:endParaRPr lang="en-US" sz="1300" dirty="0"/>
                     </a:p>
@@ -13471,7 +13471,7 @@
                       <a:tailEnd type="none" w="med" len="med"/>
                     </a:lnB>
                     <a:solidFill>
-                      <a:schemeClr val="accent3"/>
+                      <a:schemeClr val="accent6"/>
                     </a:solidFill>
                   </a:tcPr>
                 </a:tc>
@@ -13489,7 +13489,7 @@
                             <a:schemeClr val="tx1"/>
                           </a:solidFill>
                         </a:rPr>
-                        <a:t>Decide whether the AI page uses it. It is built and tested, but not wired in.</a:t>
+                        <a:t>The two chats can give different dates for one order. Keep one, use the other as a check.</a:t>
                       </a:r>
                       <a:endParaRPr lang="en-US" sz="1250" dirty="0"/>
                     </a:p>
@@ -15290,7 +15290,7 @@
                   <a:schemeClr val="accent3"/>
                 </a:solidFill>
               </a:rPr>
-              <a:t>36 tools</a:t>
+              <a:t>37 tools</a:t>
             </a:r>
             <a:pPr algn="l" indent="0" marL="0">
               <a:buNone/>
@@ -15301,7 +15301,7 @@
                   <a:schemeClr val="bg1"/>
                 </a:solidFill>
               </a:rPr>
-              <a:t> in one table (17 live, 19 in the dashboard chat): input, output, purpose, non-goals, failure mode.   </a:t>
+              <a:t> in one table (18 live, 19 in the dashboard chat): input, output, purpose, non-goals, failure mode.   </a:t>
             </a:r>
             <a:pPr algn="l" indent="0" marL="0">
               <a:buNone/>

--- a/threadpilot/docs/presentation/Presentation_GroupNN_Sprint1.pptx
+++ b/threadpilot/docs/presentation/Presentation_GroupNN_Sprint1.pptx
@@ -118,7 +118,7 @@
   <p:extLst>
     <p:ext uri="{521415D9-36F7-43E2-AB2F-B90AF26B5E84}">
       <p14:sectionLst xmlns:p14="http://schemas.microsoft.com/office/powerpoint/2010/main">
-        <p14:section name="Sprint 1" id="{60ae92fb-1fb9-a298-9173-dbdddce37335}">
+        <p14:section name="Sprint 1" id="{3c3974aa-ef2f-12f6-0ac6-1799cf546990}">
           <p14:sldIdLst>
             <p14:sldId id="256"/>
             <p14:sldId id="257"/>
@@ -130,7 +130,7 @@
             <p14:sldId id="263"/>
           </p14:sldIdLst>
         </p14:section>
-        <p14:section name="Backup" id="{73031f1c-ca5c-b759-48ce-cae8b02ed0ad}">
+        <p14:section name="Backup" id="{58246d25-f3a2-cd99-b2b8-6ecf16ead91e}">
           <p14:sldIdLst>
             <p14:sldId id="264"/>
             <p14:sldId id="265"/>
@@ -318,7 +318,7 @@
                     <c:v>Unanswerable (6/6)</c:v>
                   </c:pt>
                   <c:pt idx="4">
-                    <c:v>Feasibility (6/6)</c:v>
+                    <c:v>Feasibility (5/6)</c:v>
                   </c:pt>
                   <c:pt idx="5">
                     <c:v>Actions (2/5)</c:v>
@@ -346,7 +346,7 @@
                   <c:v>100</c:v>
                 </c:pt>
                 <c:pt idx="4">
-                  <c:v>100</c:v>
+                  <c:v>83</c:v>
                 </c:pt>
                 <c:pt idx="5">
                   <c:v>40</c:v>
@@ -1068,8 +1068,8 @@
             <a:r>
               <a:rPr lang="en-US" dirty="0"/>
               <a:t>Backup. Use if asked about errors or about how we tested.
-The course asks for at least ten failure cases, each analysed. These are the 11 questions the dashboard chat got wrong the first time: 25 of 36 right. Five fell to 'I can't answer that', five were answered by a close but wrong rule, one was a wording problem.
-None stated a wrong figure. The tools were never the problem; the routing was. Fixing a case meant adding or widening a rule, never changing a calculation. That is the cost of narrow typed tools: reliable numbers, and a router that has to be taught each phrasing.
+The course asks for at least ten failure cases, each analysed. These are the 12 questions the dashboard chat got wrong the first time: 24 of 36 right. Five fell to 'I can't answer that', six were answered by a close but wrong rule, one was a wording problem. Six more come from the bait questions, analysed in the same document.
+One stated a wrong date: a past date read as next year's. The tools were never the problem; the routing was. Fixing a case meant adding or widening a rule, never changing a calculation. That is the cost of narrow typed tools: reliable numbers, and a router that has to be taught each phrasing.
 A live language model will fail differently, with classification mistakes and rate limits, so none of this analysis applies to it until we run the live batch.</a:t>
             </a:r>
             <a:endParaRPr lang="en-US" dirty="0"/>
@@ -1522,9 +1522,9 @@
             <a:r>
               <a:rPr lang="en-US" dirty="0"/>
               <a:t>~30 seconds.
-We wrote 36 questions with answers computed from the CSV files. First pass, nothing fixed: 25 right, 69 percent. That is the number we stand behind. After fixes, 21 new questions with different wording gave 18.
-Discovery and feasibility come from our own simulator, so they show consistency, not real-world accuracy. The live OpenAI backend has not yet been run on these 36 questions; that is our first Sprint 2 task.
-(If asked: all 11 first-pass failures are analysed one by one on backup slide 11; none stated a wrong figure. The same questions now pass 36 of 36, but that is not first-pass and we do not quote it as accuracy.)</a:t>
+We wrote 36 questions with answers computed from the CSV files. First pass, nothing fixed: 24 right, 67 percent. That is the number we stand behind; we first reported 25, until our own invented-number check caught a false pass. After fixes, 21 new questions with different wording gave 18.
+We also wrote 16 bait questions before running them, to tempt it into inventing: 10 held first time, and every number bait and both prompt injections held. And we checked every number it states against what a tool returned: 3 of 163 were untraced, and one of those was a real error. The live OpenAI backend has not yet been run on these 36 questions; that is our first Sprint 2 task.
+(If asked: all 12 first-pass failures are analysed one by one on backup slide 11; one stated a wrong date, found by the provenance check. The same questions now pass 36 of 36, but that is not first-pass and we do not quote it as accuracy.)</a:t>
             </a:r>
             <a:endParaRPr lang="en-US" dirty="0"/>
           </a:p>
@@ -1796,7 +1796,7 @@
               <a:rPr lang="en-US" dirty="0"/>
               <a:t>~35 seconds.
 Sprint 2 is about proving it, not adding features. First, run the live backend once on the 36 questions and report it as first pass. Second, each teammate adds ten blind questions. Third, put the briefing on the team's cloud site. Fourth, settle on one feasibility method.
-Success criteria: the live result reported as it ran, at least 70 percent on blind questions against 69 on our own, no number without a source row, public links that open, and an owner for every feature.
+Success criteria: the live result reported as it ran, at least 70 percent on blind questions against 67 on our own, no number without a source row, public links that open, and an owner for every feature.
 [Team: the success criteria and the 70 percent target are a proposal drawn from the repository's own results. Agree them and add an owner to each roadmap row before presenting.]</a:t>
             </a:r>
             <a:endParaRPr lang="en-US" dirty="0"/>
@@ -3382,7 +3382,7 @@
                   <a:schemeClr val="tx2"/>
                 </a:solidFill>
               </a:rPr>
-              <a:t>Backup: the 11 first-pass failures, by cause</a:t>
+              <a:t>Backup: the 12 first-pass failures, by cause</a:t>
             </a:r>
             <a:endParaRPr lang="en-US" sz="3200" dirty="0"/>
           </a:p>
@@ -3600,7 +3600,7 @@
                 <a:ea typeface="Cambria" pitchFamily="34" charset="-122"/>
                 <a:cs typeface="Cambria" pitchFamily="34" charset="-120"/>
               </a:rPr>
-              <a:t>5</a:t>
+              <a:t>6</a:t>
             </a:r>
             <a:endParaRPr lang="en-US" sz="4400" dirty="0"/>
           </a:p>
@@ -3656,7 +3656,7 @@
                   <a:schemeClr val="tx1"/>
                 </a:solidFill>
               </a:rPr>
-              <a:t>The status line instead of the stage (Q04); orders instead of pieces (Q09); “Is it late?” listed late orders instead of asking which (Q17); “the Harbor Knits order” taken as the customer (Q18); “Delete ORD-005” answered as a lookup (Q35).</a:t>
+              <a:t>Status instead of stage (Q04); orders instead of pieces (Q09); “Is it late?” listed late orders (Q17); “the Harbor Knits order” taken as the customer (Q18); a past date read as next year's (Q31); “Delete ORD-005” answered as a lookup (Q35).</a:t>
             </a:r>
             <a:endParaRPr lang="en-US" sz="1500" dirty="0"/>
           </a:p>
@@ -3849,7 +3849,7 @@
                   <a:schemeClr val="tx1"/>
                 </a:solidFill>
               </a:rPr>
-              <a:t>All 11 were routing mistakes. None stated a wrong figure.</a:t>
+              <a:t>All 12 were routing mistakes. One stated a wrong date (Q31); the scorer passed it and the invented-number check caught it.</a:t>
             </a:r>
             <a:endParaRPr lang="en-US" sz="1300" dirty="0"/>
           </a:p>
@@ -7598,7 +7598,7 @@
                   <a:schemeClr val="accent5"/>
                 </a:solidFill>
               </a:rPr>
-              <a:t>Demo chat: built-in tools, no language model.  Simulated data; discovery found 5 of 5 planted events, 1 to 5 days after each began.</a:t>
+              <a:t>Demo chat: built-in tools, no language model.  Simulated data; discovery found 5 of 5 planted events, 1 to 4 days after each began.</a:t>
             </a:r>
             <a:endParaRPr lang="en-US" sz="1100" dirty="0"/>
           </a:p>
@@ -7706,7 +7706,7 @@
                   <a:schemeClr val="tx2"/>
                 </a:solidFill>
               </a:rPr>
-              <a:t>Measured so far: 25 of 36 right on the first try</a:t>
+              <a:t>Measured so far: 24 of 36 right on the first try</a:t>
             </a:r>
             <a:endParaRPr lang="en-US" sz="3200" dirty="0"/>
           </a:p>
@@ -7730,7 +7730,7 @@
       </p:graphicFrame>
       <p:sp>
         <p:nvSpPr>
-          <p:cNvPr id="4" name="Stat 25 / 36"/>
+          <p:cNvPr id="4" name="Stat 24 / 36"/>
           <p:cNvSpPr txBox="1"/>
           <p:nvPr/>
         </p:nvSpPr>
@@ -7761,7 +7761,7 @@
                 <a:ea typeface="Cambria" pitchFamily="34" charset="-122"/>
                 <a:cs typeface="Cambria" pitchFamily="34" charset="-120"/>
               </a:rPr>
-              <a:t>25 / 36</a:t>
+              <a:t>24 / 36</a:t>
             </a:r>
             <a:endParaRPr lang="en-US" sz="3800" dirty="0"/>
           </a:p>
@@ -7797,7 +7797,7 @@
                   <a:schemeClr val="tx1"/>
                 </a:solidFill>
               </a:rPr>
-              <a:t>first pass, nothing fixed yet (69%): the honest figure</a:t>
+              <a:t>first pass, nothing fixed yet (67%): the honest figure</a:t>
             </a:r>
             <a:endParaRPr lang="en-US" sz="1400" dirty="0"/>
           </a:p>
@@ -7880,7 +7880,7 @@
       </p:sp>
       <p:sp>
         <p:nvSpPr>
-          <p:cNvPr id="8" name="Stat 5 / 5"/>
+          <p:cNvPr id="8" name="Stat 10 / 16"/>
           <p:cNvSpPr txBox="1"/>
           <p:nvPr/>
         </p:nvSpPr>
@@ -7911,7 +7911,7 @@
                 <a:ea typeface="Cambria" pitchFamily="34" charset="-122"/>
                 <a:cs typeface="Cambria" pitchFamily="34" charset="-120"/>
               </a:rPr>
-              <a:t>5 / 5</a:t>
+              <a:t>10 / 16</a:t>
             </a:r>
             <a:endParaRPr lang="en-US" sz="3800" dirty="0"/>
           </a:p>
@@ -7947,7 +7947,7 @@
                   <a:schemeClr val="tx1"/>
                 </a:solidFill>
               </a:rPr>
-              <a:t>planted events found by discovery, 1 to 5 days after each began</a:t>
+              <a:t>bait questions resisted first time; every invented-figure bait held</a:t>
             </a:r>
             <a:endParaRPr lang="en-US" sz="1400" dirty="0"/>
           </a:p>
@@ -7955,7 +7955,7 @@
       </p:sp>
       <p:sp>
         <p:nvSpPr>
-          <p:cNvPr id="10" name="Stat 14 / 14"/>
+          <p:cNvPr id="10" name="Stat 3 / 163"/>
           <p:cNvSpPr txBox="1"/>
           <p:nvPr/>
         </p:nvSpPr>
@@ -7986,7 +7986,7 @@
                 <a:ea typeface="Cambria" pitchFamily="34" charset="-122"/>
                 <a:cs typeface="Cambria" pitchFamily="34" charset="-120"/>
               </a:rPr>
-              <a:t>14 / 14</a:t>
+              <a:t>3 / 163</a:t>
             </a:r>
             <a:endParaRPr lang="en-US" sz="3800" dirty="0"/>
           </a:p>
@@ -8022,7 +8022,7 @@
                   <a:schemeClr val="tx1"/>
                 </a:solidFill>
               </a:rPr>
-              <a:t>feasibility ranges that contained the real finish</a:t>
+              <a:t>numbers not traced to a tool; read by hand, 1 was a real error</a:t>
             </a:r>
             <a:endParaRPr lang="en-US" sz="1400" dirty="0"/>
           </a:p>
@@ -8058,7 +8058,7 @@
                   <a:schemeClr val="accent5"/>
                 </a:solidFill>
               </a:rPr>
-              <a:t>Dashboard chat. The last two come from our own simulator: internal consistency, not real-world accuracy.</a:t>
+              <a:t>Dashboard chat, no language model. 24 of 36 was first reported as 25: the invented-number check found a false pass.</a:t>
             </a:r>
             <a:endParaRPr lang="en-US" sz="1100" dirty="0"/>
           </a:p>
@@ -8836,7 +8836,7 @@
                             <a:schemeClr val="tx1"/>
                           </a:solidFill>
                         </a:rPr>
-                        <a:t>Numbers come from code, never from the model; every figure opens its source rows. First pass 25 of 36 and no answer stated a wrong figure; each failure analysed one by one.</a:t>
+                        <a:t>Numbers come from code, never from the model; every figure opens its source rows. Every stated number is checked against tool output: 3 of 163 untraced, 1 a real error, now fixed.</a:t>
                       </a:r>
                       <a:endParaRPr lang="en-US" sz="1250" dirty="0"/>
                     </a:p>
@@ -13933,7 +13933,7 @@
                   <a:schemeClr val="bg1"/>
                 </a:solidFill>
               </a:rPr>
-              <a:t>70% or more right on teammates' blind questions (rule-based chat: 69% on ours)</a:t>
+              <a:t>70% or more right on teammates' blind questions (rule-based chat: 67% on ours)</a:t>
             </a:r>
             <a:endParaRPr lang="en-US" sz="1400" dirty="0"/>
           </a:p>

--- a/threadpilot/docs/presentation/Presentation_GroupNN_Sprint1.pptx
+++ b/threadpilot/docs/presentation/Presentation_GroupNN_Sprint1.pptx
@@ -118,7 +118,7 @@
   <p:extLst>
     <p:ext uri="{521415D9-36F7-43E2-AB2F-B90AF26B5E84}">
       <p14:sectionLst xmlns:p14="http://schemas.microsoft.com/office/powerpoint/2010/main">
-        <p14:section name="Sprint 1" id="{3c3974aa-ef2f-12f6-0ac6-1799cf546990}">
+        <p14:section name="Sprint 1" id="{c46b4016-37ec-0a61-5a2a-682c0c75e0e4}">
           <p14:sldIdLst>
             <p14:sldId id="256"/>
             <p14:sldId id="257"/>
@@ -130,7 +130,7 @@
             <p14:sldId id="263"/>
           </p14:sldIdLst>
         </p14:section>
-        <p14:section name="Backup" id="{58246d25-f3a2-cd99-b2b8-6ecf16ead91e}">
+        <p14:section name="Backup" id="{1f5e19ff-f9e9-7838-db95-414d6fdd55d6}">
           <p14:sldIdLst>
             <p14:sldId id="264"/>
             <p14:sldId id="265"/>
@@ -1251,7 +1251,7 @@
               <a:t>~35 seconds.
 The brief gives five questions a general manager asks across a day. Today each one costs a phone call to a planner and a wait, and the answer is sometimes wrong.
 Our solution is an agent the manager talks to: a morning briefing, a chat that asks when unsure and says what the data cannot answer, and actions only after a confirmation.
-The value, in the brief's words, is the planner's half hour every morning plus every 'let me check and call you back'. We answer all five questions in the demo. We cannot yet show hours saved: no real manager has used it.</a:t>
+The value, in the brief's words, is the planner's half hour every morning plus every 'let me check and call you back'. We answer all five questions in the demo. We cannot yet show hours saved: no real manager has used it. In a paired simulation, finding problems through the briefing avoided about 30 working days of lateness per two months.</a:t>
             </a:r>
             <a:endParaRPr lang="en-US" dirty="0"/>
           </a:p>
@@ -4311,7 +4311,7 @@
                   <a:schemeClr val="tx1"/>
                 </a:solidFill>
               </a:rPr>
-              <a:t>Unlikely by Sat 25 Apr: finishes between Fri 1 May and Fri 8 May. Bottleneck: Packing. An estimate with assumptions, not a commitment.</a:t>
+              <a:t>Unlikely by Sat 25 Apr: between Tue 28 Apr and Tue 12 May. The range is widened by 3 working days each end, because tested on 180 simulated orders the narrower one held the real finish only 7 times in 10 (now 94%).</a:t>
             </a:r>
             <a:endParaRPr lang="en-US" sz="1200" dirty="0"/>
           </a:p>
@@ -5308,12 +5308,12 @@
         </p:nvSpPr>
         <p:spPr>
           <a:xfrm>
-            <a:off x="8354568" y="4846320"/>
-            <a:ext cx="3057144" cy="1005840"/>
+            <a:off x="8354568" y="4617720"/>
+            <a:ext cx="3057144" cy="1325880"/>
           </a:xfrm>
           <a:prstGeom prst="roundRect">
             <a:avLst>
-              <a:gd name="adj" fmla="val 7273"/>
+              <a:gd name="adj" fmla="val 5517"/>
             </a:avLst>
           </a:prstGeom>
           <a:solidFill>
@@ -5330,8 +5330,8 @@
         </p:nvSpPr>
         <p:spPr>
           <a:xfrm>
-            <a:off x="8491728" y="4846320"/>
-            <a:ext cx="2782824" cy="1005840"/>
+            <a:off x="8491728" y="4617720"/>
+            <a:ext cx="2782824" cy="1325880"/>
           </a:xfrm>
           <a:prstGeom prst="rect">
             <a:avLst/>
@@ -5344,10 +5344,13 @@
           <a:lstStyle/>
           <a:p>
             <a:pPr algn="l" indent="0" marL="0">
+              <a:spcAft>
+                <a:spcPts val="400"/>
+              </a:spcAft>
               <a:buNone/>
             </a:pPr>
             <a:r>
-              <a:rPr lang="en-US" sz="1300" b="1" dirty="0">
+              <a:rPr lang="en-US" sz="1200" b="1" dirty="0">
                 <a:solidFill>
                   <a:schemeClr val="accent3"/>
                 </a:solidFill>
@@ -5355,17 +5358,51 @@
               <a:t>Not measured: </a:t>
             </a:r>
             <a:pPr algn="l" indent="0" marL="0">
+              <a:spcAft>
+                <a:spcPts val="400"/>
+              </a:spcAft>
               <a:buNone/>
             </a:pPr>
             <a:r>
-              <a:rPr lang="en-US" sz="1300" dirty="0">
+              <a:rPr lang="en-US" sz="1200" dirty="0">
                 <a:solidFill>
                   <a:schemeClr val="bg1"/>
                 </a:solidFill>
               </a:rPr>
-              <a:t>time saved. No real general manager has used it yet, so we report no hours.</a:t>
-            </a:r>
-            <a:endParaRPr lang="en-US" sz="1300" dirty="0"/>
+              <a:t>time saved; no real manager has used it. </a:t>
+            </a:r>
+            <a:endParaRPr lang="en-US" sz="1200" dirty="0"/>
+          </a:p>
+          <a:p>
+            <a:pPr algn="l" indent="0" marL="0">
+              <a:spcAft>
+                <a:spcPts val="400"/>
+              </a:spcAft>
+              <a:buNone/>
+            </a:pPr>
+            <a:r>
+              <a:rPr lang="en-US" sz="1200" b="1" dirty="0">
+                <a:solidFill>
+                  <a:schemeClr val="accent3"/>
+                </a:solidFill>
+              </a:rPr>
+              <a:t>In simulation: </a:t>
+            </a:r>
+            <a:pPr algn="l" indent="0" marL="0">
+              <a:spcAft>
+                <a:spcPts val="400"/>
+              </a:spcAft>
+              <a:buNone/>
+            </a:pPr>
+            <a:r>
+              <a:rPr lang="en-US" sz="1200" dirty="0">
+                <a:solidFill>
+                  <a:schemeClr val="bg1"/>
+                </a:solidFill>
+              </a:rPr>
+              <a:t>finding problems through the briefing avoided about 30 working days of lateness per two months (95%: 18 to 43).</a:t>
+            </a:r>
+            <a:endParaRPr lang="en-US" sz="1200" dirty="0"/>
           </a:p>
         </p:txBody>
       </p:sp>
@@ -9450,7 +9487,7 @@
                             <a:schemeClr val="tx1"/>
                           </a:solidFill>
                         </a:rPr>
-                        <a:t>One briefing at 07:00. Only watches the manager sets, and a stage under target 3 days running, may interrupt.</a:t>
+                        <a:t>One briefing at 07:00. Stage alerts use 3-sigma + CUSUM: about 2 false alarms a month, against 12 for the old band (measured).</a:t>
                       </a:r>
                       <a:endParaRPr lang="en-US" sz="1250" dirty="0"/>
                     </a:p>

--- a/threadpilot/docs/presentation/Presentation_GroupNN_Sprint1.pptx
+++ b/threadpilot/docs/presentation/Presentation_GroupNN_Sprint1.pptx
@@ -17,9 +17,10 @@
     <p:sldId id="265" r:id="rId11"/>
     <p:sldId id="266" r:id="rId12"/>
     <p:sldId id="267" r:id="rId13"/>
+    <p:sldId id="268" r:id="rId14"/>
   </p:sldIdLst>
   <p:notesMasterIdLst>
-    <p:notesMasterId r:id="rId14"/>
+    <p:notesMasterId r:id="rId15"/>
   </p:notesMasterIdLst>
   <p:sldSz cx="12192000" cy="6858000"/>
   <p:notesSz cx="6858000" cy="12192000"/>
@@ -118,7 +119,7 @@
   <p:extLst>
     <p:ext uri="{521415D9-36F7-43E2-AB2F-B90AF26B5E84}">
       <p14:sectionLst xmlns:p14="http://schemas.microsoft.com/office/powerpoint/2010/main">
-        <p14:section name="Sprint 1" id="{c46b4016-37ec-0a61-5a2a-682c0c75e0e4}">
+        <p14:section name="Sprint 1" id="{8f8d30a7-fdb3-a887-4e10-bdba6f5e93d1}">
           <p14:sldIdLst>
             <p14:sldId id="256"/>
             <p14:sldId id="257"/>
@@ -130,12 +131,13 @@
             <p14:sldId id="263"/>
           </p14:sldIdLst>
         </p14:section>
-        <p14:section name="Backup" id="{1f5e19ff-f9e9-7838-db95-414d6fdd55d6}">
+        <p14:section name="Backup" id="{84777e9a-cbf3-4509-0e10-dc55bab767dc}">
           <p14:sldIdLst>
             <p14:sldId id="264"/>
             <p14:sldId id="265"/>
             <p14:sldId id="266"/>
             <p14:sldId id="267"/>
+            <p14:sldId id="268"/>
           </p14:sldIdLst>
         </p14:section>
       </p14:sectionLst>
@@ -1202,6 +1204,97 @@
 </p:notes>
 </file>
 
+<file path=ppt/notesSlides/notesSlide13.xml><?xml version="1.0" encoding="utf-8"?>
+<p:notes xmlns:a="http://schemas.openxmlformats.org/drawingml/2006/main" xmlns:r="http://schemas.openxmlformats.org/officeDocument/2006/relationships" xmlns:p="http://schemas.openxmlformats.org/presentationml/2006/main">
+  <p:cSld>
+    <p:spTree>
+      <p:nvGrpSpPr>
+        <p:cNvPr id="1" name=""/>
+        <p:cNvGrpSpPr/>
+        <p:nvPr/>
+      </p:nvGrpSpPr>
+      <p:grpSpPr>
+        <a:xfrm>
+          <a:off x="0" y="0"/>
+          <a:ext cx="0" cy="0"/>
+          <a:chOff x="0" y="0"/>
+          <a:chExt cx="0" cy="0"/>
+        </a:xfrm>
+      </p:grpSpPr>
+      <p:sp>
+        <p:nvSpPr>
+          <p:cNvPr id="2" name="Slide Image Placeholder 1"/>
+          <p:cNvSpPr>
+            <a:spLocks noGrp="1" noRot="1" noChangeAspect="1"/>
+          </p:cNvSpPr>
+          <p:nvPr>
+            <p:ph type="sldImg"/>
+          </p:nvPr>
+        </p:nvSpPr>
+        <p:spPr/>
+      </p:sp>
+      <p:sp>
+        <p:nvSpPr>
+          <p:cNvPr id="3" name="Notes Placeholder 2"/>
+          <p:cNvSpPr>
+            <a:spLocks noGrp="1"/>
+          </p:cNvSpPr>
+          <p:nvPr>
+            <p:ph type="body" idx="1"/>
+          </p:nvPr>
+        </p:nvSpPr>
+        <p:spPr/>
+        <p:txBody>
+          <a:bodyPr/>
+          <a:lstStyle/>
+          <a:p>
+            <a:r>
+              <a:rPr lang="en-US" dirty="0"/>
+              <a:t>Backup. Use if asked about phones, email or the public link.
+The morning summary becomes an email written from the briefing. The manager reviews it and presses Open in Outlook: Outlook opens with the recipients, subject and text filled in, and they press Send there. Nothing is sent by ThreadPilot itself. One-click sending from inside ThreadPilot is built and tested, but it needs a one-time Microsoft app registration, so it is off until someone does that.
+Phones: a new test checks every page at phone widths; it found that hidden screen-reader labels made the briefing page 878 px wide on a 390 px phone. Fixed.
+Shared link: a per-visitor limit protects the OpenAI credit; a wrong key gives a clear message instead of a generic error.</a:t>
+            </a:r>
+            <a:endParaRPr lang="en-US" dirty="0"/>
+          </a:p>
+        </p:txBody>
+      </p:sp>
+      <p:sp>
+        <p:nvSpPr>
+          <p:cNvPr id="4" name="Slide Number Placeholder 3"/>
+          <p:cNvSpPr>
+            <a:spLocks noGrp="1"/>
+          </p:cNvSpPr>
+          <p:nvPr>
+            <p:ph type="sldNum" sz="quarter" idx="10"/>
+          </p:nvPr>
+        </p:nvSpPr>
+        <p:spPr/>
+        <p:txBody>
+          <a:bodyPr/>
+          <a:lstStyle/>
+          <a:p>
+            <a:fld id="{F7021451-1387-4CA6-816F-3879F97B5CBC}" type="slidenum">
+              <a:rPr lang="en-US"/>
+              <a:t>13</a:t>
+            </a:fld>
+            <a:endParaRPr lang="en-US"/>
+          </a:p>
+        </p:txBody>
+      </p:sp>
+    </p:spTree>
+    <p:extLst>
+      <p:ext uri="{BB962C8B-B14F-4D97-AF65-F5344CB8AC3E}">
+        <p14:creationId xmlns:p14="http://schemas.microsoft.com/office/powerpoint/2010/main" val="1024086991"/>
+      </p:ext>
+    </p:extLst>
+  </p:cSld>
+  <p:clrMapOvr>
+    <a:masterClrMapping/>
+  </p:clrMapOvr>
+</p:notes>
+</file>
+
 <file path=ppt/notesSlides/notesSlide2.xml><?xml version="1.0" encoding="utf-8"?>
 <p:notes xmlns:a="http://schemas.openxmlformats.org/drawingml/2006/main" xmlns:r="http://schemas.openxmlformats.org/officeDocument/2006/relationships" xmlns:p="http://schemas.openxmlformats.org/presentationml/2006/main">
   <p:cSld>
@@ -1250,7 +1343,7 @@
               <a:rPr lang="en-US" dirty="0"/>
               <a:t>~35 seconds.
 The brief gives five questions a general manager asks across a day. Today each one costs a phone call to a planner and a wait, and the answer is sometimes wrong.
-Our solution is an agent the manager talks to: a morning briefing, a chat that asks when unsure and says what the data cannot answer, and actions only after a confirmation.
+Our solution is an agent the manager talks to: a morning briefing, a chat that asks when unsure and says what the data cannot answer, and actions only after a confirmation. The morning summary goes out as an email from the manager's own Outlook.
 The value, in the brief's words, is the planner's half hour every morning plus every 'let me check and call you back'. We answer all five questions in the demo. We cannot yet show hours saved: no real manager has used it. In a paired simulation, finding problems through the briefing avoided about 30 working days of lateness per two months.</a:t>
             </a:r>
             <a:endParaRPr lang="en-US" dirty="0"/>
@@ -1795,7 +1888,7 @@
             <a:r>
               <a:rPr lang="en-US" dirty="0"/>
               <a:t>~35 seconds.
-Sprint 2 is about proving it, not adding features. First, run the live backend once on the 36 questions and report it as first pass. Second, each teammate adds ten blind questions. Third, put the briefing on the team's cloud site. Fourth, settle on one feasibility method.
+Sprint 2 is about proving it, not adding features. First, run the live backend once on the 36 questions and report it as first pass. Second, each teammate adds ten blind questions. Third, put the briefing on the team's cloud site: the pull request is ready and passes every test once merged. Fourth, settle on one feasibility method.
 Success criteria: the live result reported as it ran, at least 70 percent on blind questions against 67 on our own, no number without a source row, public links that open, and an owner for every feature.
 [Team: the success criteria and the 70 percent target are a proposal drawn from the repository's own results. Agree them and add an owner to each roadmap row before presenting.]</a:t>
             </a:r>
@@ -4406,6 +4499,608 @@
 </p:sld>
 </file>
 
+<file path=ppt/slides/slide13.xml><?xml version="1.0" encoding="utf-8"?>
+<p:sld xmlns:a="http://schemas.openxmlformats.org/drawingml/2006/main" xmlns:r="http://schemas.openxmlformats.org/officeDocument/2006/relationships" xmlns:p="http://schemas.openxmlformats.org/presentationml/2006/main">
+  <p:cSld name="Slide 13">
+    <p:spTree>
+      <p:nvGrpSpPr>
+        <p:cNvPr id="1" name=""/>
+        <p:cNvGrpSpPr/>
+        <p:nvPr/>
+      </p:nvGrpSpPr>
+      <p:grpSpPr>
+        <a:xfrm>
+          <a:off x="0" y="0"/>
+          <a:ext cx="0" cy="0"/>
+          <a:chOff x="0" y="0"/>
+          <a:chExt cx="0" cy="0"/>
+        </a:xfrm>
+      </p:grpSpPr>
+      <p:sp>
+        <p:nvSpPr>
+          <p:cNvPr id="2" name="Text 0"/>
+          <p:cNvSpPr/>
+          <p:nvPr>
+            <p:ph idx="100" type="title" hasCustomPrompt="1"/>
+          </p:nvPr>
+        </p:nvSpPr>
+        <p:spPr>
+          <a:xfrm>
+            <a:off x="548640" y="320040"/>
+            <a:ext cx="11091672" cy="822960"/>
+          </a:xfrm>
+          <a:prstGeom prst="rect">
+            <a:avLst/>
+          </a:prstGeom>
+          <a:noFill/>
+          <a:ln/>
+        </p:spPr>
+        <p:txBody>
+          <a:bodyPr wrap="square" lIns="0" tIns="0" rIns="0" bIns="0" rtlCol="0" anchor="ctr"/>
+          <a:lstStyle/>
+          <a:p>
+            <a:pPr algn="l" indent="0" marL="0">
+              <a:buNone/>
+            </a:pPr>
+            <a:r>
+              <a:rPr lang="en-US" sz="3200" b="1" dirty="0">
+                <a:solidFill>
+                  <a:schemeClr val="tx2"/>
+                </a:solidFill>
+              </a:rPr>
+              <a:t>Backup: ready for a phone and a shared link</a:t>
+            </a:r>
+            <a:endParaRPr lang="en-US" sz="3200" dirty="0"/>
+          </a:p>
+        </p:txBody>
+      </p:sp>
+      <p:sp>
+        <p:nvSpPr>
+          <p:cNvPr id="3" name="Backup tag"/>
+          <p:cNvSpPr txBox="1"/>
+          <p:nvPr/>
+        </p:nvSpPr>
+        <p:spPr>
+          <a:xfrm>
+            <a:off x="10515600" y="566928"/>
+            <a:ext cx="1124712" cy="292608"/>
+          </a:xfrm>
+          <a:prstGeom prst="roundRect">
+            <a:avLst>
+              <a:gd name="adj" fmla="val 31250"/>
+            </a:avLst>
+          </a:prstGeom>
+          <a:solidFill>
+            <a:schemeClr val="accent5"/>
+          </a:solidFill>
+          <a:ln/>
+        </p:spPr>
+        <p:txBody>
+          <a:bodyPr wrap="square" lIns="0" tIns="0" rIns="0" bIns="0" rtlCol="0" anchor="ctr"/>
+          <a:lstStyle/>
+          <a:p>
+            <a:pPr algn="ctr" indent="0" marL="0">
+              <a:buNone/>
+            </a:pPr>
+            <a:r>
+              <a:rPr lang="en-US" sz="1100" b="1" dirty="0">
+                <a:solidFill>
+                  <a:schemeClr val="bg1"/>
+                </a:solidFill>
+              </a:rPr>
+              <a:t>BACKUP</a:t>
+            </a:r>
+            <a:endParaRPr lang="en-US" sz="1100" dirty="0"/>
+          </a:p>
+        </p:txBody>
+      </p:sp>
+      <p:sp>
+        <p:nvSpPr>
+          <p:cNvPr id="4" name="Label"/>
+          <p:cNvSpPr txBox="1"/>
+          <p:nvPr/>
+        </p:nvSpPr>
+        <p:spPr>
+          <a:xfrm>
+            <a:off x="548640" y="1280160"/>
+            <a:ext cx="2377440" cy="411480"/>
+          </a:xfrm>
+          <a:prstGeom prst="rect">
+            <a:avLst/>
+          </a:prstGeom>
+          <a:noFill/>
+          <a:ln/>
+        </p:spPr>
+        <p:txBody>
+          <a:bodyPr wrap="square" lIns="0" tIns="0" rIns="0" bIns="0" rtlCol="0" anchor="ctr"/>
+          <a:lstStyle/>
+          <a:p>
+            <a:pPr algn="l" indent="0" marL="0">
+              <a:buNone/>
+            </a:pPr>
+            <a:r>
+              <a:rPr lang="en-US" sz="1600" b="1" dirty="0">
+                <a:solidFill>
+                  <a:schemeClr val="tx2"/>
+                </a:solidFill>
+              </a:rPr>
+              <a:t>On a phone</a:t>
+            </a:r>
+            <a:endParaRPr lang="en-US" sz="1600" dirty="0"/>
+          </a:p>
+        </p:txBody>
+      </p:sp>
+      <p:sp>
+        <p:nvSpPr>
+          <p:cNvPr id="5" name="Phone email screenshot frame"/>
+          <p:cNvSpPr/>
+          <p:nvPr/>
+        </p:nvSpPr>
+        <p:spPr>
+          <a:xfrm>
+            <a:off x="502920" y="1737360"/>
+            <a:ext cx="1997483" cy="4160520"/>
+          </a:xfrm>
+          <a:prstGeom prst="roundRect">
+            <a:avLst>
+              <a:gd name="adj" fmla="val 2747"/>
+            </a:avLst>
+          </a:prstGeom>
+          <a:solidFill>
+            <a:schemeClr val="bg1"/>
+          </a:solidFill>
+          <a:ln w="12700">
+            <a:solidFill>
+              <a:schemeClr val="bg2"/>
+            </a:solidFill>
+            <a:prstDash val="solid"/>
+          </a:ln>
+          <a:effectLst>
+            <a:outerShdw sx="100000" sy="100000" kx="0" ky="0" algn="bl" rotWithShape="0" blurRad="101600" dist="25400" dir="5400000">
+              <a:srgbClr val="000000">
+                <a:alpha val="16000"/>
+              </a:srgbClr>
+            </a:outerShdw>
+          </a:effectLst>
+        </p:spPr>
+      </p:sp>
+      <p:pic>
+        <p:nvPicPr>
+          <p:cNvPr id="6" name="Phone email screenshot" descr="The morning summary email on a 390-pixel phone: To, Cc, subject and message filled in, with a full-width Open in Outlook button">    </p:cNvPr>
+          <p:cNvPicPr>
+            <a:picLocks noChangeAspect="1"/>
+          </p:cNvPicPr>
+          <p:nvPr/>
+        </p:nvPicPr>
+        <p:blipFill>
+          <a:blip r:embed="rId1"/>
+          <a:stretch>
+            <a:fillRect/>
+          </a:stretch>
+        </p:blipFill>
+        <p:spPr>
+          <a:xfrm>
+            <a:off x="548640" y="1783080"/>
+            <a:ext cx="1906043" cy="4069080"/>
+          </a:xfrm>
+          <a:prstGeom prst="rect">
+            <a:avLst/>
+          </a:prstGeom>
+        </p:spPr>
+      </p:pic>
+      <p:sp>
+        <p:nvSpPr>
+          <p:cNvPr id="7" name="Label"/>
+          <p:cNvSpPr txBox="1"/>
+          <p:nvPr/>
+        </p:nvSpPr>
+        <p:spPr>
+          <a:xfrm>
+            <a:off x="2820443" y="1280160"/>
+            <a:ext cx="3291840" cy="411480"/>
+          </a:xfrm>
+          <a:prstGeom prst="rect">
+            <a:avLst/>
+          </a:prstGeom>
+          <a:noFill/>
+          <a:ln/>
+        </p:spPr>
+        <p:txBody>
+          <a:bodyPr wrap="square" lIns="0" tIns="0" rIns="0" bIns="0" rtlCol="0" anchor="ctr"/>
+          <a:lstStyle/>
+          <a:p>
+            <a:pPr algn="l" indent="0" marL="0">
+              <a:buNone/>
+            </a:pPr>
+            <a:r>
+              <a:rPr lang="en-US" sz="1600" b="1" dirty="0">
+                <a:solidFill>
+                  <a:schemeClr val="tx2"/>
+                </a:solidFill>
+              </a:rPr>
+              <a:t>On a laptop</a:t>
+            </a:r>
+            <a:endParaRPr lang="en-US" sz="1600" dirty="0"/>
+          </a:p>
+        </p:txBody>
+      </p:sp>
+      <p:sp>
+        <p:nvSpPr>
+          <p:cNvPr id="8" name="Desktop email screenshot frame"/>
+          <p:cNvSpPr/>
+          <p:nvPr/>
+        </p:nvSpPr>
+        <p:spPr>
+          <a:xfrm>
+            <a:off x="2774723" y="1737360"/>
+            <a:ext cx="3708400" cy="4160520"/>
+          </a:xfrm>
+          <a:prstGeom prst="roundRect">
+            <a:avLst>
+              <a:gd name="adj" fmla="val 1479"/>
+            </a:avLst>
+          </a:prstGeom>
+          <a:solidFill>
+            <a:schemeClr val="bg1"/>
+          </a:solidFill>
+          <a:ln w="12700">
+            <a:solidFill>
+              <a:schemeClr val="bg2"/>
+            </a:solidFill>
+            <a:prstDash val="solid"/>
+          </a:ln>
+          <a:effectLst>
+            <a:outerShdw sx="100000" sy="100000" kx="0" ky="0" algn="bl" rotWithShape="0" blurRad="101600" dist="25400" dir="5400000">
+              <a:srgbClr val="000000">
+                <a:alpha val="16000"/>
+              </a:srgbClr>
+            </a:outerShdw>
+          </a:effectLst>
+        </p:spPr>
+      </p:sp>
+      <p:pic>
+        <p:nvPicPr>
+          <p:cNvPr id="9" name="Desktop email screenshot" descr="The morning summary email dialog on a laptop, with recipients filled in and an Open in Outlook button">    </p:cNvPr>
+          <p:cNvPicPr>
+            <a:picLocks noChangeAspect="1"/>
+          </p:cNvPicPr>
+          <p:nvPr/>
+        </p:nvPicPr>
+        <p:blipFill>
+          <a:blip r:embed="rId2"/>
+          <a:stretch>
+            <a:fillRect/>
+          </a:stretch>
+        </p:blipFill>
+        <p:spPr>
+          <a:xfrm>
+            <a:off x="2820443" y="1783080"/>
+            <a:ext cx="3616960" cy="4069080"/>
+          </a:xfrm>
+          <a:prstGeom prst="rect">
+            <a:avLst/>
+          </a:prstGeom>
+        </p:spPr>
+      </p:pic>
+      <p:sp>
+        <p:nvSpPr>
+          <p:cNvPr id="10" name="Readiness points"/>
+          <p:cNvSpPr txBox="1"/>
+          <p:nvPr/>
+        </p:nvSpPr>
+        <p:spPr>
+          <a:xfrm>
+            <a:off x="6848883" y="1325880"/>
+            <a:ext cx="4791429" cy="3566160"/>
+          </a:xfrm>
+          <a:prstGeom prst="rect">
+            <a:avLst/>
+          </a:prstGeom>
+          <a:noFill/>
+          <a:ln/>
+        </p:spPr>
+        <p:txBody>
+          <a:bodyPr wrap="square" lIns="0" tIns="0" rIns="0" bIns="0" rtlCol="0" anchor="t"/>
+          <a:lstStyle/>
+          <a:p>
+            <a:pPr algn="l" indent="0" marL="0">
+              <a:spcAft>
+                <a:spcPts val="900"/>
+              </a:spcAft>
+              <a:buNone/>
+            </a:pPr>
+            <a:r>
+              <a:rPr lang="en-US" sz="1500" b="1" dirty="0">
+                <a:solidFill>
+                  <a:schemeClr val="tx2"/>
+                </a:solidFill>
+              </a:rPr>
+              <a:t>Morning email</a:t>
+            </a:r>
+            <a:endParaRPr lang="en-US" sz="1500" dirty="0"/>
+          </a:p>
+          <a:p>
+            <a:pPr algn="l" indent="0" marL="0">
+              <a:spcAft>
+                <a:spcPts val="900"/>
+              </a:spcAft>
+              <a:buNone/>
+            </a:pPr>
+            <a:r>
+              <a:rPr lang="en-US" sz="1250" dirty="0">
+                <a:solidFill>
+                  <a:schemeClr val="tx1"/>
+                </a:solidFill>
+              </a:rPr>
+              <a:t>Written from the 07:00 briefing; recipients carried over from the last one. Open in Outlook: a filled-in Outlook window, the manager presses Send. One-click sending needs a one-time Microsoft app registration (send-only permission).</a:t>
+            </a:r>
+            <a:endParaRPr lang="en-US" sz="1500" dirty="0"/>
+          </a:p>
+          <a:p>
+            <a:pPr algn="l" indent="0" marL="0">
+              <a:spcAft>
+                <a:spcPts val="900"/>
+              </a:spcAft>
+              <a:buNone/>
+            </a:pPr>
+            <a:r>
+              <a:rPr lang="en-US" sz="1500" b="1" dirty="0">
+                <a:solidFill>
+                  <a:schemeClr val="tx2"/>
+                </a:solidFill>
+              </a:rPr>
+              <a:t>Phones</a:t>
+            </a:r>
+            <a:endParaRPr lang="en-US" sz="1500" dirty="0"/>
+          </a:p>
+          <a:p>
+            <a:pPr algn="l" indent="0" marL="0">
+              <a:spcAft>
+                <a:spcPts val="900"/>
+              </a:spcAft>
+              <a:buNone/>
+            </a:pPr>
+            <a:r>
+              <a:rPr lang="en-US" sz="1250" dirty="0">
+                <a:solidFill>
+                  <a:schemeClr val="tx1"/>
+                </a:solidFill>
+              </a:rPr>
+              <a:t>No page scrolls sideways from 320 to 390 px. The briefing page was 878 px wide on a 390 px phone; a new test found it, and it is fixed.</a:t>
+            </a:r>
+            <a:endParaRPr lang="en-US" sz="1500" dirty="0"/>
+          </a:p>
+          <a:p>
+            <a:pPr algn="l" indent="0" marL="0">
+              <a:spcAft>
+                <a:spcPts val="900"/>
+              </a:spcAft>
+              <a:buNone/>
+            </a:pPr>
+            <a:r>
+              <a:rPr lang="en-US" sz="1500" b="1" dirty="0">
+                <a:solidFill>
+                  <a:schemeClr val="tx2"/>
+                </a:solidFill>
+              </a:rPr>
+              <a:t>A shared link</a:t>
+            </a:r>
+            <a:endParaRPr lang="en-US" sz="1500" dirty="0"/>
+          </a:p>
+          <a:p>
+            <a:pPr algn="l" indent="0" marL="0">
+              <a:spcAft>
+                <a:spcPts val="900"/>
+              </a:spcAft>
+              <a:buNone/>
+            </a:pPr>
+            <a:r>
+              <a:rPr lang="en-US" sz="1250" dirty="0">
+                <a:solidFill>
+                  <a:schemeClr val="tx1"/>
+                </a:solidFill>
+              </a:rPr>
+              <a:t>At most 40 model questions a minute per visitor; a rejected API key now says so; cover photo 2.4 MB to 195 KB.</a:t>
+            </a:r>
+            <a:endParaRPr lang="en-US" sz="1500" dirty="0"/>
+          </a:p>
+        </p:txBody>
+      </p:sp>
+      <p:sp>
+        <p:nvSpPr>
+          <p:cNvPr id="11" name="Readiness box"/>
+          <p:cNvSpPr/>
+          <p:nvPr/>
+        </p:nvSpPr>
+        <p:spPr>
+          <a:xfrm>
+            <a:off x="6848883" y="4846320"/>
+            <a:ext cx="4791429" cy="1005840"/>
+          </a:xfrm>
+          <a:prstGeom prst="roundRect">
+            <a:avLst>
+              <a:gd name="adj" fmla="val 7273"/>
+            </a:avLst>
+          </a:prstGeom>
+          <a:solidFill>
+            <a:schemeClr val="tx2"/>
+          </a:solidFill>
+          <a:ln/>
+        </p:spPr>
+      </p:sp>
+      <p:sp>
+        <p:nvSpPr>
+          <p:cNvPr id="12" name="Readiness text"/>
+          <p:cNvSpPr txBox="1"/>
+          <p:nvPr/>
+        </p:nvSpPr>
+        <p:spPr>
+          <a:xfrm>
+            <a:off x="7031763" y="4846320"/>
+            <a:ext cx="4425669" cy="1005840"/>
+          </a:xfrm>
+          <a:prstGeom prst="rect">
+            <a:avLst/>
+          </a:prstGeom>
+          <a:noFill/>
+          <a:ln/>
+        </p:spPr>
+        <p:txBody>
+          <a:bodyPr wrap="square" lIns="0" tIns="0" rIns="0" bIns="0" rtlCol="0" anchor="ctr"/>
+          <a:lstStyle/>
+          <a:p>
+            <a:pPr algn="l" indent="0" marL="0">
+              <a:spcAft>
+                <a:spcPts val="400"/>
+              </a:spcAft>
+              <a:buNone/>
+            </a:pPr>
+            <a:r>
+              <a:rPr lang="en-US" sz="1250" b="1" dirty="0">
+                <a:solidFill>
+                  <a:schemeClr val="accent3"/>
+                </a:solidFill>
+              </a:rPr>
+              <a:t>Tested: </a:t>
+            </a:r>
+            <a:pPr algn="l" indent="0" marL="0">
+              <a:spcAft>
+                <a:spcPts val="400"/>
+              </a:spcAft>
+              <a:buNone/>
+            </a:pPr>
+            <a:r>
+              <a:rPr lang="en-US" sz="1250" dirty="0">
+                <a:solidFill>
+                  <a:schemeClr val="bg1"/>
+                </a:solidFill>
+              </a:rPr>
+              <a:t>198 and 136 tests pass on the merged code (pull request #4). </a:t>
+            </a:r>
+            <a:endParaRPr lang="en-US" sz="1250" dirty="0"/>
+          </a:p>
+          <a:p>
+            <a:pPr algn="l" indent="0" marL="0">
+              <a:spcAft>
+                <a:spcPts val="400"/>
+              </a:spcAft>
+              <a:buNone/>
+            </a:pPr>
+            <a:r>
+              <a:rPr lang="en-US" sz="1250" b="1" dirty="0">
+                <a:solidFill>
+                  <a:schemeClr val="accent3"/>
+                </a:solidFill>
+              </a:rPr>
+              <a:t>Not yet tried: </a:t>
+            </a:r>
+            <a:pPr algn="l" indent="0" marL="0">
+              <a:spcAft>
+                <a:spcPts val="400"/>
+              </a:spcAft>
+              <a:buNone/>
+            </a:pPr>
+            <a:r>
+              <a:rPr lang="en-US" sz="1250" dirty="0">
+                <a:solidFill>
+                  <a:schemeClr val="bg1"/>
+                </a:solidFill>
+              </a:rPr>
+              <a:t>a real Outlook window with a team account.</a:t>
+            </a:r>
+            <a:endParaRPr lang="en-US" sz="1250" dirty="0"/>
+          </a:p>
+        </p:txBody>
+      </p:sp>
+      <p:sp>
+        <p:nvSpPr>
+          <p:cNvPr id="13" name="Readiness pointer"/>
+          <p:cNvSpPr txBox="1"/>
+          <p:nvPr/>
+        </p:nvSpPr>
+        <p:spPr>
+          <a:xfrm>
+            <a:off x="548640" y="6053328"/>
+            <a:ext cx="11091672" cy="256032"/>
+          </a:xfrm>
+          <a:prstGeom prst="rect">
+            <a:avLst/>
+          </a:prstGeom>
+          <a:noFill/>
+          <a:ln/>
+        </p:spPr>
+        <p:txBody>
+          <a:bodyPr wrap="square" lIns="0" tIns="0" rIns="0" bIns="0" rtlCol="0" anchor="t"/>
+          <a:lstStyle/>
+          <a:p>
+            <a:pPr algn="l" indent="0" marL="0">
+              <a:buNone/>
+            </a:pPr>
+            <a:r>
+              <a:rPr lang="en-US" sz="1100" dirty="0">
+                <a:solidFill>
+                  <a:schemeClr val="accent5"/>
+                </a:solidFill>
+              </a:rPr>
+              <a:t>Setup and security: docs/outlook_setup.md.</a:t>
+            </a:r>
+            <a:endParaRPr lang="en-US" sz="1100" dirty="0"/>
+          </a:p>
+        </p:txBody>
+      </p:sp>
+      <p:sp>
+        <p:nvSpPr>
+          <p:cNvPr id="25" name="Slide Number Placeholder 0"/>
+          <p:cNvSpPr>
+            <a:spLocks noGrp="1"/>
+          </p:cNvSpPr>
+          <p:nvPr>
+            <p:ph type="sldNum" sz="quarter" idx="4294967295"/>
+          </p:nvPr>
+        </p:nvSpPr>
+        <p:spPr>
+          <a:xfrm>
+            <a:off x="11137392" y="6382512"/>
+            <a:ext cx="502920" cy="274320"/>
+          </a:xfrm>
+          <a:prstGeom prst="rect">
+            <a:avLst/>
+          </a:prstGeom>
+          <a:extLst>
+            <a:ext uri="{C572A759-6A51-4108-AA02-DFA0A04FC94B}">
+              <ma14:wrappingTextBoxFlag xmlns:ma14="http://schemas.microsoft.com/office/mac/drawingml/2011/main" val="0"/>
+            </a:ext>
+          </a:extLst>
+        </p:spPr>
+        <p:txBody>
+          <a:bodyPr/>
+          <a:lstStyle>
+            <a:lvl1pPr>
+              <a:defRPr sz="1000">
+                <a:solidFill>
+                  <a:schemeClr val="accent5"/>
+                </a:solidFill>
+              </a:defRPr>
+            </a:lvl1pPr>
+          </a:lstStyle>
+          <a:p>
+            <a:pPr algn="r"/>
+            <a:fld id="{F7021451-1387-4CA6-816F-3879F97B5CBC}" type="slidenum">
+              <a:rPr b="0" lang="en-US"/>
+              <a:t>13</a:t>
+            </a:fld>
+            <a:endParaRPr lang="en-US"/>
+          </a:p>
+        </p:txBody>
+      </p:sp>
+    </p:spTree>
+  </p:cSld>
+  <p:clrMapOvr>
+    <a:masterClrMapping/>
+  </p:clrMapOvr>
+</p:sld>
+</file>
+
 <file path=ppt/slides/slide2.xml><?xml version="1.0" encoding="utf-8"?>
 <p:sld xmlns:a="http://schemas.openxmlformats.org/drawingml/2006/main" xmlns:r="http://schemas.openxmlformats.org/officeDocument/2006/relationships" xmlns:p="http://schemas.openxmlformats.org/presentationml/2006/main">
   <p:cSld name="Slide 2">
@@ -5039,8 +5734,8 @@
         </p:nvSpPr>
         <p:spPr>
           <a:xfrm>
-            <a:off x="4565904" y="3017520"/>
-            <a:ext cx="3057144" cy="2926080"/>
+            <a:off x="4565904" y="2926080"/>
+            <a:ext cx="3057144" cy="3063240"/>
           </a:xfrm>
           <a:prstGeom prst="rect">
             <a:avLst/>
@@ -5054,138 +5749,172 @@
           <a:p>
             <a:pPr algn="l" indent="0" marL="0">
               <a:spcAft>
-                <a:spcPts val="700"/>
+                <a:spcPts val="300"/>
               </a:spcAft>
               <a:buNone/>
             </a:pPr>
             <a:r>
-              <a:rPr lang="en-US" sz="1300" b="1" dirty="0">
+              <a:rPr lang="en-US" sz="1250" b="1" dirty="0">
                 <a:solidFill>
                   <a:schemeClr val="tx2"/>
                 </a:solidFill>
               </a:rPr>
               <a:t>07:00 briefing</a:t>
             </a:r>
-            <a:endParaRPr lang="en-US" sz="1300" dirty="0"/>
+            <a:endParaRPr lang="en-US" sz="1250" dirty="0"/>
           </a:p>
           <a:p>
             <a:pPr algn="l" indent="0" marL="0">
               <a:spcAft>
-                <a:spcPts val="700"/>
+                <a:spcPts val="300"/>
               </a:spcAft>
               <a:buNone/>
             </a:pPr>
             <a:r>
-              <a:rPr lang="en-US" sz="1300" dirty="0">
+              <a:rPr lang="en-US" sz="1250" dirty="0">
                 <a:solidFill>
                   <a:schemeClr val="tx1"/>
                 </a:solidFill>
               </a:rPr>
-              <a:t>Three lines: yesterday, the top issue, what to decide.</a:t>
-            </a:r>
-            <a:endParaRPr lang="en-US" sz="1300" dirty="0"/>
+              <a:t>Three lines: yesterday, top issue, what to decide.</a:t>
+            </a:r>
+            <a:endParaRPr lang="en-US" sz="1250" dirty="0"/>
           </a:p>
           <a:p>
             <a:pPr algn="l" indent="0" marL="0">
               <a:spcAft>
-                <a:spcPts val="700"/>
+                <a:spcPts val="300"/>
               </a:spcAft>
               <a:buNone/>
             </a:pPr>
             <a:r>
-              <a:rPr lang="en-US" sz="1300" b="1" dirty="0">
+              <a:rPr lang="en-US" sz="1250" b="1" dirty="0">
                 <a:solidFill>
                   <a:schemeClr val="tx2"/>
                 </a:solidFill>
               </a:rPr>
               <a:t>Chat that is honest</a:t>
             </a:r>
-            <a:endParaRPr lang="en-US" sz="1300" dirty="0"/>
+            <a:endParaRPr lang="en-US" sz="1250" dirty="0"/>
           </a:p>
           <a:p>
             <a:pPr algn="l" indent="0" marL="0">
               <a:spcAft>
-                <a:spcPts val="700"/>
+                <a:spcPts val="300"/>
               </a:spcAft>
               <a:buNone/>
             </a:pPr>
             <a:r>
-              <a:rPr lang="en-US" sz="1300" dirty="0">
+              <a:rPr lang="en-US" sz="1250" dirty="0">
                 <a:solidFill>
                   <a:schemeClr val="tx1"/>
                 </a:solidFill>
               </a:rPr>
               <a:t>Asks when unsure, remembers the order in focus, says what the data cannot answer.</a:t>
             </a:r>
-            <a:endParaRPr lang="en-US" sz="1300" dirty="0"/>
+            <a:endParaRPr lang="en-US" sz="1250" dirty="0"/>
           </a:p>
           <a:p>
             <a:pPr algn="l" indent="0" marL="0">
               <a:spcAft>
-                <a:spcPts val="700"/>
+                <a:spcPts val="300"/>
               </a:spcAft>
               <a:buNone/>
             </a:pPr>
             <a:r>
-              <a:rPr lang="en-US" sz="1300" b="1" dirty="0">
+              <a:rPr lang="en-US" sz="1250" b="1" dirty="0">
                 <a:solidFill>
                   <a:schemeClr val="tx2"/>
                 </a:solidFill>
               </a:rPr>
               <a:t>Actions behind a gate</a:t>
             </a:r>
-            <a:endParaRPr lang="en-US" sz="1300" dirty="0"/>
+            <a:endParaRPr lang="en-US" sz="1250" dirty="0"/>
           </a:p>
           <a:p>
             <a:pPr algn="l" indent="0" marL="0">
               <a:spcAft>
-                <a:spcPts val="700"/>
+                <a:spcPts val="300"/>
               </a:spcAft>
               <a:buNone/>
             </a:pPr>
             <a:r>
-              <a:rPr lang="en-US" sz="1300" dirty="0">
+              <a:rPr lang="en-US" sz="1250" dirty="0">
                 <a:solidFill>
                   <a:schemeClr val="tx1"/>
                 </a:solidFill>
               </a:rPr>
               <a:t>A chase-up, note or reminder only after preview, confirm and log.</a:t>
             </a:r>
-            <a:endParaRPr lang="en-US" sz="1300" dirty="0"/>
+            <a:endParaRPr lang="en-US" sz="1250" dirty="0"/>
           </a:p>
           <a:p>
             <a:pPr algn="l" indent="0" marL="0">
               <a:spcAft>
-                <a:spcPts val="700"/>
+                <a:spcPts val="300"/>
               </a:spcAft>
               <a:buNone/>
             </a:pPr>
             <a:r>
-              <a:rPr lang="en-US" sz="1300" b="1" dirty="0">
+              <a:rPr lang="en-US" sz="1250" b="1" dirty="0">
                 <a:solidFill>
                   <a:schemeClr val="tx2"/>
                 </a:solidFill>
               </a:rPr>
               <a:t>Every number traceable</a:t>
             </a:r>
-            <a:endParaRPr lang="en-US" sz="1300" dirty="0"/>
+            <a:endParaRPr lang="en-US" sz="1250" dirty="0"/>
           </a:p>
           <a:p>
             <a:pPr algn="l" indent="0" marL="0">
               <a:spcAft>
-                <a:spcPts val="700"/>
+                <a:spcPts val="300"/>
               </a:spcAft>
               <a:buNone/>
             </a:pPr>
             <a:r>
-              <a:rPr lang="en-US" sz="1300" dirty="0">
+              <a:rPr lang="en-US" sz="1250" dirty="0">
                 <a:solidFill>
                   <a:schemeClr val="tx1"/>
                 </a:solidFill>
               </a:rPr>
               <a:t>It opens the source rows behind it.</a:t>
             </a:r>
-            <a:endParaRPr lang="en-US" sz="1300" dirty="0"/>
+            <a:endParaRPr lang="en-US" sz="1250" dirty="0"/>
+          </a:p>
+          <a:p>
+            <a:pPr algn="l" indent="0" marL="0">
+              <a:spcAft>
+                <a:spcPts val="300"/>
+              </a:spcAft>
+              <a:buNone/>
+            </a:pPr>
+            <a:r>
+              <a:rPr lang="en-US" sz="1250" b="1" dirty="0">
+                <a:solidFill>
+                  <a:schemeClr val="tx2"/>
+                </a:solidFill>
+              </a:rPr>
+              <a:t>Morning email in Outlook</a:t>
+            </a:r>
+            <a:endParaRPr lang="en-US" sz="1250" dirty="0"/>
+          </a:p>
+          <a:p>
+            <a:pPr algn="l" indent="0" marL="0">
+              <a:spcAft>
+                <a:spcPts val="300"/>
+              </a:spcAft>
+              <a:buNone/>
+            </a:pPr>
+            <a:r>
+              <a:rPr lang="en-US" sz="1250" dirty="0">
+                <a:solidFill>
+                  <a:schemeClr val="tx1"/>
+                </a:solidFill>
+              </a:rPr>
+              <a:t>Written from the briefing; opens in Outlook, filled in.</a:t>
+            </a:r>
+            <a:endParaRPr lang="en-US" sz="1250" dirty="0"/>
           </a:p>
         </p:txBody>
       </p:sp>
@@ -6257,7 +6986,7 @@
                   <a:schemeClr val="tx1"/>
                 </a:solidFill>
               </a:rPr>
-              <a:t>Draft, note, reminder: never sent unconfirmed</a:t>
+              <a:t>Chase-up, note, reminder, morning email: never sent unconfirmed</a:t>
             </a:r>
             <a:endParaRPr lang="en-US" sz="1400" dirty="0"/>
           </a:p>
@@ -9180,7 +9909,7 @@
                             <a:schemeClr val="tx1"/>
                           </a:solidFill>
                         </a:rPr>
-                        <a:t>Preview, then a 15-minute single-use confirmation key; every action logged. The chat cannot cancel, delete or change an order.</a:t>
+                        <a:t>Preview, then a 15-minute single-use confirmation key; every action logged. The chat cannot cancel, delete or change an order. The morning email is sent only by the manager, from their own Outlook.</a:t>
                       </a:r>
                       <a:endParaRPr lang="en-US" sz="1250" dirty="0"/>
                     </a:p>
@@ -10101,7 +10830,7 @@
                             <a:schemeClr val="tx1"/>
                           </a:solidFill>
                         </a:rPr>
-                        <a:t>Run the live backend once on the 36 questions and report it as first pass. The demo path (same tools, rules instead of a model) is the fallback.</a:t>
+                        <a:t>Run the live backend once on the 36 questions and report it as first pass. The demo path (same tools, rules instead of a model) is the fallback. On the public link, at most 40 model questions a minute per visitor.</a:t>
                       </a:r>
                       <a:endParaRPr lang="en-US" sz="1250" dirty="0"/>
                     </a:p>
@@ -13280,7 +14009,7 @@
                             <a:schemeClr val="tx1"/>
                           </a:solidFill>
                         </a:rPr>
-                        <a:t>Merge and redeploy, so the briefing and live discovery run on the team's site.</a:t>
+                        <a:t>Pull request #4 is ready: no conflicts, all tests pass on the merged code. Merge, redeploy, run one database step.</a:t>
                       </a:r>
                       <a:endParaRPr lang="en-US" sz="1250" dirty="0"/>
                     </a:p>

--- a/threadpilot/docs/presentation/Presentation_GroupNN_Sprint1.pptx
+++ b/threadpilot/docs/presentation/Presentation_GroupNN_Sprint1.pptx
@@ -18,9 +18,10 @@
     <p:sldId id="266" r:id="rId12"/>
     <p:sldId id="267" r:id="rId13"/>
     <p:sldId id="268" r:id="rId14"/>
+    <p:sldId id="269" r:id="rId15"/>
   </p:sldIdLst>
   <p:notesMasterIdLst>
-    <p:notesMasterId r:id="rId15"/>
+    <p:notesMasterId r:id="rId16"/>
   </p:notesMasterIdLst>
   <p:sldSz cx="12192000" cy="6858000"/>
   <p:notesSz cx="6858000" cy="12192000"/>
@@ -119,7 +120,7 @@
   <p:extLst>
     <p:ext uri="{521415D9-36F7-43E2-AB2F-B90AF26B5E84}">
       <p14:sectionLst xmlns:p14="http://schemas.microsoft.com/office/powerpoint/2010/main">
-        <p14:section name="Sprint 1" id="{8f8d30a7-fdb3-a887-4e10-bdba6f5e93d1}">
+        <p14:section name="Sprint 1" id="{1e200046-80d7-2c0c-1784-9b9908b2b797}">
           <p14:sldIdLst>
             <p14:sldId id="256"/>
             <p14:sldId id="257"/>
@@ -129,15 +130,16 @@
             <p14:sldId id="261"/>
             <p14:sldId id="262"/>
             <p14:sldId id="263"/>
+            <p14:sldId id="264"/>
           </p14:sldIdLst>
         </p14:section>
-        <p14:section name="Backup" id="{84777e9a-cbf3-4509-0e10-dc55bab767dc}">
+        <p14:section name="Backup" id="{2bc55228-5436-749c-a324-804d8a8f3489}">
           <p14:sldIdLst>
-            <p14:sldId id="264"/>
             <p14:sldId id="265"/>
             <p14:sldId id="266"/>
             <p14:sldId id="267"/>
             <p14:sldId id="268"/>
+            <p14:sldId id="269"/>
           </p14:sldIdLst>
         </p14:section>
       </p14:sectionLst>
@@ -888,7 +890,7 @@
           <a:p>
             <a:r>
               <a:rPr lang="en-US" dirty="0"/>
-              <a:t>~10 seconds. The whole talk is about 4:00 when spoken, leaving about a minute before the hard stop at 5:00.
+              <a:t>~10 seconds. The whole talk is about 4:25 when spoken (9 main slides), leaving about half a minute before the hard stop at 5:00. Rehearse it with a timer.
 We are the Track 1 team. ThreadPilot is a co-pilot for the general manager of a knitwear factory; the picture is our real morning page on a simulated day.
 [Add before presenting: group number and the sixth team member's name. Rename the file to Presentation_GroupNN_Sprint1.pptx with the two-digit group number.]</a:t>
             </a:r>
@@ -978,10 +980,11 @@
           <a:p>
             <a:r>
               <a:rPr lang="en-US" dirty="0"/>
-              <a:t>Backup. Use if asked about safety or alerts.
-'Chase ORD-120' does not send anything. It drafts a message to the production planner, shows the worst case in plain words (one unwanted message to one colleague), and waits. Confirm, and it is logged; in this demo nothing is actually sent. The backend adds a confirmation key tied to one order and one text that expires after 15 minutes, re-reads the order before acting, and ignores a second confirmation.
-Right picture: 'Delete ORD-005' is refused. The chat reads the data; it never changes an order.
-On alerts: one briefing at 07:00; otherwise only the watches the manager set and a stage that missed its target three days running. A test checks docs/alert_triggers.md against the code.</a:t>
+              <a:t>Backup. Use if asked about the tool set.
+The brief says the centre of the track is the tool set, so we specified every tool before building it: 37 entries in one table, 18 on the live backend and 19 in the dashboard chat, each with its limits. A test checks the live names against what the engine really calls.
+Judgement is the one to remember: 'normal' is an explicit rule, the previous 8 same weekdays with Sundays closed, shared by the briefing, the chat and the dashboard, and a test holds them to identical numbers.
+The boundaries page (docs/tool_boundaries.md) records 27 questions that could plausibly go to two tools, with the tool that must answer and the one that must not; it is generated by running the real chat, and a test re-runs it.
+Stack: FastAPI, MySQL 8, a SQLite store for sessions and confirmations, the OpenAI API for understanding and wording only, and a LangChain read-only SQL agent.</a:t>
             </a:r>
             <a:endParaRPr lang="en-US" dirty="0"/>
           </a:p>
@@ -1069,10 +1072,10 @@
           <a:p>
             <a:r>
               <a:rPr lang="en-US" dirty="0"/>
-              <a:t>Backup. Use if asked about errors or about how we tested.
-The course asks for at least ten failure cases, each analysed. These are the 12 questions the dashboard chat got wrong the first time: 24 of 36 right. Five fell to 'I can't answer that', six were answered by a close but wrong rule, one was a wording problem. Six more come from the bait questions, analysed in the same document.
-One stated a wrong date: a past date read as next year's. The tools were never the problem; the routing was. Fixing a case meant adding or widening a rule, never changing a calculation. That is the cost of narrow typed tools: reliable numbers, and a router that has to be taught each phrasing.
-A live language model will fail differently, with classification mistakes and rate limits, so none of this analysis applies to it until we run the live batch.</a:t>
+              <a:t>Backup. Use if asked about safety or alerts.
+'Chase ORD-120' does not send anything. It drafts a message to the production planner, shows the worst case in plain words (one unwanted message to one colleague), and waits. Confirm, and it is logged; in this demo nothing is actually sent. The backend adds a confirmation key tied to one order and one text that expires after 15 minutes, re-reads the order before acting, and ignores a second confirmation.
+Right picture: 'Delete ORD-005' is refused. The chat reads the data; it never changes an order.
+On alerts: one briefing at 07:00; otherwise only the watches the manager set and a stage that missed its target three days running. A test checks docs/alert_triggers.md against the code.</a:t>
             </a:r>
             <a:endParaRPr lang="en-US" dirty="0"/>
           </a:p>
@@ -1160,9 +1163,10 @@
           <a:p>
             <a:r>
               <a:rPr lang="en-US" dirty="0"/>
-              <a:t>Backup. Use if asked about estimates or alerts.
-Feasibility never answers a plain yes: it gives a date range, the bottleneck stage and the assumptions, and a follow-up like 'What about 400 pieces?' changes one input. A missing date or quantity is asked for.
-Watches: confirmed with a card, evaluated once each morning against that morning's data, logged either way (fired or cleared). If the condition is no longer true, the watch clears itself. Backend reminders run on a 30-second loop and store one in-app notification when the condition is unmet; they send nothing outside the system.</a:t>
+              <a:t>Backup. Use if asked about errors or about how we tested.
+The course asks for at least ten failure cases, each analysed. These are the 12 questions the dashboard chat got wrong the first time: 24 of 36 right. Five fell to 'I can't answer that', six were answered by a close but wrong rule, one was a wording problem. Six more come from the bait questions, analysed in the same document.
+One stated a wrong date: a past date read as next year's. The tools were never the problem; the routing was. Fixing a case meant adding or widening a rule, never changing a calculation. That is the cost of narrow typed tools: reliable numbers, and a router that has to be taught each phrasing.
+A live language model will fail differently, with classification mistakes and rate limits, so none of this analysis applies to it until we run the live batch.</a:t>
             </a:r>
             <a:endParaRPr lang="en-US" dirty="0"/>
           </a:p>
@@ -1250,10 +1254,9 @@
           <a:p>
             <a:r>
               <a:rPr lang="en-US" dirty="0"/>
-              <a:t>Backup. Use if asked about phones, email or the public link.
-The morning summary becomes an email written from the briefing. The manager reviews it and presses Open in Outlook: Outlook opens with the recipients, subject and text filled in, and they press Send there. Nothing is sent by ThreadPilot itself. One-click sending from inside ThreadPilot is built and tested, but it needs a one-time Microsoft app registration, so it is off until someone does that.
-Phones: a new test checks every page at phone widths; it found that hidden screen-reader labels made the briefing page 878 px wide on a 390 px phone. Fixed.
-Shared link: a per-visitor limit protects the OpenAI credit; a wrong key gives a clear message instead of a generic error.</a:t>
+              <a:t>Backup. Use if asked about estimates or alerts.
+Feasibility never answers a plain yes: it gives a date range, the bottleneck stage and the assumptions, and a follow-up like 'What about 400 pieces?' changes one input. A missing date or quantity is asked for.
+Watches: confirmed with a card, evaluated once each morning against that morning's data, logged either way (fired or cleared). If the condition is no longer true, the watch clears itself. Backend reminders run on a 30-second loop and store one in-app notification when the condition is unmet; they send nothing outside the system.</a:t>
             </a:r>
             <a:endParaRPr lang="en-US" dirty="0"/>
           </a:p>
@@ -1277,6 +1280,97 @@
             <a:fld id="{F7021451-1387-4CA6-816F-3879F97B5CBC}" type="slidenum">
               <a:rPr lang="en-US"/>
               <a:t>13</a:t>
+            </a:fld>
+            <a:endParaRPr lang="en-US"/>
+          </a:p>
+        </p:txBody>
+      </p:sp>
+    </p:spTree>
+    <p:extLst>
+      <p:ext uri="{BB962C8B-B14F-4D97-AF65-F5344CB8AC3E}">
+        <p14:creationId xmlns:p14="http://schemas.microsoft.com/office/powerpoint/2010/main" val="1024086991"/>
+      </p:ext>
+    </p:extLst>
+  </p:cSld>
+  <p:clrMapOvr>
+    <a:masterClrMapping/>
+  </p:clrMapOvr>
+</p:notes>
+</file>
+
+<file path=ppt/notesSlides/notesSlide14.xml><?xml version="1.0" encoding="utf-8"?>
+<p:notes xmlns:a="http://schemas.openxmlformats.org/drawingml/2006/main" xmlns:r="http://schemas.openxmlformats.org/officeDocument/2006/relationships" xmlns:p="http://schemas.openxmlformats.org/presentationml/2006/main">
+  <p:cSld>
+    <p:spTree>
+      <p:nvGrpSpPr>
+        <p:cNvPr id="1" name=""/>
+        <p:cNvGrpSpPr/>
+        <p:nvPr/>
+      </p:nvGrpSpPr>
+      <p:grpSpPr>
+        <a:xfrm>
+          <a:off x="0" y="0"/>
+          <a:ext cx="0" cy="0"/>
+          <a:chOff x="0" y="0"/>
+          <a:chExt cx="0" cy="0"/>
+        </a:xfrm>
+      </p:grpSpPr>
+      <p:sp>
+        <p:nvSpPr>
+          <p:cNvPr id="2" name="Slide Image Placeholder 1"/>
+          <p:cNvSpPr>
+            <a:spLocks noGrp="1" noRot="1" noChangeAspect="1"/>
+          </p:cNvSpPr>
+          <p:nvPr>
+            <p:ph type="sldImg"/>
+          </p:nvPr>
+        </p:nvSpPr>
+        <p:spPr/>
+      </p:sp>
+      <p:sp>
+        <p:nvSpPr>
+          <p:cNvPr id="3" name="Notes Placeholder 2"/>
+          <p:cNvSpPr>
+            <a:spLocks noGrp="1"/>
+          </p:cNvSpPr>
+          <p:nvPr>
+            <p:ph type="body" idx="1"/>
+          </p:nvPr>
+        </p:nvSpPr>
+        <p:spPr/>
+        <p:txBody>
+          <a:bodyPr/>
+          <a:lstStyle/>
+          <a:p>
+            <a:r>
+              <a:rPr lang="en-US" dirty="0"/>
+              <a:t>Backup. Use if asked about phones, email or the public link.
+The morning summary becomes an email written from the briefing. The manager reviews it and presses Open in Outlook: Outlook opens with the recipients, subject and text filled in, and they press Send there. Nothing is sent by ThreadPilot itself. One-click sending from inside ThreadPilot is built and tested, but it needs a one-time Microsoft app registration, so it is off until someone does that.
+Phones: a new test checks every page at phone widths; it found that hidden screen-reader labels made the briefing page 878 px wide on a 390 px phone. Fixed.
+Shared link: a per-visitor limit protects the OpenAI credit; a wrong key gives a clear message instead of a generic error.</a:t>
+            </a:r>
+            <a:endParaRPr lang="en-US" dirty="0"/>
+          </a:p>
+        </p:txBody>
+      </p:sp>
+      <p:sp>
+        <p:nvSpPr>
+          <p:cNvPr id="4" name="Slide Number Placeholder 3"/>
+          <p:cNvSpPr>
+            <a:spLocks noGrp="1"/>
+          </p:cNvSpPr>
+          <p:nvPr>
+            <p:ph type="sldNum" sz="quarter" idx="10"/>
+          </p:nvPr>
+        </p:nvSpPr>
+        <p:spPr/>
+        <p:txBody>
+          <a:bodyPr/>
+          <a:lstStyle/>
+          <a:p>
+            <a:fld id="{F7021451-1387-4CA6-816F-3879F97B5CBC}" type="slidenum">
+              <a:rPr lang="en-US"/>
+              <a:t>14</a:t>
             </a:fld>
             <a:endParaRPr lang="en-US"/>
           </a:p>
@@ -1614,10 +1708,11 @@
           <a:p>
             <a:r>
               <a:rPr lang="en-US" dirty="0"/>
-              <a:t>~30 seconds.
-We wrote 36 questions with answers computed from the CSV files. First pass, nothing fixed: 24 right, 67 percent. That is the number we stand behind; we first reported 25, until our own invented-number check caught a false pass. After fixes, 21 new questions with different wording gave 18.
-We also wrote 16 bait questions before running them, to tempt it into inventing: 10 held first time, and every number bait and both prompt injections held. And we checked every number it states against what a tool returned: 3 of 163 were untraced, and one of those was a real error. The live OpenAI backend has not yet been run on these 36 questions; that is our first Sprint 2 task.
-(If asked: all 12 first-pass failures are analysed one by one on backup slide 11; one stated a wrong date, found by the provenance check. The same questions now pass 36 of 36, but that is not first-pass and we do not quote it as accuracy.)</a:t>
+              <a:t>~30 seconds. This is what makes it more than a prototype.
+First, it is live on Tencent CloudBase, in the Singapore region. The manager opens a web link: no app to install. The website is static hosting; behind it, one Python cloud function runs every tool, the chat and the email drafts, and holds the OpenAI key, so the key never reaches a phone. The data sits in CloudBase MySQL, and a timer function writes the morning briefing at 07:00 every day. The site asks for a workspace access token, so a stranger with the link cannot use it.
+Second, it works where a general manager actually is: on the factory floor, on a phone. These are real screenshots at phone width: the dashboard, the 07:00 briefing and the chat. A test checks every page at 320 to 390 pixels wide; it caught one page that scrolled sideways, which we fixed.
+(If the QR code is on the slide: invite the audience to scan it.)
+[Be accurate if asked: the dashboard, orders, predictions and AI chat are on the cloud site now; the 07:00 briefing page joins it when this week's pull request is merged and redeployed.]</a:t>
             </a:r>
             <a:endParaRPr lang="en-US" dirty="0"/>
           </a:p>
@@ -1706,9 +1801,9 @@
             <a:r>
               <a:rPr lang="en-US" dirty="0"/>
               <a:t>~30 seconds.
-Five risks. A wrong number: numbers come from code, not the model, and open their source rows. A wrong action: nothing happens without confirmation, and the chat cannot change an order. Alert fatigue: one briefing a day.
-Our evidence flatters us: synthetic data and questions we wrote, so teammates add blind ones. And the live model is unproven, so we run it once and report the first pass.
-[Team: confirm the probability and impact ratings before presenting; they are drafted from the evidence in the repository.]</a:t>
+We wrote 36 questions with answers computed from the CSV files. First pass, nothing fixed: 24 right, 67 percent. That is the number we stand behind; we first reported 25, until our own invented-number check caught a false pass. After fixes, 21 new questions with different wording gave 18.
+We also wrote 16 bait questions before running them, to tempt it into inventing: 10 held first time, and every number bait and both prompt injections held. And we checked every number it states against what a tool returned: 3 of 163 were untraced, and one of those was a real error. The live OpenAI backend has not yet been run on these 36 questions; that is our first Sprint 2 task.
+(If asked: all 12 first-pass failures are analysed one by one on backup slide 12; one stated a wrong date, found by the provenance check. The same questions now pass 36 of 36, but that is not first-pass and we do not quote it as accuracy.)</a:t>
             </a:r>
             <a:endParaRPr lang="en-US" dirty="0"/>
           </a:p>
@@ -1796,10 +1891,10 @@
           <a:p>
             <a:r>
               <a:rPr lang="en-US" dirty="0"/>
-              <a:t>~25 seconds.
-Five assumptions, each with how we will check it. The riskiest: that the brief's questions are what a real manager needs, that synthetic data behaves like a real factory, and that a model routes questions reliably.
-As planned, Sprint 2 tests the last one; the first two need access we do not have yet, and we say so.
-[Team: confirm the risk levels before presenting.]</a:t>
+              <a:t>~30 seconds.
+Five risks. A wrong number: numbers come from code, not the model, and open their source rows. A wrong action: nothing happens without confirmation, and the chat cannot change an order. Alert fatigue: one briefing a day.
+Our evidence flatters us: synthetic data and questions we wrote, so teammates add blind ones. And the live model is unproven, so we run it once and report the first pass.
+[Team: confirm the probability and impact ratings before presenting; they are drafted from the evidence in the repository.]</a:t>
             </a:r>
             <a:endParaRPr lang="en-US" dirty="0"/>
           </a:p>
@@ -1887,10 +1982,10 @@
           <a:p>
             <a:r>
               <a:rPr lang="en-US" dirty="0"/>
-              <a:t>~35 seconds.
-Sprint 2 is about proving it, not adding features. First, run the live backend once on the 36 questions and report it as first pass. Second, each teammate adds ten blind questions. Third, put the briefing on the team's cloud site: the pull request is ready and passes every test once merged. Fourth, settle on one feasibility method.
-Success criteria: the live result reported as it ran, at least 70 percent on blind questions against 67 on our own, no number without a source row, public links that open, and an owner for every feature.
-[Team: the success criteria and the 70 percent target are a proposal drawn from the repository's own results. Agree them and add an owner to each roadmap row before presenting.]</a:t>
+              <a:t>~25 seconds.
+Five assumptions, each with how we will check it. The riskiest: that the brief's questions are what a real manager needs, that synthetic data behaves like a real factory, and that a model routes questions reliably.
+As planned, Sprint 2 tests the last one; the first two need access we do not have yet, and we say so.
+[Team: confirm the risk levels before presenting.]</a:t>
             </a:r>
             <a:endParaRPr lang="en-US" dirty="0"/>
           </a:p>
@@ -1978,11 +2073,10 @@
           <a:p>
             <a:r>
               <a:rPr lang="en-US" dirty="0"/>
-              <a:t>Backup. Use if asked about the tool set.
-The brief says the centre of the track is the tool set, so we specified every tool before building it: 37 entries in one table, 18 on the live backend and 19 in the dashboard chat, each with its limits. A test checks the live names against what the engine really calls.
-Judgement is the one to remember: 'normal' is an explicit rule, the previous 8 same weekdays with Sundays closed, shared by the briefing, the chat and the dashboard, and a test holds them to identical numbers.
-The boundaries page (docs/tool_boundaries.md) records 27 questions that could plausibly go to two tools, with the tool that must answer and the one that must not; it is generated by running the real chat, and a test re-runs it.
-Stack: FastAPI, MySQL 8, a SQLite store for sessions and confirmations, the OpenAI API for understanding and wording only, and a LangChain read-only SQL agent.</a:t>
+              <a:t>~35 seconds.
+Sprint 2 is about proving it, not adding features. First, run the live backend once on the 36 questions and report it as first pass. Second, each teammate adds ten blind questions. Third, put the briefing on the team's cloud site: the pull request is ready and passes every test once merged. Fourth, settle on one feasibility method.
+Success criteria: the live result reported as it ran, at least 70 percent on blind questions against 67 on our own, no number without a source row, public links that open, and an owner for every feature.
+[Team: the success criteria and the 70 percent target are a proposal drawn from the repository's own results. Agree them and add an owner to each roadmap row before presenting.]</a:t>
             </a:r>
             <a:endParaRPr lang="en-US" dirty="0"/>
           </a:p>
@@ -2774,7 +2868,7 @@
         </p:nvSpPr>
         <p:spPr>
           <a:xfrm>
-            <a:off x="731520" y="5074920"/>
+            <a:off x="731520" y="5029200"/>
             <a:ext cx="5486400" cy="384048"/>
           </a:xfrm>
           <a:prstGeom prst="roundRect">
@@ -2824,7 +2918,110 @@
       </p:sp>
       <p:sp>
         <p:nvSpPr>
-          <p:cNvPr id="7" name="Hero screenshot frame"/>
+          <p:cNvPr id="7" name="GitHub link"/>
+          <p:cNvSpPr txBox="1"/>
+          <p:nvPr/>
+        </p:nvSpPr>
+        <p:spPr>
+          <a:xfrm>
+            <a:off x="731520" y="5504688"/>
+            <a:ext cx="5486400" cy="292608"/>
+          </a:xfrm>
+          <a:prstGeom prst="rect">
+            <a:avLst/>
+          </a:prstGeom>
+          <a:noFill/>
+          <a:ln/>
+        </p:spPr>
+        <p:txBody>
+          <a:bodyPr wrap="square" lIns="0" tIns="0" rIns="0" bIns="0" rtlCol="0" anchor="ctr"/>
+          <a:lstStyle/>
+          <a:p>
+            <a:pPr algn="l" indent="0" marL="0">
+              <a:buNone/>
+            </a:pPr>
+            <a:r>
+              <a:rPr lang="en-US" sz="1400" b="1" dirty="0">
+                <a:solidFill>
+                  <a:schemeClr val="accent3"/>
+                </a:solidFill>
+              </a:rPr>
+              <a:t>Code: </a:t>
+            </a:r>
+            <a:pPr algn="l" indent="0" marL="0">
+              <a:buNone/>
+            </a:pPr>
+            <a:r>
+              <a:rPr lang="en-US" sz="1400" dirty="0">
+                <a:solidFill>
+                  <a:schemeClr val="bg1"/>
+                </a:solidFill>
+              </a:rPr>
+              <a:t>github.com/jingweiluo557/DSS5105</a:t>
+            </a:r>
+            <a:endParaRPr lang="en-US" sz="1400" dirty="0"/>
+          </a:p>
+        </p:txBody>
+      </p:sp>
+      <p:sp>
+        <p:nvSpPr>
+          <p:cNvPr id="8" name="Site link missing"/>
+          <p:cNvSpPr txBox="1"/>
+          <p:nvPr/>
+        </p:nvSpPr>
+        <p:spPr>
+          <a:xfrm>
+            <a:off x="731520" y="5870448"/>
+            <a:ext cx="5486400" cy="384048"/>
+          </a:xfrm>
+          <a:prstGeom prst="roundRect">
+            <a:avLst>
+              <a:gd name="adj" fmla="val 19048"/>
+            </a:avLst>
+          </a:prstGeom>
+          <a:solidFill>
+            <a:schemeClr val="accent3"/>
+          </a:solidFill>
+          <a:ln w="15875">
+            <a:solidFill>
+              <a:schemeClr val="bg1"/>
+            </a:solidFill>
+            <a:prstDash val="dash"/>
+          </a:ln>
+        </p:spPr>
+        <p:txBody>
+          <a:bodyPr wrap="square" lIns="76200" tIns="76200" rIns="76200" bIns="76200" rtlCol="0" anchor="ctr"/>
+          <a:lstStyle/>
+          <a:p>
+            <a:pPr algn="l" indent="0" marL="0">
+              <a:buNone/>
+            </a:pPr>
+            <a:r>
+              <a:rPr lang="en-US" sz="1300" b="1" dirty="0">
+                <a:solidFill>
+                  <a:schemeClr val="tx1"/>
+                </a:solidFill>
+              </a:rPr>
+              <a:t>ADD: </a:t>
+            </a:r>
+            <a:pPr algn="l" indent="0" marL="0">
+              <a:buNone/>
+            </a:pPr>
+            <a:r>
+              <a:rPr lang="en-US" sz="1300" dirty="0">
+                <a:solidFill>
+                  <a:schemeClr val="tx1"/>
+                </a:solidFill>
+              </a:rPr>
+              <a:t>live site link (DEMO_URL=... node build.js adds a QR code)</a:t>
+            </a:r>
+            <a:endParaRPr lang="en-US" sz="1300" dirty="0"/>
+          </a:p>
+        </p:txBody>
+      </p:sp>
+      <p:sp>
+        <p:nvSpPr>
+          <p:cNvPr id="9" name="Hero screenshot frame"/>
           <p:cNvSpPr/>
           <p:nvPr/>
         </p:nvSpPr>
@@ -2858,7 +3055,7 @@
       </p:sp>
       <p:pic>
         <p:nvPicPr>
-          <p:cNvPr id="8" name="Hero screenshot" descr="The ThreadPilot morning page on Thursday 9 April 2026: three-line summary, order health and KPI cards">    </p:cNvPr>
+          <p:cNvPr id="10" name="Hero screenshot" descr="The ThreadPilot morning page on Thursday 9 April 2026: three-line summary, order health and KPI cards">    </p:cNvPr>
           <p:cNvPicPr>
             <a:picLocks noChangeAspect="1"/>
           </p:cNvPicPr>
@@ -2882,7 +3079,7 @@
       </p:pic>
       <p:sp>
         <p:nvSpPr>
-          <p:cNvPr id="9" name="Screenshot caption"/>
+          <p:cNvPr id="11" name="Screenshot caption"/>
           <p:cNvSpPr txBox="1"/>
           <p:nvPr/>
         </p:nvSpPr>
@@ -2973,7 +3170,7 @@
                   <a:schemeClr val="tx2"/>
                 </a:solidFill>
               </a:rPr>
-              <a:t>Backup: it acts only after you confirm</a:t>
+              <a:t>Backup: a designed tool set, with its edges</a:t>
             </a:r>
             <a:endParaRPr lang="en-US" sz="3200" dirty="0"/>
           </a:p>
@@ -3021,14 +3218,14 @@
       </p:sp>
       <p:sp>
         <p:nvSpPr>
-          <p:cNvPr id="4" name="Label"/>
+          <p:cNvPr id="4" name="Header Tool kind"/>
           <p:cNvSpPr txBox="1"/>
           <p:nvPr/>
         </p:nvSpPr>
         <p:spPr>
           <a:xfrm>
-            <a:off x="548640" y="1280160"/>
-            <a:ext cx="3840480" cy="411480"/>
+            <a:off x="1280160" y="1298448"/>
+            <a:ext cx="3657600" cy="274320"/>
           </a:xfrm>
           <a:prstGeom prst="rect">
             <a:avLst/>
@@ -3044,54 +3241,139 @@
               <a:buNone/>
             </a:pPr>
             <a:r>
-              <a:rPr lang="en-US" sz="1600" b="1" dirty="0">
-                <a:solidFill>
-                  <a:schemeClr val="tx2"/>
-                </a:solidFill>
-              </a:rPr>
-              <a:t>Preview: the card states the worst case</a:t>
-            </a:r>
-            <a:endParaRPr lang="en-US" sz="1600" dirty="0"/>
-          </a:p>
-        </p:txBody>
-      </p:sp>
-      <p:sp>
-        <p:nvSpPr>
-          <p:cNvPr id="5" name="Confirmation card screenshot frame"/>
+              <a:rPr lang="en-US" sz="1200" b="1" spc="100" kern="0" dirty="0">
+                <a:solidFill>
+                  <a:schemeClr val="accent5"/>
+                </a:solidFill>
+              </a:rPr>
+              <a:t>TOOL KIND</a:t>
+            </a:r>
+            <a:endParaRPr lang="en-US" sz="1200" dirty="0"/>
+          </a:p>
+        </p:txBody>
+      </p:sp>
+      <p:sp>
+        <p:nvSpPr>
+          <p:cNvPr id="5" name="Header What ours does"/>
+          <p:cNvSpPr txBox="1"/>
+          <p:nvPr/>
+        </p:nvSpPr>
+        <p:spPr>
+          <a:xfrm>
+            <a:off x="3017520" y="1298448"/>
+            <a:ext cx="3657600" cy="274320"/>
+          </a:xfrm>
+          <a:prstGeom prst="rect">
+            <a:avLst/>
+          </a:prstGeom>
+          <a:noFill/>
+          <a:ln/>
+        </p:spPr>
+        <p:txBody>
+          <a:bodyPr wrap="square" lIns="0" tIns="0" rIns="0" bIns="0" rtlCol="0" anchor="ctr"/>
+          <a:lstStyle/>
+          <a:p>
+            <a:pPr algn="l" indent="0" marL="0">
+              <a:buNone/>
+            </a:pPr>
+            <a:r>
+              <a:rPr lang="en-US" sz="1200" b="1" spc="100" kern="0" dirty="0">
+                <a:solidFill>
+                  <a:schemeClr val="accent5"/>
+                </a:solidFill>
+              </a:rPr>
+              <a:t>WHAT OURS DOES</a:t>
+            </a:r>
+            <a:endParaRPr lang="en-US" sz="1200" dirty="0"/>
+          </a:p>
+        </p:txBody>
+      </p:sp>
+      <p:sp>
+        <p:nvSpPr>
+          <p:cNvPr id="6" name="Header Deliberately does not"/>
+          <p:cNvSpPr txBox="1"/>
+          <p:nvPr/>
+        </p:nvSpPr>
+        <p:spPr>
+          <a:xfrm>
+            <a:off x="8412480" y="1298448"/>
+            <a:ext cx="3657600" cy="274320"/>
+          </a:xfrm>
+          <a:prstGeom prst="rect">
+            <a:avLst/>
+          </a:prstGeom>
+          <a:noFill/>
+          <a:ln/>
+        </p:spPr>
+        <p:txBody>
+          <a:bodyPr wrap="square" lIns="0" tIns="0" rIns="0" bIns="0" rtlCol="0" anchor="ctr"/>
+          <a:lstStyle/>
+          <a:p>
+            <a:pPr algn="l" indent="0" marL="0">
+              <a:buNone/>
+            </a:pPr>
+            <a:r>
+              <a:rPr lang="en-US" sz="1200" b="1" spc="100" kern="0" dirty="0">
+                <a:solidFill>
+                  <a:schemeClr val="accent5"/>
+                </a:solidFill>
+              </a:rPr>
+              <a:t>DELIBERATELY DOES NOT</a:t>
+            </a:r>
+            <a:endParaRPr lang="en-US" sz="1200" dirty="0"/>
+          </a:p>
+        </p:txBody>
+      </p:sp>
+      <p:sp>
+        <p:nvSpPr>
+          <p:cNvPr id="7" name="Row Retrieval"/>
           <p:cNvSpPr/>
           <p:nvPr/>
         </p:nvSpPr>
         <p:spPr>
           <a:xfrm>
-            <a:off x="502920" y="1783080"/>
-            <a:ext cx="3397207" cy="3840480"/>
+            <a:off x="548640" y="1645920"/>
+            <a:ext cx="11091672" cy="676656"/>
           </a:xfrm>
           <a:prstGeom prst="roundRect">
             <a:avLst>
-              <a:gd name="adj" fmla="val 1615"/>
+              <a:gd name="adj" fmla="val 10811"/>
             </a:avLst>
           </a:prstGeom>
           <a:solidFill>
-            <a:schemeClr val="bg1"/>
+            <a:schemeClr val="bg2"/>
           </a:solidFill>
-          <a:ln w="12700">
+          <a:ln/>
+        </p:spPr>
+      </p:sp>
+      <p:sp>
+        <p:nvSpPr>
+          <p:cNvPr id="8" name="Icon disc Retrieval"/>
+          <p:cNvSpPr/>
+          <p:nvPr/>
+        </p:nvSpPr>
+        <p:spPr>
+          <a:xfrm>
+            <a:off x="713232" y="1755648"/>
+            <a:ext cx="457200" cy="457200"/>
+          </a:xfrm>
+          <a:prstGeom prst="ellipse">
+            <a:avLst/>
+          </a:prstGeom>
+          <a:solidFill>
+            <a:schemeClr val="accent1"/>
+          </a:solidFill>
+          <a:ln w="6350">
             <a:solidFill>
-              <a:schemeClr val="bg2"/>
+              <a:schemeClr val="accent1"/>
             </a:solidFill>
             <a:prstDash val="solid"/>
           </a:ln>
-          <a:effectLst>
-            <a:outerShdw sx="100000" sy="100000" kx="0" ky="0" algn="bl" rotWithShape="0" blurRad="101600" dist="25400" dir="5400000">
-              <a:srgbClr val="000000">
-                <a:alpha val="16000"/>
-              </a:srgbClr>
-            </a:outerShdw>
-          </a:effectLst>
         </p:spPr>
       </p:sp>
       <p:pic>
         <p:nvPicPr>
-          <p:cNvPr id="6" name="Confirmation card screenshot" descr="Chat: 'Chase ORD-120' answered with a confirmation card showing the recipient, an editable message and the worst case">    </p:cNvPr>
+          <p:cNvPr id="9" name="Image 0" descr="Retrieval icon">    </p:cNvPr>
           <p:cNvPicPr>
             <a:picLocks noChangeAspect="1"/>
           </p:cNvPicPr>
@@ -3105,8 +3387,8 @@
         </p:blipFill>
         <p:spPr>
           <a:xfrm>
-            <a:off x="548640" y="1828800"/>
-            <a:ext cx="3305767" cy="3749040"/>
+            <a:off x="822960" y="1865376"/>
+            <a:ext cx="237744" cy="237744"/>
           </a:xfrm>
           <a:prstGeom prst="rect">
             <a:avLst/>
@@ -3115,14 +3397,14 @@
       </p:pic>
       <p:sp>
         <p:nvSpPr>
-          <p:cNvPr id="7" name="Label"/>
+          <p:cNvPr id="10" name="Kind Retrieval"/>
           <p:cNvSpPr txBox="1"/>
           <p:nvPr/>
         </p:nvSpPr>
         <p:spPr>
           <a:xfrm>
-            <a:off x="4220167" y="1280160"/>
-            <a:ext cx="3840480" cy="411480"/>
+            <a:off x="1280160" y="1645920"/>
+            <a:ext cx="1645920" cy="676656"/>
           </a:xfrm>
           <a:prstGeom prst="rect">
             <a:avLst/>
@@ -3138,54 +3420,139 @@
               <a:buNone/>
             </a:pPr>
             <a:r>
-              <a:rPr lang="en-US" sz="1600" b="1" dirty="0">
+              <a:rPr lang="en-US" sz="1800" b="1" dirty="0">
                 <a:solidFill>
                   <a:schemeClr val="tx2"/>
                 </a:solidFill>
               </a:rPr>
-              <a:t>Then logged, and some things refused</a:t>
-            </a:r>
-            <a:endParaRPr lang="en-US" sz="1600" dirty="0"/>
-          </a:p>
-        </p:txBody>
-      </p:sp>
-      <p:sp>
-        <p:nvSpPr>
-          <p:cNvPr id="8" name="Logged and refused screenshot frame"/>
+              <a:t>Retrieval</a:t>
+            </a:r>
+            <a:endParaRPr lang="en-US" sz="1800" dirty="0"/>
+          </a:p>
+        </p:txBody>
+      </p:sp>
+      <p:sp>
+        <p:nvSpPr>
+          <p:cNvPr id="11" name="Does Retrieval"/>
+          <p:cNvSpPr txBox="1"/>
+          <p:nvPr/>
+        </p:nvSpPr>
+        <p:spPr>
+          <a:xfrm>
+            <a:off x="3017520" y="1645920"/>
+            <a:ext cx="5212080" cy="676656"/>
+          </a:xfrm>
+          <a:prstGeom prst="rect">
+            <a:avLst/>
+          </a:prstGeom>
+          <a:noFill/>
+          <a:ln/>
+        </p:spPr>
+        <p:txBody>
+          <a:bodyPr wrap="square" lIns="0" tIns="0" rIns="0" bIns="0" rtlCol="0" anchor="ctr"/>
+          <a:lstStyle/>
+          <a:p>
+            <a:pPr algn="l" indent="0" marL="0">
+              <a:buNone/>
+            </a:pPr>
+            <a:r>
+              <a:rPr lang="en-US" sz="1400" dirty="0">
+                <a:solidFill>
+                  <a:schemeClr val="tx1"/>
+                </a:solidFill>
+              </a:rPr>
+              <a:t>Typed order look-ups, plus a read-only SQL agent (SELECT only) for everything else</a:t>
+            </a:r>
+            <a:endParaRPr lang="en-US" sz="1400" dirty="0"/>
+          </a:p>
+        </p:txBody>
+      </p:sp>
+      <p:sp>
+        <p:nvSpPr>
+          <p:cNvPr id="12" name="Not Retrieval"/>
+          <p:cNvSpPr txBox="1"/>
+          <p:nvPr/>
+        </p:nvSpPr>
+        <p:spPr>
+          <a:xfrm>
+            <a:off x="8412480" y="1645920"/>
+            <a:ext cx="3108960" cy="676656"/>
+          </a:xfrm>
+          <a:prstGeom prst="rect">
+            <a:avLst/>
+          </a:prstGeom>
+          <a:noFill/>
+          <a:ln/>
+        </p:spPr>
+        <p:txBody>
+          <a:bodyPr wrap="square" lIns="0" tIns="0" rIns="0" bIns="0" rtlCol="0" anchor="ctr"/>
+          <a:lstStyle/>
+          <a:p>
+            <a:pPr algn="l" indent="0" marL="0">
+              <a:buNone/>
+            </a:pPr>
+            <a:r>
+              <a:rPr lang="en-US" sz="1400" dirty="0">
+                <a:solidFill>
+                  <a:schemeClr val="tx1"/>
+                </a:solidFill>
+              </a:rPr>
+              <a:t>Pick the first match when several fit</a:t>
+            </a:r>
+            <a:endParaRPr lang="en-US" sz="1400" dirty="0"/>
+          </a:p>
+        </p:txBody>
+      </p:sp>
+      <p:sp>
+        <p:nvSpPr>
+          <p:cNvPr id="13" name="Row Judgement"/>
           <p:cNvSpPr/>
           <p:nvPr/>
         </p:nvSpPr>
         <p:spPr>
           <a:xfrm>
-            <a:off x="4174447" y="1783080"/>
-            <a:ext cx="3180537" cy="3840480"/>
+            <a:off x="548640" y="2395728"/>
+            <a:ext cx="11091672" cy="676656"/>
           </a:xfrm>
           <a:prstGeom prst="roundRect">
             <a:avLst>
-              <a:gd name="adj" fmla="val 1725"/>
+              <a:gd name="adj" fmla="val 10811"/>
             </a:avLst>
           </a:prstGeom>
           <a:solidFill>
-            <a:schemeClr val="bg1"/>
+            <a:schemeClr val="bg2"/>
           </a:solidFill>
-          <a:ln w="12700">
+          <a:ln/>
+        </p:spPr>
+      </p:sp>
+      <p:sp>
+        <p:nvSpPr>
+          <p:cNvPr id="14" name="Icon disc Judgement"/>
+          <p:cNvSpPr/>
+          <p:nvPr/>
+        </p:nvSpPr>
+        <p:spPr>
+          <a:xfrm>
+            <a:off x="713232" y="2505456"/>
+            <a:ext cx="457200" cy="457200"/>
+          </a:xfrm>
+          <a:prstGeom prst="ellipse">
+            <a:avLst/>
+          </a:prstGeom>
+          <a:solidFill>
+            <a:schemeClr val="accent1"/>
+          </a:solidFill>
+          <a:ln w="6350">
             <a:solidFill>
-              <a:schemeClr val="bg2"/>
+              <a:schemeClr val="accent1"/>
             </a:solidFill>
             <a:prstDash val="solid"/>
           </a:ln>
-          <a:effectLst>
-            <a:outerShdw sx="100000" sy="100000" kx="0" ky="0" algn="bl" rotWithShape="0" blurRad="101600" dist="25400" dir="5400000">
-              <a:srgbClr val="000000">
-                <a:alpha val="16000"/>
-              </a:srgbClr>
-            </a:outerShdw>
-          </a:effectLst>
         </p:spPr>
       </p:sp>
       <p:pic>
         <p:nvPicPr>
-          <p:cNvPr id="9" name="Logged and refused screenshot" descr="Chat: the chase-up logged with 'nothing was actually sent', then 'Delete ORD-005' refused">    </p:cNvPr>
+          <p:cNvPr id="15" name="Image 1" descr="Judgement icon">    </p:cNvPr>
           <p:cNvPicPr>
             <a:picLocks noChangeAspect="1"/>
           </p:cNvPicPr>
@@ -3199,8 +3566,8 @@
         </p:blipFill>
         <p:spPr>
           <a:xfrm>
-            <a:off x="4220167" y="1828800"/>
-            <a:ext cx="3089097" cy="3749040"/>
+            <a:off x="822960" y="2615184"/>
+            <a:ext cx="237744" cy="237744"/>
           </a:xfrm>
           <a:prstGeom prst="rect">
             <a:avLst/>
@@ -3209,14 +3576,14 @@
       </p:pic>
       <p:sp>
         <p:nvSpPr>
-          <p:cNvPr id="10" name="Label"/>
+          <p:cNvPr id="16" name="Kind Judgement"/>
           <p:cNvSpPr txBox="1"/>
           <p:nvPr/>
         </p:nvSpPr>
         <p:spPr>
           <a:xfrm>
-            <a:off x="7812183" y="1280160"/>
-            <a:ext cx="3828129" cy="411480"/>
+            <a:off x="1280160" y="2395728"/>
+            <a:ext cx="1645920" cy="676656"/>
           </a:xfrm>
           <a:prstGeom prst="rect">
             <a:avLst/>
@@ -3237,7 +3604,7 @@
                   <a:schemeClr val="tx2"/>
                 </a:solidFill>
               </a:rPr>
-              <a:t>Preview, confirm, log</a:t>
+              <a:t>Judgement</a:t>
             </a:r>
             <a:endParaRPr lang="en-US" sz="1800" dirty="0"/>
           </a:p>
@@ -3245,14 +3612,14 @@
       </p:sp>
       <p:sp>
         <p:nvSpPr>
-          <p:cNvPr id="11" name="Safety rules"/>
+          <p:cNvPr id="17" name="Does Judgement"/>
           <p:cNvSpPr txBox="1"/>
           <p:nvPr/>
         </p:nvSpPr>
         <p:spPr>
           <a:xfrm>
-            <a:off x="7812183" y="1783080"/>
-            <a:ext cx="3828129" cy="3931920"/>
+            <a:off x="3017520" y="2395728"/>
+            <a:ext cx="5212080" cy="676656"/>
           </a:xfrm>
           <a:prstGeom prst="rect">
             <a:avLst/>
@@ -3261,92 +3628,34 @@
           <a:ln/>
         </p:spPr>
         <p:txBody>
-          <a:bodyPr wrap="square" lIns="0" tIns="0" rIns="0" bIns="0" rtlCol="0" anchor="t"/>
+          <a:bodyPr wrap="square" lIns="0" tIns="0" rIns="0" bIns="0" rtlCol="0" anchor="ctr"/>
           <a:lstStyle/>
           <a:p>
-            <a:pPr algn="l" marL="203200" indent="-203200">
-              <a:spcAft>
-                <a:spcPts val="1100"/>
-              </a:spcAft>
-              <a:buSzPct val="100000"/>
-              <a:buChar char="•"/>
-            </a:pPr>
-            <a:r>
-              <a:rPr lang="en-US" sz="1500" dirty="0">
+            <a:pPr algn="l" indent="0" marL="0">
+              <a:buNone/>
+            </a:pPr>
+            <a:r>
+              <a:rPr lang="en-US" sz="1400" dirty="0">
                 <a:solidFill>
                   <a:schemeClr val="tx1"/>
                 </a:solidFill>
               </a:rPr>
-              <a:t>Nothing is sent until you press Confirm. In the demo it is only logged.</a:t>
-            </a:r>
-            <a:endParaRPr lang="en-US" sz="1500" dirty="0"/>
-          </a:p>
-          <a:p>
-            <a:pPr algn="l" marL="203200" indent="-203200">
-              <a:spcAft>
-                <a:spcPts val="1100"/>
-              </a:spcAft>
-              <a:buSzPct val="100000"/>
-              <a:buChar char="•"/>
-            </a:pPr>
-            <a:r>
-              <a:rPr lang="en-US" sz="1500" dirty="0">
-                <a:solidFill>
-                  <a:schemeClr val="tx1"/>
-                </a:solidFill>
-              </a:rPr>
-              <a:t>A confirmation key covers one order and one text, expires in 15 minutes, and confirming twice does nothing.</a:t>
-            </a:r>
-            <a:endParaRPr lang="en-US" sz="1500" dirty="0"/>
-          </a:p>
-          <a:p>
-            <a:pPr algn="l" marL="203200" indent="-203200">
-              <a:spcAft>
-                <a:spcPts val="1100"/>
-              </a:spcAft>
-              <a:buSzPct val="100000"/>
-              <a:buChar char="•"/>
-            </a:pPr>
-            <a:r>
-              <a:rPr lang="en-US" sz="1500" dirty="0">
-                <a:solidFill>
-                  <a:schemeClr val="tx1"/>
-                </a:solidFill>
-              </a:rPr>
-              <a:t>It cannot cancel, delete or change an order, and says so.</a:t>
-            </a:r>
-            <a:endParaRPr lang="en-US" sz="1500" dirty="0"/>
-          </a:p>
-          <a:p>
-            <a:pPr algn="l" marL="203200" indent="-203200">
-              <a:spcAft>
-                <a:spcPts val="1100"/>
-              </a:spcAft>
-              <a:buSzPct val="100000"/>
-              <a:buChar char="•"/>
-            </a:pPr>
-            <a:r>
-              <a:rPr lang="en-US" sz="1500" dirty="0">
-                <a:solidFill>
-                  <a:schemeClr val="tx1"/>
-                </a:solidFill>
-              </a:rPr>
-              <a:t>It speaks first rarely: one briefing at 07:00, plus watches you set and a stage that misses its target 3 days running.</a:t>
-            </a:r>
-            <a:endParaRPr lang="en-US" sz="1500" dirty="0"/>
-          </a:p>
-        </p:txBody>
-      </p:sp>
-      <p:sp>
-        <p:nvSpPr>
-          <p:cNvPr id="12" name="Docs pointer"/>
+              <a:t>“Normal” = mean of the previous 8 same weekdays ± the larger of 1.5 SD or 5%; Sundays closed</a:t>
+            </a:r>
+            <a:endParaRPr lang="en-US" sz="1400" dirty="0"/>
+          </a:p>
+        </p:txBody>
+      </p:sp>
+      <p:sp>
+        <p:nvSpPr>
+          <p:cNvPr id="18" name="Not Judgement"/>
           <p:cNvSpPr txBox="1"/>
           <p:nvPr/>
         </p:nvSpPr>
         <p:spPr>
           <a:xfrm>
-            <a:off x="548640" y="5943600"/>
-            <a:ext cx="11091672" cy="320040"/>
+            <a:off x="8412480" y="2395728"/>
+            <a:ext cx="3108960" cy="676656"/>
           </a:xfrm>
           <a:prstGeom prst="rect">
             <a:avLst/>
@@ -3355,21 +3664,649 @@
           <a:ln/>
         </p:spPr>
         <p:txBody>
-          <a:bodyPr wrap="square" lIns="0" tIns="0" rIns="0" bIns="0" rtlCol="0" anchor="t"/>
+          <a:bodyPr wrap="square" lIns="0" tIns="0" rIns="0" bIns="0" rtlCol="0" anchor="ctr"/>
           <a:lstStyle/>
           <a:p>
             <a:pPr algn="l" indent="0" marL="0">
               <a:buNone/>
             </a:pPr>
             <a:r>
-              <a:rPr lang="en-US" sz="1100" dirty="0">
-                <a:solidFill>
-                  <a:schemeClr val="accent5"/>
-                </a:solidFill>
-              </a:rPr>
-              <a:t>Every action, its worst case and what it cannot do: docs/actions_and_limits.md. What may interrupt the manager: docs/alert_triggers.md.</a:t>
-            </a:r>
-            <a:endParaRPr lang="en-US" sz="1100" dirty="0"/>
+              <a:rPr lang="en-US" sz="1400" dirty="0">
+                <a:solidFill>
+                  <a:schemeClr val="tx1"/>
+                </a:solidFill>
+              </a:rPr>
+              <a:t>Treat one low day as proof of a fault</a:t>
+            </a:r>
+            <a:endParaRPr lang="en-US" sz="1400" dirty="0"/>
+          </a:p>
+        </p:txBody>
+      </p:sp>
+      <p:sp>
+        <p:nvSpPr>
+          <p:cNvPr id="19" name="Row Tracing"/>
+          <p:cNvSpPr/>
+          <p:nvPr/>
+        </p:nvSpPr>
+        <p:spPr>
+          <a:xfrm>
+            <a:off x="548640" y="3145536"/>
+            <a:ext cx="11091672" cy="676656"/>
+          </a:xfrm>
+          <a:prstGeom prst="roundRect">
+            <a:avLst>
+              <a:gd name="adj" fmla="val 10811"/>
+            </a:avLst>
+          </a:prstGeom>
+          <a:solidFill>
+            <a:schemeClr val="bg2"/>
+          </a:solidFill>
+          <a:ln/>
+        </p:spPr>
+      </p:sp>
+      <p:sp>
+        <p:nvSpPr>
+          <p:cNvPr id="20" name="Icon disc Tracing"/>
+          <p:cNvSpPr/>
+          <p:nvPr/>
+        </p:nvSpPr>
+        <p:spPr>
+          <a:xfrm>
+            <a:off x="713232" y="3255264"/>
+            <a:ext cx="457200" cy="457200"/>
+          </a:xfrm>
+          <a:prstGeom prst="ellipse">
+            <a:avLst/>
+          </a:prstGeom>
+          <a:solidFill>
+            <a:schemeClr val="accent1"/>
+          </a:solidFill>
+          <a:ln w="6350">
+            <a:solidFill>
+              <a:schemeClr val="accent1"/>
+            </a:solidFill>
+            <a:prstDash val="solid"/>
+          </a:ln>
+        </p:spPr>
+      </p:sp>
+      <p:pic>
+        <p:nvPicPr>
+          <p:cNvPr id="21" name="Image 2" descr="Tracing icon">    </p:cNvPr>
+          <p:cNvPicPr>
+            <a:picLocks noChangeAspect="1"/>
+          </p:cNvPicPr>
+          <p:nvPr/>
+        </p:nvPicPr>
+        <p:blipFill>
+          <a:blip r:embed="rId3"/>
+          <a:stretch>
+            <a:fillRect/>
+          </a:stretch>
+        </p:blipFill>
+        <p:spPr>
+          <a:xfrm>
+            <a:off x="822960" y="3364992"/>
+            <a:ext cx="237744" cy="237744"/>
+          </a:xfrm>
+          <a:prstGeom prst="rect">
+            <a:avLst/>
+          </a:prstGeom>
+        </p:spPr>
+      </p:pic>
+      <p:sp>
+        <p:nvSpPr>
+          <p:cNvPr id="22" name="Kind Tracing"/>
+          <p:cNvSpPr txBox="1"/>
+          <p:nvPr/>
+        </p:nvSpPr>
+        <p:spPr>
+          <a:xfrm>
+            <a:off x="1280160" y="3145536"/>
+            <a:ext cx="1645920" cy="676656"/>
+          </a:xfrm>
+          <a:prstGeom prst="rect">
+            <a:avLst/>
+          </a:prstGeom>
+          <a:noFill/>
+          <a:ln/>
+        </p:spPr>
+        <p:txBody>
+          <a:bodyPr wrap="square" lIns="0" tIns="0" rIns="0" bIns="0" rtlCol="0" anchor="ctr"/>
+          <a:lstStyle/>
+          <a:p>
+            <a:pPr algn="l" indent="0" marL="0">
+              <a:buNone/>
+            </a:pPr>
+            <a:r>
+              <a:rPr lang="en-US" sz="1800" b="1" dirty="0">
+                <a:solidFill>
+                  <a:schemeClr val="tx2"/>
+                </a:solidFill>
+              </a:rPr>
+              <a:t>Tracing</a:t>
+            </a:r>
+            <a:endParaRPr lang="en-US" sz="1800" dirty="0"/>
+          </a:p>
+        </p:txBody>
+      </p:sp>
+      <p:sp>
+        <p:nvSpPr>
+          <p:cNvPr id="23" name="Does Tracing"/>
+          <p:cNvSpPr txBox="1"/>
+          <p:nvPr/>
+        </p:nvSpPr>
+        <p:spPr>
+          <a:xfrm>
+            <a:off x="3017520" y="3145536"/>
+            <a:ext cx="5212080" cy="676656"/>
+          </a:xfrm>
+          <a:prstGeom prst="rect">
+            <a:avLst/>
+          </a:prstGeom>
+          <a:noFill/>
+          <a:ln/>
+        </p:spPr>
+        <p:txBody>
+          <a:bodyPr wrap="square" lIns="0" tIns="0" rIns="0" bIns="0" rtlCol="0" anchor="ctr"/>
+          <a:lstStyle/>
+          <a:p>
+            <a:pPr algn="l" indent="0" marL="0">
+              <a:buNone/>
+            </a:pPr>
+            <a:r>
+              <a:rPr lang="en-US" sz="1400" dirty="0">
+                <a:solidFill>
+                  <a:schemeClr val="tx1"/>
+                </a:solidFill>
+              </a:rPr>
+              <a:t>Every number links to the source file and row behind it</a:t>
+            </a:r>
+            <a:endParaRPr lang="en-US" sz="1400" dirty="0"/>
+          </a:p>
+        </p:txBody>
+      </p:sp>
+      <p:sp>
+        <p:nvSpPr>
+          <p:cNvPr id="24" name="Not Tracing"/>
+          <p:cNvSpPr txBox="1"/>
+          <p:nvPr/>
+        </p:nvSpPr>
+        <p:spPr>
+          <a:xfrm>
+            <a:off x="8412480" y="3145536"/>
+            <a:ext cx="3108960" cy="676656"/>
+          </a:xfrm>
+          <a:prstGeom prst="rect">
+            <a:avLst/>
+          </a:prstGeom>
+          <a:noFill/>
+          <a:ln/>
+        </p:spPr>
+        <p:txBody>
+          <a:bodyPr wrap="square" lIns="0" tIns="0" rIns="0" bIns="0" rtlCol="0" anchor="ctr"/>
+          <a:lstStyle/>
+          <a:p>
+            <a:pPr algn="l" indent="0" marL="0">
+              <a:buNone/>
+            </a:pPr>
+            <a:r>
+              <a:rPr lang="en-US" sz="1400" dirty="0">
+                <a:solidFill>
+                  <a:schemeClr val="tx1"/>
+                </a:solidFill>
+              </a:rPr>
+              <a:t>Explain causes the data does not hold</a:t>
+            </a:r>
+            <a:endParaRPr lang="en-US" sz="1400" dirty="0"/>
+          </a:p>
+        </p:txBody>
+      </p:sp>
+      <p:sp>
+        <p:nvSpPr>
+          <p:cNvPr id="25" name="Row Discovery"/>
+          <p:cNvSpPr/>
+          <p:nvPr/>
+        </p:nvSpPr>
+        <p:spPr>
+          <a:xfrm>
+            <a:off x="548640" y="3895344"/>
+            <a:ext cx="11091672" cy="676656"/>
+          </a:xfrm>
+          <a:prstGeom prst="roundRect">
+            <a:avLst>
+              <a:gd name="adj" fmla="val 10811"/>
+            </a:avLst>
+          </a:prstGeom>
+          <a:solidFill>
+            <a:schemeClr val="bg2"/>
+          </a:solidFill>
+          <a:ln/>
+        </p:spPr>
+      </p:sp>
+      <p:sp>
+        <p:nvSpPr>
+          <p:cNvPr id="26" name="Icon disc Discovery"/>
+          <p:cNvSpPr/>
+          <p:nvPr/>
+        </p:nvSpPr>
+        <p:spPr>
+          <a:xfrm>
+            <a:off x="713232" y="4005072"/>
+            <a:ext cx="457200" cy="457200"/>
+          </a:xfrm>
+          <a:prstGeom prst="ellipse">
+            <a:avLst/>
+          </a:prstGeom>
+          <a:solidFill>
+            <a:schemeClr val="accent1"/>
+          </a:solidFill>
+          <a:ln w="6350">
+            <a:solidFill>
+              <a:schemeClr val="accent1"/>
+            </a:solidFill>
+            <a:prstDash val="solid"/>
+          </a:ln>
+        </p:spPr>
+      </p:sp>
+      <p:pic>
+        <p:nvPicPr>
+          <p:cNvPr id="27" name="Image 3" descr="Discovery icon">    </p:cNvPr>
+          <p:cNvPicPr>
+            <a:picLocks noChangeAspect="1"/>
+          </p:cNvPicPr>
+          <p:nvPr/>
+        </p:nvPicPr>
+        <p:blipFill>
+          <a:blip r:embed="rId4"/>
+          <a:stretch>
+            <a:fillRect/>
+          </a:stretch>
+        </p:blipFill>
+        <p:spPr>
+          <a:xfrm>
+            <a:off x="822960" y="4114800"/>
+            <a:ext cx="237744" cy="237744"/>
+          </a:xfrm>
+          <a:prstGeom prst="rect">
+            <a:avLst/>
+          </a:prstGeom>
+        </p:spPr>
+      </p:pic>
+      <p:sp>
+        <p:nvSpPr>
+          <p:cNvPr id="28" name="Kind Discovery"/>
+          <p:cNvSpPr txBox="1"/>
+          <p:nvPr/>
+        </p:nvSpPr>
+        <p:spPr>
+          <a:xfrm>
+            <a:off x="1280160" y="3895344"/>
+            <a:ext cx="1645920" cy="676656"/>
+          </a:xfrm>
+          <a:prstGeom prst="rect">
+            <a:avLst/>
+          </a:prstGeom>
+          <a:noFill/>
+          <a:ln/>
+        </p:spPr>
+        <p:txBody>
+          <a:bodyPr wrap="square" lIns="0" tIns="0" rIns="0" bIns="0" rtlCol="0" anchor="ctr"/>
+          <a:lstStyle/>
+          <a:p>
+            <a:pPr algn="l" indent="0" marL="0">
+              <a:buNone/>
+            </a:pPr>
+            <a:r>
+              <a:rPr lang="en-US" sz="1800" b="1" dirty="0">
+                <a:solidFill>
+                  <a:schemeClr val="tx2"/>
+                </a:solidFill>
+              </a:rPr>
+              <a:t>Discovery</a:t>
+            </a:r>
+            <a:endParaRPr lang="en-US" sz="1800" dirty="0"/>
+          </a:p>
+        </p:txBody>
+      </p:sp>
+      <p:sp>
+        <p:nvSpPr>
+          <p:cNvPr id="29" name="Does Discovery"/>
+          <p:cNvSpPr txBox="1"/>
+          <p:nvPr/>
+        </p:nvSpPr>
+        <p:spPr>
+          <a:xfrm>
+            <a:off x="3017520" y="3895344"/>
+            <a:ext cx="5212080" cy="676656"/>
+          </a:xfrm>
+          <a:prstGeom prst="rect">
+            <a:avLst/>
+          </a:prstGeom>
+          <a:noFill/>
+          <a:ln/>
+        </p:spPr>
+        <p:txBody>
+          <a:bodyPr wrap="square" lIns="0" tIns="0" rIns="0" bIns="0" rtlCol="0" anchor="ctr"/>
+          <a:lstStyle/>
+          <a:p>
+            <a:pPr algn="l" indent="0" marL="0">
+              <a:buNone/>
+            </a:pPr>
+            <a:r>
+              <a:rPr lang="en-US" sz="1400" dirty="0">
+                <a:solidFill>
+                  <a:schemeClr val="tx1"/>
+                </a:solidFill>
+              </a:rPr>
+              <a:t>Ranks stalled customers, quiet orders and stages below normal; the top five make the page</a:t>
+            </a:r>
+            <a:endParaRPr lang="en-US" sz="1400" dirty="0"/>
+          </a:p>
+        </p:txBody>
+      </p:sp>
+      <p:sp>
+        <p:nvSpPr>
+          <p:cNvPr id="30" name="Not Discovery"/>
+          <p:cNvSpPr txBox="1"/>
+          <p:nvPr/>
+        </p:nvSpPr>
+        <p:spPr>
+          <a:xfrm>
+            <a:off x="8412480" y="3895344"/>
+            <a:ext cx="3108960" cy="676656"/>
+          </a:xfrm>
+          <a:prstGeom prst="rect">
+            <a:avLst/>
+          </a:prstGeom>
+          <a:noFill/>
+          <a:ln/>
+        </p:spPr>
+        <p:txBody>
+          <a:bodyPr wrap="square" lIns="0" tIns="0" rIns="0" bIns="0" rtlCol="0" anchor="ctr"/>
+          <a:lstStyle/>
+          <a:p>
+            <a:pPr algn="l" indent="0" marL="0">
+              <a:buNone/>
+            </a:pPr>
+            <a:r>
+              <a:rPr lang="en-US" sz="1400" dirty="0">
+                <a:solidFill>
+                  <a:schemeClr val="tx1"/>
+                </a:solidFill>
+              </a:rPr>
+              <a:t>List every finding</a:t>
+            </a:r>
+            <a:endParaRPr lang="en-US" sz="1400" dirty="0"/>
+          </a:p>
+        </p:txBody>
+      </p:sp>
+      <p:sp>
+        <p:nvSpPr>
+          <p:cNvPr id="31" name="Row Action"/>
+          <p:cNvSpPr/>
+          <p:nvPr/>
+        </p:nvSpPr>
+        <p:spPr>
+          <a:xfrm>
+            <a:off x="548640" y="4645152"/>
+            <a:ext cx="11091672" cy="676656"/>
+          </a:xfrm>
+          <a:prstGeom prst="roundRect">
+            <a:avLst>
+              <a:gd name="adj" fmla="val 10811"/>
+            </a:avLst>
+          </a:prstGeom>
+          <a:solidFill>
+            <a:schemeClr val="bg2"/>
+          </a:solidFill>
+          <a:ln/>
+        </p:spPr>
+      </p:sp>
+      <p:sp>
+        <p:nvSpPr>
+          <p:cNvPr id="32" name="Icon disc Action"/>
+          <p:cNvSpPr/>
+          <p:nvPr/>
+        </p:nvSpPr>
+        <p:spPr>
+          <a:xfrm>
+            <a:off x="713232" y="4754880"/>
+            <a:ext cx="457200" cy="457200"/>
+          </a:xfrm>
+          <a:prstGeom prst="ellipse">
+            <a:avLst/>
+          </a:prstGeom>
+          <a:solidFill>
+            <a:schemeClr val="accent1"/>
+          </a:solidFill>
+          <a:ln w="6350">
+            <a:solidFill>
+              <a:schemeClr val="accent1"/>
+            </a:solidFill>
+            <a:prstDash val="solid"/>
+          </a:ln>
+        </p:spPr>
+      </p:sp>
+      <p:pic>
+        <p:nvPicPr>
+          <p:cNvPr id="33" name="Image 4" descr="Action icon">    </p:cNvPr>
+          <p:cNvPicPr>
+            <a:picLocks noChangeAspect="1"/>
+          </p:cNvPicPr>
+          <p:nvPr/>
+        </p:nvPicPr>
+        <p:blipFill>
+          <a:blip r:embed="rId5"/>
+          <a:stretch>
+            <a:fillRect/>
+          </a:stretch>
+        </p:blipFill>
+        <p:spPr>
+          <a:xfrm>
+            <a:off x="822960" y="4864608"/>
+            <a:ext cx="237744" cy="237744"/>
+          </a:xfrm>
+          <a:prstGeom prst="rect">
+            <a:avLst/>
+          </a:prstGeom>
+        </p:spPr>
+      </p:pic>
+      <p:sp>
+        <p:nvSpPr>
+          <p:cNvPr id="34" name="Kind Action"/>
+          <p:cNvSpPr txBox="1"/>
+          <p:nvPr/>
+        </p:nvSpPr>
+        <p:spPr>
+          <a:xfrm>
+            <a:off x="1280160" y="4645152"/>
+            <a:ext cx="1645920" cy="676656"/>
+          </a:xfrm>
+          <a:prstGeom prst="rect">
+            <a:avLst/>
+          </a:prstGeom>
+          <a:noFill/>
+          <a:ln/>
+        </p:spPr>
+        <p:txBody>
+          <a:bodyPr wrap="square" lIns="0" tIns="0" rIns="0" bIns="0" rtlCol="0" anchor="ctr"/>
+          <a:lstStyle/>
+          <a:p>
+            <a:pPr algn="l" indent="0" marL="0">
+              <a:buNone/>
+            </a:pPr>
+            <a:r>
+              <a:rPr lang="en-US" sz="1800" b="1" dirty="0">
+                <a:solidFill>
+                  <a:schemeClr val="tx2"/>
+                </a:solidFill>
+              </a:rPr>
+              <a:t>Action</a:t>
+            </a:r>
+            <a:endParaRPr lang="en-US" sz="1800" dirty="0"/>
+          </a:p>
+        </p:txBody>
+      </p:sp>
+      <p:sp>
+        <p:nvSpPr>
+          <p:cNvPr id="35" name="Does Action"/>
+          <p:cNvSpPr txBox="1"/>
+          <p:nvPr/>
+        </p:nvSpPr>
+        <p:spPr>
+          <a:xfrm>
+            <a:off x="3017520" y="4645152"/>
+            <a:ext cx="5212080" cy="676656"/>
+          </a:xfrm>
+          <a:prstGeom prst="rect">
+            <a:avLst/>
+          </a:prstGeom>
+          <a:noFill/>
+          <a:ln/>
+        </p:spPr>
+        <p:txBody>
+          <a:bodyPr wrap="square" lIns="0" tIns="0" rIns="0" bIns="0" rtlCol="0" anchor="ctr"/>
+          <a:lstStyle/>
+          <a:p>
+            <a:pPr algn="l" indent="0" marL="0">
+              <a:buNone/>
+            </a:pPr>
+            <a:r>
+              <a:rPr lang="en-US" sz="1400" dirty="0">
+                <a:solidFill>
+                  <a:schemeClr val="tx1"/>
+                </a:solidFill>
+              </a:rPr>
+              <a:t>Preview, then a 15-minute confirmation key; every executed action is logged</a:t>
+            </a:r>
+            <a:endParaRPr lang="en-US" sz="1400" dirty="0"/>
+          </a:p>
+        </p:txBody>
+      </p:sp>
+      <p:sp>
+        <p:nvSpPr>
+          <p:cNvPr id="36" name="Not Action"/>
+          <p:cNvSpPr txBox="1"/>
+          <p:nvPr/>
+        </p:nvSpPr>
+        <p:spPr>
+          <a:xfrm>
+            <a:off x="8412480" y="4645152"/>
+            <a:ext cx="3108960" cy="676656"/>
+          </a:xfrm>
+          <a:prstGeom prst="rect">
+            <a:avLst/>
+          </a:prstGeom>
+          <a:noFill/>
+          <a:ln/>
+        </p:spPr>
+        <p:txBody>
+          <a:bodyPr wrap="square" lIns="0" tIns="0" rIns="0" bIns="0" rtlCol="0" anchor="ctr"/>
+          <a:lstStyle/>
+          <a:p>
+            <a:pPr algn="l" indent="0" marL="0">
+              <a:buNone/>
+            </a:pPr>
+            <a:r>
+              <a:rPr lang="en-US" sz="1400" dirty="0">
+                <a:solidFill>
+                  <a:schemeClr val="tx1"/>
+                </a:solidFill>
+              </a:rPr>
+              <a:t>Send without a matching, unexpired key</a:t>
+            </a:r>
+            <a:endParaRPr lang="en-US" sz="1400" dirty="0"/>
+          </a:p>
+        </p:txBody>
+      </p:sp>
+      <p:sp>
+        <p:nvSpPr>
+          <p:cNvPr id="37" name="Banner"/>
+          <p:cNvSpPr/>
+          <p:nvPr/>
+        </p:nvSpPr>
+        <p:spPr>
+          <a:xfrm>
+            <a:off x="548640" y="5669280"/>
+            <a:ext cx="11091672" cy="566928"/>
+          </a:xfrm>
+          <a:prstGeom prst="roundRect">
+            <a:avLst>
+              <a:gd name="adj" fmla="val 12903"/>
+            </a:avLst>
+          </a:prstGeom>
+          <a:solidFill>
+            <a:schemeClr val="tx2"/>
+          </a:solidFill>
+          <a:ln/>
+        </p:spPr>
+      </p:sp>
+      <p:sp>
+        <p:nvSpPr>
+          <p:cNvPr id="38" name="Banner text"/>
+          <p:cNvSpPr txBox="1"/>
+          <p:nvPr/>
+        </p:nvSpPr>
+        <p:spPr>
+          <a:xfrm>
+            <a:off x="777240" y="5669280"/>
+            <a:ext cx="10698480" cy="566928"/>
+          </a:xfrm>
+          <a:prstGeom prst="rect">
+            <a:avLst/>
+          </a:prstGeom>
+          <a:noFill/>
+          <a:ln/>
+        </p:spPr>
+        <p:txBody>
+          <a:bodyPr wrap="square" lIns="0" tIns="0" rIns="0" bIns="0" rtlCol="0" anchor="ctr"/>
+          <a:lstStyle/>
+          <a:p>
+            <a:pPr algn="l" indent="0" marL="0">
+              <a:buNone/>
+            </a:pPr>
+            <a:r>
+              <a:rPr lang="en-US" sz="1400" b="1" dirty="0">
+                <a:solidFill>
+                  <a:schemeClr val="accent3"/>
+                </a:solidFill>
+              </a:rPr>
+              <a:t>37 tools</a:t>
+            </a:r>
+            <a:pPr algn="l" indent="0" marL="0">
+              <a:buNone/>
+            </a:pPr>
+            <a:r>
+              <a:rPr lang="en-US" sz="1400" dirty="0">
+                <a:solidFill>
+                  <a:schemeClr val="bg1"/>
+                </a:solidFill>
+              </a:rPr>
+              <a:t> in one table (18 live, 19 in the dashboard chat): input, output, purpose, non-goals, failure mode.   </a:t>
+            </a:r>
+            <a:pPr algn="l" indent="0" marL="0">
+              <a:buNone/>
+            </a:pPr>
+            <a:r>
+              <a:rPr lang="en-US" sz="1400" b="1" dirty="0">
+                <a:solidFill>
+                  <a:schemeClr val="accent3"/>
+                </a:solidFill>
+              </a:rPr>
+              <a:t>27 boundary questions</a:t>
+            </a:r>
+            <a:pPr algn="l" indent="0" marL="0">
+              <a:buNone/>
+            </a:pPr>
+            <a:r>
+              <a:rPr lang="en-US" sz="1400" dirty="0">
+                <a:solidFill>
+                  <a:schemeClr val="bg1"/>
+                </a:solidFill>
+              </a:rPr>
+              <a:t> recorded, each naming the tool that answers and the neighbour that must not.</a:t>
+            </a:r>
+            <a:endParaRPr lang="en-US" sz="1400" dirty="0"/>
           </a:p>
         </p:txBody>
       </p:sp>
@@ -3475,7 +4412,7 @@
                   <a:schemeClr val="tx2"/>
                 </a:solidFill>
               </a:rPr>
-              <a:t>Backup: the 12 first-pass failures, by cause</a:t>
+              <a:t>Backup: it acts only after you confirm</a:t>
             </a:r>
             <a:endParaRPr lang="en-US" sz="3200" dirty="0"/>
           </a:p>
@@ -3523,36 +4460,108 @@
       </p:sp>
       <p:sp>
         <p:nvSpPr>
-          <p:cNvPr id="4" name="Failure group 1"/>
+          <p:cNvPr id="4" name="Label"/>
+          <p:cNvSpPr txBox="1"/>
+          <p:nvPr/>
+        </p:nvSpPr>
+        <p:spPr>
+          <a:xfrm>
+            <a:off x="548640" y="1280160"/>
+            <a:ext cx="3840480" cy="411480"/>
+          </a:xfrm>
+          <a:prstGeom prst="rect">
+            <a:avLst/>
+          </a:prstGeom>
+          <a:noFill/>
+          <a:ln/>
+        </p:spPr>
+        <p:txBody>
+          <a:bodyPr wrap="square" lIns="0" tIns="0" rIns="0" bIns="0" rtlCol="0" anchor="ctr"/>
+          <a:lstStyle/>
+          <a:p>
+            <a:pPr algn="l" indent="0" marL="0">
+              <a:buNone/>
+            </a:pPr>
+            <a:r>
+              <a:rPr lang="en-US" sz="1600" b="1" dirty="0">
+                <a:solidFill>
+                  <a:schemeClr val="tx2"/>
+                </a:solidFill>
+              </a:rPr>
+              <a:t>Preview: the card states the worst case</a:t>
+            </a:r>
+            <a:endParaRPr lang="en-US" sz="1600" dirty="0"/>
+          </a:p>
+        </p:txBody>
+      </p:sp>
+      <p:sp>
+        <p:nvSpPr>
+          <p:cNvPr id="5" name="Confirmation card screenshot frame"/>
           <p:cNvSpPr/>
           <p:nvPr/>
         </p:nvSpPr>
         <p:spPr>
           <a:xfrm>
-            <a:off x="548640" y="1371600"/>
-            <a:ext cx="7040880" cy="1234440"/>
+            <a:off x="502920" y="1783080"/>
+            <a:ext cx="3397207" cy="3840480"/>
           </a:xfrm>
           <a:prstGeom prst="roundRect">
             <a:avLst>
-              <a:gd name="adj" fmla="val 5926"/>
+              <a:gd name="adj" fmla="val 1615"/>
             </a:avLst>
           </a:prstGeom>
           <a:solidFill>
-            <a:schemeClr val="bg2"/>
+            <a:schemeClr val="bg1"/>
           </a:solidFill>
-          <a:ln/>
-        </p:spPr>
-      </p:sp>
-      <p:sp>
-        <p:nvSpPr>
-          <p:cNvPr id="5" name="Failure count 1"/>
+          <a:ln w="12700">
+            <a:solidFill>
+              <a:schemeClr val="bg2"/>
+            </a:solidFill>
+            <a:prstDash val="solid"/>
+          </a:ln>
+          <a:effectLst>
+            <a:outerShdw sx="100000" sy="100000" kx="0" ky="0" algn="bl" rotWithShape="0" blurRad="101600" dist="25400" dir="5400000">
+              <a:srgbClr val="000000">
+                <a:alpha val="16000"/>
+              </a:srgbClr>
+            </a:outerShdw>
+          </a:effectLst>
+        </p:spPr>
+      </p:sp>
+      <p:pic>
+        <p:nvPicPr>
+          <p:cNvPr id="6" name="Confirmation card screenshot" descr="Chat: 'Chase ORD-120' answered with a confirmation card showing the recipient, an editable message and the worst case">    </p:cNvPr>
+          <p:cNvPicPr>
+            <a:picLocks noChangeAspect="1"/>
+          </p:cNvPicPr>
+          <p:nvPr/>
+        </p:nvPicPr>
+        <p:blipFill>
+          <a:blip r:embed="rId1"/>
+          <a:stretch>
+            <a:fillRect/>
+          </a:stretch>
+        </p:blipFill>
+        <p:spPr>
+          <a:xfrm>
+            <a:off x="548640" y="1828800"/>
+            <a:ext cx="3305767" cy="3749040"/>
+          </a:xfrm>
+          <a:prstGeom prst="rect">
+            <a:avLst/>
+          </a:prstGeom>
+        </p:spPr>
+      </p:pic>
+      <p:sp>
+        <p:nvSpPr>
+          <p:cNvPr id="7" name="Label"/>
           <p:cNvSpPr txBox="1"/>
           <p:nvPr/>
         </p:nvSpPr>
         <p:spPr>
           <a:xfrm>
-            <a:off x="731520" y="1371600"/>
-            <a:ext cx="731520" cy="1234440"/>
+            <a:off x="4220167" y="1280160"/>
+            <a:ext cx="3840480" cy="411480"/>
           </a:xfrm>
           <a:prstGeom prst="rect">
             <a:avLst/>
@@ -3564,34 +4573,89 @@
           <a:bodyPr wrap="square" lIns="0" tIns="0" rIns="0" bIns="0" rtlCol="0" anchor="ctr"/>
           <a:lstStyle/>
           <a:p>
-            <a:pPr algn="ctr" indent="0" marL="0">
-              <a:buNone/>
-            </a:pPr>
-            <a:r>
-              <a:rPr lang="en-US" sz="4400" b="1" dirty="0">
-                <a:solidFill>
-                  <a:schemeClr val="accent1"/>
-                </a:solidFill>
-                <a:latin typeface="Cambria" pitchFamily="34" charset="0"/>
-                <a:ea typeface="Cambria" pitchFamily="34" charset="-122"/>
-                <a:cs typeface="Cambria" pitchFamily="34" charset="-120"/>
-              </a:rPr>
-              <a:t>5</a:t>
-            </a:r>
-            <a:endParaRPr lang="en-US" sz="4400" dirty="0"/>
-          </a:p>
-        </p:txBody>
-      </p:sp>
-      <p:sp>
-        <p:nvSpPr>
-          <p:cNvPr id="6" name="Failure text 1"/>
+            <a:pPr algn="l" indent="0" marL="0">
+              <a:buNone/>
+            </a:pPr>
+            <a:r>
+              <a:rPr lang="en-US" sz="1600" b="1" dirty="0">
+                <a:solidFill>
+                  <a:schemeClr val="tx2"/>
+                </a:solidFill>
+              </a:rPr>
+              <a:t>Then logged, and some things refused</a:t>
+            </a:r>
+            <a:endParaRPr lang="en-US" sz="1600" dirty="0"/>
+          </a:p>
+        </p:txBody>
+      </p:sp>
+      <p:sp>
+        <p:nvSpPr>
+          <p:cNvPr id="8" name="Logged and refused screenshot frame"/>
+          <p:cNvSpPr/>
+          <p:nvPr/>
+        </p:nvSpPr>
+        <p:spPr>
+          <a:xfrm>
+            <a:off x="4174447" y="1783080"/>
+            <a:ext cx="3180537" cy="3840480"/>
+          </a:xfrm>
+          <a:prstGeom prst="roundRect">
+            <a:avLst>
+              <a:gd name="adj" fmla="val 1725"/>
+            </a:avLst>
+          </a:prstGeom>
+          <a:solidFill>
+            <a:schemeClr val="bg1"/>
+          </a:solidFill>
+          <a:ln w="12700">
+            <a:solidFill>
+              <a:schemeClr val="bg2"/>
+            </a:solidFill>
+            <a:prstDash val="solid"/>
+          </a:ln>
+          <a:effectLst>
+            <a:outerShdw sx="100000" sy="100000" kx="0" ky="0" algn="bl" rotWithShape="0" blurRad="101600" dist="25400" dir="5400000">
+              <a:srgbClr val="000000">
+                <a:alpha val="16000"/>
+              </a:srgbClr>
+            </a:outerShdw>
+          </a:effectLst>
+        </p:spPr>
+      </p:sp>
+      <p:pic>
+        <p:nvPicPr>
+          <p:cNvPr id="9" name="Logged and refused screenshot" descr="Chat: the chase-up logged with 'nothing was actually sent', then 'Delete ORD-005' refused">    </p:cNvPr>
+          <p:cNvPicPr>
+            <a:picLocks noChangeAspect="1"/>
+          </p:cNvPicPr>
+          <p:nvPr/>
+        </p:nvPicPr>
+        <p:blipFill>
+          <a:blip r:embed="rId2"/>
+          <a:stretch>
+            <a:fillRect/>
+          </a:stretch>
+        </p:blipFill>
+        <p:spPr>
+          <a:xfrm>
+            <a:off x="4220167" y="1828800"/>
+            <a:ext cx="3089097" cy="3749040"/>
+          </a:xfrm>
+          <a:prstGeom prst="rect">
+            <a:avLst/>
+          </a:prstGeom>
+        </p:spPr>
+      </p:pic>
+      <p:sp>
+        <p:nvSpPr>
+          <p:cNvPr id="10" name="Label"/>
           <p:cNvSpPr txBox="1"/>
           <p:nvPr/>
         </p:nvSpPr>
         <p:spPr>
           <a:xfrm>
-            <a:off x="1600200" y="1371600"/>
-            <a:ext cx="5852160" cy="1234440"/>
+            <a:off x="7812183" y="1280160"/>
+            <a:ext cx="3828129" cy="411480"/>
           </a:xfrm>
           <a:prstGeom prst="rect">
             <a:avLst/>
@@ -3604,72 +4668,30 @@
           <a:lstStyle/>
           <a:p>
             <a:pPr algn="l" indent="0" marL="0">
-              <a:spcAft>
-                <a:spcPts val="300"/>
-              </a:spcAft>
-              <a:buNone/>
-            </a:pPr>
-            <a:r>
-              <a:rPr lang="en-US" sz="1500" b="1" dirty="0">
+              <a:buNone/>
+            </a:pPr>
+            <a:r>
+              <a:rPr lang="en-US" sz="1800" b="1" dirty="0">
                 <a:solidFill>
                   <a:schemeClr val="tx2"/>
                 </a:solidFill>
               </a:rPr>
-              <a:t>fell to “I can't answer that”</a:t>
-            </a:r>
-            <a:endParaRPr lang="en-US" sz="1500" dirty="0"/>
-          </a:p>
-          <a:p>
-            <a:pPr algn="l" indent="0" marL="0">
-              <a:spcAft>
-                <a:spcPts val="300"/>
-              </a:spcAft>
-              <a:buNone/>
-            </a:pPr>
-            <a:r>
-              <a:rPr lang="en-US" sz="1200" dirty="0">
-                <a:solidFill>
-                  <a:schemeClr val="tx1"/>
-                </a:solidFill>
-              </a:rPr>
-              <a:t>No rule matched, though the data could answer: a count of orders in progress (Q01), two short follow-ups with no order in them (Q11, Q12), “the other one” (Q19), “Email the customer…” (Q36).</a:t>
-            </a:r>
-            <a:endParaRPr lang="en-US" sz="1500" dirty="0"/>
-          </a:p>
-        </p:txBody>
-      </p:sp>
-      <p:sp>
-        <p:nvSpPr>
-          <p:cNvPr id="7" name="Failure group 2"/>
-          <p:cNvSpPr/>
-          <p:nvPr/>
-        </p:nvSpPr>
-        <p:spPr>
-          <a:xfrm>
-            <a:off x="548640" y="2743200"/>
-            <a:ext cx="7040880" cy="1234440"/>
-          </a:xfrm>
-          <a:prstGeom prst="roundRect">
-            <a:avLst>
-              <a:gd name="adj" fmla="val 5926"/>
-            </a:avLst>
-          </a:prstGeom>
-          <a:solidFill>
-            <a:schemeClr val="bg2"/>
-          </a:solidFill>
-          <a:ln/>
-        </p:spPr>
-      </p:sp>
-      <p:sp>
-        <p:nvSpPr>
-          <p:cNvPr id="8" name="Failure count 2"/>
+              <a:t>Preview, confirm, log</a:t>
+            </a:r>
+            <a:endParaRPr lang="en-US" sz="1800" dirty="0"/>
+          </a:p>
+        </p:txBody>
+      </p:sp>
+      <p:sp>
+        <p:nvSpPr>
+          <p:cNvPr id="11" name="Safety rules"/>
           <p:cNvSpPr txBox="1"/>
           <p:nvPr/>
         </p:nvSpPr>
         <p:spPr>
           <a:xfrm>
-            <a:off x="731520" y="2743200"/>
-            <a:ext cx="731520" cy="1234440"/>
+            <a:off x="7812183" y="1783080"/>
+            <a:ext cx="3828129" cy="3931920"/>
           </a:xfrm>
           <a:prstGeom prst="rect">
             <a:avLst/>
@@ -3678,333 +4700,85 @@
           <a:ln/>
         </p:spPr>
         <p:txBody>
-          <a:bodyPr wrap="square" lIns="0" tIns="0" rIns="0" bIns="0" rtlCol="0" anchor="ctr"/>
-          <a:lstStyle/>
-          <a:p>
-            <a:pPr algn="ctr" indent="0" marL="0">
-              <a:buNone/>
-            </a:pPr>
-            <a:r>
-              <a:rPr lang="en-US" sz="4400" b="1" dirty="0">
-                <a:solidFill>
-                  <a:schemeClr val="accent2"/>
-                </a:solidFill>
-                <a:latin typeface="Cambria" pitchFamily="34" charset="0"/>
-                <a:ea typeface="Cambria" pitchFamily="34" charset="-122"/>
-                <a:cs typeface="Cambria" pitchFamily="34" charset="-120"/>
-              </a:rPr>
-              <a:t>6</a:t>
-            </a:r>
-            <a:endParaRPr lang="en-US" sz="4400" dirty="0"/>
-          </a:p>
-        </p:txBody>
-      </p:sp>
-      <p:sp>
-        <p:nvSpPr>
-          <p:cNvPr id="9" name="Failure text 2"/>
-          <p:cNvSpPr txBox="1"/>
-          <p:nvPr/>
-        </p:nvSpPr>
-        <p:spPr>
-          <a:xfrm>
-            <a:off x="1600200" y="2743200"/>
-            <a:ext cx="5852160" cy="1234440"/>
-          </a:xfrm>
-          <a:prstGeom prst="rect">
-            <a:avLst/>
-          </a:prstGeom>
-          <a:noFill/>
-          <a:ln/>
-        </p:spPr>
-        <p:txBody>
-          <a:bodyPr wrap="square" lIns="0" tIns="0" rIns="0" bIns="0" rtlCol="0" anchor="ctr"/>
-          <a:lstStyle/>
-          <a:p>
-            <a:pPr algn="l" indent="0" marL="0">
-              <a:spcAft>
-                <a:spcPts val="300"/>
-              </a:spcAft>
-              <a:buNone/>
-            </a:pPr>
-            <a:r>
-              <a:rPr lang="en-US" sz="1500" b="1" dirty="0">
-                <a:solidFill>
-                  <a:schemeClr val="tx2"/>
-                </a:solidFill>
-              </a:rPr>
-              <a:t>answered by a close but wrong rule</a:t>
-            </a:r>
-            <a:endParaRPr lang="en-US" sz="1500" dirty="0"/>
-          </a:p>
-          <a:p>
-            <a:pPr algn="l" indent="0" marL="0">
-              <a:spcAft>
-                <a:spcPts val="300"/>
-              </a:spcAft>
-              <a:buNone/>
-            </a:pPr>
-            <a:r>
-              <a:rPr lang="en-US" sz="1200" dirty="0">
-                <a:solidFill>
-                  <a:schemeClr val="tx1"/>
-                </a:solidFill>
-              </a:rPr>
-              <a:t>Status instead of stage (Q04); orders instead of pieces (Q09); “Is it late?” listed late orders (Q17); “the Harbor Knits order” taken as the customer (Q18); a past date read as next year's (Q31); “Delete ORD-005” answered as a lookup (Q35).</a:t>
-            </a:r>
-            <a:endParaRPr lang="en-US" sz="1500" dirty="0"/>
-          </a:p>
-        </p:txBody>
-      </p:sp>
-      <p:sp>
-        <p:nvSpPr>
-          <p:cNvPr id="10" name="Failure group 3"/>
-          <p:cNvSpPr/>
-          <p:nvPr/>
-        </p:nvSpPr>
-        <p:spPr>
-          <a:xfrm>
-            <a:off x="548640" y="4114800"/>
-            <a:ext cx="7040880" cy="1234440"/>
-          </a:xfrm>
-          <a:prstGeom prst="roundRect">
-            <a:avLst>
-              <a:gd name="adj" fmla="val 5926"/>
-            </a:avLst>
-          </a:prstGeom>
-          <a:solidFill>
-            <a:schemeClr val="bg2"/>
-          </a:solidFill>
-          <a:ln/>
-        </p:spPr>
-      </p:sp>
-      <p:sp>
-        <p:nvSpPr>
-          <p:cNvPr id="11" name="Failure count 3"/>
-          <p:cNvSpPr txBox="1"/>
-          <p:nvPr/>
-        </p:nvSpPr>
-        <p:spPr>
-          <a:xfrm>
-            <a:off x="731520" y="4114800"/>
-            <a:ext cx="731520" cy="1234440"/>
-          </a:xfrm>
-          <a:prstGeom prst="rect">
-            <a:avLst/>
-          </a:prstGeom>
-          <a:noFill/>
-          <a:ln/>
-        </p:spPr>
-        <p:txBody>
-          <a:bodyPr wrap="square" lIns="0" tIns="0" rIns="0" bIns="0" rtlCol="0" anchor="ctr"/>
-          <a:lstStyle/>
-          <a:p>
-            <a:pPr algn="ctr" indent="0" marL="0">
-              <a:buNone/>
-            </a:pPr>
-            <a:r>
-              <a:rPr lang="en-US" sz="4400" b="1" dirty="0">
-                <a:solidFill>
-                  <a:schemeClr val="accent1"/>
-                </a:solidFill>
-                <a:latin typeface="Cambria" pitchFamily="34" charset="0"/>
-                <a:ea typeface="Cambria" pitchFamily="34" charset="-122"/>
-                <a:cs typeface="Cambria" pitchFamily="34" charset="-120"/>
-              </a:rPr>
-              <a:t>1</a:t>
-            </a:r>
-            <a:endParaRPr lang="en-US" sz="4400" dirty="0"/>
-          </a:p>
-        </p:txBody>
-      </p:sp>
-      <p:sp>
-        <p:nvSpPr>
-          <p:cNvPr id="12" name="Failure text 3"/>
-          <p:cNvSpPr txBox="1"/>
-          <p:nvPr/>
-        </p:nvSpPr>
-        <p:spPr>
-          <a:xfrm>
-            <a:off x="1600200" y="4114800"/>
-            <a:ext cx="5852160" cy="1234440"/>
-          </a:xfrm>
-          <a:prstGeom prst="rect">
-            <a:avLst/>
-          </a:prstGeom>
-          <a:noFill/>
-          <a:ln/>
-        </p:spPr>
-        <p:txBody>
-          <a:bodyPr wrap="square" lIns="0" tIns="0" rIns="0" bIns="0" rtlCol="0" anchor="ctr"/>
-          <a:lstStyle/>
-          <a:p>
-            <a:pPr algn="l" indent="0" marL="0">
-              <a:spcAft>
-                <a:spcPts val="300"/>
-              </a:spcAft>
-              <a:buNone/>
-            </a:pPr>
-            <a:r>
-              <a:rPr lang="en-US" sz="1500" b="1" dirty="0">
-                <a:solidFill>
-                  <a:schemeClr val="tx2"/>
-                </a:solidFill>
-              </a:rPr>
-              <a:t>a wording problem</a:t>
-            </a:r>
-            <a:endParaRPr lang="en-US" sz="1500" dirty="0"/>
-          </a:p>
-          <a:p>
-            <a:pPr algn="l" indent="0" marL="0">
-              <a:spcAft>
-                <a:spcPts val="300"/>
-              </a:spcAft>
-              <a:buNone/>
-            </a:pPr>
-            <a:r>
-              <a:rPr lang="en-US" sz="1200" dirty="0">
-                <a:solidFill>
-                  <a:schemeClr val="tx1"/>
-                </a:solidFill>
-              </a:rPr>
-              <a:t>The reminder's first sentence did not say in words that nothing is set up until you confirm (Q34). It matters for voice, where there is no card to see.</a:t>
-            </a:r>
-            <a:endParaRPr lang="en-US" sz="1500" dirty="0"/>
-          </a:p>
-        </p:txBody>
-      </p:sp>
-      <p:sp>
-        <p:nvSpPr>
-          <p:cNvPr id="13" name="Label"/>
-          <p:cNvSpPr txBox="1"/>
-          <p:nvPr/>
-        </p:nvSpPr>
-        <p:spPr>
-          <a:xfrm>
-            <a:off x="7909560" y="1371600"/>
-            <a:ext cx="3730752" cy="365760"/>
-          </a:xfrm>
-          <a:prstGeom prst="rect">
-            <a:avLst/>
-          </a:prstGeom>
-          <a:noFill/>
-          <a:ln/>
-        </p:spPr>
-        <p:txBody>
-          <a:bodyPr wrap="square" lIns="0" tIns="0" rIns="0" bIns="0" rtlCol="0" anchor="ctr"/>
-          <a:lstStyle/>
-          <a:p>
-            <a:pPr algn="l" indent="0" marL="0">
-              <a:buNone/>
-            </a:pPr>
-            <a:r>
-              <a:rPr lang="en-US" sz="1700" b="1" dirty="0">
-                <a:solidFill>
-                  <a:schemeClr val="tx2"/>
-                </a:solidFill>
-              </a:rPr>
-              <a:t>What they have in common</a:t>
-            </a:r>
-            <a:endParaRPr lang="en-US" sz="1700" dirty="0"/>
-          </a:p>
-        </p:txBody>
-      </p:sp>
-      <p:sp>
-        <p:nvSpPr>
-          <p:cNvPr id="14" name="Failure takeaways"/>
-          <p:cNvSpPr txBox="1"/>
-          <p:nvPr/>
-        </p:nvSpPr>
-        <p:spPr>
-          <a:xfrm>
-            <a:off x="7909560" y="1810512"/>
-            <a:ext cx="3730752" cy="3840480"/>
-          </a:xfrm>
-          <a:prstGeom prst="rect">
-            <a:avLst/>
-          </a:prstGeom>
-          <a:noFill/>
-          <a:ln/>
-        </p:spPr>
-        <p:txBody>
           <a:bodyPr wrap="square" lIns="0" tIns="0" rIns="0" bIns="0" rtlCol="0" anchor="t"/>
           <a:lstStyle/>
           <a:p>
             <a:pPr algn="l" marL="203200" indent="-203200">
               <a:spcAft>
-                <a:spcPts val="800"/>
+                <a:spcPts val="1100"/>
               </a:spcAft>
               <a:buSzPct val="100000"/>
               <a:buChar char="•"/>
             </a:pPr>
             <a:r>
-              <a:rPr lang="en-US" sz="1300" dirty="0">
+              <a:rPr lang="en-US" sz="1500" dirty="0">
                 <a:solidFill>
                   <a:schemeClr val="tx1"/>
                 </a:solidFill>
               </a:rPr>
-              <a:t>All 12 were routing mistakes. One stated a wrong date (Q31); the scorer passed it and the invented-number check caught it.</a:t>
-            </a:r>
-            <a:endParaRPr lang="en-US" sz="1300" dirty="0"/>
+              <a:t>Nothing is sent until you press Confirm. In the demo it is only logged.</a:t>
+            </a:r>
+            <a:endParaRPr lang="en-US" sz="1500" dirty="0"/>
           </a:p>
           <a:p>
             <a:pPr algn="l" marL="203200" indent="-203200">
               <a:spcAft>
-                <a:spcPts val="800"/>
+                <a:spcPts val="1100"/>
               </a:spcAft>
               <a:buSzPct val="100000"/>
               <a:buChar char="•"/>
             </a:pPr>
             <a:r>
-              <a:rPr lang="en-US" sz="1300" dirty="0">
+              <a:rPr lang="en-US" sz="1500" dirty="0">
                 <a:solidFill>
                   <a:schemeClr val="tx1"/>
                 </a:solidFill>
               </a:rPr>
-              <a:t>Guessing was the commonest wrong move (Q17, Q18, Q35): the brief says ask, do not guess.</a:t>
-            </a:r>
-            <a:endParaRPr lang="en-US" sz="1300" dirty="0"/>
+              <a:t>A confirmation key covers one order and one text, expires in 15 minutes, and confirming twice does nothing.</a:t>
+            </a:r>
+            <a:endParaRPr lang="en-US" sz="1500" dirty="0"/>
           </a:p>
           <a:p>
             <a:pPr algn="l" marL="203200" indent="-203200">
               <a:spcAft>
-                <a:spcPts val="800"/>
+                <a:spcPts val="1100"/>
               </a:spcAft>
               <a:buSzPct val="100000"/>
               <a:buChar char="•"/>
             </a:pPr>
             <a:r>
-              <a:rPr lang="en-US" sz="1300" dirty="0">
+              <a:rPr lang="en-US" sz="1500" dirty="0">
                 <a:solidFill>
                   <a:schemeClr val="tx1"/>
                 </a:solidFill>
               </a:rPr>
-              <a:t>The worst was Q35: a destructive request answered like a lookup, so the manager could not tell whether anything had happened.</a:t>
-            </a:r>
-            <a:endParaRPr lang="en-US" sz="1300" dirty="0"/>
+              <a:t>It cannot cancel, delete or change an order, and says so.</a:t>
+            </a:r>
+            <a:endParaRPr lang="en-US" sz="1500" dirty="0"/>
           </a:p>
           <a:p>
             <a:pPr algn="l" marL="203200" indent="-203200">
               <a:spcAft>
-                <a:spcPts val="800"/>
+                <a:spcPts val="1100"/>
               </a:spcAft>
               <a:buSzPct val="100000"/>
               <a:buChar char="•"/>
             </a:pPr>
             <a:r>
-              <a:rPr lang="en-US" sz="1300" dirty="0">
+              <a:rPr lang="en-US" sz="1500" dirty="0">
                 <a:solidFill>
                   <a:schemeClr val="tx1"/>
                 </a:solidFill>
               </a:rPr>
-              <a:t>Probing the tool boundaries found three more: the manager's own number ignored (“Is 800 pieces from assembly normal?”), a stalled customer, and “Show me all orders”.</a:t>
-            </a:r>
-            <a:endParaRPr lang="en-US" sz="1300" dirty="0"/>
-          </a:p>
-        </p:txBody>
-      </p:sp>
-      <p:sp>
-        <p:nvSpPr>
-          <p:cNvPr id="15" name="Docs pointer"/>
+              <a:t>It speaks first rarely: one briefing at 07:00, plus watches you set and a stage that misses its target 3 days running.</a:t>
+            </a:r>
+            <a:endParaRPr lang="en-US" sz="1500" dirty="0"/>
+          </a:p>
+        </p:txBody>
+      </p:sp>
+      <p:sp>
+        <p:nvSpPr>
+          <p:cNvPr id="12" name="Docs pointer"/>
           <p:cNvSpPr txBox="1"/>
           <p:nvPr/>
         </p:nvSpPr>
@@ -4032,7 +4806,7 @@
                   <a:schemeClr val="accent5"/>
                 </a:solidFill>
               </a:rPr>
-              <a:t>Every case, what it said and the fix: docs/failure_analysis.md. A test checks that page against the recorded run.</a:t>
+              <a:t>Every action, its worst case and what it cannot do: docs/actions_and_limits.md. What may interrupt the manager: docs/alert_triggers.md.</a:t>
             </a:r>
             <a:endParaRPr lang="en-US" sz="1100" dirty="0"/>
           </a:p>
@@ -4140,7 +4914,7 @@
                   <a:schemeClr val="tx2"/>
                 </a:solidFill>
               </a:rPr>
-              <a:t>Backup: an estimate, and a watch that fires</a:t>
+              <a:t>Backup: the 12 first-pass failures, by cause</a:t>
             </a:r>
             <a:endParaRPr lang="en-US" sz="3200" dirty="0"/>
           </a:p>
@@ -4188,14 +4962,36 @@
       </p:sp>
       <p:sp>
         <p:nvSpPr>
-          <p:cNvPr id="4" name="Label"/>
+          <p:cNvPr id="4" name="Failure group 1"/>
+          <p:cNvSpPr/>
+          <p:nvPr/>
+        </p:nvSpPr>
+        <p:spPr>
+          <a:xfrm>
+            <a:off x="548640" y="1371600"/>
+            <a:ext cx="7040880" cy="1234440"/>
+          </a:xfrm>
+          <a:prstGeom prst="roundRect">
+            <a:avLst>
+              <a:gd name="adj" fmla="val 5926"/>
+            </a:avLst>
+          </a:prstGeom>
+          <a:solidFill>
+            <a:schemeClr val="bg2"/>
+          </a:solidFill>
+          <a:ln/>
+        </p:spPr>
+      </p:sp>
+      <p:sp>
+        <p:nvSpPr>
+          <p:cNvPr id="5" name="Failure count 1"/>
           <p:cNvSpPr txBox="1"/>
           <p:nvPr/>
         </p:nvSpPr>
         <p:spPr>
           <a:xfrm>
-            <a:off x="548640" y="1234440"/>
-            <a:ext cx="4297680" cy="411480"/>
+            <a:off x="731520" y="1371600"/>
+            <a:ext cx="731520" cy="1234440"/>
           </a:xfrm>
           <a:prstGeom prst="rect">
             <a:avLst/>
@@ -4207,7 +5003,49 @@
           <a:bodyPr wrap="square" lIns="0" tIns="0" rIns="0" bIns="0" rtlCol="0" anchor="ctr"/>
           <a:lstStyle/>
           <a:p>
-            <a:pPr algn="l" indent="0" marL="0">
+            <a:pPr algn="ctr" indent="0" marL="0">
+              <a:buNone/>
+            </a:pPr>
+            <a:r>
+              <a:rPr lang="en-US" sz="4400" b="1" dirty="0">
+                <a:solidFill>
+                  <a:schemeClr val="accent1"/>
+                </a:solidFill>
+                <a:latin typeface="Cambria" pitchFamily="34" charset="0"/>
+                <a:ea typeface="Cambria" pitchFamily="34" charset="-122"/>
+                <a:cs typeface="Cambria" pitchFamily="34" charset="-120"/>
+              </a:rPr>
+              <a:t>5</a:t>
+            </a:r>
+            <a:endParaRPr lang="en-US" sz="4400" dirty="0"/>
+          </a:p>
+        </p:txBody>
+      </p:sp>
+      <p:sp>
+        <p:nvSpPr>
+          <p:cNvPr id="6" name="Failure text 1"/>
+          <p:cNvSpPr txBox="1"/>
+          <p:nvPr/>
+        </p:nvSpPr>
+        <p:spPr>
+          <a:xfrm>
+            <a:off x="1600200" y="1371600"/>
+            <a:ext cx="5852160" cy="1234440"/>
+          </a:xfrm>
+          <a:prstGeom prst="rect">
+            <a:avLst/>
+          </a:prstGeom>
+          <a:noFill/>
+          <a:ln/>
+        </p:spPr>
+        <p:txBody>
+          <a:bodyPr wrap="square" lIns="0" tIns="0" rIns="0" bIns="0" rtlCol="0" anchor="ctr"/>
+          <a:lstStyle/>
+          <a:p>
+            <a:pPr algn="l" indent="0" marL="0">
+              <a:spcAft>
+                <a:spcPts val="300"/>
+              </a:spcAft>
               <a:buNone/>
             </a:pPr>
             <a:r>
@@ -4216,80 +5054,61 @@
                   <a:schemeClr val="tx2"/>
                 </a:solidFill>
               </a:rPr>
-              <a:t>“Can we take 800 hoodies by the 25th?”</a:t>
+              <a:t>fell to “I can't answer that”</a:t>
             </a:r>
             <a:endParaRPr lang="en-US" sz="1500" dirty="0"/>
           </a:p>
-        </p:txBody>
-      </p:sp>
-      <p:sp>
-        <p:nvSpPr>
-          <p:cNvPr id="5" name="Feasibility screenshot frame"/>
+          <a:p>
+            <a:pPr algn="l" indent="0" marL="0">
+              <a:spcAft>
+                <a:spcPts val="300"/>
+              </a:spcAft>
+              <a:buNone/>
+            </a:pPr>
+            <a:r>
+              <a:rPr lang="en-US" sz="1200" dirty="0">
+                <a:solidFill>
+                  <a:schemeClr val="tx1"/>
+                </a:solidFill>
+              </a:rPr>
+              <a:t>No rule matched, though the data could answer: a count of orders in progress (Q01), two short follow-ups with no order in them (Q11, Q12), “the other one” (Q19), “Email the customer…” (Q36).</a:t>
+            </a:r>
+            <a:endParaRPr lang="en-US" sz="1500" dirty="0"/>
+          </a:p>
+        </p:txBody>
+      </p:sp>
+      <p:sp>
+        <p:nvSpPr>
+          <p:cNvPr id="7" name="Failure group 2"/>
           <p:cNvSpPr/>
           <p:nvPr/>
         </p:nvSpPr>
         <p:spPr>
           <a:xfrm>
-            <a:off x="502920" y="1737360"/>
-            <a:ext cx="4335258" cy="3611880"/>
+            <a:off x="548640" y="2743200"/>
+            <a:ext cx="7040880" cy="1234440"/>
           </a:xfrm>
           <a:prstGeom prst="roundRect">
             <a:avLst>
-              <a:gd name="adj" fmla="val 1519"/>
+              <a:gd name="adj" fmla="val 5926"/>
             </a:avLst>
           </a:prstGeom>
           <a:solidFill>
-            <a:schemeClr val="bg1"/>
+            <a:schemeClr val="bg2"/>
           </a:solidFill>
-          <a:ln w="12700">
-            <a:solidFill>
-              <a:schemeClr val="bg2"/>
-            </a:solidFill>
-            <a:prstDash val="solid"/>
-          </a:ln>
-          <a:effectLst>
-            <a:outerShdw sx="100000" sy="100000" kx="0" ky="0" algn="bl" rotWithShape="0" blurRad="101600" dist="25400" dir="5400000">
-              <a:srgbClr val="000000">
-                <a:alpha val="16000"/>
-              </a:srgbClr>
-            </a:outerShdw>
-          </a:effectLst>
-        </p:spPr>
-      </p:sp>
-      <p:pic>
-        <p:nvPicPr>
-          <p:cNvPr id="6" name="Feasibility screenshot" descr="Chat: a feasibility answer with a date range, the bottleneck stage and the assumptions">    </p:cNvPr>
-          <p:cNvPicPr>
-            <a:picLocks noChangeAspect="1"/>
-          </p:cNvPicPr>
-          <p:nvPr/>
-        </p:nvPicPr>
-        <p:blipFill>
-          <a:blip r:embed="rId1"/>
-          <a:stretch>
-            <a:fillRect/>
-          </a:stretch>
-        </p:blipFill>
-        <p:spPr>
-          <a:xfrm>
-            <a:off x="548640" y="1783080"/>
-            <a:ext cx="4243818" cy="3520440"/>
-          </a:xfrm>
-          <a:prstGeom prst="rect">
-            <a:avLst/>
-          </a:prstGeom>
-        </p:spPr>
-      </p:pic>
-      <p:sp>
-        <p:nvSpPr>
-          <p:cNvPr id="7" name="Label"/>
+          <a:ln/>
+        </p:spPr>
+      </p:sp>
+      <p:sp>
+        <p:nvSpPr>
+          <p:cNvPr id="8" name="Failure count 2"/>
           <p:cNvSpPr txBox="1"/>
           <p:nvPr/>
         </p:nvSpPr>
         <p:spPr>
           <a:xfrm>
-            <a:off x="5203938" y="1234440"/>
-            <a:ext cx="6436374" cy="411480"/>
+            <a:off x="731520" y="2743200"/>
+            <a:ext cx="731520" cy="1234440"/>
           </a:xfrm>
           <a:prstGeom prst="rect">
             <a:avLst/>
@@ -4301,7 +5120,49 @@
           <a:bodyPr wrap="square" lIns="0" tIns="0" rIns="0" bIns="0" rtlCol="0" anchor="ctr"/>
           <a:lstStyle/>
           <a:p>
-            <a:pPr algn="l" indent="0" marL="0">
+            <a:pPr algn="ctr" indent="0" marL="0">
+              <a:buNone/>
+            </a:pPr>
+            <a:r>
+              <a:rPr lang="en-US" sz="4400" b="1" dirty="0">
+                <a:solidFill>
+                  <a:schemeClr val="accent2"/>
+                </a:solidFill>
+                <a:latin typeface="Cambria" pitchFamily="34" charset="0"/>
+                <a:ea typeface="Cambria" pitchFamily="34" charset="-122"/>
+                <a:cs typeface="Cambria" pitchFamily="34" charset="-120"/>
+              </a:rPr>
+              <a:t>6</a:t>
+            </a:r>
+            <a:endParaRPr lang="en-US" sz="4400" dirty="0"/>
+          </a:p>
+        </p:txBody>
+      </p:sp>
+      <p:sp>
+        <p:nvSpPr>
+          <p:cNvPr id="9" name="Failure text 2"/>
+          <p:cNvSpPr txBox="1"/>
+          <p:nvPr/>
+        </p:nvSpPr>
+        <p:spPr>
+          <a:xfrm>
+            <a:off x="1600200" y="2743200"/>
+            <a:ext cx="5852160" cy="1234440"/>
+          </a:xfrm>
+          <a:prstGeom prst="rect">
+            <a:avLst/>
+          </a:prstGeom>
+          <a:noFill/>
+          <a:ln/>
+        </p:spPr>
+        <p:txBody>
+          <a:bodyPr wrap="square" lIns="0" tIns="0" rIns="0" bIns="0" rtlCol="0" anchor="ctr"/>
+          <a:lstStyle/>
+          <a:p>
+            <a:pPr algn="l" indent="0" marL="0">
+              <a:spcAft>
+                <a:spcPts val="300"/>
+              </a:spcAft>
               <a:buNone/>
             </a:pPr>
             <a:r>
@@ -4310,80 +5171,61 @@
                   <a:schemeClr val="tx2"/>
                 </a:solidFill>
               </a:rPr>
-              <a:t>A watch set yesterday fires in the next morning's briefing</a:t>
+              <a:t>answered by a close but wrong rule</a:t>
             </a:r>
             <a:endParaRPr lang="en-US" sz="1500" dirty="0"/>
           </a:p>
-        </p:txBody>
-      </p:sp>
-      <p:sp>
-        <p:nvSpPr>
-          <p:cNvPr id="8" name="Watch fired screenshot frame"/>
+          <a:p>
+            <a:pPr algn="l" indent="0" marL="0">
+              <a:spcAft>
+                <a:spcPts val="300"/>
+              </a:spcAft>
+              <a:buNone/>
+            </a:pPr>
+            <a:r>
+              <a:rPr lang="en-US" sz="1200" dirty="0">
+                <a:solidFill>
+                  <a:schemeClr val="tx1"/>
+                </a:solidFill>
+              </a:rPr>
+              <a:t>Status instead of stage (Q04); orders instead of pieces (Q09); “Is it late?” listed late orders (Q17); “the Harbor Knits order” taken as the customer (Q18); a past date read as next year's (Q31); “Delete ORD-005” answered as a lookup (Q35).</a:t>
+            </a:r>
+            <a:endParaRPr lang="en-US" sz="1500" dirty="0"/>
+          </a:p>
+        </p:txBody>
+      </p:sp>
+      <p:sp>
+        <p:nvSpPr>
+          <p:cNvPr id="10" name="Failure group 3"/>
           <p:cNvSpPr/>
           <p:nvPr/>
         </p:nvSpPr>
         <p:spPr>
           <a:xfrm>
-            <a:off x="5158218" y="1737360"/>
-            <a:ext cx="5331165" cy="3611880"/>
+            <a:off x="548640" y="4114800"/>
+            <a:ext cx="7040880" cy="1234440"/>
           </a:xfrm>
           <a:prstGeom prst="roundRect">
             <a:avLst>
-              <a:gd name="adj" fmla="val 1519"/>
+              <a:gd name="adj" fmla="val 5926"/>
             </a:avLst>
           </a:prstGeom>
           <a:solidFill>
-            <a:schemeClr val="bg1"/>
+            <a:schemeClr val="bg2"/>
           </a:solidFill>
-          <a:ln w="12700">
-            <a:solidFill>
-              <a:schemeClr val="bg2"/>
-            </a:solidFill>
-            <a:prstDash val="solid"/>
-          </a:ln>
-          <a:effectLst>
-            <a:outerShdw sx="100000" sy="100000" kx="0" ky="0" algn="bl" rotWithShape="0" blurRad="101600" dist="25400" dir="5400000">
-              <a:srgbClr val="000000">
-                <a:alpha val="16000"/>
-              </a:srgbClr>
-            </a:outerShdw>
-          </a:effectLst>
-        </p:spPr>
-      </p:sp>
-      <p:pic>
-        <p:nvPicPr>
-          <p:cNvPr id="9" name="Watch fired screenshot" descr="The morning page on Friday 10 April with a 'Watch fired' notice and the chat showing the alert for ORD-120">    </p:cNvPr>
-          <p:cNvPicPr>
-            <a:picLocks noChangeAspect="1"/>
-          </p:cNvPicPr>
-          <p:nvPr/>
-        </p:nvPicPr>
-        <p:blipFill>
-          <a:blip r:embed="rId2"/>
-          <a:stretch>
-            <a:fillRect/>
-          </a:stretch>
-        </p:blipFill>
-        <p:spPr>
-          <a:xfrm>
-            <a:off x="5203938" y="1783080"/>
-            <a:ext cx="5239725" cy="3520440"/>
-          </a:xfrm>
-          <a:prstGeom prst="rect">
-            <a:avLst/>
-          </a:prstGeom>
-        </p:spPr>
-      </p:pic>
-      <p:sp>
-        <p:nvSpPr>
-          <p:cNvPr id="10" name="Note"/>
+          <a:ln/>
+        </p:spPr>
+      </p:sp>
+      <p:sp>
+        <p:nvSpPr>
+          <p:cNvPr id="11" name="Failure count 3"/>
           <p:cNvSpPr txBox="1"/>
           <p:nvPr/>
         </p:nvSpPr>
         <p:spPr>
           <a:xfrm>
-            <a:off x="548640" y="5486400"/>
-            <a:ext cx="4243818" cy="731520"/>
+            <a:off x="731520" y="4114800"/>
+            <a:ext cx="731520" cy="1234440"/>
           </a:xfrm>
           <a:prstGeom prst="rect">
             <a:avLst/>
@@ -4392,34 +5234,223 @@
           <a:ln/>
         </p:spPr>
         <p:txBody>
+          <a:bodyPr wrap="square" lIns="0" tIns="0" rIns="0" bIns="0" rtlCol="0" anchor="ctr"/>
+          <a:lstStyle/>
+          <a:p>
+            <a:pPr algn="ctr" indent="0" marL="0">
+              <a:buNone/>
+            </a:pPr>
+            <a:r>
+              <a:rPr lang="en-US" sz="4400" b="1" dirty="0">
+                <a:solidFill>
+                  <a:schemeClr val="accent1"/>
+                </a:solidFill>
+                <a:latin typeface="Cambria" pitchFamily="34" charset="0"/>
+                <a:ea typeface="Cambria" pitchFamily="34" charset="-122"/>
+                <a:cs typeface="Cambria" pitchFamily="34" charset="-120"/>
+              </a:rPr>
+              <a:t>1</a:t>
+            </a:r>
+            <a:endParaRPr lang="en-US" sz="4400" dirty="0"/>
+          </a:p>
+        </p:txBody>
+      </p:sp>
+      <p:sp>
+        <p:nvSpPr>
+          <p:cNvPr id="12" name="Failure text 3"/>
+          <p:cNvSpPr txBox="1"/>
+          <p:nvPr/>
+        </p:nvSpPr>
+        <p:spPr>
+          <a:xfrm>
+            <a:off x="1600200" y="4114800"/>
+            <a:ext cx="5852160" cy="1234440"/>
+          </a:xfrm>
+          <a:prstGeom prst="rect">
+            <a:avLst/>
+          </a:prstGeom>
+          <a:noFill/>
+          <a:ln/>
+        </p:spPr>
+        <p:txBody>
+          <a:bodyPr wrap="square" lIns="0" tIns="0" rIns="0" bIns="0" rtlCol="0" anchor="ctr"/>
+          <a:lstStyle/>
+          <a:p>
+            <a:pPr algn="l" indent="0" marL="0">
+              <a:spcAft>
+                <a:spcPts val="300"/>
+              </a:spcAft>
+              <a:buNone/>
+            </a:pPr>
+            <a:r>
+              <a:rPr lang="en-US" sz="1500" b="1" dirty="0">
+                <a:solidFill>
+                  <a:schemeClr val="tx2"/>
+                </a:solidFill>
+              </a:rPr>
+              <a:t>a wording problem</a:t>
+            </a:r>
+            <a:endParaRPr lang="en-US" sz="1500" dirty="0"/>
+          </a:p>
+          <a:p>
+            <a:pPr algn="l" indent="0" marL="0">
+              <a:spcAft>
+                <a:spcPts val="300"/>
+              </a:spcAft>
+              <a:buNone/>
+            </a:pPr>
+            <a:r>
+              <a:rPr lang="en-US" sz="1200" dirty="0">
+                <a:solidFill>
+                  <a:schemeClr val="tx1"/>
+                </a:solidFill>
+              </a:rPr>
+              <a:t>The reminder's first sentence did not say in words that nothing is set up until you confirm (Q34). It matters for voice, where there is no card to see.</a:t>
+            </a:r>
+            <a:endParaRPr lang="en-US" sz="1500" dirty="0"/>
+          </a:p>
+        </p:txBody>
+      </p:sp>
+      <p:sp>
+        <p:nvSpPr>
+          <p:cNvPr id="13" name="Label"/>
+          <p:cNvSpPr txBox="1"/>
+          <p:nvPr/>
+        </p:nvSpPr>
+        <p:spPr>
+          <a:xfrm>
+            <a:off x="7909560" y="1371600"/>
+            <a:ext cx="3730752" cy="365760"/>
+          </a:xfrm>
+          <a:prstGeom prst="rect">
+            <a:avLst/>
+          </a:prstGeom>
+          <a:noFill/>
+          <a:ln/>
+        </p:spPr>
+        <p:txBody>
+          <a:bodyPr wrap="square" lIns="0" tIns="0" rIns="0" bIns="0" rtlCol="0" anchor="ctr"/>
+          <a:lstStyle/>
+          <a:p>
+            <a:pPr algn="l" indent="0" marL="0">
+              <a:buNone/>
+            </a:pPr>
+            <a:r>
+              <a:rPr lang="en-US" sz="1700" b="1" dirty="0">
+                <a:solidFill>
+                  <a:schemeClr val="tx2"/>
+                </a:solidFill>
+              </a:rPr>
+              <a:t>What they have in common</a:t>
+            </a:r>
+            <a:endParaRPr lang="en-US" sz="1700" dirty="0"/>
+          </a:p>
+        </p:txBody>
+      </p:sp>
+      <p:sp>
+        <p:nvSpPr>
+          <p:cNvPr id="14" name="Failure takeaways"/>
+          <p:cNvSpPr txBox="1"/>
+          <p:nvPr/>
+        </p:nvSpPr>
+        <p:spPr>
+          <a:xfrm>
+            <a:off x="7909560" y="1810512"/>
+            <a:ext cx="3730752" cy="3840480"/>
+          </a:xfrm>
+          <a:prstGeom prst="rect">
+            <a:avLst/>
+          </a:prstGeom>
+          <a:noFill/>
+          <a:ln/>
+        </p:spPr>
+        <p:txBody>
           <a:bodyPr wrap="square" lIns="0" tIns="0" rIns="0" bIns="0" rtlCol="0" anchor="t"/>
           <a:lstStyle/>
           <a:p>
-            <a:pPr algn="l" indent="0" marL="0">
-              <a:buNone/>
-            </a:pPr>
-            <a:r>
-              <a:rPr lang="en-US" sz="1200" dirty="0">
+            <a:pPr algn="l" marL="203200" indent="-203200">
+              <a:spcAft>
+                <a:spcPts val="800"/>
+              </a:spcAft>
+              <a:buSzPct val="100000"/>
+              <a:buChar char="•"/>
+            </a:pPr>
+            <a:r>
+              <a:rPr lang="en-US" sz="1300" dirty="0">
                 <a:solidFill>
                   <a:schemeClr val="tx1"/>
                 </a:solidFill>
               </a:rPr>
-              <a:t>Unlikely by Sat 25 Apr: between Tue 28 Apr and Tue 12 May. The range is widened by 3 working days each end, because tested on 180 simulated orders the narrower one held the real finish only 7 times in 10 (now 94%).</a:t>
-            </a:r>
-            <a:endParaRPr lang="en-US" sz="1200" dirty="0"/>
-          </a:p>
-        </p:txBody>
-      </p:sp>
-      <p:sp>
-        <p:nvSpPr>
-          <p:cNvPr id="11" name="Note"/>
+              <a:t>All 12 were routing mistakes. One stated a wrong date (Q31); the scorer passed it and the invented-number check caught it.</a:t>
+            </a:r>
+            <a:endParaRPr lang="en-US" sz="1300" dirty="0"/>
+          </a:p>
+          <a:p>
+            <a:pPr algn="l" marL="203200" indent="-203200">
+              <a:spcAft>
+                <a:spcPts val="800"/>
+              </a:spcAft>
+              <a:buSzPct val="100000"/>
+              <a:buChar char="•"/>
+            </a:pPr>
+            <a:r>
+              <a:rPr lang="en-US" sz="1300" dirty="0">
+                <a:solidFill>
+                  <a:schemeClr val="tx1"/>
+                </a:solidFill>
+              </a:rPr>
+              <a:t>Guessing was the commonest wrong move (Q17, Q18, Q35): the brief says ask, do not guess.</a:t>
+            </a:r>
+            <a:endParaRPr lang="en-US" sz="1300" dirty="0"/>
+          </a:p>
+          <a:p>
+            <a:pPr algn="l" marL="203200" indent="-203200">
+              <a:spcAft>
+                <a:spcPts val="800"/>
+              </a:spcAft>
+              <a:buSzPct val="100000"/>
+              <a:buChar char="•"/>
+            </a:pPr>
+            <a:r>
+              <a:rPr lang="en-US" sz="1300" dirty="0">
+                <a:solidFill>
+                  <a:schemeClr val="tx1"/>
+                </a:solidFill>
+              </a:rPr>
+              <a:t>The worst was Q35: a destructive request answered like a lookup, so the manager could not tell whether anything had happened.</a:t>
+            </a:r>
+            <a:endParaRPr lang="en-US" sz="1300" dirty="0"/>
+          </a:p>
+          <a:p>
+            <a:pPr algn="l" marL="203200" indent="-203200">
+              <a:spcAft>
+                <a:spcPts val="800"/>
+              </a:spcAft>
+              <a:buSzPct val="100000"/>
+              <a:buChar char="•"/>
+            </a:pPr>
+            <a:r>
+              <a:rPr lang="en-US" sz="1300" dirty="0">
+                <a:solidFill>
+                  <a:schemeClr val="tx1"/>
+                </a:solidFill>
+              </a:rPr>
+              <a:t>Probing the tool boundaries found three more: the manager's own number ignored (“Is 800 pieces from assembly normal?”), a stalled customer, and “Show me all orders”.</a:t>
+            </a:r>
+            <a:endParaRPr lang="en-US" sz="1300" dirty="0"/>
+          </a:p>
+        </p:txBody>
+      </p:sp>
+      <p:sp>
+        <p:nvSpPr>
+          <p:cNvPr id="15" name="Docs pointer"/>
           <p:cNvSpPr txBox="1"/>
           <p:nvPr/>
         </p:nvSpPr>
         <p:spPr>
           <a:xfrm>
-            <a:off x="5203938" y="5486400"/>
-            <a:ext cx="5239725" cy="731520"/>
+            <a:off x="548640" y="5943600"/>
+            <a:ext cx="11091672" cy="320040"/>
           </a:xfrm>
           <a:prstGeom prst="rect">
             <a:avLst/>
@@ -4435,14 +5466,14 @@
               <a:buNone/>
             </a:pPr>
             <a:r>
-              <a:rPr lang="en-US" sz="1200" dirty="0">
-                <a:solidFill>
-                  <a:schemeClr val="tx1"/>
-                </a:solidFill>
-              </a:rPr>
-              <a:t>Confirmed on 9 April. On 10 April the briefing re-checks the data, finds no activity since 3 April and raises the alert. Nothing is sent outside the system.</a:t>
-            </a:r>
-            <a:endParaRPr lang="en-US" sz="1200" dirty="0"/>
+              <a:rPr lang="en-US" sz="1100" dirty="0">
+                <a:solidFill>
+                  <a:schemeClr val="accent5"/>
+                </a:solidFill>
+              </a:rPr>
+              <a:t>Every case, what it said and the fix: docs/failure_analysis.md. A test checks that page against the recorded run.</a:t>
+            </a:r>
+            <a:endParaRPr lang="en-US" sz="1100" dirty="0"/>
           </a:p>
         </p:txBody>
       </p:sp>
@@ -4548,7 +5579,7 @@
                   <a:schemeClr val="tx2"/>
                 </a:solidFill>
               </a:rPr>
-              <a:t>Backup: ready for a phone and a shared link</a:t>
+              <a:t>Backup: an estimate, and a watch that fires</a:t>
             </a:r>
             <a:endParaRPr lang="en-US" sz="3200" dirty="0"/>
           </a:p>
@@ -4602,8 +5633,8 @@
         </p:nvSpPr>
         <p:spPr>
           <a:xfrm>
-            <a:off x="548640" y="1280160"/>
-            <a:ext cx="2377440" cy="411480"/>
+            <a:off x="548640" y="1234440"/>
+            <a:ext cx="4297680" cy="411480"/>
           </a:xfrm>
           <a:prstGeom prst="rect">
             <a:avLst/>
@@ -4619,31 +5650,31 @@
               <a:buNone/>
             </a:pPr>
             <a:r>
-              <a:rPr lang="en-US" sz="1600" b="1" dirty="0">
+              <a:rPr lang="en-US" sz="1500" b="1" dirty="0">
                 <a:solidFill>
                   <a:schemeClr val="tx2"/>
                 </a:solidFill>
               </a:rPr>
-              <a:t>On a phone</a:t>
-            </a:r>
-            <a:endParaRPr lang="en-US" sz="1600" dirty="0"/>
-          </a:p>
-        </p:txBody>
-      </p:sp>
-      <p:sp>
-        <p:nvSpPr>
-          <p:cNvPr id="5" name="Phone email screenshot frame"/>
+              <a:t>“Can we take 800 hoodies by the 25th?”</a:t>
+            </a:r>
+            <a:endParaRPr lang="en-US" sz="1500" dirty="0"/>
+          </a:p>
+        </p:txBody>
+      </p:sp>
+      <p:sp>
+        <p:nvSpPr>
+          <p:cNvPr id="5" name="Feasibility screenshot frame"/>
           <p:cNvSpPr/>
           <p:nvPr/>
         </p:nvSpPr>
         <p:spPr>
           <a:xfrm>
             <a:off x="502920" y="1737360"/>
-            <a:ext cx="1997483" cy="4160520"/>
+            <a:ext cx="4335258" cy="3611880"/>
           </a:xfrm>
           <a:prstGeom prst="roundRect">
             <a:avLst>
-              <a:gd name="adj" fmla="val 2747"/>
+              <a:gd name="adj" fmla="val 1519"/>
             </a:avLst>
           </a:prstGeom>
           <a:solidFill>
@@ -4666,7 +5697,7 @@
       </p:sp>
       <p:pic>
         <p:nvPicPr>
-          <p:cNvPr id="6" name="Phone email screenshot" descr="The morning summary email on a 390-pixel phone: To, Cc, subject and message filled in, with a full-width Open in Outlook button">    </p:cNvPr>
+          <p:cNvPr id="6" name="Feasibility screenshot" descr="Chat: a feasibility answer with a date range, the bottleneck stage and the assumptions">    </p:cNvPr>
           <p:cNvPicPr>
             <a:picLocks noChangeAspect="1"/>
           </p:cNvPicPr>
@@ -4681,7 +5712,7 @@
         <p:spPr>
           <a:xfrm>
             <a:off x="548640" y="1783080"/>
-            <a:ext cx="1906043" cy="4069080"/>
+            <a:ext cx="4243818" cy="3520440"/>
           </a:xfrm>
           <a:prstGeom prst="rect">
             <a:avLst/>
@@ -4696,8 +5727,8 @@
         </p:nvSpPr>
         <p:spPr>
           <a:xfrm>
-            <a:off x="2820443" y="1280160"/>
-            <a:ext cx="3291840" cy="411480"/>
+            <a:off x="5203938" y="1234440"/>
+            <a:ext cx="6436374" cy="411480"/>
           </a:xfrm>
           <a:prstGeom prst="rect">
             <a:avLst/>
@@ -4713,31 +5744,31 @@
               <a:buNone/>
             </a:pPr>
             <a:r>
-              <a:rPr lang="en-US" sz="1600" b="1" dirty="0">
+              <a:rPr lang="en-US" sz="1500" b="1" dirty="0">
                 <a:solidFill>
                   <a:schemeClr val="tx2"/>
                 </a:solidFill>
               </a:rPr>
-              <a:t>On a laptop</a:t>
-            </a:r>
-            <a:endParaRPr lang="en-US" sz="1600" dirty="0"/>
-          </a:p>
-        </p:txBody>
-      </p:sp>
-      <p:sp>
-        <p:nvSpPr>
-          <p:cNvPr id="8" name="Desktop email screenshot frame"/>
+              <a:t>A watch set yesterday fires in the next morning's briefing</a:t>
+            </a:r>
+            <a:endParaRPr lang="en-US" sz="1500" dirty="0"/>
+          </a:p>
+        </p:txBody>
+      </p:sp>
+      <p:sp>
+        <p:nvSpPr>
+          <p:cNvPr id="8" name="Watch fired screenshot frame"/>
           <p:cNvSpPr/>
           <p:nvPr/>
         </p:nvSpPr>
         <p:spPr>
           <a:xfrm>
-            <a:off x="2774723" y="1737360"/>
-            <a:ext cx="3708400" cy="4160520"/>
+            <a:off x="5158218" y="1737360"/>
+            <a:ext cx="5331165" cy="3611880"/>
           </a:xfrm>
           <a:prstGeom prst="roundRect">
             <a:avLst>
-              <a:gd name="adj" fmla="val 1479"/>
+              <a:gd name="adj" fmla="val 1519"/>
             </a:avLst>
           </a:prstGeom>
           <a:solidFill>
@@ -4760,7 +5791,7 @@
       </p:sp>
       <p:pic>
         <p:nvPicPr>
-          <p:cNvPr id="9" name="Desktop email screenshot" descr="The morning summary email dialog on a laptop, with recipients filled in and an Open in Outlook button">    </p:cNvPr>
+          <p:cNvPr id="9" name="Watch fired screenshot" descr="The morning page on Friday 10 April with a 'Watch fired' notice and the chat showing the alert for ORD-120">    </p:cNvPr>
           <p:cNvPicPr>
             <a:picLocks noChangeAspect="1"/>
           </p:cNvPicPr>
@@ -4774,8 +5805,8 @@
         </p:blipFill>
         <p:spPr>
           <a:xfrm>
-            <a:off x="2820443" y="1783080"/>
-            <a:ext cx="3616960" cy="4069080"/>
+            <a:off x="5203938" y="1783080"/>
+            <a:ext cx="5239725" cy="3520440"/>
           </a:xfrm>
           <a:prstGeom prst="rect">
             <a:avLst/>
@@ -4784,14 +5815,14 @@
       </p:pic>
       <p:sp>
         <p:nvSpPr>
-          <p:cNvPr id="10" name="Readiness points"/>
+          <p:cNvPr id="10" name="Note"/>
           <p:cNvSpPr txBox="1"/>
           <p:nvPr/>
         </p:nvSpPr>
         <p:spPr>
           <a:xfrm>
-            <a:off x="6848883" y="1325880"/>
-            <a:ext cx="4791429" cy="3566160"/>
+            <a:off x="548640" y="5486400"/>
+            <a:ext cx="4243818" cy="731520"/>
           </a:xfrm>
           <a:prstGeom prst="rect">
             <a:avLst/>
@@ -4804,140 +5835,30 @@
           <a:lstStyle/>
           <a:p>
             <a:pPr algn="l" indent="0" marL="0">
-              <a:spcAft>
-                <a:spcPts val="900"/>
-              </a:spcAft>
-              <a:buNone/>
-            </a:pPr>
-            <a:r>
-              <a:rPr lang="en-US" sz="1500" b="1" dirty="0">
-                <a:solidFill>
-                  <a:schemeClr val="tx2"/>
-                </a:solidFill>
-              </a:rPr>
-              <a:t>Morning email</a:t>
-            </a:r>
-            <a:endParaRPr lang="en-US" sz="1500" dirty="0"/>
-          </a:p>
-          <a:p>
-            <a:pPr algn="l" indent="0" marL="0">
-              <a:spcAft>
-                <a:spcPts val="900"/>
-              </a:spcAft>
-              <a:buNone/>
-            </a:pPr>
-            <a:r>
-              <a:rPr lang="en-US" sz="1250" dirty="0">
+              <a:buNone/>
+            </a:pPr>
+            <a:r>
+              <a:rPr lang="en-US" sz="1200" dirty="0">
                 <a:solidFill>
                   <a:schemeClr val="tx1"/>
                 </a:solidFill>
               </a:rPr>
-              <a:t>Written from the 07:00 briefing; recipients carried over from the last one. Open in Outlook: a filled-in Outlook window, the manager presses Send. One-click sending needs a one-time Microsoft app registration (send-only permission).</a:t>
-            </a:r>
-            <a:endParaRPr lang="en-US" sz="1500" dirty="0"/>
-          </a:p>
-          <a:p>
-            <a:pPr algn="l" indent="0" marL="0">
-              <a:spcAft>
-                <a:spcPts val="900"/>
-              </a:spcAft>
-              <a:buNone/>
-            </a:pPr>
-            <a:r>
-              <a:rPr lang="en-US" sz="1500" b="1" dirty="0">
-                <a:solidFill>
-                  <a:schemeClr val="tx2"/>
-                </a:solidFill>
-              </a:rPr>
-              <a:t>Phones</a:t>
-            </a:r>
-            <a:endParaRPr lang="en-US" sz="1500" dirty="0"/>
-          </a:p>
-          <a:p>
-            <a:pPr algn="l" indent="0" marL="0">
-              <a:spcAft>
-                <a:spcPts val="900"/>
-              </a:spcAft>
-              <a:buNone/>
-            </a:pPr>
-            <a:r>
-              <a:rPr lang="en-US" sz="1250" dirty="0">
-                <a:solidFill>
-                  <a:schemeClr val="tx1"/>
-                </a:solidFill>
-              </a:rPr>
-              <a:t>No page scrolls sideways from 320 to 390 px. The briefing page was 878 px wide on a 390 px phone; a new test found it, and it is fixed.</a:t>
-            </a:r>
-            <a:endParaRPr lang="en-US" sz="1500" dirty="0"/>
-          </a:p>
-          <a:p>
-            <a:pPr algn="l" indent="0" marL="0">
-              <a:spcAft>
-                <a:spcPts val="900"/>
-              </a:spcAft>
-              <a:buNone/>
-            </a:pPr>
-            <a:r>
-              <a:rPr lang="en-US" sz="1500" b="1" dirty="0">
-                <a:solidFill>
-                  <a:schemeClr val="tx2"/>
-                </a:solidFill>
-              </a:rPr>
-              <a:t>A shared link</a:t>
-            </a:r>
-            <a:endParaRPr lang="en-US" sz="1500" dirty="0"/>
-          </a:p>
-          <a:p>
-            <a:pPr algn="l" indent="0" marL="0">
-              <a:spcAft>
-                <a:spcPts val="900"/>
-              </a:spcAft>
-              <a:buNone/>
-            </a:pPr>
-            <a:r>
-              <a:rPr lang="en-US" sz="1250" dirty="0">
-                <a:solidFill>
-                  <a:schemeClr val="tx1"/>
-                </a:solidFill>
-              </a:rPr>
-              <a:t>At most 40 model questions a minute per visitor; a rejected API key now says so; cover photo 2.4 MB to 195 KB.</a:t>
-            </a:r>
-            <a:endParaRPr lang="en-US" sz="1500" dirty="0"/>
-          </a:p>
-        </p:txBody>
-      </p:sp>
-      <p:sp>
-        <p:nvSpPr>
-          <p:cNvPr id="11" name="Readiness box"/>
-          <p:cNvSpPr/>
-          <p:nvPr/>
-        </p:nvSpPr>
-        <p:spPr>
-          <a:xfrm>
-            <a:off x="6848883" y="4846320"/>
-            <a:ext cx="4791429" cy="1005840"/>
-          </a:xfrm>
-          <a:prstGeom prst="roundRect">
-            <a:avLst>
-              <a:gd name="adj" fmla="val 7273"/>
-            </a:avLst>
-          </a:prstGeom>
-          <a:solidFill>
-            <a:schemeClr val="tx2"/>
-          </a:solidFill>
-          <a:ln/>
-        </p:spPr>
-      </p:sp>
-      <p:sp>
-        <p:nvSpPr>
-          <p:cNvPr id="12" name="Readiness text"/>
+              <a:t>Unlikely by Sat 25 Apr: between Tue 28 Apr and Tue 12 May. The range is widened by 3 working days each end, because tested on 180 simulated orders the narrower one held the real finish only 7 times in 10 (now 94%).</a:t>
+            </a:r>
+            <a:endParaRPr lang="en-US" sz="1200" dirty="0"/>
+          </a:p>
+        </p:txBody>
+      </p:sp>
+      <p:sp>
+        <p:nvSpPr>
+          <p:cNvPr id="11" name="Note"/>
           <p:cNvSpPr txBox="1"/>
           <p:nvPr/>
         </p:nvSpPr>
         <p:spPr>
           <a:xfrm>
-            <a:off x="7031763" y="4846320"/>
-            <a:ext cx="4425669" cy="1005840"/>
+            <a:off x="5203938" y="5486400"/>
+            <a:ext cx="5239725" cy="731520"/>
           </a:xfrm>
           <a:prstGeom prst="rect">
             <a:avLst/>
@@ -4946,90 +5867,6 @@
           <a:ln/>
         </p:spPr>
         <p:txBody>
-          <a:bodyPr wrap="square" lIns="0" tIns="0" rIns="0" bIns="0" rtlCol="0" anchor="ctr"/>
-          <a:lstStyle/>
-          <a:p>
-            <a:pPr algn="l" indent="0" marL="0">
-              <a:spcAft>
-                <a:spcPts val="400"/>
-              </a:spcAft>
-              <a:buNone/>
-            </a:pPr>
-            <a:r>
-              <a:rPr lang="en-US" sz="1250" b="1" dirty="0">
-                <a:solidFill>
-                  <a:schemeClr val="accent3"/>
-                </a:solidFill>
-              </a:rPr>
-              <a:t>Tested: </a:t>
-            </a:r>
-            <a:pPr algn="l" indent="0" marL="0">
-              <a:spcAft>
-                <a:spcPts val="400"/>
-              </a:spcAft>
-              <a:buNone/>
-            </a:pPr>
-            <a:r>
-              <a:rPr lang="en-US" sz="1250" dirty="0">
-                <a:solidFill>
-                  <a:schemeClr val="bg1"/>
-                </a:solidFill>
-              </a:rPr>
-              <a:t>198 and 136 tests pass on the merged code (pull request #4). </a:t>
-            </a:r>
-            <a:endParaRPr lang="en-US" sz="1250" dirty="0"/>
-          </a:p>
-          <a:p>
-            <a:pPr algn="l" indent="0" marL="0">
-              <a:spcAft>
-                <a:spcPts val="400"/>
-              </a:spcAft>
-              <a:buNone/>
-            </a:pPr>
-            <a:r>
-              <a:rPr lang="en-US" sz="1250" b="1" dirty="0">
-                <a:solidFill>
-                  <a:schemeClr val="accent3"/>
-                </a:solidFill>
-              </a:rPr>
-              <a:t>Not yet tried: </a:t>
-            </a:r>
-            <a:pPr algn="l" indent="0" marL="0">
-              <a:spcAft>
-                <a:spcPts val="400"/>
-              </a:spcAft>
-              <a:buNone/>
-            </a:pPr>
-            <a:r>
-              <a:rPr lang="en-US" sz="1250" dirty="0">
-                <a:solidFill>
-                  <a:schemeClr val="bg1"/>
-                </a:solidFill>
-              </a:rPr>
-              <a:t>a real Outlook window with a team account.</a:t>
-            </a:r>
-            <a:endParaRPr lang="en-US" sz="1250" dirty="0"/>
-          </a:p>
-        </p:txBody>
-      </p:sp>
-      <p:sp>
-        <p:nvSpPr>
-          <p:cNvPr id="13" name="Readiness pointer"/>
-          <p:cNvSpPr txBox="1"/>
-          <p:nvPr/>
-        </p:nvSpPr>
-        <p:spPr>
-          <a:xfrm>
-            <a:off x="548640" y="6053328"/>
-            <a:ext cx="11091672" cy="256032"/>
-          </a:xfrm>
-          <a:prstGeom prst="rect">
-            <a:avLst/>
-          </a:prstGeom>
-          <a:noFill/>
-          <a:ln/>
-        </p:spPr>
-        <p:txBody>
           <a:bodyPr wrap="square" lIns="0" tIns="0" rIns="0" bIns="0" rtlCol="0" anchor="t"/>
           <a:lstStyle/>
           <a:p>
@@ -5037,14 +5874,14 @@
               <a:buNone/>
             </a:pPr>
             <a:r>
-              <a:rPr lang="en-US" sz="1100" dirty="0">
-                <a:solidFill>
-                  <a:schemeClr val="accent5"/>
-                </a:solidFill>
-              </a:rPr>
-              <a:t>Setup and security: docs/outlook_setup.md.</a:t>
-            </a:r>
-            <a:endParaRPr lang="en-US" sz="1100" dirty="0"/>
+              <a:rPr lang="en-US" sz="1200" dirty="0">
+                <a:solidFill>
+                  <a:schemeClr val="tx1"/>
+                </a:solidFill>
+              </a:rPr>
+              <a:t>Confirmed on 9 April. On 10 April the briefing re-checks the data, finds no activity since 3 April and raises the alert. Nothing is sent outside the system.</a:t>
+            </a:r>
+            <a:endParaRPr lang="en-US" sz="1200" dirty="0"/>
           </a:p>
         </p:txBody>
       </p:sp>
@@ -5088,6 +5925,608 @@
             <a:fld id="{F7021451-1387-4CA6-816F-3879F97B5CBC}" type="slidenum">
               <a:rPr b="0" lang="en-US"/>
               <a:t>13</a:t>
+            </a:fld>
+            <a:endParaRPr lang="en-US"/>
+          </a:p>
+        </p:txBody>
+      </p:sp>
+    </p:spTree>
+  </p:cSld>
+  <p:clrMapOvr>
+    <a:masterClrMapping/>
+  </p:clrMapOvr>
+</p:sld>
+</file>
+
+<file path=ppt/slides/slide14.xml><?xml version="1.0" encoding="utf-8"?>
+<p:sld xmlns:a="http://schemas.openxmlformats.org/drawingml/2006/main" xmlns:r="http://schemas.openxmlformats.org/officeDocument/2006/relationships" xmlns:p="http://schemas.openxmlformats.org/presentationml/2006/main">
+  <p:cSld name="Slide 14">
+    <p:spTree>
+      <p:nvGrpSpPr>
+        <p:cNvPr id="1" name=""/>
+        <p:cNvGrpSpPr/>
+        <p:nvPr/>
+      </p:nvGrpSpPr>
+      <p:grpSpPr>
+        <a:xfrm>
+          <a:off x="0" y="0"/>
+          <a:ext cx="0" cy="0"/>
+          <a:chOff x="0" y="0"/>
+          <a:chExt cx="0" cy="0"/>
+        </a:xfrm>
+      </p:grpSpPr>
+      <p:sp>
+        <p:nvSpPr>
+          <p:cNvPr id="2" name="Text 0"/>
+          <p:cNvSpPr/>
+          <p:nvPr>
+            <p:ph idx="100" type="title" hasCustomPrompt="1"/>
+          </p:nvPr>
+        </p:nvSpPr>
+        <p:spPr>
+          <a:xfrm>
+            <a:off x="548640" y="320040"/>
+            <a:ext cx="11091672" cy="822960"/>
+          </a:xfrm>
+          <a:prstGeom prst="rect">
+            <a:avLst/>
+          </a:prstGeom>
+          <a:noFill/>
+          <a:ln/>
+        </p:spPr>
+        <p:txBody>
+          <a:bodyPr wrap="square" lIns="0" tIns="0" rIns="0" bIns="0" rtlCol="0" anchor="ctr"/>
+          <a:lstStyle/>
+          <a:p>
+            <a:pPr algn="l" indent="0" marL="0">
+              <a:buNone/>
+            </a:pPr>
+            <a:r>
+              <a:rPr lang="en-US" sz="3200" b="1" dirty="0">
+                <a:solidFill>
+                  <a:schemeClr val="tx2"/>
+                </a:solidFill>
+              </a:rPr>
+              <a:t>Backup: the morning email, sent from Outlook</a:t>
+            </a:r>
+            <a:endParaRPr lang="en-US" sz="3200" dirty="0"/>
+          </a:p>
+        </p:txBody>
+      </p:sp>
+      <p:sp>
+        <p:nvSpPr>
+          <p:cNvPr id="3" name="Backup tag"/>
+          <p:cNvSpPr txBox="1"/>
+          <p:nvPr/>
+        </p:nvSpPr>
+        <p:spPr>
+          <a:xfrm>
+            <a:off x="10515600" y="566928"/>
+            <a:ext cx="1124712" cy="292608"/>
+          </a:xfrm>
+          <a:prstGeom prst="roundRect">
+            <a:avLst>
+              <a:gd name="adj" fmla="val 31250"/>
+            </a:avLst>
+          </a:prstGeom>
+          <a:solidFill>
+            <a:schemeClr val="accent5"/>
+          </a:solidFill>
+          <a:ln/>
+        </p:spPr>
+        <p:txBody>
+          <a:bodyPr wrap="square" lIns="0" tIns="0" rIns="0" bIns="0" rtlCol="0" anchor="ctr"/>
+          <a:lstStyle/>
+          <a:p>
+            <a:pPr algn="ctr" indent="0" marL="0">
+              <a:buNone/>
+            </a:pPr>
+            <a:r>
+              <a:rPr lang="en-US" sz="1100" b="1" dirty="0">
+                <a:solidFill>
+                  <a:schemeClr val="bg1"/>
+                </a:solidFill>
+              </a:rPr>
+              <a:t>BACKUP</a:t>
+            </a:r>
+            <a:endParaRPr lang="en-US" sz="1100" dirty="0"/>
+          </a:p>
+        </p:txBody>
+      </p:sp>
+      <p:sp>
+        <p:nvSpPr>
+          <p:cNvPr id="4" name="Label"/>
+          <p:cNvSpPr txBox="1"/>
+          <p:nvPr/>
+        </p:nvSpPr>
+        <p:spPr>
+          <a:xfrm>
+            <a:off x="548640" y="1280160"/>
+            <a:ext cx="2377440" cy="411480"/>
+          </a:xfrm>
+          <a:prstGeom prst="rect">
+            <a:avLst/>
+          </a:prstGeom>
+          <a:noFill/>
+          <a:ln/>
+        </p:spPr>
+        <p:txBody>
+          <a:bodyPr wrap="square" lIns="0" tIns="0" rIns="0" bIns="0" rtlCol="0" anchor="ctr"/>
+          <a:lstStyle/>
+          <a:p>
+            <a:pPr algn="l" indent="0" marL="0">
+              <a:buNone/>
+            </a:pPr>
+            <a:r>
+              <a:rPr lang="en-US" sz="1600" b="1" dirty="0">
+                <a:solidFill>
+                  <a:schemeClr val="tx2"/>
+                </a:solidFill>
+              </a:rPr>
+              <a:t>On a phone</a:t>
+            </a:r>
+            <a:endParaRPr lang="en-US" sz="1600" dirty="0"/>
+          </a:p>
+        </p:txBody>
+      </p:sp>
+      <p:sp>
+        <p:nvSpPr>
+          <p:cNvPr id="5" name="Phone email screenshot frame"/>
+          <p:cNvSpPr/>
+          <p:nvPr/>
+        </p:nvSpPr>
+        <p:spPr>
+          <a:xfrm>
+            <a:off x="502920" y="1737360"/>
+            <a:ext cx="1997483" cy="4160520"/>
+          </a:xfrm>
+          <a:prstGeom prst="roundRect">
+            <a:avLst>
+              <a:gd name="adj" fmla="val 2747"/>
+            </a:avLst>
+          </a:prstGeom>
+          <a:solidFill>
+            <a:schemeClr val="bg1"/>
+          </a:solidFill>
+          <a:ln w="12700">
+            <a:solidFill>
+              <a:schemeClr val="bg2"/>
+            </a:solidFill>
+            <a:prstDash val="solid"/>
+          </a:ln>
+          <a:effectLst>
+            <a:outerShdw sx="100000" sy="100000" kx="0" ky="0" algn="bl" rotWithShape="0" blurRad="101600" dist="25400" dir="5400000">
+              <a:srgbClr val="000000">
+                <a:alpha val="16000"/>
+              </a:srgbClr>
+            </a:outerShdw>
+          </a:effectLst>
+        </p:spPr>
+      </p:sp>
+      <p:pic>
+        <p:nvPicPr>
+          <p:cNvPr id="6" name="Phone email screenshot" descr="The morning summary email on a 390-pixel phone: To, Cc, subject and message filled in, with a full-width Open in Outlook button">    </p:cNvPr>
+          <p:cNvPicPr>
+            <a:picLocks noChangeAspect="1"/>
+          </p:cNvPicPr>
+          <p:nvPr/>
+        </p:nvPicPr>
+        <p:blipFill>
+          <a:blip r:embed="rId1"/>
+          <a:stretch>
+            <a:fillRect/>
+          </a:stretch>
+        </p:blipFill>
+        <p:spPr>
+          <a:xfrm>
+            <a:off x="548640" y="1783080"/>
+            <a:ext cx="1906043" cy="4069080"/>
+          </a:xfrm>
+          <a:prstGeom prst="rect">
+            <a:avLst/>
+          </a:prstGeom>
+        </p:spPr>
+      </p:pic>
+      <p:sp>
+        <p:nvSpPr>
+          <p:cNvPr id="7" name="Label"/>
+          <p:cNvSpPr txBox="1"/>
+          <p:nvPr/>
+        </p:nvSpPr>
+        <p:spPr>
+          <a:xfrm>
+            <a:off x="2820443" y="1280160"/>
+            <a:ext cx="3291840" cy="411480"/>
+          </a:xfrm>
+          <a:prstGeom prst="rect">
+            <a:avLst/>
+          </a:prstGeom>
+          <a:noFill/>
+          <a:ln/>
+        </p:spPr>
+        <p:txBody>
+          <a:bodyPr wrap="square" lIns="0" tIns="0" rIns="0" bIns="0" rtlCol="0" anchor="ctr"/>
+          <a:lstStyle/>
+          <a:p>
+            <a:pPr algn="l" indent="0" marL="0">
+              <a:buNone/>
+            </a:pPr>
+            <a:r>
+              <a:rPr lang="en-US" sz="1600" b="1" dirty="0">
+                <a:solidFill>
+                  <a:schemeClr val="tx2"/>
+                </a:solidFill>
+              </a:rPr>
+              <a:t>On a laptop</a:t>
+            </a:r>
+            <a:endParaRPr lang="en-US" sz="1600" dirty="0"/>
+          </a:p>
+        </p:txBody>
+      </p:sp>
+      <p:sp>
+        <p:nvSpPr>
+          <p:cNvPr id="8" name="Desktop email screenshot frame"/>
+          <p:cNvSpPr/>
+          <p:nvPr/>
+        </p:nvSpPr>
+        <p:spPr>
+          <a:xfrm>
+            <a:off x="2774723" y="1737360"/>
+            <a:ext cx="3708400" cy="4160520"/>
+          </a:xfrm>
+          <a:prstGeom prst="roundRect">
+            <a:avLst>
+              <a:gd name="adj" fmla="val 1479"/>
+            </a:avLst>
+          </a:prstGeom>
+          <a:solidFill>
+            <a:schemeClr val="bg1"/>
+          </a:solidFill>
+          <a:ln w="12700">
+            <a:solidFill>
+              <a:schemeClr val="bg2"/>
+            </a:solidFill>
+            <a:prstDash val="solid"/>
+          </a:ln>
+          <a:effectLst>
+            <a:outerShdw sx="100000" sy="100000" kx="0" ky="0" algn="bl" rotWithShape="0" blurRad="101600" dist="25400" dir="5400000">
+              <a:srgbClr val="000000">
+                <a:alpha val="16000"/>
+              </a:srgbClr>
+            </a:outerShdw>
+          </a:effectLst>
+        </p:spPr>
+      </p:sp>
+      <p:pic>
+        <p:nvPicPr>
+          <p:cNvPr id="9" name="Desktop email screenshot" descr="The morning summary email dialog on a laptop, with recipients filled in and an Open in Outlook button">    </p:cNvPr>
+          <p:cNvPicPr>
+            <a:picLocks noChangeAspect="1"/>
+          </p:cNvPicPr>
+          <p:nvPr/>
+        </p:nvPicPr>
+        <p:blipFill>
+          <a:blip r:embed="rId2"/>
+          <a:stretch>
+            <a:fillRect/>
+          </a:stretch>
+        </p:blipFill>
+        <p:spPr>
+          <a:xfrm>
+            <a:off x="2820443" y="1783080"/>
+            <a:ext cx="3616960" cy="4069080"/>
+          </a:xfrm>
+          <a:prstGeom prst="rect">
+            <a:avLst/>
+          </a:prstGeom>
+        </p:spPr>
+      </p:pic>
+      <p:sp>
+        <p:nvSpPr>
+          <p:cNvPr id="10" name="Readiness points"/>
+          <p:cNvSpPr txBox="1"/>
+          <p:nvPr/>
+        </p:nvSpPr>
+        <p:spPr>
+          <a:xfrm>
+            <a:off x="6848883" y="1325880"/>
+            <a:ext cx="4791429" cy="3566160"/>
+          </a:xfrm>
+          <a:prstGeom prst="rect">
+            <a:avLst/>
+          </a:prstGeom>
+          <a:noFill/>
+          <a:ln/>
+        </p:spPr>
+        <p:txBody>
+          <a:bodyPr wrap="square" lIns="0" tIns="0" rIns="0" bIns="0" rtlCol="0" anchor="t"/>
+          <a:lstStyle/>
+          <a:p>
+            <a:pPr algn="l" indent="0" marL="0">
+              <a:spcAft>
+                <a:spcPts val="900"/>
+              </a:spcAft>
+              <a:buNone/>
+            </a:pPr>
+            <a:r>
+              <a:rPr lang="en-US" sz="1500" b="1" dirty="0">
+                <a:solidFill>
+                  <a:schemeClr val="tx2"/>
+                </a:solidFill>
+              </a:rPr>
+              <a:t>Morning email</a:t>
+            </a:r>
+            <a:endParaRPr lang="en-US" sz="1500" dirty="0"/>
+          </a:p>
+          <a:p>
+            <a:pPr algn="l" indent="0" marL="0">
+              <a:spcAft>
+                <a:spcPts val="900"/>
+              </a:spcAft>
+              <a:buNone/>
+            </a:pPr>
+            <a:r>
+              <a:rPr lang="en-US" sz="1250" dirty="0">
+                <a:solidFill>
+                  <a:schemeClr val="tx1"/>
+                </a:solidFill>
+              </a:rPr>
+              <a:t>Written from the 07:00 briefing; recipients carried over from the last one. Open in Outlook: a filled-in Outlook window, the manager presses Send. One-click sending needs a one-time Microsoft app registration (send-only permission).</a:t>
+            </a:r>
+            <a:endParaRPr lang="en-US" sz="1500" dirty="0"/>
+          </a:p>
+          <a:p>
+            <a:pPr algn="l" indent="0" marL="0">
+              <a:spcAft>
+                <a:spcPts val="900"/>
+              </a:spcAft>
+              <a:buNone/>
+            </a:pPr>
+            <a:r>
+              <a:rPr lang="en-US" sz="1500" b="1" dirty="0">
+                <a:solidFill>
+                  <a:schemeClr val="tx2"/>
+                </a:solidFill>
+              </a:rPr>
+              <a:t>Phones</a:t>
+            </a:r>
+            <a:endParaRPr lang="en-US" sz="1500" dirty="0"/>
+          </a:p>
+          <a:p>
+            <a:pPr algn="l" indent="0" marL="0">
+              <a:spcAft>
+                <a:spcPts val="900"/>
+              </a:spcAft>
+              <a:buNone/>
+            </a:pPr>
+            <a:r>
+              <a:rPr lang="en-US" sz="1250" dirty="0">
+                <a:solidFill>
+                  <a:schemeClr val="tx1"/>
+                </a:solidFill>
+              </a:rPr>
+              <a:t>No page scrolls sideways from 320 to 390 px. The briefing page was 878 px wide on a 390 px phone; a new test found it, and it is fixed.</a:t>
+            </a:r>
+            <a:endParaRPr lang="en-US" sz="1500" dirty="0"/>
+          </a:p>
+          <a:p>
+            <a:pPr algn="l" indent="0" marL="0">
+              <a:spcAft>
+                <a:spcPts val="900"/>
+              </a:spcAft>
+              <a:buNone/>
+            </a:pPr>
+            <a:r>
+              <a:rPr lang="en-US" sz="1500" b="1" dirty="0">
+                <a:solidFill>
+                  <a:schemeClr val="tx2"/>
+                </a:solidFill>
+              </a:rPr>
+              <a:t>A shared link</a:t>
+            </a:r>
+            <a:endParaRPr lang="en-US" sz="1500" dirty="0"/>
+          </a:p>
+          <a:p>
+            <a:pPr algn="l" indent="0" marL="0">
+              <a:spcAft>
+                <a:spcPts val="900"/>
+              </a:spcAft>
+              <a:buNone/>
+            </a:pPr>
+            <a:r>
+              <a:rPr lang="en-US" sz="1250" dirty="0">
+                <a:solidFill>
+                  <a:schemeClr val="tx1"/>
+                </a:solidFill>
+              </a:rPr>
+              <a:t>At most 40 model questions a minute per visitor; a rejected API key now says so; cover photo 2.4 MB to 195 KB.</a:t>
+            </a:r>
+            <a:endParaRPr lang="en-US" sz="1500" dirty="0"/>
+          </a:p>
+        </p:txBody>
+      </p:sp>
+      <p:sp>
+        <p:nvSpPr>
+          <p:cNvPr id="11" name="Readiness box"/>
+          <p:cNvSpPr/>
+          <p:nvPr/>
+        </p:nvSpPr>
+        <p:spPr>
+          <a:xfrm>
+            <a:off x="6848883" y="4846320"/>
+            <a:ext cx="4791429" cy="1005840"/>
+          </a:xfrm>
+          <a:prstGeom prst="roundRect">
+            <a:avLst>
+              <a:gd name="adj" fmla="val 7273"/>
+            </a:avLst>
+          </a:prstGeom>
+          <a:solidFill>
+            <a:schemeClr val="tx2"/>
+          </a:solidFill>
+          <a:ln/>
+        </p:spPr>
+      </p:sp>
+      <p:sp>
+        <p:nvSpPr>
+          <p:cNvPr id="12" name="Readiness text"/>
+          <p:cNvSpPr txBox="1"/>
+          <p:nvPr/>
+        </p:nvSpPr>
+        <p:spPr>
+          <a:xfrm>
+            <a:off x="7031763" y="4846320"/>
+            <a:ext cx="4425669" cy="1005840"/>
+          </a:xfrm>
+          <a:prstGeom prst="rect">
+            <a:avLst/>
+          </a:prstGeom>
+          <a:noFill/>
+          <a:ln/>
+        </p:spPr>
+        <p:txBody>
+          <a:bodyPr wrap="square" lIns="0" tIns="0" rIns="0" bIns="0" rtlCol="0" anchor="ctr"/>
+          <a:lstStyle/>
+          <a:p>
+            <a:pPr algn="l" indent="0" marL="0">
+              <a:spcAft>
+                <a:spcPts val="400"/>
+              </a:spcAft>
+              <a:buNone/>
+            </a:pPr>
+            <a:r>
+              <a:rPr lang="en-US" sz="1250" b="1" dirty="0">
+                <a:solidFill>
+                  <a:schemeClr val="accent3"/>
+                </a:solidFill>
+              </a:rPr>
+              <a:t>Tested: </a:t>
+            </a:r>
+            <a:pPr algn="l" indent="0" marL="0">
+              <a:spcAft>
+                <a:spcPts val="400"/>
+              </a:spcAft>
+              <a:buNone/>
+            </a:pPr>
+            <a:r>
+              <a:rPr lang="en-US" sz="1250" dirty="0">
+                <a:solidFill>
+                  <a:schemeClr val="bg1"/>
+                </a:solidFill>
+              </a:rPr>
+              <a:t>198 and 136 tests pass on the merged code (pull request #4). </a:t>
+            </a:r>
+            <a:endParaRPr lang="en-US" sz="1250" dirty="0"/>
+          </a:p>
+          <a:p>
+            <a:pPr algn="l" indent="0" marL="0">
+              <a:spcAft>
+                <a:spcPts val="400"/>
+              </a:spcAft>
+              <a:buNone/>
+            </a:pPr>
+            <a:r>
+              <a:rPr lang="en-US" sz="1250" b="1" dirty="0">
+                <a:solidFill>
+                  <a:schemeClr val="accent3"/>
+                </a:solidFill>
+              </a:rPr>
+              <a:t>Not yet tried: </a:t>
+            </a:r>
+            <a:pPr algn="l" indent="0" marL="0">
+              <a:spcAft>
+                <a:spcPts val="400"/>
+              </a:spcAft>
+              <a:buNone/>
+            </a:pPr>
+            <a:r>
+              <a:rPr lang="en-US" sz="1250" dirty="0">
+                <a:solidFill>
+                  <a:schemeClr val="bg1"/>
+                </a:solidFill>
+              </a:rPr>
+              <a:t>a real Outlook window with a team account.</a:t>
+            </a:r>
+            <a:endParaRPr lang="en-US" sz="1250" dirty="0"/>
+          </a:p>
+        </p:txBody>
+      </p:sp>
+      <p:sp>
+        <p:nvSpPr>
+          <p:cNvPr id="13" name="Readiness pointer"/>
+          <p:cNvSpPr txBox="1"/>
+          <p:nvPr/>
+        </p:nvSpPr>
+        <p:spPr>
+          <a:xfrm>
+            <a:off x="548640" y="6053328"/>
+            <a:ext cx="11091672" cy="256032"/>
+          </a:xfrm>
+          <a:prstGeom prst="rect">
+            <a:avLst/>
+          </a:prstGeom>
+          <a:noFill/>
+          <a:ln/>
+        </p:spPr>
+        <p:txBody>
+          <a:bodyPr wrap="square" lIns="0" tIns="0" rIns="0" bIns="0" rtlCol="0" anchor="t"/>
+          <a:lstStyle/>
+          <a:p>
+            <a:pPr algn="l" indent="0" marL="0">
+              <a:buNone/>
+            </a:pPr>
+            <a:r>
+              <a:rPr lang="en-US" sz="1100" dirty="0">
+                <a:solidFill>
+                  <a:schemeClr val="accent5"/>
+                </a:solidFill>
+              </a:rPr>
+              <a:t>Setup and security: docs/outlook_setup.md.</a:t>
+            </a:r>
+            <a:endParaRPr lang="en-US" sz="1100" dirty="0"/>
+          </a:p>
+        </p:txBody>
+      </p:sp>
+      <p:sp>
+        <p:nvSpPr>
+          <p:cNvPr id="25" name="Slide Number Placeholder 0"/>
+          <p:cNvSpPr>
+            <a:spLocks noGrp="1"/>
+          </p:cNvSpPr>
+          <p:nvPr>
+            <p:ph type="sldNum" sz="quarter" idx="4294967295"/>
+          </p:nvPr>
+        </p:nvSpPr>
+        <p:spPr>
+          <a:xfrm>
+            <a:off x="11137392" y="6382512"/>
+            <a:ext cx="502920" cy="274320"/>
+          </a:xfrm>
+          <a:prstGeom prst="rect">
+            <a:avLst/>
+          </a:prstGeom>
+          <a:extLst>
+            <a:ext uri="{C572A759-6A51-4108-AA02-DFA0A04FC94B}">
+              <ma14:wrappingTextBoxFlag xmlns:ma14="http://schemas.microsoft.com/office/mac/drawingml/2011/main" val="0"/>
+            </a:ext>
+          </a:extLst>
+        </p:spPr>
+        <p:txBody>
+          <a:bodyPr/>
+          <a:lstStyle>
+            <a:lvl1pPr>
+              <a:defRPr sz="1000">
+                <a:solidFill>
+                  <a:schemeClr val="accent5"/>
+                </a:solidFill>
+              </a:defRPr>
+            </a:lvl1pPr>
+          </a:lstStyle>
+          <a:p>
+            <a:pPr algn="r"/>
+            <a:fld id="{F7021451-1387-4CA6-816F-3879F97B5CBC}" type="slidenum">
+              <a:rPr b="0" lang="en-US"/>
+              <a:t>14</a:t>
             </a:fld>
             <a:endParaRPr lang="en-US"/>
           </a:p>
@@ -7783,7 +9222,7 @@
                   <a:schemeClr val="bg1"/>
                 </a:solidFill>
               </a:rPr>
-              <a:t>Code does the arithmetic and the refusals. The demo runs the same tools with rules instead of a model; the live backend uses OpenAI and MySQL.</a:t>
+              <a:t>Code does the arithmetic and the refusals. The demo runs the same tools with rules instead of a model; the live backend uses OpenAI and MySQL on Tencent CloudBase (next slide).</a:t>
             </a:r>
             <a:endParaRPr lang="en-US" sz="1400" dirty="0"/>
           </a:p>
@@ -8472,38 +9911,22 @@
                   <a:schemeClr val="tx2"/>
                 </a:solidFill>
               </a:rPr>
-              <a:t>Measured so far: 24 of 36 right on the first try</a:t>
+              <a:t>Live on the cloud, in the manager's pocket</a:t>
             </a:r>
             <a:endParaRPr lang="en-US" sz="3200" dirty="0"/>
           </a:p>
         </p:txBody>
       </p:sp>
-      <p:graphicFrame>
-        <p:nvGraphicFramePr>
-          <p:cNvPr id="3" name="Chart 0" descr=""/>
-          <p:cNvGraphicFramePr/>
-          <p:nvPr/>
-        </p:nvGraphicFramePr>
-        <p:xfrm>
-          <a:off x="548640" y="1325880"/>
-          <a:ext cx="6126480" cy="4023360"/>
-        </p:xfrm>
-        <a:graphic xmlns:a="http://schemas.openxmlformats.org/drawingml/2006/main">
-          <a:graphicData uri="http://schemas.openxmlformats.org/drawingml/2006/chart">
-            <c:chart xmlns:c="http://schemas.openxmlformats.org/drawingml/2006/chart" r:id="rId1"/>
-          </a:graphicData>
-        </a:graphic>
-      </p:graphicFrame>
-      <p:sp>
-        <p:nvSpPr>
-          <p:cNvPr id="4" name="Stat 24 / 36"/>
+      <p:sp>
+        <p:nvSpPr>
+          <p:cNvPr id="3" name="Label"/>
           <p:cNvSpPr txBox="1"/>
           <p:nvPr/>
         </p:nvSpPr>
         <p:spPr>
           <a:xfrm>
-            <a:off x="7040880" y="1325880"/>
-            <a:ext cx="2011680" cy="822960"/>
+            <a:off x="548640" y="1261872"/>
+            <a:ext cx="1880262" cy="365760"/>
           </a:xfrm>
           <a:prstGeom prst="rect">
             <a:avLst/>
@@ -8515,34 +9938,89 @@
           <a:bodyPr wrap="square" lIns="0" tIns="0" rIns="0" bIns="0" rtlCol="0" anchor="ctr"/>
           <a:lstStyle/>
           <a:p>
-            <a:pPr algn="l" indent="0" marL="0">
-              <a:buNone/>
-            </a:pPr>
-            <a:r>
-              <a:rPr lang="en-US" sz="3800" b="1" dirty="0">
-                <a:solidFill>
-                  <a:schemeClr val="accent1"/>
-                </a:solidFill>
-                <a:latin typeface="Cambria" pitchFamily="34" charset="0"/>
-                <a:ea typeface="Cambria" pitchFamily="34" charset="-122"/>
-                <a:cs typeface="Cambria" pitchFamily="34" charset="-120"/>
-              </a:rPr>
-              <a:t>24 / 36</a:t>
-            </a:r>
-            <a:endParaRPr lang="en-US" sz="3800" dirty="0"/>
-          </a:p>
-        </p:txBody>
-      </p:sp>
-      <p:sp>
-        <p:nvSpPr>
-          <p:cNvPr id="5" name="Stat caption 1"/>
+            <a:pPr algn="ctr" indent="0" marL="0">
+              <a:buNone/>
+            </a:pPr>
+            <a:r>
+              <a:rPr lang="en-US" sz="1500" b="1" dirty="0">
+                <a:solidFill>
+                  <a:schemeClr val="tx2"/>
+                </a:solidFill>
+              </a:rPr>
+              <a:t>Dashboard</a:t>
+            </a:r>
+            <a:endParaRPr lang="en-US" sz="1500" dirty="0"/>
+          </a:p>
+        </p:txBody>
+      </p:sp>
+      <p:sp>
+        <p:nvSpPr>
+          <p:cNvPr id="4" name="Phone Dashboard frame"/>
+          <p:cNvSpPr/>
+          <p:nvPr/>
+        </p:nvSpPr>
+        <p:spPr>
+          <a:xfrm>
+            <a:off x="502920" y="1691640"/>
+            <a:ext cx="1971702" cy="4160520"/>
+          </a:xfrm>
+          <a:prstGeom prst="roundRect">
+            <a:avLst>
+              <a:gd name="adj" fmla="val 2783"/>
+            </a:avLst>
+          </a:prstGeom>
+          <a:solidFill>
+            <a:schemeClr val="bg1"/>
+          </a:solidFill>
+          <a:ln w="12700">
+            <a:solidFill>
+              <a:schemeClr val="bg2"/>
+            </a:solidFill>
+            <a:prstDash val="solid"/>
+          </a:ln>
+          <a:effectLst>
+            <a:outerShdw sx="100000" sy="100000" kx="0" ky="0" algn="bl" rotWithShape="0" blurRad="101600" dist="25400" dir="5400000">
+              <a:srgbClr val="000000">
+                <a:alpha val="16000"/>
+              </a:srgbClr>
+            </a:outerShdw>
+          </a:effectLst>
+        </p:spPr>
+      </p:sp>
+      <p:pic>
+        <p:nvPicPr>
+          <p:cNvPr id="5" name="Phone Dashboard" descr="The team's dashboard on a 390-pixel phone: in-progress, overdue and due-today cards">    </p:cNvPr>
+          <p:cNvPicPr>
+            <a:picLocks noChangeAspect="1"/>
+          </p:cNvPicPr>
+          <p:nvPr/>
+        </p:nvPicPr>
+        <p:blipFill>
+          <a:blip r:embed="rId1"/>
+          <a:stretch>
+            <a:fillRect/>
+          </a:stretch>
+        </p:blipFill>
+        <p:spPr>
+          <a:xfrm>
+            <a:off x="548640" y="1737360"/>
+            <a:ext cx="1880262" cy="4069080"/>
+          </a:xfrm>
+          <a:prstGeom prst="rect">
+            <a:avLst/>
+          </a:prstGeom>
+        </p:spPr>
+      </p:pic>
+      <p:sp>
+        <p:nvSpPr>
+          <p:cNvPr id="6" name="Label"/>
           <p:cNvSpPr txBox="1"/>
           <p:nvPr/>
         </p:nvSpPr>
         <p:spPr>
           <a:xfrm>
-            <a:off x="9098280" y="1325880"/>
-            <a:ext cx="2560320" cy="822960"/>
+            <a:off x="2630070" y="1261872"/>
+            <a:ext cx="1880262" cy="365760"/>
           </a:xfrm>
           <a:prstGeom prst="rect">
             <a:avLst/>
@@ -8554,31 +10032,89 @@
           <a:bodyPr wrap="square" lIns="0" tIns="0" rIns="0" bIns="0" rtlCol="0" anchor="ctr"/>
           <a:lstStyle/>
           <a:p>
-            <a:pPr algn="l" indent="0" marL="0">
-              <a:buNone/>
-            </a:pPr>
-            <a:r>
-              <a:rPr lang="en-US" sz="1400" dirty="0">
-                <a:solidFill>
-                  <a:schemeClr val="tx1"/>
-                </a:solidFill>
-              </a:rPr>
-              <a:t>first pass, nothing fixed yet (67%): the honest figure</a:t>
-            </a:r>
-            <a:endParaRPr lang="en-US" sz="1400" dirty="0"/>
-          </a:p>
-        </p:txBody>
-      </p:sp>
-      <p:sp>
-        <p:nvSpPr>
-          <p:cNvPr id="6" name="Stat 18 / 21"/>
+            <a:pPr algn="ctr" indent="0" marL="0">
+              <a:buNone/>
+            </a:pPr>
+            <a:r>
+              <a:rPr lang="en-US" sz="1500" b="1" dirty="0">
+                <a:solidFill>
+                  <a:schemeClr val="tx2"/>
+                </a:solidFill>
+              </a:rPr>
+              <a:t>07:00 briefing</a:t>
+            </a:r>
+            <a:endParaRPr lang="en-US" sz="1500" dirty="0"/>
+          </a:p>
+        </p:txBody>
+      </p:sp>
+      <p:sp>
+        <p:nvSpPr>
+          <p:cNvPr id="7" name="Phone 07:00 briefing frame"/>
+          <p:cNvSpPr/>
+          <p:nvPr/>
+        </p:nvSpPr>
+        <p:spPr>
+          <a:xfrm>
+            <a:off x="2584350" y="1691640"/>
+            <a:ext cx="1971702" cy="4160520"/>
+          </a:xfrm>
+          <a:prstGeom prst="roundRect">
+            <a:avLst>
+              <a:gd name="adj" fmla="val 2783"/>
+            </a:avLst>
+          </a:prstGeom>
+          <a:solidFill>
+            <a:schemeClr val="bg1"/>
+          </a:solidFill>
+          <a:ln w="12700">
+            <a:solidFill>
+              <a:schemeClr val="bg2"/>
+            </a:solidFill>
+            <a:prstDash val="solid"/>
+          </a:ln>
+          <a:effectLst>
+            <a:outerShdw sx="100000" sy="100000" kx="0" ky="0" algn="bl" rotWithShape="0" blurRad="101600" dist="25400" dir="5400000">
+              <a:srgbClr val="000000">
+                <a:alpha val="16000"/>
+              </a:srgbClr>
+            </a:outerShdw>
+          </a:effectLst>
+        </p:spPr>
+      </p:sp>
+      <p:pic>
+        <p:nvPicPr>
+          <p:cNvPr id="8" name="Phone 07:00 briefing" descr="The morning briefing on a phone: three-line summary and order health">    </p:cNvPr>
+          <p:cNvPicPr>
+            <a:picLocks noChangeAspect="1"/>
+          </p:cNvPicPr>
+          <p:nvPr/>
+        </p:nvPicPr>
+        <p:blipFill>
+          <a:blip r:embed="rId2"/>
+          <a:stretch>
+            <a:fillRect/>
+          </a:stretch>
+        </p:blipFill>
+        <p:spPr>
+          <a:xfrm>
+            <a:off x="2630070" y="1737360"/>
+            <a:ext cx="1880262" cy="4069080"/>
+          </a:xfrm>
+          <a:prstGeom prst="rect">
+            <a:avLst/>
+          </a:prstGeom>
+        </p:spPr>
+      </p:pic>
+      <p:sp>
+        <p:nvSpPr>
+          <p:cNvPr id="9" name="Label"/>
           <p:cNvSpPr txBox="1"/>
           <p:nvPr/>
         </p:nvSpPr>
         <p:spPr>
           <a:xfrm>
-            <a:off x="7040880" y="2240280"/>
-            <a:ext cx="2011680" cy="822960"/>
+            <a:off x="4711500" y="1261872"/>
+            <a:ext cx="1880262" cy="365760"/>
           </a:xfrm>
           <a:prstGeom prst="rect">
             <a:avLst/>
@@ -8590,34 +10126,89 @@
           <a:bodyPr wrap="square" lIns="0" tIns="0" rIns="0" bIns="0" rtlCol="0" anchor="ctr"/>
           <a:lstStyle/>
           <a:p>
-            <a:pPr algn="l" indent="0" marL="0">
-              <a:buNone/>
-            </a:pPr>
-            <a:r>
-              <a:rPr lang="en-US" sz="3800" b="1" dirty="0">
-                <a:solidFill>
-                  <a:schemeClr val="accent1"/>
-                </a:solidFill>
-                <a:latin typeface="Cambria" pitchFamily="34" charset="0"/>
-                <a:ea typeface="Cambria" pitchFamily="34" charset="-122"/>
-                <a:cs typeface="Cambria" pitchFamily="34" charset="-120"/>
-              </a:rPr>
-              <a:t>18 / 21</a:t>
-            </a:r>
-            <a:endParaRPr lang="en-US" sz="3800" dirty="0"/>
-          </a:p>
-        </p:txBody>
-      </p:sp>
-      <p:sp>
-        <p:nvSpPr>
-          <p:cNvPr id="7" name="Stat caption 2"/>
+            <a:pPr algn="ctr" indent="0" marL="0">
+              <a:buNone/>
+            </a:pPr>
+            <a:r>
+              <a:rPr lang="en-US" sz="1500" b="1" dirty="0">
+                <a:solidFill>
+                  <a:schemeClr val="tx2"/>
+                </a:solidFill>
+              </a:rPr>
+              <a:t>Chat</a:t>
+            </a:r>
+            <a:endParaRPr lang="en-US" sz="1500" dirty="0"/>
+          </a:p>
+        </p:txBody>
+      </p:sp>
+      <p:sp>
+        <p:nvSpPr>
+          <p:cNvPr id="10" name="Phone Chat frame"/>
+          <p:cNvSpPr/>
+          <p:nvPr/>
+        </p:nvSpPr>
+        <p:spPr>
+          <a:xfrm>
+            <a:off x="4665780" y="1691640"/>
+            <a:ext cx="1971702" cy="4160520"/>
+          </a:xfrm>
+          <a:prstGeom prst="roundRect">
+            <a:avLst>
+              <a:gd name="adj" fmla="val 2783"/>
+            </a:avLst>
+          </a:prstGeom>
+          <a:solidFill>
+            <a:schemeClr val="bg1"/>
+          </a:solidFill>
+          <a:ln w="12700">
+            <a:solidFill>
+              <a:schemeClr val="bg2"/>
+            </a:solidFill>
+            <a:prstDash val="solid"/>
+          </a:ln>
+          <a:effectLst>
+            <a:outerShdw sx="100000" sy="100000" kx="0" ky="0" algn="bl" rotWithShape="0" blurRad="101600" dist="25400" dir="5400000">
+              <a:srgbClr val="000000">
+                <a:alpha val="16000"/>
+              </a:srgbClr>
+            </a:outerShdw>
+          </a:effectLst>
+        </p:spPr>
+      </p:sp>
+      <p:pic>
+        <p:nvPicPr>
+          <p:cNvPr id="11" name="Phone Chat" descr="The chat on a phone: asks which of six TrendCart orders is meant">    </p:cNvPr>
+          <p:cNvPicPr>
+            <a:picLocks noChangeAspect="1"/>
+          </p:cNvPicPr>
+          <p:nvPr/>
+        </p:nvPicPr>
+        <p:blipFill>
+          <a:blip r:embed="rId3"/>
+          <a:stretch>
+            <a:fillRect/>
+          </a:stretch>
+        </p:blipFill>
+        <p:spPr>
+          <a:xfrm>
+            <a:off x="4711500" y="1737360"/>
+            <a:ext cx="1880262" cy="4069080"/>
+          </a:xfrm>
+          <a:prstGeom prst="rect">
+            <a:avLst/>
+          </a:prstGeom>
+        </p:spPr>
+      </p:pic>
+      <p:sp>
+        <p:nvSpPr>
+          <p:cNvPr id="12" name="Cloud heading"/>
           <p:cNvSpPr txBox="1"/>
           <p:nvPr/>
         </p:nvSpPr>
         <p:spPr>
           <a:xfrm>
-            <a:off x="9098280" y="2240280"/>
-            <a:ext cx="2560320" cy="822960"/>
+            <a:off x="7021530" y="1261872"/>
+            <a:ext cx="4618782" cy="365760"/>
           </a:xfrm>
           <a:prstGeom prst="rect">
             <a:avLst/>
@@ -8633,27 +10224,98 @@
               <a:buNone/>
             </a:pPr>
             <a:r>
-              <a:rPr lang="en-US" sz="1400" dirty="0">
-                <a:solidFill>
-                  <a:schemeClr val="tx1"/>
-                </a:solidFill>
-              </a:rPr>
-              <a:t>held-out questions with new wording (86%)</a:t>
-            </a:r>
-            <a:endParaRPr lang="en-US" sz="1400" dirty="0"/>
-          </a:p>
-        </p:txBody>
-      </p:sp>
-      <p:sp>
-        <p:nvSpPr>
-          <p:cNvPr id="8" name="Stat 10 / 16"/>
+              <a:rPr lang="en-US" sz="1200" b="1" spc="100" kern="0" dirty="0">
+                <a:solidFill>
+                  <a:schemeClr val="accent5"/>
+                </a:solidFill>
+              </a:rPr>
+              <a:t>TENCENT CLOUDBASE · SINGAPORE</a:t>
+            </a:r>
+            <a:endParaRPr lang="en-US" sz="1200" dirty="0"/>
+          </a:p>
+        </p:txBody>
+      </p:sp>
+      <p:sp>
+        <p:nvSpPr>
+          <p:cNvPr id="13" name="Cloud step 1"/>
+          <p:cNvSpPr/>
+          <p:nvPr/>
+        </p:nvSpPr>
+        <p:spPr>
+          <a:xfrm>
+            <a:off x="7021530" y="1737360"/>
+            <a:ext cx="4618782" cy="676656"/>
+          </a:xfrm>
+          <a:prstGeom prst="roundRect">
+            <a:avLst>
+              <a:gd name="adj" fmla="val 10811"/>
+            </a:avLst>
+          </a:prstGeom>
+          <a:solidFill>
+            <a:schemeClr val="bg2"/>
+          </a:solidFill>
+          <a:ln/>
+        </p:spPr>
+      </p:sp>
+      <p:sp>
+        <p:nvSpPr>
+          <p:cNvPr id="14" name="Cloud icon disc 1"/>
+          <p:cNvSpPr/>
+          <p:nvPr/>
+        </p:nvSpPr>
+        <p:spPr>
+          <a:xfrm>
+            <a:off x="7149546" y="1874520"/>
+            <a:ext cx="402336" cy="402336"/>
+          </a:xfrm>
+          <a:prstGeom prst="ellipse">
+            <a:avLst/>
+          </a:prstGeom>
+          <a:solidFill>
+            <a:schemeClr val="accent2"/>
+          </a:solidFill>
+          <a:ln w="6350">
+            <a:solidFill>
+              <a:schemeClr val="accent2"/>
+            </a:solidFill>
+            <a:prstDash val="solid"/>
+          </a:ln>
+        </p:spPr>
+      </p:sp>
+      <p:pic>
+        <p:nvPicPr>
+          <p:cNvPr id="15" name="Image 3" descr="Any phone, tablet or laptop icon">    </p:cNvPr>
+          <p:cNvPicPr>
+            <a:picLocks noChangeAspect="1"/>
+          </p:cNvPicPr>
+          <p:nvPr/>
+        </p:nvPicPr>
+        <p:blipFill>
+          <a:blip r:embed="rId4"/>
+          <a:stretch>
+            <a:fillRect/>
+          </a:stretch>
+        </p:blipFill>
+        <p:spPr>
+          <a:xfrm>
+            <a:off x="7250130" y="1975104"/>
+            <a:ext cx="201168" cy="201168"/>
+          </a:xfrm>
+          <a:prstGeom prst="rect">
+            <a:avLst/>
+          </a:prstGeom>
+        </p:spPr>
+      </p:pic>
+      <p:sp>
+        <p:nvSpPr>
+          <p:cNvPr id="16" name="Cloud step text 1"/>
           <p:cNvSpPr txBox="1"/>
           <p:nvPr/>
         </p:nvSpPr>
         <p:spPr>
           <a:xfrm>
-            <a:off x="7040880" y="3154680"/>
-            <a:ext cx="2011680" cy="822960"/>
+            <a:off x="7661610" y="1737360"/>
+            <a:ext cx="3887262" cy="676656"/>
           </a:xfrm>
           <a:prstGeom prst="rect">
             <a:avLst/>
@@ -8669,30 +10331,136 @@
               <a:buNone/>
             </a:pPr>
             <a:r>
-              <a:rPr lang="en-US" sz="3800" b="1" dirty="0">
-                <a:solidFill>
-                  <a:schemeClr val="accent4"/>
-                </a:solidFill>
-                <a:latin typeface="Cambria" pitchFamily="34" charset="0"/>
-                <a:ea typeface="Cambria" pitchFamily="34" charset="-122"/>
-                <a:cs typeface="Cambria" pitchFamily="34" charset="-120"/>
-              </a:rPr>
-              <a:t>10 / 16</a:t>
-            </a:r>
-            <a:endParaRPr lang="en-US" sz="3800" dirty="0"/>
-          </a:p>
-        </p:txBody>
-      </p:sp>
-      <p:sp>
-        <p:nvSpPr>
-          <p:cNvPr id="9" name="Stat caption 3"/>
+              <a:rPr lang="en-US" sz="1350" b="1" dirty="0">
+                <a:solidFill>
+                  <a:schemeClr val="tx2"/>
+                </a:solidFill>
+              </a:rPr>
+              <a:t>Any phone, tablet or laptop</a:t>
+            </a:r>
+            <a:endParaRPr lang="en-US" sz="1350" dirty="0"/>
+          </a:p>
+          <a:p>
+            <a:pPr algn="l" indent="0" marL="0">
+              <a:buNone/>
+            </a:pPr>
+            <a:r>
+              <a:rPr lang="en-US" sz="1150" dirty="0">
+                <a:solidFill>
+                  <a:schemeClr val="tx1"/>
+                </a:solidFill>
+              </a:rPr>
+              <a:t>a web link: nothing to install</a:t>
+            </a:r>
+            <a:endParaRPr lang="en-US" sz="1350" dirty="0"/>
+          </a:p>
+        </p:txBody>
+      </p:sp>
+      <p:sp>
+        <p:nvSpPr>
+          <p:cNvPr id="17" name="Cloud arrow 1"/>
+          <p:cNvSpPr/>
+          <p:nvPr/>
+        </p:nvSpPr>
+        <p:spPr>
+          <a:xfrm>
+            <a:off x="7350714" y="2441448"/>
+            <a:ext cx="0" cy="182880"/>
+          </a:xfrm>
+          <a:prstGeom prst="line">
+            <a:avLst/>
+          </a:prstGeom>
+          <a:noFill/>
+          <a:ln w="25400">
+            <a:solidFill>
+              <a:schemeClr val="accent5"/>
+            </a:solidFill>
+            <a:prstDash val="solid"/>
+            <a:tailEnd type="triangle"/>
+          </a:ln>
+        </p:spPr>
+      </p:sp>
+      <p:sp>
+        <p:nvSpPr>
+          <p:cNvPr id="18" name="Cloud step 2"/>
+          <p:cNvSpPr/>
+          <p:nvPr/>
+        </p:nvSpPr>
+        <p:spPr>
+          <a:xfrm>
+            <a:off x="7021530" y="2651760"/>
+            <a:ext cx="4618782" cy="676656"/>
+          </a:xfrm>
+          <a:prstGeom prst="roundRect">
+            <a:avLst>
+              <a:gd name="adj" fmla="val 10811"/>
+            </a:avLst>
+          </a:prstGeom>
+          <a:solidFill>
+            <a:schemeClr val="bg2"/>
+          </a:solidFill>
+          <a:ln/>
+        </p:spPr>
+      </p:sp>
+      <p:sp>
+        <p:nvSpPr>
+          <p:cNvPr id="19" name="Cloud icon disc 2"/>
+          <p:cNvSpPr/>
+          <p:nvPr/>
+        </p:nvSpPr>
+        <p:spPr>
+          <a:xfrm>
+            <a:off x="7149546" y="2788920"/>
+            <a:ext cx="402336" cy="402336"/>
+          </a:xfrm>
+          <a:prstGeom prst="ellipse">
+            <a:avLst/>
+          </a:prstGeom>
+          <a:solidFill>
+            <a:schemeClr val="accent1"/>
+          </a:solidFill>
+          <a:ln w="6350">
+            <a:solidFill>
+              <a:schemeClr val="accent1"/>
+            </a:solidFill>
+            <a:prstDash val="solid"/>
+          </a:ln>
+        </p:spPr>
+      </p:sp>
+      <p:pic>
+        <p:nvPicPr>
+          <p:cNvPr id="20" name="Image 4" descr="Static website hosting icon">    </p:cNvPr>
+          <p:cNvPicPr>
+            <a:picLocks noChangeAspect="1"/>
+          </p:cNvPicPr>
+          <p:nvPr/>
+        </p:nvPicPr>
+        <p:blipFill>
+          <a:blip r:embed="rId5"/>
+          <a:stretch>
+            <a:fillRect/>
+          </a:stretch>
+        </p:blipFill>
+        <p:spPr>
+          <a:xfrm>
+            <a:off x="7250130" y="2889504"/>
+            <a:ext cx="201168" cy="201168"/>
+          </a:xfrm>
+          <a:prstGeom prst="rect">
+            <a:avLst/>
+          </a:prstGeom>
+        </p:spPr>
+      </p:pic>
+      <p:sp>
+        <p:nvSpPr>
+          <p:cNvPr id="21" name="Cloud step text 2"/>
           <p:cNvSpPr txBox="1"/>
           <p:nvPr/>
         </p:nvSpPr>
         <p:spPr>
           <a:xfrm>
-            <a:off x="9098280" y="3154680"/>
-            <a:ext cx="2560320" cy="822960"/>
+            <a:off x="7661610" y="2651760"/>
+            <a:ext cx="3887262" cy="676656"/>
           </a:xfrm>
           <a:prstGeom prst="rect">
             <a:avLst/>
@@ -8708,27 +10476,137 @@
               <a:buNone/>
             </a:pPr>
             <a:r>
-              <a:rPr lang="en-US" sz="1400" dirty="0">
+              <a:rPr lang="en-US" sz="1350" b="1" dirty="0">
+                <a:solidFill>
+                  <a:schemeClr val="tx2"/>
+                </a:solidFill>
+              </a:rPr>
+              <a:t>Static website hosting</a:t>
+            </a:r>
+            <a:endParaRPr lang="en-US" sz="1350" dirty="0"/>
+          </a:p>
+          <a:p>
+            <a:pPr algn="l" indent="0" marL="0">
+              <a:buNone/>
+            </a:pPr>
+            <a:r>
+              <a:rPr lang="en-US" sz="1150" dirty="0">
                 <a:solidFill>
                   <a:schemeClr val="tx1"/>
                 </a:solidFill>
               </a:rPr>
-              <a:t>bait questions resisted first time; every invented-figure bait held</a:t>
-            </a:r>
-            <a:endParaRPr lang="en-US" sz="1400" dirty="0"/>
-          </a:p>
-        </p:txBody>
-      </p:sp>
-      <p:sp>
-        <p:nvSpPr>
-          <p:cNvPr id="10" name="Stat 3 / 163"/>
+              <a:t>the app itself, served over HTTPS</a:t>
+            </a:r>
+            <a:endParaRPr lang="en-US" sz="1350" dirty="0"/>
+          </a:p>
+        </p:txBody>
+      </p:sp>
+      <p:sp>
+        <p:nvSpPr>
+          <p:cNvPr id="22" name="Cloud arrow 2"/>
+          <p:cNvSpPr/>
+          <p:nvPr/>
+        </p:nvSpPr>
+        <p:spPr>
+          <a:xfrm>
+            <a:off x="7350714" y="3355848"/>
+            <a:ext cx="0" cy="182880"/>
+          </a:xfrm>
+          <a:prstGeom prst="line">
+            <a:avLst/>
+          </a:prstGeom>
+          <a:noFill/>
+          <a:ln w="25400">
+            <a:solidFill>
+              <a:schemeClr val="accent5"/>
+            </a:solidFill>
+            <a:prstDash val="solid"/>
+            <a:headEnd type="triangle"/>
+            <a:tailEnd type="triangle"/>
+          </a:ln>
+        </p:spPr>
+      </p:sp>
+      <p:sp>
+        <p:nvSpPr>
+          <p:cNvPr id="23" name="Cloud step 3"/>
+          <p:cNvSpPr/>
+          <p:nvPr/>
+        </p:nvSpPr>
+        <p:spPr>
+          <a:xfrm>
+            <a:off x="7021530" y="3566160"/>
+            <a:ext cx="4618782" cy="676656"/>
+          </a:xfrm>
+          <a:prstGeom prst="roundRect">
+            <a:avLst>
+              <a:gd name="adj" fmla="val 10811"/>
+            </a:avLst>
+          </a:prstGeom>
+          <a:solidFill>
+            <a:schemeClr val="bg2"/>
+          </a:solidFill>
+          <a:ln/>
+        </p:spPr>
+      </p:sp>
+      <p:sp>
+        <p:nvSpPr>
+          <p:cNvPr id="24" name="Cloud icon disc 3"/>
+          <p:cNvSpPr/>
+          <p:nvPr/>
+        </p:nvSpPr>
+        <p:spPr>
+          <a:xfrm>
+            <a:off x="7149546" y="3703320"/>
+            <a:ext cx="402336" cy="402336"/>
+          </a:xfrm>
+          <a:prstGeom prst="ellipse">
+            <a:avLst/>
+          </a:prstGeom>
+          <a:solidFill>
+            <a:schemeClr val="accent1"/>
+          </a:solidFill>
+          <a:ln w="6350">
+            <a:solidFill>
+              <a:schemeClr val="accent1"/>
+            </a:solidFill>
+            <a:prstDash val="solid"/>
+          </a:ln>
+        </p:spPr>
+      </p:sp>
+      <p:pic>
+        <p:nvPicPr>
+          <p:cNvPr id="25" name="Image 5" descr="Cloud function (Python, FastAPI) icon">    </p:cNvPr>
+          <p:cNvPicPr>
+            <a:picLocks noChangeAspect="1"/>
+          </p:cNvPicPr>
+          <p:nvPr/>
+        </p:nvPicPr>
+        <p:blipFill>
+          <a:blip r:embed="rId6"/>
+          <a:stretch>
+            <a:fillRect/>
+          </a:stretch>
+        </p:blipFill>
+        <p:spPr>
+          <a:xfrm>
+            <a:off x="7250130" y="3803904"/>
+            <a:ext cx="201168" cy="201168"/>
+          </a:xfrm>
+          <a:prstGeom prst="rect">
+            <a:avLst/>
+          </a:prstGeom>
+        </p:spPr>
+      </p:pic>
+      <p:sp>
+        <p:nvSpPr>
+          <p:cNvPr id="26" name="Cloud step text 3"/>
           <p:cNvSpPr txBox="1"/>
           <p:nvPr/>
         </p:nvSpPr>
         <p:spPr>
           <a:xfrm>
-            <a:off x="7040880" y="4069080"/>
-            <a:ext cx="2011680" cy="822960"/>
+            <a:off x="7661610" y="3566160"/>
+            <a:ext cx="3887262" cy="676656"/>
           </a:xfrm>
           <a:prstGeom prst="rect">
             <a:avLst/>
@@ -8744,30 +10622,137 @@
               <a:buNone/>
             </a:pPr>
             <a:r>
-              <a:rPr lang="en-US" sz="3800" b="1" dirty="0">
-                <a:solidFill>
-                  <a:schemeClr val="accent4"/>
-                </a:solidFill>
-                <a:latin typeface="Cambria" pitchFamily="34" charset="0"/>
-                <a:ea typeface="Cambria" pitchFamily="34" charset="-122"/>
-                <a:cs typeface="Cambria" pitchFamily="34" charset="-120"/>
-              </a:rPr>
-              <a:t>3 / 163</a:t>
-            </a:r>
-            <a:endParaRPr lang="en-US" sz="3800" dirty="0"/>
-          </a:p>
-        </p:txBody>
-      </p:sp>
-      <p:sp>
-        <p:nvSpPr>
-          <p:cNvPr id="11" name="Stat caption 4"/>
+              <a:rPr lang="en-US" sz="1350" b="1" dirty="0">
+                <a:solidFill>
+                  <a:schemeClr val="tx2"/>
+                </a:solidFill>
+              </a:rPr>
+              <a:t>Cloud function (Python, FastAPI)</a:t>
+            </a:r>
+            <a:endParaRPr lang="en-US" sz="1350" dirty="0"/>
+          </a:p>
+          <a:p>
+            <a:pPr algn="l" indent="0" marL="0">
+              <a:buNone/>
+            </a:pPr>
+            <a:r>
+              <a:rPr lang="en-US" sz="1150" dirty="0">
+                <a:solidFill>
+                  <a:schemeClr val="tx1"/>
+                </a:solidFill>
+              </a:rPr>
+              <a:t>tools, chat, briefing, email drafts; holds the OpenAI key</a:t>
+            </a:r>
+            <a:endParaRPr lang="en-US" sz="1350" dirty="0"/>
+          </a:p>
+        </p:txBody>
+      </p:sp>
+      <p:sp>
+        <p:nvSpPr>
+          <p:cNvPr id="27" name="Cloud arrow 3"/>
+          <p:cNvSpPr/>
+          <p:nvPr/>
+        </p:nvSpPr>
+        <p:spPr>
+          <a:xfrm>
+            <a:off x="7350714" y="4270248"/>
+            <a:ext cx="0" cy="182880"/>
+          </a:xfrm>
+          <a:prstGeom prst="line">
+            <a:avLst/>
+          </a:prstGeom>
+          <a:noFill/>
+          <a:ln w="25400">
+            <a:solidFill>
+              <a:schemeClr val="accent5"/>
+            </a:solidFill>
+            <a:prstDash val="solid"/>
+            <a:headEnd type="triangle"/>
+            <a:tailEnd type="triangle"/>
+          </a:ln>
+        </p:spPr>
+      </p:sp>
+      <p:sp>
+        <p:nvSpPr>
+          <p:cNvPr id="28" name="Cloud step 4"/>
+          <p:cNvSpPr/>
+          <p:nvPr/>
+        </p:nvSpPr>
+        <p:spPr>
+          <a:xfrm>
+            <a:off x="7021530" y="4480560"/>
+            <a:ext cx="4618782" cy="676656"/>
+          </a:xfrm>
+          <a:prstGeom prst="roundRect">
+            <a:avLst>
+              <a:gd name="adj" fmla="val 10811"/>
+            </a:avLst>
+          </a:prstGeom>
+          <a:solidFill>
+            <a:schemeClr val="bg2"/>
+          </a:solidFill>
+          <a:ln/>
+        </p:spPr>
+      </p:sp>
+      <p:sp>
+        <p:nvSpPr>
+          <p:cNvPr id="29" name="Cloud icon disc 4"/>
+          <p:cNvSpPr/>
+          <p:nvPr/>
+        </p:nvSpPr>
+        <p:spPr>
+          <a:xfrm>
+            <a:off x="7149546" y="4617720"/>
+            <a:ext cx="402336" cy="402336"/>
+          </a:xfrm>
+          <a:prstGeom prst="ellipse">
+            <a:avLst/>
+          </a:prstGeom>
+          <a:solidFill>
+            <a:schemeClr val="accent1"/>
+          </a:solidFill>
+          <a:ln w="6350">
+            <a:solidFill>
+              <a:schemeClr val="accent1"/>
+            </a:solidFill>
+            <a:prstDash val="solid"/>
+          </a:ln>
+        </p:spPr>
+      </p:sp>
+      <p:pic>
+        <p:nvPicPr>
+          <p:cNvPr id="30" name="Image 6" descr="CloudBase MySQL icon">    </p:cNvPr>
+          <p:cNvPicPr>
+            <a:picLocks noChangeAspect="1"/>
+          </p:cNvPicPr>
+          <p:nvPr/>
+        </p:nvPicPr>
+        <p:blipFill>
+          <a:blip r:embed="rId7"/>
+          <a:stretch>
+            <a:fillRect/>
+          </a:stretch>
+        </p:blipFill>
+        <p:spPr>
+          <a:xfrm>
+            <a:off x="7250130" y="4718304"/>
+            <a:ext cx="201168" cy="201168"/>
+          </a:xfrm>
+          <a:prstGeom prst="rect">
+            <a:avLst/>
+          </a:prstGeom>
+        </p:spPr>
+      </p:pic>
+      <p:sp>
+        <p:nvSpPr>
+          <p:cNvPr id="31" name="Cloud step text 4"/>
           <p:cNvSpPr txBox="1"/>
           <p:nvPr/>
         </p:nvSpPr>
         <p:spPr>
           <a:xfrm>
-            <a:off x="9098280" y="4069080"/>
-            <a:ext cx="2560320" cy="822960"/>
+            <a:off x="7661610" y="4480560"/>
+            <a:ext cx="3887262" cy="676656"/>
           </a:xfrm>
           <a:prstGeom prst="rect">
             <a:avLst/>
@@ -8783,27 +10768,41 @@
               <a:buNone/>
             </a:pPr>
             <a:r>
-              <a:rPr lang="en-US" sz="1400" dirty="0">
+              <a:rPr lang="en-US" sz="1350" b="1" dirty="0">
+                <a:solidFill>
+                  <a:schemeClr val="tx2"/>
+                </a:solidFill>
+              </a:rPr>
+              <a:t>CloudBase MySQL</a:t>
+            </a:r>
+            <a:endParaRPr lang="en-US" sz="1350" dirty="0"/>
+          </a:p>
+          <a:p>
+            <a:pPr algn="l" indent="0" marL="0">
+              <a:buNone/>
+            </a:pPr>
+            <a:r>
+              <a:rPr lang="en-US" sz="1150" dirty="0">
                 <a:solidFill>
                   <a:schemeClr val="tx1"/>
                 </a:solidFill>
               </a:rPr>
-              <a:t>numbers not traced to a tool; read by hand, 1 was a real error</a:t>
-            </a:r>
-            <a:endParaRPr lang="en-US" sz="1400" dirty="0"/>
-          </a:p>
-        </p:txBody>
-      </p:sp>
-      <p:sp>
-        <p:nvSpPr>
-          <p:cNvPr id="12" name="Stats caption"/>
+              <a:t>orders, production log, briefings, drafts</a:t>
+            </a:r>
+            <a:endParaRPr lang="en-US" sz="1350" dirty="0"/>
+          </a:p>
+        </p:txBody>
+      </p:sp>
+      <p:sp>
+        <p:nvSpPr>
+          <p:cNvPr id="32" name="Token caption"/>
           <p:cNvSpPr txBox="1"/>
           <p:nvPr/>
         </p:nvSpPr>
         <p:spPr>
           <a:xfrm>
-            <a:off x="7040880" y="5029200"/>
-            <a:ext cx="4617720" cy="365760"/>
+            <a:off x="7570170" y="3346704"/>
+            <a:ext cx="4070142" cy="201168"/>
           </a:xfrm>
           <a:prstGeom prst="rect">
             <a:avLst/>
@@ -8812,38 +10811,142 @@
           <a:ln/>
         </p:spPr>
         <p:txBody>
-          <a:bodyPr wrap="square" lIns="0" tIns="0" rIns="0" bIns="0" rtlCol="0" anchor="t"/>
+          <a:bodyPr wrap="square" lIns="0" tIns="0" rIns="0" bIns="0" rtlCol="0" anchor="ctr"/>
           <a:lstStyle/>
           <a:p>
             <a:pPr algn="l" indent="0" marL="0">
               <a:buNone/>
             </a:pPr>
             <a:r>
-              <a:rPr lang="en-US" sz="1100" dirty="0">
+              <a:rPr lang="en-US" sz="950" i="1" dirty="0">
                 <a:solidFill>
                   <a:schemeClr val="accent5"/>
                 </a:solidFill>
               </a:rPr>
-              <a:t>Dashboard chat, no language model. 24 of 36 was first reported as 25: the invented-number check found a false pass.</a:t>
-            </a:r>
-            <a:endParaRPr lang="en-US" sz="1100" dirty="0"/>
-          </a:p>
-        </p:txBody>
-      </p:sp>
-      <p:sp>
-        <p:nvSpPr>
-          <p:cNvPr id="13" name="Banner"/>
+              <a:t>HTTPS + workspace access token</a:t>
+            </a:r>
+            <a:endParaRPr lang="en-US" sz="950" dirty="0"/>
+          </a:p>
+          <a:p>
+            <a:pPr algn="l" indent="0" marL="0">
+              <a:buNone/>
+            </a:pPr>
+            <a:endParaRPr lang="en-US" sz="950" dirty="0"/>
+          </a:p>
+        </p:txBody>
+      </p:sp>
+      <p:sp>
+        <p:nvSpPr>
+          <p:cNvPr id="33" name="Timer box"/>
           <p:cNvSpPr/>
           <p:nvPr/>
         </p:nvSpPr>
         <p:spPr>
           <a:xfrm>
-            <a:off x="548640" y="5532120"/>
-            <a:ext cx="11091672" cy="749808"/>
+            <a:off x="7021530" y="5266944"/>
+            <a:ext cx="4618782" cy="384048"/>
           </a:xfrm>
           <a:prstGeom prst="roundRect">
             <a:avLst>
-              <a:gd name="adj" fmla="val 9756"/>
+              <a:gd name="adj" fmla="val 19048"/>
+            </a:avLst>
+          </a:prstGeom>
+          <a:solidFill>
+            <a:schemeClr val="bg1"/>
+          </a:solidFill>
+          <a:ln w="15875">
+            <a:solidFill>
+              <a:schemeClr val="accent1"/>
+            </a:solidFill>
+            <a:prstDash val="dash"/>
+          </a:ln>
+        </p:spPr>
+      </p:sp>
+      <p:pic>
+        <p:nvPicPr>
+          <p:cNvPr id="34" name="Image 7" descr="Clock icon">    </p:cNvPr>
+          <p:cNvPicPr>
+            <a:picLocks noChangeAspect="1"/>
+          </p:cNvPicPr>
+          <p:nvPr/>
+        </p:nvPicPr>
+        <p:blipFill>
+          <a:blip r:embed="rId8"/>
+          <a:stretch>
+            <a:fillRect/>
+          </a:stretch>
+        </p:blipFill>
+        <p:spPr>
+          <a:xfrm>
+            <a:off x="7250130" y="5358384"/>
+            <a:ext cx="201168" cy="201168"/>
+          </a:xfrm>
+          <a:prstGeom prst="rect">
+            <a:avLst/>
+          </a:prstGeom>
+        </p:spPr>
+      </p:pic>
+      <p:sp>
+        <p:nvSpPr>
+          <p:cNvPr id="35" name="Timer text"/>
+          <p:cNvSpPr txBox="1"/>
+          <p:nvPr/>
+        </p:nvSpPr>
+        <p:spPr>
+          <a:xfrm>
+            <a:off x="7661610" y="5266944"/>
+            <a:ext cx="3887262" cy="384048"/>
+          </a:xfrm>
+          <a:prstGeom prst="rect">
+            <a:avLst/>
+          </a:prstGeom>
+          <a:noFill/>
+          <a:ln/>
+        </p:spPr>
+        <p:txBody>
+          <a:bodyPr wrap="square" lIns="0" tIns="0" rIns="0" bIns="0" rtlCol="0" anchor="ctr"/>
+          <a:lstStyle/>
+          <a:p>
+            <a:pPr algn="l" indent="0" marL="0">
+              <a:buNone/>
+            </a:pPr>
+            <a:r>
+              <a:rPr lang="en-US" sz="1150" b="1" dirty="0">
+                <a:solidFill>
+                  <a:schemeClr val="tx1"/>
+                </a:solidFill>
+              </a:rPr>
+              <a:t>Timer, 07:00 daily: </a:t>
+            </a:r>
+            <a:pPr algn="l" indent="0" marL="0">
+              <a:buNone/>
+            </a:pPr>
+            <a:r>
+              <a:rPr lang="en-US" sz="1150" dirty="0">
+                <a:solidFill>
+                  <a:schemeClr val="tx1"/>
+                </a:solidFill>
+              </a:rPr>
+              <a:t>writes the morning briefing</a:t>
+            </a:r>
+            <a:endParaRPr lang="en-US" sz="1150" dirty="0"/>
+          </a:p>
+        </p:txBody>
+      </p:sp>
+      <p:sp>
+        <p:nvSpPr>
+          <p:cNvPr id="36" name="Cloud banner"/>
+          <p:cNvSpPr/>
+          <p:nvPr/>
+        </p:nvSpPr>
+        <p:spPr>
+          <a:xfrm>
+            <a:off x="548640" y="5943600"/>
+            <a:ext cx="11091672" cy="384048"/>
+          </a:xfrm>
+          <a:prstGeom prst="roundRect">
+            <a:avLst>
+              <a:gd name="adj" fmla="val 19048"/>
             </a:avLst>
           </a:prstGeom>
           <a:solidFill>
@@ -8854,14 +10957,14 @@
       </p:sp>
       <p:sp>
         <p:nvSpPr>
-          <p:cNvPr id="14" name="Banner text"/>
+          <p:cNvPr id="37" name="Cloud banner text"/>
           <p:cNvSpPr txBox="1"/>
           <p:nvPr/>
         </p:nvSpPr>
         <p:spPr>
           <a:xfrm>
-            <a:off x="777240" y="5532120"/>
-            <a:ext cx="10698480" cy="749808"/>
+            <a:off x="731520" y="5943600"/>
+            <a:ext cx="10817352" cy="384048"/>
           </a:xfrm>
           <a:prstGeom prst="rect">
             <a:avLst/>
@@ -8877,25 +10980,47 @@
               <a:buNone/>
             </a:pPr>
             <a:r>
-              <a:rPr lang="en-US" sz="1400" b="1" dirty="0">
+              <a:rPr lang="en-US" sz="1200" b="1" dirty="0">
                 <a:solidFill>
                   <a:schemeClr val="accent3"/>
                 </a:solidFill>
               </a:rPr>
-              <a:t>Live backend (OpenAI model + MySQL): </a:t>
-            </a:r>
-            <a:pPr algn="l" indent="0" marL="0">
-              <a:buNone/>
-            </a:pPr>
-            <a:r>
-              <a:rPr lang="en-US" sz="1400" dirty="0">
+              <a:t>Checked 14 Oct: </a:t>
+            </a:r>
+            <a:pPr algn="l" indent="0" marL="0">
+              <a:buNone/>
+            </a:pPr>
+            <a:r>
+              <a:rPr lang="en-US" sz="1200" dirty="0">
                 <a:solidFill>
                   <a:schemeClr val="bg1"/>
                 </a:solidFill>
               </a:rPr>
-              <a:t>36 of 45 scripted turns passed on its first full batch (7 hit rate limits). Not yet run on these 36 questions: we will run it once and report that as first pass.</a:t>
-            </a:r>
-            <a:endParaRPr lang="en-US" sz="1400" dirty="0"/>
+              <a:t>the cloud backend answers, model switched on.  </a:t>
+            </a:r>
+            <a:pPr algn="l" indent="0" marL="0">
+              <a:buNone/>
+            </a:pPr>
+            <a:r>
+              <a:rPr lang="en-US" sz="1200" b="1" dirty="0">
+                <a:solidFill>
+                  <a:schemeClr val="accent3"/>
+                </a:solidFill>
+              </a:rPr>
+              <a:t>Phones: </a:t>
+            </a:r>
+            <a:pPr algn="l" indent="0" marL="0">
+              <a:buNone/>
+            </a:pPr>
+            <a:r>
+              <a:rPr lang="en-US" sz="1200" dirty="0">
+                <a:solidFill>
+                  <a:schemeClr val="bg1"/>
+                </a:solidFill>
+              </a:rPr>
+              <a:t>no page scrolls sideways at 320 to 390 px (tested).</a:t>
+            </a:r>
+            <a:endParaRPr lang="en-US" sz="1200" dirty="0"/>
           </a:p>
         </p:txBody>
       </p:sp>
@@ -9001,7 +11126,7 @@
                   <a:schemeClr val="tx2"/>
                 </a:solidFill>
               </a:rPr>
-              <a:t>Risk assessment: five risks and how we handle them</a:t>
+              <a:t>Measured so far: 24 of 36 right on the first try</a:t>
             </a:r>
             <a:endParaRPr lang="en-US" sz="3200" dirty="0"/>
           </a:p>
@@ -9009,7 +11134,536 @@
       </p:sp>
       <p:graphicFrame>
         <p:nvGraphicFramePr>
-          <p:cNvPr id="7" name="Risk table"/>
+          <p:cNvPr id="3" name="Chart 0" descr=""/>
+          <p:cNvGraphicFramePr/>
+          <p:nvPr/>
+        </p:nvGraphicFramePr>
+        <p:xfrm>
+          <a:off x="548640" y="1325880"/>
+          <a:ext cx="6126480" cy="4023360"/>
+        </p:xfrm>
+        <a:graphic xmlns:a="http://schemas.openxmlformats.org/drawingml/2006/main">
+          <a:graphicData uri="http://schemas.openxmlformats.org/drawingml/2006/chart">
+            <c:chart xmlns:c="http://schemas.openxmlformats.org/drawingml/2006/chart" r:id="rId1"/>
+          </a:graphicData>
+        </a:graphic>
+      </p:graphicFrame>
+      <p:sp>
+        <p:nvSpPr>
+          <p:cNvPr id="4" name="Stat 24 / 36"/>
+          <p:cNvSpPr txBox="1"/>
+          <p:nvPr/>
+        </p:nvSpPr>
+        <p:spPr>
+          <a:xfrm>
+            <a:off x="7040880" y="1325880"/>
+            <a:ext cx="2011680" cy="822960"/>
+          </a:xfrm>
+          <a:prstGeom prst="rect">
+            <a:avLst/>
+          </a:prstGeom>
+          <a:noFill/>
+          <a:ln/>
+        </p:spPr>
+        <p:txBody>
+          <a:bodyPr wrap="square" lIns="0" tIns="0" rIns="0" bIns="0" rtlCol="0" anchor="ctr"/>
+          <a:lstStyle/>
+          <a:p>
+            <a:pPr algn="l" indent="0" marL="0">
+              <a:buNone/>
+            </a:pPr>
+            <a:r>
+              <a:rPr lang="en-US" sz="3800" b="1" dirty="0">
+                <a:solidFill>
+                  <a:schemeClr val="accent1"/>
+                </a:solidFill>
+                <a:latin typeface="Cambria" pitchFamily="34" charset="0"/>
+                <a:ea typeface="Cambria" pitchFamily="34" charset="-122"/>
+                <a:cs typeface="Cambria" pitchFamily="34" charset="-120"/>
+              </a:rPr>
+              <a:t>24 / 36</a:t>
+            </a:r>
+            <a:endParaRPr lang="en-US" sz="3800" dirty="0"/>
+          </a:p>
+        </p:txBody>
+      </p:sp>
+      <p:sp>
+        <p:nvSpPr>
+          <p:cNvPr id="5" name="Stat caption 1"/>
+          <p:cNvSpPr txBox="1"/>
+          <p:nvPr/>
+        </p:nvSpPr>
+        <p:spPr>
+          <a:xfrm>
+            <a:off x="9098280" y="1325880"/>
+            <a:ext cx="2560320" cy="822960"/>
+          </a:xfrm>
+          <a:prstGeom prst="rect">
+            <a:avLst/>
+          </a:prstGeom>
+          <a:noFill/>
+          <a:ln/>
+        </p:spPr>
+        <p:txBody>
+          <a:bodyPr wrap="square" lIns="0" tIns="0" rIns="0" bIns="0" rtlCol="0" anchor="ctr"/>
+          <a:lstStyle/>
+          <a:p>
+            <a:pPr algn="l" indent="0" marL="0">
+              <a:buNone/>
+            </a:pPr>
+            <a:r>
+              <a:rPr lang="en-US" sz="1400" dirty="0">
+                <a:solidFill>
+                  <a:schemeClr val="tx1"/>
+                </a:solidFill>
+              </a:rPr>
+              <a:t>first pass, nothing fixed yet (67%): the honest figure</a:t>
+            </a:r>
+            <a:endParaRPr lang="en-US" sz="1400" dirty="0"/>
+          </a:p>
+        </p:txBody>
+      </p:sp>
+      <p:sp>
+        <p:nvSpPr>
+          <p:cNvPr id="6" name="Stat 18 / 21"/>
+          <p:cNvSpPr txBox="1"/>
+          <p:nvPr/>
+        </p:nvSpPr>
+        <p:spPr>
+          <a:xfrm>
+            <a:off x="7040880" y="2240280"/>
+            <a:ext cx="2011680" cy="822960"/>
+          </a:xfrm>
+          <a:prstGeom prst="rect">
+            <a:avLst/>
+          </a:prstGeom>
+          <a:noFill/>
+          <a:ln/>
+        </p:spPr>
+        <p:txBody>
+          <a:bodyPr wrap="square" lIns="0" tIns="0" rIns="0" bIns="0" rtlCol="0" anchor="ctr"/>
+          <a:lstStyle/>
+          <a:p>
+            <a:pPr algn="l" indent="0" marL="0">
+              <a:buNone/>
+            </a:pPr>
+            <a:r>
+              <a:rPr lang="en-US" sz="3800" b="1" dirty="0">
+                <a:solidFill>
+                  <a:schemeClr val="accent1"/>
+                </a:solidFill>
+                <a:latin typeface="Cambria" pitchFamily="34" charset="0"/>
+                <a:ea typeface="Cambria" pitchFamily="34" charset="-122"/>
+                <a:cs typeface="Cambria" pitchFamily="34" charset="-120"/>
+              </a:rPr>
+              <a:t>18 / 21</a:t>
+            </a:r>
+            <a:endParaRPr lang="en-US" sz="3800" dirty="0"/>
+          </a:p>
+        </p:txBody>
+      </p:sp>
+      <p:sp>
+        <p:nvSpPr>
+          <p:cNvPr id="7" name="Stat caption 2"/>
+          <p:cNvSpPr txBox="1"/>
+          <p:nvPr/>
+        </p:nvSpPr>
+        <p:spPr>
+          <a:xfrm>
+            <a:off x="9098280" y="2240280"/>
+            <a:ext cx="2560320" cy="822960"/>
+          </a:xfrm>
+          <a:prstGeom prst="rect">
+            <a:avLst/>
+          </a:prstGeom>
+          <a:noFill/>
+          <a:ln/>
+        </p:spPr>
+        <p:txBody>
+          <a:bodyPr wrap="square" lIns="0" tIns="0" rIns="0" bIns="0" rtlCol="0" anchor="ctr"/>
+          <a:lstStyle/>
+          <a:p>
+            <a:pPr algn="l" indent="0" marL="0">
+              <a:buNone/>
+            </a:pPr>
+            <a:r>
+              <a:rPr lang="en-US" sz="1400" dirty="0">
+                <a:solidFill>
+                  <a:schemeClr val="tx1"/>
+                </a:solidFill>
+              </a:rPr>
+              <a:t>held-out questions with new wording (86%)</a:t>
+            </a:r>
+            <a:endParaRPr lang="en-US" sz="1400" dirty="0"/>
+          </a:p>
+        </p:txBody>
+      </p:sp>
+      <p:sp>
+        <p:nvSpPr>
+          <p:cNvPr id="8" name="Stat 10 / 16"/>
+          <p:cNvSpPr txBox="1"/>
+          <p:nvPr/>
+        </p:nvSpPr>
+        <p:spPr>
+          <a:xfrm>
+            <a:off x="7040880" y="3154680"/>
+            <a:ext cx="2011680" cy="822960"/>
+          </a:xfrm>
+          <a:prstGeom prst="rect">
+            <a:avLst/>
+          </a:prstGeom>
+          <a:noFill/>
+          <a:ln/>
+        </p:spPr>
+        <p:txBody>
+          <a:bodyPr wrap="square" lIns="0" tIns="0" rIns="0" bIns="0" rtlCol="0" anchor="ctr"/>
+          <a:lstStyle/>
+          <a:p>
+            <a:pPr algn="l" indent="0" marL="0">
+              <a:buNone/>
+            </a:pPr>
+            <a:r>
+              <a:rPr lang="en-US" sz="3800" b="1" dirty="0">
+                <a:solidFill>
+                  <a:schemeClr val="accent4"/>
+                </a:solidFill>
+                <a:latin typeface="Cambria" pitchFamily="34" charset="0"/>
+                <a:ea typeface="Cambria" pitchFamily="34" charset="-122"/>
+                <a:cs typeface="Cambria" pitchFamily="34" charset="-120"/>
+              </a:rPr>
+              <a:t>10 / 16</a:t>
+            </a:r>
+            <a:endParaRPr lang="en-US" sz="3800" dirty="0"/>
+          </a:p>
+        </p:txBody>
+      </p:sp>
+      <p:sp>
+        <p:nvSpPr>
+          <p:cNvPr id="9" name="Stat caption 3"/>
+          <p:cNvSpPr txBox="1"/>
+          <p:nvPr/>
+        </p:nvSpPr>
+        <p:spPr>
+          <a:xfrm>
+            <a:off x="9098280" y="3154680"/>
+            <a:ext cx="2560320" cy="822960"/>
+          </a:xfrm>
+          <a:prstGeom prst="rect">
+            <a:avLst/>
+          </a:prstGeom>
+          <a:noFill/>
+          <a:ln/>
+        </p:spPr>
+        <p:txBody>
+          <a:bodyPr wrap="square" lIns="0" tIns="0" rIns="0" bIns="0" rtlCol="0" anchor="ctr"/>
+          <a:lstStyle/>
+          <a:p>
+            <a:pPr algn="l" indent="0" marL="0">
+              <a:buNone/>
+            </a:pPr>
+            <a:r>
+              <a:rPr lang="en-US" sz="1400" dirty="0">
+                <a:solidFill>
+                  <a:schemeClr val="tx1"/>
+                </a:solidFill>
+              </a:rPr>
+              <a:t>bait questions resisted first time; every invented-figure bait held</a:t>
+            </a:r>
+            <a:endParaRPr lang="en-US" sz="1400" dirty="0"/>
+          </a:p>
+        </p:txBody>
+      </p:sp>
+      <p:sp>
+        <p:nvSpPr>
+          <p:cNvPr id="10" name="Stat 3 / 163"/>
+          <p:cNvSpPr txBox="1"/>
+          <p:nvPr/>
+        </p:nvSpPr>
+        <p:spPr>
+          <a:xfrm>
+            <a:off x="7040880" y="4069080"/>
+            <a:ext cx="2011680" cy="822960"/>
+          </a:xfrm>
+          <a:prstGeom prst="rect">
+            <a:avLst/>
+          </a:prstGeom>
+          <a:noFill/>
+          <a:ln/>
+        </p:spPr>
+        <p:txBody>
+          <a:bodyPr wrap="square" lIns="0" tIns="0" rIns="0" bIns="0" rtlCol="0" anchor="ctr"/>
+          <a:lstStyle/>
+          <a:p>
+            <a:pPr algn="l" indent="0" marL="0">
+              <a:buNone/>
+            </a:pPr>
+            <a:r>
+              <a:rPr lang="en-US" sz="3800" b="1" dirty="0">
+                <a:solidFill>
+                  <a:schemeClr val="accent4"/>
+                </a:solidFill>
+                <a:latin typeface="Cambria" pitchFamily="34" charset="0"/>
+                <a:ea typeface="Cambria" pitchFamily="34" charset="-122"/>
+                <a:cs typeface="Cambria" pitchFamily="34" charset="-120"/>
+              </a:rPr>
+              <a:t>3 / 163</a:t>
+            </a:r>
+            <a:endParaRPr lang="en-US" sz="3800" dirty="0"/>
+          </a:p>
+        </p:txBody>
+      </p:sp>
+      <p:sp>
+        <p:nvSpPr>
+          <p:cNvPr id="11" name="Stat caption 4"/>
+          <p:cNvSpPr txBox="1"/>
+          <p:nvPr/>
+        </p:nvSpPr>
+        <p:spPr>
+          <a:xfrm>
+            <a:off x="9098280" y="4069080"/>
+            <a:ext cx="2560320" cy="822960"/>
+          </a:xfrm>
+          <a:prstGeom prst="rect">
+            <a:avLst/>
+          </a:prstGeom>
+          <a:noFill/>
+          <a:ln/>
+        </p:spPr>
+        <p:txBody>
+          <a:bodyPr wrap="square" lIns="0" tIns="0" rIns="0" bIns="0" rtlCol="0" anchor="ctr"/>
+          <a:lstStyle/>
+          <a:p>
+            <a:pPr algn="l" indent="0" marL="0">
+              <a:buNone/>
+            </a:pPr>
+            <a:r>
+              <a:rPr lang="en-US" sz="1400" dirty="0">
+                <a:solidFill>
+                  <a:schemeClr val="tx1"/>
+                </a:solidFill>
+              </a:rPr>
+              <a:t>numbers not traced to a tool; read by hand, 1 was a real error</a:t>
+            </a:r>
+            <a:endParaRPr lang="en-US" sz="1400" dirty="0"/>
+          </a:p>
+        </p:txBody>
+      </p:sp>
+      <p:sp>
+        <p:nvSpPr>
+          <p:cNvPr id="12" name="Stats caption"/>
+          <p:cNvSpPr txBox="1"/>
+          <p:nvPr/>
+        </p:nvSpPr>
+        <p:spPr>
+          <a:xfrm>
+            <a:off x="7040880" y="5029200"/>
+            <a:ext cx="4617720" cy="365760"/>
+          </a:xfrm>
+          <a:prstGeom prst="rect">
+            <a:avLst/>
+          </a:prstGeom>
+          <a:noFill/>
+          <a:ln/>
+        </p:spPr>
+        <p:txBody>
+          <a:bodyPr wrap="square" lIns="0" tIns="0" rIns="0" bIns="0" rtlCol="0" anchor="t"/>
+          <a:lstStyle/>
+          <a:p>
+            <a:pPr algn="l" indent="0" marL="0">
+              <a:buNone/>
+            </a:pPr>
+            <a:r>
+              <a:rPr lang="en-US" sz="1100" dirty="0">
+                <a:solidFill>
+                  <a:schemeClr val="accent5"/>
+                </a:solidFill>
+              </a:rPr>
+              <a:t>Dashboard chat, no language model. 24 of 36 was first reported as 25: the invented-number check found a false pass.</a:t>
+            </a:r>
+            <a:endParaRPr lang="en-US" sz="1100" dirty="0"/>
+          </a:p>
+        </p:txBody>
+      </p:sp>
+      <p:sp>
+        <p:nvSpPr>
+          <p:cNvPr id="13" name="Banner"/>
+          <p:cNvSpPr/>
+          <p:nvPr/>
+        </p:nvSpPr>
+        <p:spPr>
+          <a:xfrm>
+            <a:off x="548640" y="5532120"/>
+            <a:ext cx="11091672" cy="749808"/>
+          </a:xfrm>
+          <a:prstGeom prst="roundRect">
+            <a:avLst>
+              <a:gd name="adj" fmla="val 9756"/>
+            </a:avLst>
+          </a:prstGeom>
+          <a:solidFill>
+            <a:schemeClr val="tx2"/>
+          </a:solidFill>
+          <a:ln/>
+        </p:spPr>
+      </p:sp>
+      <p:sp>
+        <p:nvSpPr>
+          <p:cNvPr id="14" name="Banner text"/>
+          <p:cNvSpPr txBox="1"/>
+          <p:nvPr/>
+        </p:nvSpPr>
+        <p:spPr>
+          <a:xfrm>
+            <a:off x="777240" y="5532120"/>
+            <a:ext cx="10698480" cy="749808"/>
+          </a:xfrm>
+          <a:prstGeom prst="rect">
+            <a:avLst/>
+          </a:prstGeom>
+          <a:noFill/>
+          <a:ln/>
+        </p:spPr>
+        <p:txBody>
+          <a:bodyPr wrap="square" lIns="0" tIns="0" rIns="0" bIns="0" rtlCol="0" anchor="ctr"/>
+          <a:lstStyle/>
+          <a:p>
+            <a:pPr algn="l" indent="0" marL="0">
+              <a:buNone/>
+            </a:pPr>
+            <a:r>
+              <a:rPr lang="en-US" sz="1400" b="1" dirty="0">
+                <a:solidFill>
+                  <a:schemeClr val="accent3"/>
+                </a:solidFill>
+              </a:rPr>
+              <a:t>Live backend (OpenAI model + MySQL): </a:t>
+            </a:r>
+            <a:pPr algn="l" indent="0" marL="0">
+              <a:buNone/>
+            </a:pPr>
+            <a:r>
+              <a:rPr lang="en-US" sz="1400" dirty="0">
+                <a:solidFill>
+                  <a:schemeClr val="bg1"/>
+                </a:solidFill>
+              </a:rPr>
+              <a:t>36 of 45 scripted turns passed on its first full batch (7 hit rate limits). Not yet run on these 36 questions: we will run it once and report that as first pass.</a:t>
+            </a:r>
+            <a:endParaRPr lang="en-US" sz="1400" dirty="0"/>
+          </a:p>
+        </p:txBody>
+      </p:sp>
+      <p:sp>
+        <p:nvSpPr>
+          <p:cNvPr id="25" name="Slide Number Placeholder 0"/>
+          <p:cNvSpPr>
+            <a:spLocks noGrp="1"/>
+          </p:cNvSpPr>
+          <p:nvPr>
+            <p:ph type="sldNum" sz="quarter" idx="4294967295"/>
+          </p:nvPr>
+        </p:nvSpPr>
+        <p:spPr>
+          <a:xfrm>
+            <a:off x="11137392" y="6382512"/>
+            <a:ext cx="502920" cy="274320"/>
+          </a:xfrm>
+          <a:prstGeom prst="rect">
+            <a:avLst/>
+          </a:prstGeom>
+          <a:extLst>
+            <a:ext uri="{C572A759-6A51-4108-AA02-DFA0A04FC94B}">
+              <ma14:wrappingTextBoxFlag xmlns:ma14="http://schemas.microsoft.com/office/mac/drawingml/2011/main" val="0"/>
+            </a:ext>
+          </a:extLst>
+        </p:spPr>
+        <p:txBody>
+          <a:bodyPr/>
+          <a:lstStyle>
+            <a:lvl1pPr>
+              <a:defRPr sz="1000">
+                <a:solidFill>
+                  <a:schemeClr val="accent5"/>
+                </a:solidFill>
+              </a:defRPr>
+            </a:lvl1pPr>
+          </a:lstStyle>
+          <a:p>
+            <a:pPr algn="r"/>
+            <a:fld id="{F7021451-1387-4CA6-816F-3879F97B5CBC}" type="slidenum">
+              <a:rPr b="0" lang="en-US"/>
+              <a:t>6</a:t>
+            </a:fld>
+            <a:endParaRPr lang="en-US"/>
+          </a:p>
+        </p:txBody>
+      </p:sp>
+    </p:spTree>
+  </p:cSld>
+  <p:clrMapOvr>
+    <a:masterClrMapping/>
+  </p:clrMapOvr>
+</p:sld>
+</file>
+
+<file path=ppt/slides/slide7.xml><?xml version="1.0" encoding="utf-8"?>
+<p:sld xmlns:a="http://schemas.openxmlformats.org/drawingml/2006/main" xmlns:r="http://schemas.openxmlformats.org/officeDocument/2006/relationships" xmlns:p="http://schemas.openxmlformats.org/presentationml/2006/main">
+  <p:cSld name="Slide 7">
+    <p:spTree>
+      <p:nvGrpSpPr>
+        <p:cNvPr id="1" name=""/>
+        <p:cNvGrpSpPr/>
+        <p:nvPr/>
+      </p:nvGrpSpPr>
+      <p:grpSpPr>
+        <a:xfrm>
+          <a:off x="0" y="0"/>
+          <a:ext cx="0" cy="0"/>
+          <a:chOff x="0" y="0"/>
+          <a:chExt cx="0" cy="0"/>
+        </a:xfrm>
+      </p:grpSpPr>
+      <p:sp>
+        <p:nvSpPr>
+          <p:cNvPr id="2" name="Text 0"/>
+          <p:cNvSpPr/>
+          <p:nvPr>
+            <p:ph idx="100" type="title" hasCustomPrompt="1"/>
+          </p:nvPr>
+        </p:nvSpPr>
+        <p:spPr>
+          <a:xfrm>
+            <a:off x="548640" y="320040"/>
+            <a:ext cx="11091672" cy="822960"/>
+          </a:xfrm>
+          <a:prstGeom prst="rect">
+            <a:avLst/>
+          </a:prstGeom>
+          <a:noFill/>
+          <a:ln/>
+        </p:spPr>
+        <p:txBody>
+          <a:bodyPr wrap="square" lIns="0" tIns="0" rIns="0" bIns="0" rtlCol="0" anchor="ctr"/>
+          <a:lstStyle/>
+          <a:p>
+            <a:pPr algn="l" indent="0" marL="0">
+              <a:buNone/>
+            </a:pPr>
+            <a:r>
+              <a:rPr lang="en-US" sz="3200" b="1" dirty="0">
+                <a:solidFill>
+                  <a:schemeClr val="tx2"/>
+                </a:solidFill>
+              </a:rPr>
+              <a:t>Risk assessment: five risks and how we handle them</a:t>
+            </a:r>
+            <a:endParaRPr lang="en-US" sz="3200" dirty="0"/>
+          </a:p>
+        </p:txBody>
+      </p:sp>
+      <p:graphicFrame>
+        <p:nvGraphicFramePr>
+          <p:cNvPr id="8" name="Risk table"/>
           <p:cNvGraphicFramePr>
             <a:graphicFrameLocks noGrp="1"/>
           </p:cNvGraphicFramePr>
@@ -10957,7 +13611,7 @@
             <a:pPr algn="r"/>
             <a:fld id="{F7021451-1387-4CA6-816F-3879F97B5CBC}" type="slidenum">
               <a:rPr b="0" lang="en-US"/>
-              <a:t>6</a:t>
+              <a:t>7</a:t>
             </a:fld>
             <a:endParaRPr lang="en-US"/>
           </a:p>
@@ -10971,9 +13625,9 @@
 </p:sld>
 </file>
 
-<file path=ppt/slides/slide7.xml><?xml version="1.0" encoding="utf-8"?>
+<file path=ppt/slides/slide8.xml><?xml version="1.0" encoding="utf-8"?>
 <p:sld xmlns:a="http://schemas.openxmlformats.org/drawingml/2006/main" xmlns:r="http://schemas.openxmlformats.org/officeDocument/2006/relationships" xmlns:p="http://schemas.openxmlformats.org/presentationml/2006/main">
-  <p:cSld name="Slide 7">
+  <p:cSld name="Slide 8">
     <p:spTree>
       <p:nvGrpSpPr>
         <p:cNvPr id="1" name=""/>
@@ -11028,7 +13682,7 @@
       </p:sp>
       <p:graphicFrame>
         <p:nvGraphicFramePr>
-          <p:cNvPr id="8" name="Assumptions table"/>
+          <p:cNvPr id="9" name="Assumptions table"/>
           <p:cNvGraphicFramePr>
             <a:graphicFrameLocks noGrp="1"/>
           </p:cNvGraphicFramePr>
@@ -12976,7 +15630,7 @@
             <a:pPr algn="r"/>
             <a:fld id="{F7021451-1387-4CA6-816F-3879F97B5CBC}" type="slidenum">
               <a:rPr b="0" lang="en-US"/>
-              <a:t>7</a:t>
+              <a:t>8</a:t>
             </a:fld>
             <a:endParaRPr lang="en-US"/>
           </a:p>
@@ -12990,9 +15644,9 @@
 </p:sld>
 </file>
 
-<file path=ppt/slides/slide8.xml><?xml version="1.0" encoding="utf-8"?>
+<file path=ppt/slides/slide9.xml><?xml version="1.0" encoding="utf-8"?>
 <p:sld xmlns:a="http://schemas.openxmlformats.org/drawingml/2006/main" xmlns:r="http://schemas.openxmlformats.org/officeDocument/2006/relationships" xmlns:p="http://schemas.openxmlformats.org/presentationml/2006/main">
-  <p:cSld name="Slide 8">
+  <p:cSld name="Slide 9">
     <p:spTree>
       <p:nvGrpSpPr>
         <p:cNvPr id="1" name=""/>
@@ -13047,7 +15701,7 @@
       </p:sp>
       <p:graphicFrame>
         <p:nvGraphicFramePr>
-          <p:cNvPr id="9" name="Roadmap table"/>
+          <p:cNvPr id="10" name="Roadmap table"/>
           <p:cNvGraphicFramePr>
             <a:graphicFrameLocks noGrp="1"/>
           </p:cNvGraphicFramePr>
@@ -14850,1248 +17504,6 @@
               <a:t>Sprint 2: Fri 30 Oct  ·  Sprint 3: Fri 13 Nov  ·  final zip: Sun 15 Nov</a:t>
             </a:r>
             <a:endParaRPr lang="en-US" sz="1200" dirty="0"/>
-          </a:p>
-        </p:txBody>
-      </p:sp>
-      <p:sp>
-        <p:nvSpPr>
-          <p:cNvPr id="25" name="Slide Number Placeholder 0"/>
-          <p:cNvSpPr>
-            <a:spLocks noGrp="1"/>
-          </p:cNvSpPr>
-          <p:nvPr>
-            <p:ph type="sldNum" sz="quarter" idx="4294967295"/>
-          </p:nvPr>
-        </p:nvSpPr>
-        <p:spPr>
-          <a:xfrm>
-            <a:off x="11137392" y="6382512"/>
-            <a:ext cx="502920" cy="274320"/>
-          </a:xfrm>
-          <a:prstGeom prst="rect">
-            <a:avLst/>
-          </a:prstGeom>
-          <a:extLst>
-            <a:ext uri="{C572A759-6A51-4108-AA02-DFA0A04FC94B}">
-              <ma14:wrappingTextBoxFlag xmlns:ma14="http://schemas.microsoft.com/office/mac/drawingml/2011/main" val="0"/>
-            </a:ext>
-          </a:extLst>
-        </p:spPr>
-        <p:txBody>
-          <a:bodyPr/>
-          <a:lstStyle>
-            <a:lvl1pPr>
-              <a:defRPr sz="1000">
-                <a:solidFill>
-                  <a:schemeClr val="accent5"/>
-                </a:solidFill>
-              </a:defRPr>
-            </a:lvl1pPr>
-          </a:lstStyle>
-          <a:p>
-            <a:pPr algn="r"/>
-            <a:fld id="{F7021451-1387-4CA6-816F-3879F97B5CBC}" type="slidenum">
-              <a:rPr b="0" lang="en-US"/>
-              <a:t>8</a:t>
-            </a:fld>
-            <a:endParaRPr lang="en-US"/>
-          </a:p>
-        </p:txBody>
-      </p:sp>
-    </p:spTree>
-  </p:cSld>
-  <p:clrMapOvr>
-    <a:masterClrMapping/>
-  </p:clrMapOvr>
-</p:sld>
-</file>
-
-<file path=ppt/slides/slide9.xml><?xml version="1.0" encoding="utf-8"?>
-<p:sld xmlns:a="http://schemas.openxmlformats.org/drawingml/2006/main" xmlns:r="http://schemas.openxmlformats.org/officeDocument/2006/relationships" xmlns:p="http://schemas.openxmlformats.org/presentationml/2006/main">
-  <p:cSld name="Slide 9">
-    <p:spTree>
-      <p:nvGrpSpPr>
-        <p:cNvPr id="1" name=""/>
-        <p:cNvGrpSpPr/>
-        <p:nvPr/>
-      </p:nvGrpSpPr>
-      <p:grpSpPr>
-        <a:xfrm>
-          <a:off x="0" y="0"/>
-          <a:ext cx="0" cy="0"/>
-          <a:chOff x="0" y="0"/>
-          <a:chExt cx="0" cy="0"/>
-        </a:xfrm>
-      </p:grpSpPr>
-      <p:sp>
-        <p:nvSpPr>
-          <p:cNvPr id="2" name="Text 0"/>
-          <p:cNvSpPr/>
-          <p:nvPr>
-            <p:ph idx="100" type="title" hasCustomPrompt="1"/>
-          </p:nvPr>
-        </p:nvSpPr>
-        <p:spPr>
-          <a:xfrm>
-            <a:off x="548640" y="320040"/>
-            <a:ext cx="11091672" cy="822960"/>
-          </a:xfrm>
-          <a:prstGeom prst="rect">
-            <a:avLst/>
-          </a:prstGeom>
-          <a:noFill/>
-          <a:ln/>
-        </p:spPr>
-        <p:txBody>
-          <a:bodyPr wrap="square" lIns="0" tIns="0" rIns="0" bIns="0" rtlCol="0" anchor="ctr"/>
-          <a:lstStyle/>
-          <a:p>
-            <a:pPr algn="l" indent="0" marL="0">
-              <a:buNone/>
-            </a:pPr>
-            <a:r>
-              <a:rPr lang="en-US" sz="3200" b="1" dirty="0">
-                <a:solidFill>
-                  <a:schemeClr val="tx2"/>
-                </a:solidFill>
-              </a:rPr>
-              <a:t>Backup: a designed tool set, with its edges</a:t>
-            </a:r>
-            <a:endParaRPr lang="en-US" sz="3200" dirty="0"/>
-          </a:p>
-        </p:txBody>
-      </p:sp>
-      <p:sp>
-        <p:nvSpPr>
-          <p:cNvPr id="3" name="Backup tag"/>
-          <p:cNvSpPr txBox="1"/>
-          <p:nvPr/>
-        </p:nvSpPr>
-        <p:spPr>
-          <a:xfrm>
-            <a:off x="10515600" y="566928"/>
-            <a:ext cx="1124712" cy="292608"/>
-          </a:xfrm>
-          <a:prstGeom prst="roundRect">
-            <a:avLst>
-              <a:gd name="adj" fmla="val 31250"/>
-            </a:avLst>
-          </a:prstGeom>
-          <a:solidFill>
-            <a:schemeClr val="accent5"/>
-          </a:solidFill>
-          <a:ln/>
-        </p:spPr>
-        <p:txBody>
-          <a:bodyPr wrap="square" lIns="0" tIns="0" rIns="0" bIns="0" rtlCol="0" anchor="ctr"/>
-          <a:lstStyle/>
-          <a:p>
-            <a:pPr algn="ctr" indent="0" marL="0">
-              <a:buNone/>
-            </a:pPr>
-            <a:r>
-              <a:rPr lang="en-US" sz="1100" b="1" dirty="0">
-                <a:solidFill>
-                  <a:schemeClr val="bg1"/>
-                </a:solidFill>
-              </a:rPr>
-              <a:t>BACKUP</a:t>
-            </a:r>
-            <a:endParaRPr lang="en-US" sz="1100" dirty="0"/>
-          </a:p>
-        </p:txBody>
-      </p:sp>
-      <p:sp>
-        <p:nvSpPr>
-          <p:cNvPr id="4" name="Header Tool kind"/>
-          <p:cNvSpPr txBox="1"/>
-          <p:nvPr/>
-        </p:nvSpPr>
-        <p:spPr>
-          <a:xfrm>
-            <a:off x="1280160" y="1298448"/>
-            <a:ext cx="3657600" cy="274320"/>
-          </a:xfrm>
-          <a:prstGeom prst="rect">
-            <a:avLst/>
-          </a:prstGeom>
-          <a:noFill/>
-          <a:ln/>
-        </p:spPr>
-        <p:txBody>
-          <a:bodyPr wrap="square" lIns="0" tIns="0" rIns="0" bIns="0" rtlCol="0" anchor="ctr"/>
-          <a:lstStyle/>
-          <a:p>
-            <a:pPr algn="l" indent="0" marL="0">
-              <a:buNone/>
-            </a:pPr>
-            <a:r>
-              <a:rPr lang="en-US" sz="1200" b="1" spc="100" kern="0" dirty="0">
-                <a:solidFill>
-                  <a:schemeClr val="accent5"/>
-                </a:solidFill>
-              </a:rPr>
-              <a:t>TOOL KIND</a:t>
-            </a:r>
-            <a:endParaRPr lang="en-US" sz="1200" dirty="0"/>
-          </a:p>
-        </p:txBody>
-      </p:sp>
-      <p:sp>
-        <p:nvSpPr>
-          <p:cNvPr id="5" name="Header What ours does"/>
-          <p:cNvSpPr txBox="1"/>
-          <p:nvPr/>
-        </p:nvSpPr>
-        <p:spPr>
-          <a:xfrm>
-            <a:off x="3017520" y="1298448"/>
-            <a:ext cx="3657600" cy="274320"/>
-          </a:xfrm>
-          <a:prstGeom prst="rect">
-            <a:avLst/>
-          </a:prstGeom>
-          <a:noFill/>
-          <a:ln/>
-        </p:spPr>
-        <p:txBody>
-          <a:bodyPr wrap="square" lIns="0" tIns="0" rIns="0" bIns="0" rtlCol="0" anchor="ctr"/>
-          <a:lstStyle/>
-          <a:p>
-            <a:pPr algn="l" indent="0" marL="0">
-              <a:buNone/>
-            </a:pPr>
-            <a:r>
-              <a:rPr lang="en-US" sz="1200" b="1" spc="100" kern="0" dirty="0">
-                <a:solidFill>
-                  <a:schemeClr val="accent5"/>
-                </a:solidFill>
-              </a:rPr>
-              <a:t>WHAT OURS DOES</a:t>
-            </a:r>
-            <a:endParaRPr lang="en-US" sz="1200" dirty="0"/>
-          </a:p>
-        </p:txBody>
-      </p:sp>
-      <p:sp>
-        <p:nvSpPr>
-          <p:cNvPr id="6" name="Header Deliberately does not"/>
-          <p:cNvSpPr txBox="1"/>
-          <p:nvPr/>
-        </p:nvSpPr>
-        <p:spPr>
-          <a:xfrm>
-            <a:off x="8412480" y="1298448"/>
-            <a:ext cx="3657600" cy="274320"/>
-          </a:xfrm>
-          <a:prstGeom prst="rect">
-            <a:avLst/>
-          </a:prstGeom>
-          <a:noFill/>
-          <a:ln/>
-        </p:spPr>
-        <p:txBody>
-          <a:bodyPr wrap="square" lIns="0" tIns="0" rIns="0" bIns="0" rtlCol="0" anchor="ctr"/>
-          <a:lstStyle/>
-          <a:p>
-            <a:pPr algn="l" indent="0" marL="0">
-              <a:buNone/>
-            </a:pPr>
-            <a:r>
-              <a:rPr lang="en-US" sz="1200" b="1" spc="100" kern="0" dirty="0">
-                <a:solidFill>
-                  <a:schemeClr val="accent5"/>
-                </a:solidFill>
-              </a:rPr>
-              <a:t>DELIBERATELY DOES NOT</a:t>
-            </a:r>
-            <a:endParaRPr lang="en-US" sz="1200" dirty="0"/>
-          </a:p>
-        </p:txBody>
-      </p:sp>
-      <p:sp>
-        <p:nvSpPr>
-          <p:cNvPr id="7" name="Row Retrieval"/>
-          <p:cNvSpPr/>
-          <p:nvPr/>
-        </p:nvSpPr>
-        <p:spPr>
-          <a:xfrm>
-            <a:off x="548640" y="1645920"/>
-            <a:ext cx="11091672" cy="676656"/>
-          </a:xfrm>
-          <a:prstGeom prst="roundRect">
-            <a:avLst>
-              <a:gd name="adj" fmla="val 10811"/>
-            </a:avLst>
-          </a:prstGeom>
-          <a:solidFill>
-            <a:schemeClr val="bg2"/>
-          </a:solidFill>
-          <a:ln/>
-        </p:spPr>
-      </p:sp>
-      <p:sp>
-        <p:nvSpPr>
-          <p:cNvPr id="8" name="Icon disc Retrieval"/>
-          <p:cNvSpPr/>
-          <p:nvPr/>
-        </p:nvSpPr>
-        <p:spPr>
-          <a:xfrm>
-            <a:off x="713232" y="1755648"/>
-            <a:ext cx="457200" cy="457200"/>
-          </a:xfrm>
-          <a:prstGeom prst="ellipse">
-            <a:avLst/>
-          </a:prstGeom>
-          <a:solidFill>
-            <a:schemeClr val="accent1"/>
-          </a:solidFill>
-          <a:ln w="6350">
-            <a:solidFill>
-              <a:schemeClr val="accent1"/>
-            </a:solidFill>
-            <a:prstDash val="solid"/>
-          </a:ln>
-        </p:spPr>
-      </p:sp>
-      <p:pic>
-        <p:nvPicPr>
-          <p:cNvPr id="9" name="Image 0" descr="Retrieval icon">    </p:cNvPr>
-          <p:cNvPicPr>
-            <a:picLocks noChangeAspect="1"/>
-          </p:cNvPicPr>
-          <p:nvPr/>
-        </p:nvPicPr>
-        <p:blipFill>
-          <a:blip r:embed="rId1"/>
-          <a:stretch>
-            <a:fillRect/>
-          </a:stretch>
-        </p:blipFill>
-        <p:spPr>
-          <a:xfrm>
-            <a:off x="822960" y="1865376"/>
-            <a:ext cx="237744" cy="237744"/>
-          </a:xfrm>
-          <a:prstGeom prst="rect">
-            <a:avLst/>
-          </a:prstGeom>
-        </p:spPr>
-      </p:pic>
-      <p:sp>
-        <p:nvSpPr>
-          <p:cNvPr id="10" name="Kind Retrieval"/>
-          <p:cNvSpPr txBox="1"/>
-          <p:nvPr/>
-        </p:nvSpPr>
-        <p:spPr>
-          <a:xfrm>
-            <a:off x="1280160" y="1645920"/>
-            <a:ext cx="1645920" cy="676656"/>
-          </a:xfrm>
-          <a:prstGeom prst="rect">
-            <a:avLst/>
-          </a:prstGeom>
-          <a:noFill/>
-          <a:ln/>
-        </p:spPr>
-        <p:txBody>
-          <a:bodyPr wrap="square" lIns="0" tIns="0" rIns="0" bIns="0" rtlCol="0" anchor="ctr"/>
-          <a:lstStyle/>
-          <a:p>
-            <a:pPr algn="l" indent="0" marL="0">
-              <a:buNone/>
-            </a:pPr>
-            <a:r>
-              <a:rPr lang="en-US" sz="1800" b="1" dirty="0">
-                <a:solidFill>
-                  <a:schemeClr val="tx2"/>
-                </a:solidFill>
-              </a:rPr>
-              <a:t>Retrieval</a:t>
-            </a:r>
-            <a:endParaRPr lang="en-US" sz="1800" dirty="0"/>
-          </a:p>
-        </p:txBody>
-      </p:sp>
-      <p:sp>
-        <p:nvSpPr>
-          <p:cNvPr id="11" name="Does Retrieval"/>
-          <p:cNvSpPr txBox="1"/>
-          <p:nvPr/>
-        </p:nvSpPr>
-        <p:spPr>
-          <a:xfrm>
-            <a:off x="3017520" y="1645920"/>
-            <a:ext cx="5212080" cy="676656"/>
-          </a:xfrm>
-          <a:prstGeom prst="rect">
-            <a:avLst/>
-          </a:prstGeom>
-          <a:noFill/>
-          <a:ln/>
-        </p:spPr>
-        <p:txBody>
-          <a:bodyPr wrap="square" lIns="0" tIns="0" rIns="0" bIns="0" rtlCol="0" anchor="ctr"/>
-          <a:lstStyle/>
-          <a:p>
-            <a:pPr algn="l" indent="0" marL="0">
-              <a:buNone/>
-            </a:pPr>
-            <a:r>
-              <a:rPr lang="en-US" sz="1400" dirty="0">
-                <a:solidFill>
-                  <a:schemeClr val="tx1"/>
-                </a:solidFill>
-              </a:rPr>
-              <a:t>Typed order look-ups, plus a read-only SQL agent (SELECT only) for everything else</a:t>
-            </a:r>
-            <a:endParaRPr lang="en-US" sz="1400" dirty="0"/>
-          </a:p>
-        </p:txBody>
-      </p:sp>
-      <p:sp>
-        <p:nvSpPr>
-          <p:cNvPr id="12" name="Not Retrieval"/>
-          <p:cNvSpPr txBox="1"/>
-          <p:nvPr/>
-        </p:nvSpPr>
-        <p:spPr>
-          <a:xfrm>
-            <a:off x="8412480" y="1645920"/>
-            <a:ext cx="3108960" cy="676656"/>
-          </a:xfrm>
-          <a:prstGeom prst="rect">
-            <a:avLst/>
-          </a:prstGeom>
-          <a:noFill/>
-          <a:ln/>
-        </p:spPr>
-        <p:txBody>
-          <a:bodyPr wrap="square" lIns="0" tIns="0" rIns="0" bIns="0" rtlCol="0" anchor="ctr"/>
-          <a:lstStyle/>
-          <a:p>
-            <a:pPr algn="l" indent="0" marL="0">
-              <a:buNone/>
-            </a:pPr>
-            <a:r>
-              <a:rPr lang="en-US" sz="1400" dirty="0">
-                <a:solidFill>
-                  <a:schemeClr val="tx1"/>
-                </a:solidFill>
-              </a:rPr>
-              <a:t>Pick the first match when several fit</a:t>
-            </a:r>
-            <a:endParaRPr lang="en-US" sz="1400" dirty="0"/>
-          </a:p>
-        </p:txBody>
-      </p:sp>
-      <p:sp>
-        <p:nvSpPr>
-          <p:cNvPr id="13" name="Row Judgement"/>
-          <p:cNvSpPr/>
-          <p:nvPr/>
-        </p:nvSpPr>
-        <p:spPr>
-          <a:xfrm>
-            <a:off x="548640" y="2395728"/>
-            <a:ext cx="11091672" cy="676656"/>
-          </a:xfrm>
-          <a:prstGeom prst="roundRect">
-            <a:avLst>
-              <a:gd name="adj" fmla="val 10811"/>
-            </a:avLst>
-          </a:prstGeom>
-          <a:solidFill>
-            <a:schemeClr val="bg2"/>
-          </a:solidFill>
-          <a:ln/>
-        </p:spPr>
-      </p:sp>
-      <p:sp>
-        <p:nvSpPr>
-          <p:cNvPr id="14" name="Icon disc Judgement"/>
-          <p:cNvSpPr/>
-          <p:nvPr/>
-        </p:nvSpPr>
-        <p:spPr>
-          <a:xfrm>
-            <a:off x="713232" y="2505456"/>
-            <a:ext cx="457200" cy="457200"/>
-          </a:xfrm>
-          <a:prstGeom prst="ellipse">
-            <a:avLst/>
-          </a:prstGeom>
-          <a:solidFill>
-            <a:schemeClr val="accent1"/>
-          </a:solidFill>
-          <a:ln w="6350">
-            <a:solidFill>
-              <a:schemeClr val="accent1"/>
-            </a:solidFill>
-            <a:prstDash val="solid"/>
-          </a:ln>
-        </p:spPr>
-      </p:sp>
-      <p:pic>
-        <p:nvPicPr>
-          <p:cNvPr id="15" name="Image 1" descr="Judgement icon">    </p:cNvPr>
-          <p:cNvPicPr>
-            <a:picLocks noChangeAspect="1"/>
-          </p:cNvPicPr>
-          <p:nvPr/>
-        </p:nvPicPr>
-        <p:blipFill>
-          <a:blip r:embed="rId2"/>
-          <a:stretch>
-            <a:fillRect/>
-          </a:stretch>
-        </p:blipFill>
-        <p:spPr>
-          <a:xfrm>
-            <a:off x="822960" y="2615184"/>
-            <a:ext cx="237744" cy="237744"/>
-          </a:xfrm>
-          <a:prstGeom prst="rect">
-            <a:avLst/>
-          </a:prstGeom>
-        </p:spPr>
-      </p:pic>
-      <p:sp>
-        <p:nvSpPr>
-          <p:cNvPr id="16" name="Kind Judgement"/>
-          <p:cNvSpPr txBox="1"/>
-          <p:nvPr/>
-        </p:nvSpPr>
-        <p:spPr>
-          <a:xfrm>
-            <a:off x="1280160" y="2395728"/>
-            <a:ext cx="1645920" cy="676656"/>
-          </a:xfrm>
-          <a:prstGeom prst="rect">
-            <a:avLst/>
-          </a:prstGeom>
-          <a:noFill/>
-          <a:ln/>
-        </p:spPr>
-        <p:txBody>
-          <a:bodyPr wrap="square" lIns="0" tIns="0" rIns="0" bIns="0" rtlCol="0" anchor="ctr"/>
-          <a:lstStyle/>
-          <a:p>
-            <a:pPr algn="l" indent="0" marL="0">
-              <a:buNone/>
-            </a:pPr>
-            <a:r>
-              <a:rPr lang="en-US" sz="1800" b="1" dirty="0">
-                <a:solidFill>
-                  <a:schemeClr val="tx2"/>
-                </a:solidFill>
-              </a:rPr>
-              <a:t>Judgement</a:t>
-            </a:r>
-            <a:endParaRPr lang="en-US" sz="1800" dirty="0"/>
-          </a:p>
-        </p:txBody>
-      </p:sp>
-      <p:sp>
-        <p:nvSpPr>
-          <p:cNvPr id="17" name="Does Judgement"/>
-          <p:cNvSpPr txBox="1"/>
-          <p:nvPr/>
-        </p:nvSpPr>
-        <p:spPr>
-          <a:xfrm>
-            <a:off x="3017520" y="2395728"/>
-            <a:ext cx="5212080" cy="676656"/>
-          </a:xfrm>
-          <a:prstGeom prst="rect">
-            <a:avLst/>
-          </a:prstGeom>
-          <a:noFill/>
-          <a:ln/>
-        </p:spPr>
-        <p:txBody>
-          <a:bodyPr wrap="square" lIns="0" tIns="0" rIns="0" bIns="0" rtlCol="0" anchor="ctr"/>
-          <a:lstStyle/>
-          <a:p>
-            <a:pPr algn="l" indent="0" marL="0">
-              <a:buNone/>
-            </a:pPr>
-            <a:r>
-              <a:rPr lang="en-US" sz="1400" dirty="0">
-                <a:solidFill>
-                  <a:schemeClr val="tx1"/>
-                </a:solidFill>
-              </a:rPr>
-              <a:t>“Normal” = mean of the previous 8 same weekdays ± the larger of 1.5 SD or 5%; Sundays closed</a:t>
-            </a:r>
-            <a:endParaRPr lang="en-US" sz="1400" dirty="0"/>
-          </a:p>
-        </p:txBody>
-      </p:sp>
-      <p:sp>
-        <p:nvSpPr>
-          <p:cNvPr id="18" name="Not Judgement"/>
-          <p:cNvSpPr txBox="1"/>
-          <p:nvPr/>
-        </p:nvSpPr>
-        <p:spPr>
-          <a:xfrm>
-            <a:off x="8412480" y="2395728"/>
-            <a:ext cx="3108960" cy="676656"/>
-          </a:xfrm>
-          <a:prstGeom prst="rect">
-            <a:avLst/>
-          </a:prstGeom>
-          <a:noFill/>
-          <a:ln/>
-        </p:spPr>
-        <p:txBody>
-          <a:bodyPr wrap="square" lIns="0" tIns="0" rIns="0" bIns="0" rtlCol="0" anchor="ctr"/>
-          <a:lstStyle/>
-          <a:p>
-            <a:pPr algn="l" indent="0" marL="0">
-              <a:buNone/>
-            </a:pPr>
-            <a:r>
-              <a:rPr lang="en-US" sz="1400" dirty="0">
-                <a:solidFill>
-                  <a:schemeClr val="tx1"/>
-                </a:solidFill>
-              </a:rPr>
-              <a:t>Treat one low day as proof of a fault</a:t>
-            </a:r>
-            <a:endParaRPr lang="en-US" sz="1400" dirty="0"/>
-          </a:p>
-        </p:txBody>
-      </p:sp>
-      <p:sp>
-        <p:nvSpPr>
-          <p:cNvPr id="19" name="Row Tracing"/>
-          <p:cNvSpPr/>
-          <p:nvPr/>
-        </p:nvSpPr>
-        <p:spPr>
-          <a:xfrm>
-            <a:off x="548640" y="3145536"/>
-            <a:ext cx="11091672" cy="676656"/>
-          </a:xfrm>
-          <a:prstGeom prst="roundRect">
-            <a:avLst>
-              <a:gd name="adj" fmla="val 10811"/>
-            </a:avLst>
-          </a:prstGeom>
-          <a:solidFill>
-            <a:schemeClr val="bg2"/>
-          </a:solidFill>
-          <a:ln/>
-        </p:spPr>
-      </p:sp>
-      <p:sp>
-        <p:nvSpPr>
-          <p:cNvPr id="20" name="Icon disc Tracing"/>
-          <p:cNvSpPr/>
-          <p:nvPr/>
-        </p:nvSpPr>
-        <p:spPr>
-          <a:xfrm>
-            <a:off x="713232" y="3255264"/>
-            <a:ext cx="457200" cy="457200"/>
-          </a:xfrm>
-          <a:prstGeom prst="ellipse">
-            <a:avLst/>
-          </a:prstGeom>
-          <a:solidFill>
-            <a:schemeClr val="accent1"/>
-          </a:solidFill>
-          <a:ln w="6350">
-            <a:solidFill>
-              <a:schemeClr val="accent1"/>
-            </a:solidFill>
-            <a:prstDash val="solid"/>
-          </a:ln>
-        </p:spPr>
-      </p:sp>
-      <p:pic>
-        <p:nvPicPr>
-          <p:cNvPr id="21" name="Image 2" descr="Tracing icon">    </p:cNvPr>
-          <p:cNvPicPr>
-            <a:picLocks noChangeAspect="1"/>
-          </p:cNvPicPr>
-          <p:nvPr/>
-        </p:nvPicPr>
-        <p:blipFill>
-          <a:blip r:embed="rId3"/>
-          <a:stretch>
-            <a:fillRect/>
-          </a:stretch>
-        </p:blipFill>
-        <p:spPr>
-          <a:xfrm>
-            <a:off x="822960" y="3364992"/>
-            <a:ext cx="237744" cy="237744"/>
-          </a:xfrm>
-          <a:prstGeom prst="rect">
-            <a:avLst/>
-          </a:prstGeom>
-        </p:spPr>
-      </p:pic>
-      <p:sp>
-        <p:nvSpPr>
-          <p:cNvPr id="22" name="Kind Tracing"/>
-          <p:cNvSpPr txBox="1"/>
-          <p:nvPr/>
-        </p:nvSpPr>
-        <p:spPr>
-          <a:xfrm>
-            <a:off x="1280160" y="3145536"/>
-            <a:ext cx="1645920" cy="676656"/>
-          </a:xfrm>
-          <a:prstGeom prst="rect">
-            <a:avLst/>
-          </a:prstGeom>
-          <a:noFill/>
-          <a:ln/>
-        </p:spPr>
-        <p:txBody>
-          <a:bodyPr wrap="square" lIns="0" tIns="0" rIns="0" bIns="0" rtlCol="0" anchor="ctr"/>
-          <a:lstStyle/>
-          <a:p>
-            <a:pPr algn="l" indent="0" marL="0">
-              <a:buNone/>
-            </a:pPr>
-            <a:r>
-              <a:rPr lang="en-US" sz="1800" b="1" dirty="0">
-                <a:solidFill>
-                  <a:schemeClr val="tx2"/>
-                </a:solidFill>
-              </a:rPr>
-              <a:t>Tracing</a:t>
-            </a:r>
-            <a:endParaRPr lang="en-US" sz="1800" dirty="0"/>
-          </a:p>
-        </p:txBody>
-      </p:sp>
-      <p:sp>
-        <p:nvSpPr>
-          <p:cNvPr id="23" name="Does Tracing"/>
-          <p:cNvSpPr txBox="1"/>
-          <p:nvPr/>
-        </p:nvSpPr>
-        <p:spPr>
-          <a:xfrm>
-            <a:off x="3017520" y="3145536"/>
-            <a:ext cx="5212080" cy="676656"/>
-          </a:xfrm>
-          <a:prstGeom prst="rect">
-            <a:avLst/>
-          </a:prstGeom>
-          <a:noFill/>
-          <a:ln/>
-        </p:spPr>
-        <p:txBody>
-          <a:bodyPr wrap="square" lIns="0" tIns="0" rIns="0" bIns="0" rtlCol="0" anchor="ctr"/>
-          <a:lstStyle/>
-          <a:p>
-            <a:pPr algn="l" indent="0" marL="0">
-              <a:buNone/>
-            </a:pPr>
-            <a:r>
-              <a:rPr lang="en-US" sz="1400" dirty="0">
-                <a:solidFill>
-                  <a:schemeClr val="tx1"/>
-                </a:solidFill>
-              </a:rPr>
-              <a:t>Every number links to the source file and row behind it</a:t>
-            </a:r>
-            <a:endParaRPr lang="en-US" sz="1400" dirty="0"/>
-          </a:p>
-        </p:txBody>
-      </p:sp>
-      <p:sp>
-        <p:nvSpPr>
-          <p:cNvPr id="24" name="Not Tracing"/>
-          <p:cNvSpPr txBox="1"/>
-          <p:nvPr/>
-        </p:nvSpPr>
-        <p:spPr>
-          <a:xfrm>
-            <a:off x="8412480" y="3145536"/>
-            <a:ext cx="3108960" cy="676656"/>
-          </a:xfrm>
-          <a:prstGeom prst="rect">
-            <a:avLst/>
-          </a:prstGeom>
-          <a:noFill/>
-          <a:ln/>
-        </p:spPr>
-        <p:txBody>
-          <a:bodyPr wrap="square" lIns="0" tIns="0" rIns="0" bIns="0" rtlCol="0" anchor="ctr"/>
-          <a:lstStyle/>
-          <a:p>
-            <a:pPr algn="l" indent="0" marL="0">
-              <a:buNone/>
-            </a:pPr>
-            <a:r>
-              <a:rPr lang="en-US" sz="1400" dirty="0">
-                <a:solidFill>
-                  <a:schemeClr val="tx1"/>
-                </a:solidFill>
-              </a:rPr>
-              <a:t>Explain causes the data does not hold</a:t>
-            </a:r>
-            <a:endParaRPr lang="en-US" sz="1400" dirty="0"/>
-          </a:p>
-        </p:txBody>
-      </p:sp>
-      <p:sp>
-        <p:nvSpPr>
-          <p:cNvPr id="25" name="Row Discovery"/>
-          <p:cNvSpPr/>
-          <p:nvPr/>
-        </p:nvSpPr>
-        <p:spPr>
-          <a:xfrm>
-            <a:off x="548640" y="3895344"/>
-            <a:ext cx="11091672" cy="676656"/>
-          </a:xfrm>
-          <a:prstGeom prst="roundRect">
-            <a:avLst>
-              <a:gd name="adj" fmla="val 10811"/>
-            </a:avLst>
-          </a:prstGeom>
-          <a:solidFill>
-            <a:schemeClr val="bg2"/>
-          </a:solidFill>
-          <a:ln/>
-        </p:spPr>
-      </p:sp>
-      <p:sp>
-        <p:nvSpPr>
-          <p:cNvPr id="26" name="Icon disc Discovery"/>
-          <p:cNvSpPr/>
-          <p:nvPr/>
-        </p:nvSpPr>
-        <p:spPr>
-          <a:xfrm>
-            <a:off x="713232" y="4005072"/>
-            <a:ext cx="457200" cy="457200"/>
-          </a:xfrm>
-          <a:prstGeom prst="ellipse">
-            <a:avLst/>
-          </a:prstGeom>
-          <a:solidFill>
-            <a:schemeClr val="accent1"/>
-          </a:solidFill>
-          <a:ln w="6350">
-            <a:solidFill>
-              <a:schemeClr val="accent1"/>
-            </a:solidFill>
-            <a:prstDash val="solid"/>
-          </a:ln>
-        </p:spPr>
-      </p:sp>
-      <p:pic>
-        <p:nvPicPr>
-          <p:cNvPr id="27" name="Image 3" descr="Discovery icon">    </p:cNvPr>
-          <p:cNvPicPr>
-            <a:picLocks noChangeAspect="1"/>
-          </p:cNvPicPr>
-          <p:nvPr/>
-        </p:nvPicPr>
-        <p:blipFill>
-          <a:blip r:embed="rId4"/>
-          <a:stretch>
-            <a:fillRect/>
-          </a:stretch>
-        </p:blipFill>
-        <p:spPr>
-          <a:xfrm>
-            <a:off x="822960" y="4114800"/>
-            <a:ext cx="237744" cy="237744"/>
-          </a:xfrm>
-          <a:prstGeom prst="rect">
-            <a:avLst/>
-          </a:prstGeom>
-        </p:spPr>
-      </p:pic>
-      <p:sp>
-        <p:nvSpPr>
-          <p:cNvPr id="28" name="Kind Discovery"/>
-          <p:cNvSpPr txBox="1"/>
-          <p:nvPr/>
-        </p:nvSpPr>
-        <p:spPr>
-          <a:xfrm>
-            <a:off x="1280160" y="3895344"/>
-            <a:ext cx="1645920" cy="676656"/>
-          </a:xfrm>
-          <a:prstGeom prst="rect">
-            <a:avLst/>
-          </a:prstGeom>
-          <a:noFill/>
-          <a:ln/>
-        </p:spPr>
-        <p:txBody>
-          <a:bodyPr wrap="square" lIns="0" tIns="0" rIns="0" bIns="0" rtlCol="0" anchor="ctr"/>
-          <a:lstStyle/>
-          <a:p>
-            <a:pPr algn="l" indent="0" marL="0">
-              <a:buNone/>
-            </a:pPr>
-            <a:r>
-              <a:rPr lang="en-US" sz="1800" b="1" dirty="0">
-                <a:solidFill>
-                  <a:schemeClr val="tx2"/>
-                </a:solidFill>
-              </a:rPr>
-              <a:t>Discovery</a:t>
-            </a:r>
-            <a:endParaRPr lang="en-US" sz="1800" dirty="0"/>
-          </a:p>
-        </p:txBody>
-      </p:sp>
-      <p:sp>
-        <p:nvSpPr>
-          <p:cNvPr id="29" name="Does Discovery"/>
-          <p:cNvSpPr txBox="1"/>
-          <p:nvPr/>
-        </p:nvSpPr>
-        <p:spPr>
-          <a:xfrm>
-            <a:off x="3017520" y="3895344"/>
-            <a:ext cx="5212080" cy="676656"/>
-          </a:xfrm>
-          <a:prstGeom prst="rect">
-            <a:avLst/>
-          </a:prstGeom>
-          <a:noFill/>
-          <a:ln/>
-        </p:spPr>
-        <p:txBody>
-          <a:bodyPr wrap="square" lIns="0" tIns="0" rIns="0" bIns="0" rtlCol="0" anchor="ctr"/>
-          <a:lstStyle/>
-          <a:p>
-            <a:pPr algn="l" indent="0" marL="0">
-              <a:buNone/>
-            </a:pPr>
-            <a:r>
-              <a:rPr lang="en-US" sz="1400" dirty="0">
-                <a:solidFill>
-                  <a:schemeClr val="tx1"/>
-                </a:solidFill>
-              </a:rPr>
-              <a:t>Ranks stalled customers, quiet orders and stages below normal; the top five make the page</a:t>
-            </a:r>
-            <a:endParaRPr lang="en-US" sz="1400" dirty="0"/>
-          </a:p>
-        </p:txBody>
-      </p:sp>
-      <p:sp>
-        <p:nvSpPr>
-          <p:cNvPr id="30" name="Not Discovery"/>
-          <p:cNvSpPr txBox="1"/>
-          <p:nvPr/>
-        </p:nvSpPr>
-        <p:spPr>
-          <a:xfrm>
-            <a:off x="8412480" y="3895344"/>
-            <a:ext cx="3108960" cy="676656"/>
-          </a:xfrm>
-          <a:prstGeom prst="rect">
-            <a:avLst/>
-          </a:prstGeom>
-          <a:noFill/>
-          <a:ln/>
-        </p:spPr>
-        <p:txBody>
-          <a:bodyPr wrap="square" lIns="0" tIns="0" rIns="0" bIns="0" rtlCol="0" anchor="ctr"/>
-          <a:lstStyle/>
-          <a:p>
-            <a:pPr algn="l" indent="0" marL="0">
-              <a:buNone/>
-            </a:pPr>
-            <a:r>
-              <a:rPr lang="en-US" sz="1400" dirty="0">
-                <a:solidFill>
-                  <a:schemeClr val="tx1"/>
-                </a:solidFill>
-              </a:rPr>
-              <a:t>List every finding</a:t>
-            </a:r>
-            <a:endParaRPr lang="en-US" sz="1400" dirty="0"/>
-          </a:p>
-        </p:txBody>
-      </p:sp>
-      <p:sp>
-        <p:nvSpPr>
-          <p:cNvPr id="31" name="Row Action"/>
-          <p:cNvSpPr/>
-          <p:nvPr/>
-        </p:nvSpPr>
-        <p:spPr>
-          <a:xfrm>
-            <a:off x="548640" y="4645152"/>
-            <a:ext cx="11091672" cy="676656"/>
-          </a:xfrm>
-          <a:prstGeom prst="roundRect">
-            <a:avLst>
-              <a:gd name="adj" fmla="val 10811"/>
-            </a:avLst>
-          </a:prstGeom>
-          <a:solidFill>
-            <a:schemeClr val="bg2"/>
-          </a:solidFill>
-          <a:ln/>
-        </p:spPr>
-      </p:sp>
-      <p:sp>
-        <p:nvSpPr>
-          <p:cNvPr id="32" name="Icon disc Action"/>
-          <p:cNvSpPr/>
-          <p:nvPr/>
-        </p:nvSpPr>
-        <p:spPr>
-          <a:xfrm>
-            <a:off x="713232" y="4754880"/>
-            <a:ext cx="457200" cy="457200"/>
-          </a:xfrm>
-          <a:prstGeom prst="ellipse">
-            <a:avLst/>
-          </a:prstGeom>
-          <a:solidFill>
-            <a:schemeClr val="accent1"/>
-          </a:solidFill>
-          <a:ln w="6350">
-            <a:solidFill>
-              <a:schemeClr val="accent1"/>
-            </a:solidFill>
-            <a:prstDash val="solid"/>
-          </a:ln>
-        </p:spPr>
-      </p:sp>
-      <p:pic>
-        <p:nvPicPr>
-          <p:cNvPr id="33" name="Image 4" descr="Action icon">    </p:cNvPr>
-          <p:cNvPicPr>
-            <a:picLocks noChangeAspect="1"/>
-          </p:cNvPicPr>
-          <p:nvPr/>
-        </p:nvPicPr>
-        <p:blipFill>
-          <a:blip r:embed="rId5"/>
-          <a:stretch>
-            <a:fillRect/>
-          </a:stretch>
-        </p:blipFill>
-        <p:spPr>
-          <a:xfrm>
-            <a:off x="822960" y="4864608"/>
-            <a:ext cx="237744" cy="237744"/>
-          </a:xfrm>
-          <a:prstGeom prst="rect">
-            <a:avLst/>
-          </a:prstGeom>
-        </p:spPr>
-      </p:pic>
-      <p:sp>
-        <p:nvSpPr>
-          <p:cNvPr id="34" name="Kind Action"/>
-          <p:cNvSpPr txBox="1"/>
-          <p:nvPr/>
-        </p:nvSpPr>
-        <p:spPr>
-          <a:xfrm>
-            <a:off x="1280160" y="4645152"/>
-            <a:ext cx="1645920" cy="676656"/>
-          </a:xfrm>
-          <a:prstGeom prst="rect">
-            <a:avLst/>
-          </a:prstGeom>
-          <a:noFill/>
-          <a:ln/>
-        </p:spPr>
-        <p:txBody>
-          <a:bodyPr wrap="square" lIns="0" tIns="0" rIns="0" bIns="0" rtlCol="0" anchor="ctr"/>
-          <a:lstStyle/>
-          <a:p>
-            <a:pPr algn="l" indent="0" marL="0">
-              <a:buNone/>
-            </a:pPr>
-            <a:r>
-              <a:rPr lang="en-US" sz="1800" b="1" dirty="0">
-                <a:solidFill>
-                  <a:schemeClr val="tx2"/>
-                </a:solidFill>
-              </a:rPr>
-              <a:t>Action</a:t>
-            </a:r>
-            <a:endParaRPr lang="en-US" sz="1800" dirty="0"/>
-          </a:p>
-        </p:txBody>
-      </p:sp>
-      <p:sp>
-        <p:nvSpPr>
-          <p:cNvPr id="35" name="Does Action"/>
-          <p:cNvSpPr txBox="1"/>
-          <p:nvPr/>
-        </p:nvSpPr>
-        <p:spPr>
-          <a:xfrm>
-            <a:off x="3017520" y="4645152"/>
-            <a:ext cx="5212080" cy="676656"/>
-          </a:xfrm>
-          <a:prstGeom prst="rect">
-            <a:avLst/>
-          </a:prstGeom>
-          <a:noFill/>
-          <a:ln/>
-        </p:spPr>
-        <p:txBody>
-          <a:bodyPr wrap="square" lIns="0" tIns="0" rIns="0" bIns="0" rtlCol="0" anchor="ctr"/>
-          <a:lstStyle/>
-          <a:p>
-            <a:pPr algn="l" indent="0" marL="0">
-              <a:buNone/>
-            </a:pPr>
-            <a:r>
-              <a:rPr lang="en-US" sz="1400" dirty="0">
-                <a:solidFill>
-                  <a:schemeClr val="tx1"/>
-                </a:solidFill>
-              </a:rPr>
-              <a:t>Preview, then a 15-minute confirmation key; every executed action is logged</a:t>
-            </a:r>
-            <a:endParaRPr lang="en-US" sz="1400" dirty="0"/>
-          </a:p>
-        </p:txBody>
-      </p:sp>
-      <p:sp>
-        <p:nvSpPr>
-          <p:cNvPr id="36" name="Not Action"/>
-          <p:cNvSpPr txBox="1"/>
-          <p:nvPr/>
-        </p:nvSpPr>
-        <p:spPr>
-          <a:xfrm>
-            <a:off x="8412480" y="4645152"/>
-            <a:ext cx="3108960" cy="676656"/>
-          </a:xfrm>
-          <a:prstGeom prst="rect">
-            <a:avLst/>
-          </a:prstGeom>
-          <a:noFill/>
-          <a:ln/>
-        </p:spPr>
-        <p:txBody>
-          <a:bodyPr wrap="square" lIns="0" tIns="0" rIns="0" bIns="0" rtlCol="0" anchor="ctr"/>
-          <a:lstStyle/>
-          <a:p>
-            <a:pPr algn="l" indent="0" marL="0">
-              <a:buNone/>
-            </a:pPr>
-            <a:r>
-              <a:rPr lang="en-US" sz="1400" dirty="0">
-                <a:solidFill>
-                  <a:schemeClr val="tx1"/>
-                </a:solidFill>
-              </a:rPr>
-              <a:t>Send without a matching, unexpired key</a:t>
-            </a:r>
-            <a:endParaRPr lang="en-US" sz="1400" dirty="0"/>
-          </a:p>
-        </p:txBody>
-      </p:sp>
-      <p:sp>
-        <p:nvSpPr>
-          <p:cNvPr id="37" name="Banner"/>
-          <p:cNvSpPr/>
-          <p:nvPr/>
-        </p:nvSpPr>
-        <p:spPr>
-          <a:xfrm>
-            <a:off x="548640" y="5669280"/>
-            <a:ext cx="11091672" cy="566928"/>
-          </a:xfrm>
-          <a:prstGeom prst="roundRect">
-            <a:avLst>
-              <a:gd name="adj" fmla="val 12903"/>
-            </a:avLst>
-          </a:prstGeom>
-          <a:solidFill>
-            <a:schemeClr val="tx2"/>
-          </a:solidFill>
-          <a:ln/>
-        </p:spPr>
-      </p:sp>
-      <p:sp>
-        <p:nvSpPr>
-          <p:cNvPr id="38" name="Banner text"/>
-          <p:cNvSpPr txBox="1"/>
-          <p:nvPr/>
-        </p:nvSpPr>
-        <p:spPr>
-          <a:xfrm>
-            <a:off x="777240" y="5669280"/>
-            <a:ext cx="10698480" cy="566928"/>
-          </a:xfrm>
-          <a:prstGeom prst="rect">
-            <a:avLst/>
-          </a:prstGeom>
-          <a:noFill/>
-          <a:ln/>
-        </p:spPr>
-        <p:txBody>
-          <a:bodyPr wrap="square" lIns="0" tIns="0" rIns="0" bIns="0" rtlCol="0" anchor="ctr"/>
-          <a:lstStyle/>
-          <a:p>
-            <a:pPr algn="l" indent="0" marL="0">
-              <a:buNone/>
-            </a:pPr>
-            <a:r>
-              <a:rPr lang="en-US" sz="1400" b="1" dirty="0">
-                <a:solidFill>
-                  <a:schemeClr val="accent3"/>
-                </a:solidFill>
-              </a:rPr>
-              <a:t>37 tools</a:t>
-            </a:r>
-            <a:pPr algn="l" indent="0" marL="0">
-              <a:buNone/>
-            </a:pPr>
-            <a:r>
-              <a:rPr lang="en-US" sz="1400" dirty="0">
-                <a:solidFill>
-                  <a:schemeClr val="bg1"/>
-                </a:solidFill>
-              </a:rPr>
-              <a:t> in one table (18 live, 19 in the dashboard chat): input, output, purpose, non-goals, failure mode.   </a:t>
-            </a:r>
-            <a:pPr algn="l" indent="0" marL="0">
-              <a:buNone/>
-            </a:pPr>
-            <a:r>
-              <a:rPr lang="en-US" sz="1400" b="1" dirty="0">
-                <a:solidFill>
-                  <a:schemeClr val="accent3"/>
-                </a:solidFill>
-              </a:rPr>
-              <a:t>27 boundary questions</a:t>
-            </a:r>
-            <a:pPr algn="l" indent="0" marL="0">
-              <a:buNone/>
-            </a:pPr>
-            <a:r>
-              <a:rPr lang="en-US" sz="1400" dirty="0">
-                <a:solidFill>
-                  <a:schemeClr val="bg1"/>
-                </a:solidFill>
-              </a:rPr>
-              <a:t> recorded, each naming the tool that answers and the neighbour that must not.</a:t>
-            </a:r>
-            <a:endParaRPr lang="en-US" sz="1400" dirty="0"/>
           </a:p>
         </p:txBody>
       </p:sp>

--- a/threadpilot/docs/presentation/Presentation_GroupNN_Sprint1.pptx
+++ b/threadpilot/docs/presentation/Presentation_GroupNN_Sprint1.pptx
@@ -19,9 +19,10 @@
     <p:sldId id="267" r:id="rId13"/>
     <p:sldId id="268" r:id="rId14"/>
     <p:sldId id="269" r:id="rId15"/>
+    <p:sldId id="270" r:id="rId16"/>
   </p:sldIdLst>
   <p:notesMasterIdLst>
-    <p:notesMasterId r:id="rId16"/>
+    <p:notesMasterId r:id="rId17"/>
   </p:notesMasterIdLst>
   <p:sldSz cx="12192000" cy="6858000"/>
   <p:notesSz cx="6858000" cy="12192000"/>
@@ -120,7 +121,7 @@
   <p:extLst>
     <p:ext uri="{521415D9-36F7-43E2-AB2F-B90AF26B5E84}">
       <p14:sectionLst xmlns:p14="http://schemas.microsoft.com/office/powerpoint/2010/main">
-        <p14:section name="Sprint 1" id="{1e200046-80d7-2c0c-1784-9b9908b2b797}">
+        <p14:section name="Sprint 1" id="{67221f36-d5f8-2bc9-e0a4-dd6e59e074ff}">
           <p14:sldIdLst>
             <p14:sldId id="256"/>
             <p14:sldId id="257"/>
@@ -133,13 +134,14 @@
             <p14:sldId id="264"/>
           </p14:sldIdLst>
         </p14:section>
-        <p14:section name="Backup" id="{2bc55228-5436-749c-a324-804d8a8f3489}">
+        <p14:section name="Backup" id="{2e733fcd-6c5e-4782-7a7e-8e01883fde65}">
           <p14:sldIdLst>
             <p14:sldId id="265"/>
             <p14:sldId id="266"/>
             <p14:sldId id="267"/>
             <p14:sldId id="268"/>
             <p14:sldId id="269"/>
+            <p14:sldId id="270"/>
           </p14:sldIdLst>
         </p14:section>
       </p14:sectionLst>
@@ -1389,6 +1391,97 @@
 </p:notes>
 </file>
 
+<file path=ppt/notesSlides/notesSlide15.xml><?xml version="1.0" encoding="utf-8"?>
+<p:notes xmlns:a="http://schemas.openxmlformats.org/drawingml/2006/main" xmlns:r="http://schemas.openxmlformats.org/officeDocument/2006/relationships" xmlns:p="http://schemas.openxmlformats.org/presentationml/2006/main">
+  <p:cSld>
+    <p:spTree>
+      <p:nvGrpSpPr>
+        <p:cNvPr id="1" name=""/>
+        <p:cNvGrpSpPr/>
+        <p:nvPr/>
+      </p:nvGrpSpPr>
+      <p:grpSpPr>
+        <a:xfrm>
+          <a:off x="0" y="0"/>
+          <a:ext cx="0" cy="0"/>
+          <a:chOff x="0" y="0"/>
+          <a:chExt cx="0" cy="0"/>
+        </a:xfrm>
+      </p:grpSpPr>
+      <p:sp>
+        <p:nvSpPr>
+          <p:cNvPr id="2" name="Slide Image Placeholder 1"/>
+          <p:cNvSpPr>
+            <a:spLocks noGrp="1" noRot="1" noChangeAspect="1"/>
+          </p:cNvSpPr>
+          <p:nvPr>
+            <p:ph type="sldImg"/>
+          </p:nvPr>
+        </p:nvSpPr>
+        <p:spPr/>
+      </p:sp>
+      <p:sp>
+        <p:nvSpPr>
+          <p:cNvPr id="3" name="Notes Placeholder 2"/>
+          <p:cNvSpPr>
+            <a:spLocks noGrp="1"/>
+          </p:cNvSpPr>
+          <p:nvPr>
+            <p:ph type="body" idx="1"/>
+          </p:nvPr>
+        </p:nvSpPr>
+        <p:spPr/>
+        <p:txBody>
+          <a:bodyPr/>
+          <a:lstStyle/>
+          <a:p>
+            <a:r>
+              <a:rPr lang="en-US" dirty="0"/>
+              <a:t>Backup. Use if asked how the business value was calculated.
+Left: the planner's work today, from the brief's five questions and its 'half hour every morning'. Each task has a low, likely and high time; drawing 10,000 combinations gives about 62 hours a month saved, between 51 and 75. At a Singapore planner's pay plus CPF that is about S$18.4k a year.
+Right: the lateness number. We run the same simulated two months twice with the same random problems, once noticed by a weekly check and once by the briefing. Adding up how many working days every order finished late, the briefing version is about 30 days lower, every two months, across about 88 orders. The 95% range 18 to 43 comes from 40 different runs. We price a day of lateness at half of Urban Outfitters' published 2% a day vendor penalty.
+Be clear: these are estimates. The next step is to time a real planner for a week.</a:t>
+            </a:r>
+            <a:endParaRPr lang="en-US" dirty="0"/>
+          </a:p>
+        </p:txBody>
+      </p:sp>
+      <p:sp>
+        <p:nvSpPr>
+          <p:cNvPr id="4" name="Slide Number Placeholder 3"/>
+          <p:cNvSpPr>
+            <a:spLocks noGrp="1"/>
+          </p:cNvSpPr>
+          <p:nvPr>
+            <p:ph type="sldNum" sz="quarter" idx="10"/>
+          </p:nvPr>
+        </p:nvSpPr>
+        <p:spPr/>
+        <p:txBody>
+          <a:bodyPr/>
+          <a:lstStyle/>
+          <a:p>
+            <a:fld id="{F7021451-1387-4CA6-816F-3879F97B5CBC}" type="slidenum">
+              <a:rPr lang="en-US"/>
+              <a:t>15</a:t>
+            </a:fld>
+            <a:endParaRPr lang="en-US"/>
+          </a:p>
+        </p:txBody>
+      </p:sp>
+    </p:spTree>
+    <p:extLst>
+      <p:ext uri="{BB962C8B-B14F-4D97-AF65-F5344CB8AC3E}">
+        <p14:creationId xmlns:p14="http://schemas.microsoft.com/office/powerpoint/2010/main" val="1024086991"/>
+      </p:ext>
+    </p:extLst>
+  </p:cSld>
+  <p:clrMapOvr>
+    <a:masterClrMapping/>
+  </p:clrMapOvr>
+</p:notes>
+</file>
+
 <file path=ppt/notesSlides/notesSlide2.xml><?xml version="1.0" encoding="utf-8"?>
 <p:notes xmlns:a="http://schemas.openxmlformats.org/drawingml/2006/main" xmlns:r="http://schemas.openxmlformats.org/officeDocument/2006/relationships" xmlns:p="http://schemas.openxmlformats.org/presentationml/2006/main">
   <p:cSld>
@@ -1438,7 +1531,8 @@
               <a:t>~35 seconds.
 The brief gives five questions a general manager asks across a day. Today each one costs a phone call to a planner and a wait, and the answer is sometimes wrong.
 Our solution is an agent the manager talks to: a morning briefing, a chat that asks when unsure and says what the data cannot answer, and actions only after a confirmation. The morning summary goes out as an email from the manager's own Outlook.
-The value, in the brief's words, is the planner's half hour every morning plus every 'let me check and call you back'. We answer all five questions in the demo. We cannot yet show hours saved: no real manager has used it. In a paired simulation, finding problems through the briefing avoided about 30 working days of lateness per two months.</a:t>
+Business value, in money: about S$29.6k a year for one factory. Two parts. First, the planner's time: the morning report and every 'let me check and call you back' add up to about 62 hours a month, a third of a person, about S$18.4k a year at Singapore pay. Second, lateness: in our simulator, finding problems through the briefing cut about 30 working days of lateness every two months; at half of a real retailer's late penalty that is about S$13.1k a year. Running it costs about S$1.9k. These are estimates: the task times and selling prices are assumptions, and backup slide 15 shows every line.
+(If asked about hiring: a full-time assistant to give the same on-call answers would cost about S$49.1k a year.)</a:t>
             </a:r>
             <a:endParaRPr lang="en-US" dirty="0"/>
           </a:p>
@@ -6540,6 +6634,3053 @@
 </p:sld>
 </file>
 
+<file path=ppt/slides/slide15.xml><?xml version="1.0" encoding="utf-8"?>
+<p:sld xmlns:a="http://schemas.openxmlformats.org/drawingml/2006/main" xmlns:r="http://schemas.openxmlformats.org/officeDocument/2006/relationships" xmlns:p="http://schemas.openxmlformats.org/presentationml/2006/main">
+  <p:cSld name="Slide 15">
+    <p:spTree>
+      <p:nvGrpSpPr>
+        <p:cNvPr id="1" name=""/>
+        <p:cNvGrpSpPr/>
+        <p:nvPr/>
+      </p:nvGrpSpPr>
+      <p:grpSpPr>
+        <a:xfrm>
+          <a:off x="0" y="0"/>
+          <a:ext cx="0" cy="0"/>
+          <a:chOff x="0" y="0"/>
+          <a:chExt cx="0" cy="0"/>
+        </a:xfrm>
+      </p:grpSpPr>
+      <p:sp>
+        <p:nvSpPr>
+          <p:cNvPr id="2" name="Text 0"/>
+          <p:cNvSpPr/>
+          <p:nvPr>
+            <p:ph idx="100" type="title" hasCustomPrompt="1"/>
+          </p:nvPr>
+        </p:nvSpPr>
+        <p:spPr>
+          <a:xfrm>
+            <a:off x="548640" y="320040"/>
+            <a:ext cx="11091672" cy="822960"/>
+          </a:xfrm>
+          <a:prstGeom prst="rect">
+            <a:avLst/>
+          </a:prstGeom>
+          <a:noFill/>
+          <a:ln/>
+        </p:spPr>
+        <p:txBody>
+          <a:bodyPr wrap="square" lIns="0" tIns="0" rIns="0" bIns="0" rtlCol="0" anchor="ctr"/>
+          <a:lstStyle/>
+          <a:p>
+            <a:pPr algn="l" indent="0" marL="0">
+              <a:buNone/>
+            </a:pPr>
+            <a:r>
+              <a:rPr lang="en-US" sz="3200" b="1" dirty="0">
+                <a:solidFill>
+                  <a:schemeClr val="tx2"/>
+                </a:solidFill>
+              </a:rPr>
+              <a:t>Backup: the business case, line by line</a:t>
+            </a:r>
+            <a:endParaRPr lang="en-US" sz="3200" dirty="0"/>
+          </a:p>
+        </p:txBody>
+      </p:sp>
+      <p:sp>
+        <p:nvSpPr>
+          <p:cNvPr id="3" name="Backup tag"/>
+          <p:cNvSpPr txBox="1"/>
+          <p:nvPr/>
+        </p:nvSpPr>
+        <p:spPr>
+          <a:xfrm>
+            <a:off x="10515600" y="566928"/>
+            <a:ext cx="1124712" cy="292608"/>
+          </a:xfrm>
+          <a:prstGeom prst="roundRect">
+            <a:avLst>
+              <a:gd name="adj" fmla="val 31250"/>
+            </a:avLst>
+          </a:prstGeom>
+          <a:solidFill>
+            <a:schemeClr val="accent5"/>
+          </a:solidFill>
+          <a:ln/>
+        </p:spPr>
+        <p:txBody>
+          <a:bodyPr wrap="square" lIns="0" tIns="0" rIns="0" bIns="0" rtlCol="0" anchor="ctr"/>
+          <a:lstStyle/>
+          <a:p>
+            <a:pPr algn="ctr" indent="0" marL="0">
+              <a:buNone/>
+            </a:pPr>
+            <a:r>
+              <a:rPr lang="en-US" sz="1100" b="1" dirty="0">
+                <a:solidFill>
+                  <a:schemeClr val="bg1"/>
+                </a:solidFill>
+              </a:rPr>
+              <a:t>BACKUP</a:t>
+            </a:r>
+            <a:endParaRPr lang="en-US" sz="1100" dirty="0"/>
+          </a:p>
+        </p:txBody>
+      </p:sp>
+      <p:sp>
+        <p:nvSpPr>
+          <p:cNvPr id="4" name="Label"/>
+          <p:cNvSpPr txBox="1"/>
+          <p:nvPr/>
+        </p:nvSpPr>
+        <p:spPr>
+          <a:xfrm>
+            <a:off x="548640" y="1234440"/>
+            <a:ext cx="6583680" cy="365760"/>
+          </a:xfrm>
+          <a:prstGeom prst="rect">
+            <a:avLst/>
+          </a:prstGeom>
+          <a:noFill/>
+          <a:ln/>
+        </p:spPr>
+        <p:txBody>
+          <a:bodyPr wrap="square" lIns="0" tIns="0" rIns="0" bIns="0" rtlCol="0" anchor="ctr"/>
+          <a:lstStyle/>
+          <a:p>
+            <a:pPr algn="l" indent="0" marL="0">
+              <a:buNone/>
+            </a:pPr>
+            <a:r>
+              <a:rPr lang="en-US" sz="1500" b="1" dirty="0">
+                <a:solidFill>
+                  <a:schemeClr val="tx2"/>
+                </a:solidFill>
+              </a:rPr>
+              <a:t>1. Planner time: what a person does today, per factory day</a:t>
+            </a:r>
+            <a:endParaRPr lang="en-US" sz="1500" dirty="0"/>
+          </a:p>
+        </p:txBody>
+      </p:sp>
+      <p:graphicFrame>
+        <p:nvGraphicFramePr>
+          <p:cNvPr id="16" name="Task table"/>
+          <p:cNvGraphicFramePr>
+            <a:graphicFrameLocks noGrp="1"/>
+          </p:cNvGraphicFramePr>
+          <p:nvPr>
+            <p:extLst>
+              <p:ext uri="{D42A27DB-BD31-4B8C-83A1-F6EECF244321}">
+                <p14:modId xmlns:p14="http://schemas.microsoft.com/office/powerpoint/2010/main" val="1579011935"/>
+              </p:ext>
+            </p:extLst>
+          </p:nvPr>
+        </p:nvGraphicFramePr>
+        <p:xfrm>
+          <a:off x="548640" y="1645920"/>
+          <a:ext cx="6583680" cy="914400"/>
+        </p:xfrm>
+        <a:graphic>
+          <a:graphicData uri="http://schemas.openxmlformats.org/drawingml/2006/table">
+            <a:tbl>
+              <a:tblPr/>
+              <a:tblGrid>
+                <a:gridCol w="2834640"/>
+                <a:gridCol w="1005840"/>
+                <a:gridCol w="1005840"/>
+                <a:gridCol w="1737360"/>
+              </a:tblGrid>
+              <a:tr h="310896">
+                <a:tc>
+                  <a:txBody>
+                    <a:bodyPr/>
+                    <a:lstStyle/>
+                    <a:p>
+                      <a:pPr algn="l" indent="0" marL="0">
+                        <a:buNone/>
+                      </a:pPr>
+                      <a:r>
+                        <a:rPr lang="en-US" sz="1300" b="1" dirty="0">
+                          <a:solidFill>
+                            <a:schemeClr val="bg1"/>
+                          </a:solidFill>
+                        </a:rPr>
+                        <a:t>Task (likely case)</a:t>
+                      </a:r>
+                      <a:endParaRPr lang="en-US" sz="1300" dirty="0"/>
+                    </a:p>
+                  </a:txBody>
+                  <a:tcPr marL="101600" marR="101600" marT="50800" marB="50800" anchor="ctr">
+                    <a:lnL w="9525" cap="flat" cmpd="sng" algn="ctr">
+                      <a:solidFill>
+                        <a:srgbClr val="EAF2F2"/>
+                      </a:solidFill>
+                      <a:prstDash val="solid"/>
+                      <a:round/>
+                      <a:headEnd type="none" w="med" len="med"/>
+                      <a:tailEnd type="none" w="med" len="med"/>
+                    </a:lnL>
+                    <a:lnR w="9525" cap="flat" cmpd="sng" algn="ctr">
+                      <a:solidFill>
+                        <a:srgbClr val="EAF2F2"/>
+                      </a:solidFill>
+                      <a:prstDash val="solid"/>
+                      <a:round/>
+                      <a:headEnd type="none" w="med" len="med"/>
+                      <a:tailEnd type="none" w="med" len="med"/>
+                    </a:lnR>
+                    <a:lnT w="9525" cap="flat" cmpd="sng" algn="ctr">
+                      <a:solidFill>
+                        <a:srgbClr val="EAF2F2"/>
+                      </a:solidFill>
+                      <a:prstDash val="solid"/>
+                      <a:round/>
+                      <a:headEnd type="none" w="med" len="med"/>
+                      <a:tailEnd type="none" w="med" len="med"/>
+                    </a:lnT>
+                    <a:lnB w="9525" cap="flat" cmpd="sng" algn="ctr">
+                      <a:solidFill>
+                        <a:srgbClr val="EAF2F2"/>
+                      </a:solidFill>
+                      <a:prstDash val="solid"/>
+                      <a:round/>
+                      <a:headEnd type="none" w="med" len="med"/>
+                      <a:tailEnd type="none" w="med" len="med"/>
+                    </a:lnB>
+                    <a:solidFill>
+                      <a:schemeClr val="tx2"/>
+                    </a:solidFill>
+                  </a:tcPr>
+                </a:tc>
+                <a:tc>
+                  <a:txBody>
+                    <a:bodyPr/>
+                    <a:lstStyle/>
+                    <a:p>
+                      <a:pPr algn="ctr" indent="0" marL="0">
+                        <a:buNone/>
+                      </a:pPr>
+                      <a:r>
+                        <a:rPr lang="en-US" sz="1300" b="1" dirty="0">
+                          <a:solidFill>
+                            <a:schemeClr val="bg1"/>
+                          </a:solidFill>
+                        </a:rPr>
+                        <a:t>Minutes</a:t>
+                      </a:r>
+                      <a:endParaRPr lang="en-US" sz="1300" dirty="0"/>
+                    </a:p>
+                  </a:txBody>
+                  <a:tcPr marL="101600" marR="101600" marT="50800" marB="50800" anchor="ctr">
+                    <a:lnL w="9525" cap="flat" cmpd="sng" algn="ctr">
+                      <a:solidFill>
+                        <a:srgbClr val="EAF2F2"/>
+                      </a:solidFill>
+                      <a:prstDash val="solid"/>
+                      <a:round/>
+                      <a:headEnd type="none" w="med" len="med"/>
+                      <a:tailEnd type="none" w="med" len="med"/>
+                    </a:lnL>
+                    <a:lnR w="9525" cap="flat" cmpd="sng" algn="ctr">
+                      <a:solidFill>
+                        <a:srgbClr val="EAF2F2"/>
+                      </a:solidFill>
+                      <a:prstDash val="solid"/>
+                      <a:round/>
+                      <a:headEnd type="none" w="med" len="med"/>
+                      <a:tailEnd type="none" w="med" len="med"/>
+                    </a:lnR>
+                    <a:lnT w="9525" cap="flat" cmpd="sng" algn="ctr">
+                      <a:solidFill>
+                        <a:srgbClr val="EAF2F2"/>
+                      </a:solidFill>
+                      <a:prstDash val="solid"/>
+                      <a:round/>
+                      <a:headEnd type="none" w="med" len="med"/>
+                      <a:tailEnd type="none" w="med" len="med"/>
+                    </a:lnT>
+                    <a:lnB w="9525" cap="flat" cmpd="sng" algn="ctr">
+                      <a:solidFill>
+                        <a:srgbClr val="EAF2F2"/>
+                      </a:solidFill>
+                      <a:prstDash val="solid"/>
+                      <a:round/>
+                      <a:headEnd type="none" w="med" len="med"/>
+                      <a:tailEnd type="none" w="med" len="med"/>
+                    </a:lnB>
+                    <a:solidFill>
+                      <a:schemeClr val="tx2"/>
+                    </a:solidFill>
+                  </a:tcPr>
+                </a:tc>
+                <a:tc>
+                  <a:txBody>
+                    <a:bodyPr/>
+                    <a:lstStyle/>
+                    <a:p>
+                      <a:pPr algn="ctr" indent="0" marL="0">
+                        <a:buNone/>
+                      </a:pPr>
+                      <a:r>
+                        <a:rPr lang="en-US" sz="1300" b="1" dirty="0">
+                          <a:solidFill>
+                            <a:schemeClr val="bg1"/>
+                          </a:solidFill>
+                        </a:rPr>
+                        <a:t>Per day</a:t>
+                      </a:r>
+                      <a:endParaRPr lang="en-US" sz="1300" dirty="0"/>
+                    </a:p>
+                  </a:txBody>
+                  <a:tcPr marL="101600" marR="101600" marT="50800" marB="50800" anchor="ctr">
+                    <a:lnL w="9525" cap="flat" cmpd="sng" algn="ctr">
+                      <a:solidFill>
+                        <a:srgbClr val="EAF2F2"/>
+                      </a:solidFill>
+                      <a:prstDash val="solid"/>
+                      <a:round/>
+                      <a:headEnd type="none" w="med" len="med"/>
+                      <a:tailEnd type="none" w="med" len="med"/>
+                    </a:lnL>
+                    <a:lnR w="9525" cap="flat" cmpd="sng" algn="ctr">
+                      <a:solidFill>
+                        <a:srgbClr val="EAF2F2"/>
+                      </a:solidFill>
+                      <a:prstDash val="solid"/>
+                      <a:round/>
+                      <a:headEnd type="none" w="med" len="med"/>
+                      <a:tailEnd type="none" w="med" len="med"/>
+                    </a:lnR>
+                    <a:lnT w="9525" cap="flat" cmpd="sng" algn="ctr">
+                      <a:solidFill>
+                        <a:srgbClr val="EAF2F2"/>
+                      </a:solidFill>
+                      <a:prstDash val="solid"/>
+                      <a:round/>
+                      <a:headEnd type="none" w="med" len="med"/>
+                      <a:tailEnd type="none" w="med" len="med"/>
+                    </a:lnT>
+                    <a:lnB w="9525" cap="flat" cmpd="sng" algn="ctr">
+                      <a:solidFill>
+                        <a:srgbClr val="EAF2F2"/>
+                      </a:solidFill>
+                      <a:prstDash val="solid"/>
+                      <a:round/>
+                      <a:headEnd type="none" w="med" len="med"/>
+                      <a:tailEnd type="none" w="med" len="med"/>
+                    </a:lnB>
+                    <a:solidFill>
+                      <a:schemeClr val="tx2"/>
+                    </a:solidFill>
+                  </a:tcPr>
+                </a:tc>
+                <a:tc>
+                  <a:txBody>
+                    <a:bodyPr/>
+                    <a:lstStyle/>
+                    <a:p>
+                      <a:pPr algn="ctr" indent="0" marL="0">
+                        <a:buNone/>
+                      </a:pPr>
+                      <a:r>
+                        <a:rPr lang="en-US" sz="1300" b="1" dirty="0">
+                          <a:solidFill>
+                            <a:schemeClr val="bg1"/>
+                          </a:solidFill>
+                        </a:rPr>
+                        <a:t>With ThreadPilot</a:t>
+                      </a:r>
+                      <a:endParaRPr lang="en-US" sz="1300" dirty="0"/>
+                    </a:p>
+                  </a:txBody>
+                  <a:tcPr marL="101600" marR="101600" marT="50800" marB="50800" anchor="ctr">
+                    <a:lnL w="9525" cap="flat" cmpd="sng" algn="ctr">
+                      <a:solidFill>
+                        <a:srgbClr val="EAF2F2"/>
+                      </a:solidFill>
+                      <a:prstDash val="solid"/>
+                      <a:round/>
+                      <a:headEnd type="none" w="med" len="med"/>
+                      <a:tailEnd type="none" w="med" len="med"/>
+                    </a:lnL>
+                    <a:lnR w="9525" cap="flat" cmpd="sng" algn="ctr">
+                      <a:solidFill>
+                        <a:srgbClr val="EAF2F2"/>
+                      </a:solidFill>
+                      <a:prstDash val="solid"/>
+                      <a:round/>
+                      <a:headEnd type="none" w="med" len="med"/>
+                      <a:tailEnd type="none" w="med" len="med"/>
+                    </a:lnR>
+                    <a:lnT w="9525" cap="flat" cmpd="sng" algn="ctr">
+                      <a:solidFill>
+                        <a:srgbClr val="EAF2F2"/>
+                      </a:solidFill>
+                      <a:prstDash val="solid"/>
+                      <a:round/>
+                      <a:headEnd type="none" w="med" len="med"/>
+                      <a:tailEnd type="none" w="med" len="med"/>
+                    </a:lnT>
+                    <a:lnB w="9525" cap="flat" cmpd="sng" algn="ctr">
+                      <a:solidFill>
+                        <a:srgbClr val="EAF2F2"/>
+                      </a:solidFill>
+                      <a:prstDash val="solid"/>
+                      <a:round/>
+                      <a:headEnd type="none" w="med" len="med"/>
+                      <a:tailEnd type="none" w="med" len="med"/>
+                    </a:lnB>
+                    <a:solidFill>
+                      <a:schemeClr val="tx2"/>
+                    </a:solidFill>
+                  </a:tcPr>
+                </a:tc>
+              </a:tr>
+              <a:tr h="310896">
+                <a:tc>
+                  <a:txBody>
+                    <a:bodyPr/>
+                    <a:lstStyle/>
+                    <a:p>
+                      <a:pPr indent="0" marL="0">
+                        <a:buNone/>
+                      </a:pPr>
+                      <a:r>
+                        <a:rPr lang="en-US" sz="1250" dirty="0">
+                          <a:solidFill>
+                            <a:schemeClr val="tx1"/>
+                          </a:solidFill>
+                        </a:rPr>
+                        <a:t>Morning report</a:t>
+                      </a:r>
+                      <a:endParaRPr lang="en-US" sz="1250" dirty="0"/>
+                    </a:p>
+                  </a:txBody>
+                  <a:tcPr marL="101600" marR="101600" marT="50800" marB="50800" anchor="ctr">
+                    <a:lnL w="9525" cap="flat" cmpd="sng" algn="ctr">
+                      <a:solidFill>
+                        <a:srgbClr val="EAF2F2"/>
+                      </a:solidFill>
+                      <a:prstDash val="solid"/>
+                      <a:round/>
+                      <a:headEnd type="none" w="med" len="med"/>
+                      <a:tailEnd type="none" w="med" len="med"/>
+                    </a:lnL>
+                    <a:lnR w="9525" cap="flat" cmpd="sng" algn="ctr">
+                      <a:solidFill>
+                        <a:srgbClr val="EAF2F2"/>
+                      </a:solidFill>
+                      <a:prstDash val="solid"/>
+                      <a:round/>
+                      <a:headEnd type="none" w="med" len="med"/>
+                      <a:tailEnd type="none" w="med" len="med"/>
+                    </a:lnR>
+                    <a:lnT w="9525" cap="flat" cmpd="sng" algn="ctr">
+                      <a:solidFill>
+                        <a:srgbClr val="EAF2F2"/>
+                      </a:solidFill>
+                      <a:prstDash val="solid"/>
+                      <a:round/>
+                      <a:headEnd type="none" w="med" len="med"/>
+                      <a:tailEnd type="none" w="med" len="med"/>
+                    </a:lnT>
+                    <a:lnB w="9525" cap="flat" cmpd="sng" algn="ctr">
+                      <a:solidFill>
+                        <a:srgbClr val="EAF2F2"/>
+                      </a:solidFill>
+                      <a:prstDash val="solid"/>
+                      <a:round/>
+                      <a:headEnd type="none" w="med" len="med"/>
+                      <a:tailEnd type="none" w="med" len="med"/>
+                    </a:lnB>
+                    <a:solidFill>
+                      <a:schemeClr val="bg1"/>
+                    </a:solidFill>
+                  </a:tcPr>
+                </a:tc>
+                <a:tc>
+                  <a:txBody>
+                    <a:bodyPr/>
+                    <a:lstStyle/>
+                    <a:p>
+                      <a:pPr algn="ctr" indent="0" marL="0">
+                        <a:buNone/>
+                      </a:pPr>
+                      <a:r>
+                        <a:rPr lang="en-US" sz="1250" dirty="0">
+                          <a:solidFill>
+                            <a:schemeClr val="tx1"/>
+                          </a:solidFill>
+                        </a:rPr>
+                        <a:t>30</a:t>
+                      </a:r>
+                      <a:endParaRPr lang="en-US" sz="1250" dirty="0"/>
+                    </a:p>
+                  </a:txBody>
+                  <a:tcPr marL="101600" marR="101600" marT="50800" marB="50800" anchor="ctr">
+                    <a:lnL w="9525" cap="flat" cmpd="sng" algn="ctr">
+                      <a:solidFill>
+                        <a:srgbClr val="EAF2F2"/>
+                      </a:solidFill>
+                      <a:prstDash val="solid"/>
+                      <a:round/>
+                      <a:headEnd type="none" w="med" len="med"/>
+                      <a:tailEnd type="none" w="med" len="med"/>
+                    </a:lnL>
+                    <a:lnR w="9525" cap="flat" cmpd="sng" algn="ctr">
+                      <a:solidFill>
+                        <a:srgbClr val="EAF2F2"/>
+                      </a:solidFill>
+                      <a:prstDash val="solid"/>
+                      <a:round/>
+                      <a:headEnd type="none" w="med" len="med"/>
+                      <a:tailEnd type="none" w="med" len="med"/>
+                    </a:lnR>
+                    <a:lnT w="9525" cap="flat" cmpd="sng" algn="ctr">
+                      <a:solidFill>
+                        <a:srgbClr val="EAF2F2"/>
+                      </a:solidFill>
+                      <a:prstDash val="solid"/>
+                      <a:round/>
+                      <a:headEnd type="none" w="med" len="med"/>
+                      <a:tailEnd type="none" w="med" len="med"/>
+                    </a:lnT>
+                    <a:lnB w="9525" cap="flat" cmpd="sng" algn="ctr">
+                      <a:solidFill>
+                        <a:srgbClr val="EAF2F2"/>
+                      </a:solidFill>
+                      <a:prstDash val="solid"/>
+                      <a:round/>
+                      <a:headEnd type="none" w="med" len="med"/>
+                      <a:tailEnd type="none" w="med" len="med"/>
+                    </a:lnB>
+                    <a:solidFill>
+                      <a:schemeClr val="bg1"/>
+                    </a:solidFill>
+                  </a:tcPr>
+                </a:tc>
+                <a:tc>
+                  <a:txBody>
+                    <a:bodyPr/>
+                    <a:lstStyle/>
+                    <a:p>
+                      <a:pPr algn="ctr" indent="0" marL="0">
+                        <a:buNone/>
+                      </a:pPr>
+                      <a:r>
+                        <a:rPr lang="en-US" sz="1250" dirty="0">
+                          <a:solidFill>
+                            <a:schemeClr val="tx1"/>
+                          </a:solidFill>
+                        </a:rPr>
+                        <a:t>1</a:t>
+                      </a:r>
+                      <a:endParaRPr lang="en-US" sz="1250" dirty="0"/>
+                    </a:p>
+                  </a:txBody>
+                  <a:tcPr marL="101600" marR="101600" marT="50800" marB="50800" anchor="ctr">
+                    <a:lnL w="9525" cap="flat" cmpd="sng" algn="ctr">
+                      <a:solidFill>
+                        <a:srgbClr val="EAF2F2"/>
+                      </a:solidFill>
+                      <a:prstDash val="solid"/>
+                      <a:round/>
+                      <a:headEnd type="none" w="med" len="med"/>
+                      <a:tailEnd type="none" w="med" len="med"/>
+                    </a:lnL>
+                    <a:lnR w="9525" cap="flat" cmpd="sng" algn="ctr">
+                      <a:solidFill>
+                        <a:srgbClr val="EAF2F2"/>
+                      </a:solidFill>
+                      <a:prstDash val="solid"/>
+                      <a:round/>
+                      <a:headEnd type="none" w="med" len="med"/>
+                      <a:tailEnd type="none" w="med" len="med"/>
+                    </a:lnR>
+                    <a:lnT w="9525" cap="flat" cmpd="sng" algn="ctr">
+                      <a:solidFill>
+                        <a:srgbClr val="EAF2F2"/>
+                      </a:solidFill>
+                      <a:prstDash val="solid"/>
+                      <a:round/>
+                      <a:headEnd type="none" w="med" len="med"/>
+                      <a:tailEnd type="none" w="med" len="med"/>
+                    </a:lnT>
+                    <a:lnB w="9525" cap="flat" cmpd="sng" algn="ctr">
+                      <a:solidFill>
+                        <a:srgbClr val="EAF2F2"/>
+                      </a:solidFill>
+                      <a:prstDash val="solid"/>
+                      <a:round/>
+                      <a:headEnd type="none" w="med" len="med"/>
+                      <a:tailEnd type="none" w="med" len="med"/>
+                    </a:lnB>
+                    <a:solidFill>
+                      <a:schemeClr val="bg1"/>
+                    </a:solidFill>
+                  </a:tcPr>
+                </a:tc>
+                <a:tc>
+                  <a:txBody>
+                    <a:bodyPr/>
+                    <a:lstStyle/>
+                    <a:p>
+                      <a:pPr algn="ctr" indent="0" marL="0">
+                        <a:buNone/>
+                      </a:pPr>
+                      <a:r>
+                        <a:rPr lang="en-US" sz="1250" dirty="0">
+                          <a:solidFill>
+                            <a:schemeClr val="tx1"/>
+                          </a:solidFill>
+                        </a:rPr>
+                        <a:t>5 min</a:t>
+                      </a:r>
+                      <a:endParaRPr lang="en-US" sz="1250" dirty="0"/>
+                    </a:p>
+                  </a:txBody>
+                  <a:tcPr marL="101600" marR="101600" marT="50800" marB="50800" anchor="ctr">
+                    <a:lnL w="9525" cap="flat" cmpd="sng" algn="ctr">
+                      <a:solidFill>
+                        <a:srgbClr val="EAF2F2"/>
+                      </a:solidFill>
+                      <a:prstDash val="solid"/>
+                      <a:round/>
+                      <a:headEnd type="none" w="med" len="med"/>
+                      <a:tailEnd type="none" w="med" len="med"/>
+                    </a:lnL>
+                    <a:lnR w="9525" cap="flat" cmpd="sng" algn="ctr">
+                      <a:solidFill>
+                        <a:srgbClr val="EAF2F2"/>
+                      </a:solidFill>
+                      <a:prstDash val="solid"/>
+                      <a:round/>
+                      <a:headEnd type="none" w="med" len="med"/>
+                      <a:tailEnd type="none" w="med" len="med"/>
+                    </a:lnR>
+                    <a:lnT w="9525" cap="flat" cmpd="sng" algn="ctr">
+                      <a:solidFill>
+                        <a:srgbClr val="EAF2F2"/>
+                      </a:solidFill>
+                      <a:prstDash val="solid"/>
+                      <a:round/>
+                      <a:headEnd type="none" w="med" len="med"/>
+                      <a:tailEnd type="none" w="med" len="med"/>
+                    </a:lnT>
+                    <a:lnB w="9525" cap="flat" cmpd="sng" algn="ctr">
+                      <a:solidFill>
+                        <a:srgbClr val="EAF2F2"/>
+                      </a:solidFill>
+                      <a:prstDash val="solid"/>
+                      <a:round/>
+                      <a:headEnd type="none" w="med" len="med"/>
+                      <a:tailEnd type="none" w="med" len="med"/>
+                    </a:lnB>
+                    <a:solidFill>
+                      <a:schemeClr val="bg1"/>
+                    </a:solidFill>
+                  </a:tcPr>
+                </a:tc>
+              </a:tr>
+              <a:tr h="310896">
+                <a:tc>
+                  <a:txBody>
+                    <a:bodyPr/>
+                    <a:lstStyle/>
+                    <a:p>
+                      <a:pPr indent="0" marL="0">
+                        <a:buNone/>
+                      </a:pPr>
+                      <a:r>
+                        <a:rPr lang="en-US" sz="1250" dirty="0">
+                          <a:solidFill>
+                            <a:schemeClr val="tx1"/>
+                          </a:solidFill>
+                        </a:rPr>
+                        <a:t>Order status call-back</a:t>
+                      </a:r>
+                      <a:endParaRPr lang="en-US" sz="1250" dirty="0"/>
+                    </a:p>
+                  </a:txBody>
+                  <a:tcPr marL="101600" marR="101600" marT="50800" marB="50800" anchor="ctr">
+                    <a:lnL w="9525" cap="flat" cmpd="sng" algn="ctr">
+                      <a:solidFill>
+                        <a:srgbClr val="EAF2F2"/>
+                      </a:solidFill>
+                      <a:prstDash val="solid"/>
+                      <a:round/>
+                      <a:headEnd type="none" w="med" len="med"/>
+                      <a:tailEnd type="none" w="med" len="med"/>
+                    </a:lnL>
+                    <a:lnR w="9525" cap="flat" cmpd="sng" algn="ctr">
+                      <a:solidFill>
+                        <a:srgbClr val="EAF2F2"/>
+                      </a:solidFill>
+                      <a:prstDash val="solid"/>
+                      <a:round/>
+                      <a:headEnd type="none" w="med" len="med"/>
+                      <a:tailEnd type="none" w="med" len="med"/>
+                    </a:lnR>
+                    <a:lnT w="9525" cap="flat" cmpd="sng" algn="ctr">
+                      <a:solidFill>
+                        <a:srgbClr val="EAF2F2"/>
+                      </a:solidFill>
+                      <a:prstDash val="solid"/>
+                      <a:round/>
+                      <a:headEnd type="none" w="med" len="med"/>
+                      <a:tailEnd type="none" w="med" len="med"/>
+                    </a:lnT>
+                    <a:lnB w="9525" cap="flat" cmpd="sng" algn="ctr">
+                      <a:solidFill>
+                        <a:srgbClr val="EAF2F2"/>
+                      </a:solidFill>
+                      <a:prstDash val="solid"/>
+                      <a:round/>
+                      <a:headEnd type="none" w="med" len="med"/>
+                      <a:tailEnd type="none" w="med" len="med"/>
+                    </a:lnB>
+                    <a:solidFill>
+                      <a:schemeClr val="bg2"/>
+                    </a:solidFill>
+                  </a:tcPr>
+                </a:tc>
+                <a:tc>
+                  <a:txBody>
+                    <a:bodyPr/>
+                    <a:lstStyle/>
+                    <a:p>
+                      <a:pPr algn="ctr" indent="0" marL="0">
+                        <a:buNone/>
+                      </a:pPr>
+                      <a:r>
+                        <a:rPr lang="en-US" sz="1250" dirty="0">
+                          <a:solidFill>
+                            <a:schemeClr val="tx1"/>
+                          </a:solidFill>
+                        </a:rPr>
+                        <a:t>10</a:t>
+                      </a:r>
+                      <a:endParaRPr lang="en-US" sz="1250" dirty="0"/>
+                    </a:p>
+                  </a:txBody>
+                  <a:tcPr marL="101600" marR="101600" marT="50800" marB="50800" anchor="ctr">
+                    <a:lnL w="9525" cap="flat" cmpd="sng" algn="ctr">
+                      <a:solidFill>
+                        <a:srgbClr val="EAF2F2"/>
+                      </a:solidFill>
+                      <a:prstDash val="solid"/>
+                      <a:round/>
+                      <a:headEnd type="none" w="med" len="med"/>
+                      <a:tailEnd type="none" w="med" len="med"/>
+                    </a:lnL>
+                    <a:lnR w="9525" cap="flat" cmpd="sng" algn="ctr">
+                      <a:solidFill>
+                        <a:srgbClr val="EAF2F2"/>
+                      </a:solidFill>
+                      <a:prstDash val="solid"/>
+                      <a:round/>
+                      <a:headEnd type="none" w="med" len="med"/>
+                      <a:tailEnd type="none" w="med" len="med"/>
+                    </a:lnR>
+                    <a:lnT w="9525" cap="flat" cmpd="sng" algn="ctr">
+                      <a:solidFill>
+                        <a:srgbClr val="EAF2F2"/>
+                      </a:solidFill>
+                      <a:prstDash val="solid"/>
+                      <a:round/>
+                      <a:headEnd type="none" w="med" len="med"/>
+                      <a:tailEnd type="none" w="med" len="med"/>
+                    </a:lnT>
+                    <a:lnB w="9525" cap="flat" cmpd="sng" algn="ctr">
+                      <a:solidFill>
+                        <a:srgbClr val="EAF2F2"/>
+                      </a:solidFill>
+                      <a:prstDash val="solid"/>
+                      <a:round/>
+                      <a:headEnd type="none" w="med" len="med"/>
+                      <a:tailEnd type="none" w="med" len="med"/>
+                    </a:lnB>
+                    <a:solidFill>
+                      <a:schemeClr val="bg2"/>
+                    </a:solidFill>
+                  </a:tcPr>
+                </a:tc>
+                <a:tc>
+                  <a:txBody>
+                    <a:bodyPr/>
+                    <a:lstStyle/>
+                    <a:p>
+                      <a:pPr algn="ctr" indent="0" marL="0">
+                        <a:buNone/>
+                      </a:pPr>
+                      <a:r>
+                        <a:rPr lang="en-US" sz="1250" dirty="0">
+                          <a:solidFill>
+                            <a:schemeClr val="tx1"/>
+                          </a:solidFill>
+                        </a:rPr>
+                        <a:t>3</a:t>
+                      </a:r>
+                      <a:endParaRPr lang="en-US" sz="1250" dirty="0"/>
+                    </a:p>
+                  </a:txBody>
+                  <a:tcPr marL="101600" marR="101600" marT="50800" marB="50800" anchor="ctr">
+                    <a:lnL w="9525" cap="flat" cmpd="sng" algn="ctr">
+                      <a:solidFill>
+                        <a:srgbClr val="EAF2F2"/>
+                      </a:solidFill>
+                      <a:prstDash val="solid"/>
+                      <a:round/>
+                      <a:headEnd type="none" w="med" len="med"/>
+                      <a:tailEnd type="none" w="med" len="med"/>
+                    </a:lnL>
+                    <a:lnR w="9525" cap="flat" cmpd="sng" algn="ctr">
+                      <a:solidFill>
+                        <a:srgbClr val="EAF2F2"/>
+                      </a:solidFill>
+                      <a:prstDash val="solid"/>
+                      <a:round/>
+                      <a:headEnd type="none" w="med" len="med"/>
+                      <a:tailEnd type="none" w="med" len="med"/>
+                    </a:lnR>
+                    <a:lnT w="9525" cap="flat" cmpd="sng" algn="ctr">
+                      <a:solidFill>
+                        <a:srgbClr val="EAF2F2"/>
+                      </a:solidFill>
+                      <a:prstDash val="solid"/>
+                      <a:round/>
+                      <a:headEnd type="none" w="med" len="med"/>
+                      <a:tailEnd type="none" w="med" len="med"/>
+                    </a:lnT>
+                    <a:lnB w="9525" cap="flat" cmpd="sng" algn="ctr">
+                      <a:solidFill>
+                        <a:srgbClr val="EAF2F2"/>
+                      </a:solidFill>
+                      <a:prstDash val="solid"/>
+                      <a:round/>
+                      <a:headEnd type="none" w="med" len="med"/>
+                      <a:tailEnd type="none" w="med" len="med"/>
+                    </a:lnB>
+                    <a:solidFill>
+                      <a:schemeClr val="bg2"/>
+                    </a:solidFill>
+                  </a:tcPr>
+                </a:tc>
+                <a:tc>
+                  <a:txBody>
+                    <a:bodyPr/>
+                    <a:lstStyle/>
+                    <a:p>
+                      <a:pPr algn="ctr" indent="0" marL="0">
+                        <a:buNone/>
+                      </a:pPr>
+                      <a:r>
+                        <a:rPr lang="en-US" sz="1250" dirty="0">
+                          <a:solidFill>
+                            <a:schemeClr val="tx1"/>
+                          </a:solidFill>
+                        </a:rPr>
+                        <a:t>1 min</a:t>
+                      </a:r>
+                      <a:endParaRPr lang="en-US" sz="1250" dirty="0"/>
+                    </a:p>
+                  </a:txBody>
+                  <a:tcPr marL="101600" marR="101600" marT="50800" marB="50800" anchor="ctr">
+                    <a:lnL w="9525" cap="flat" cmpd="sng" algn="ctr">
+                      <a:solidFill>
+                        <a:srgbClr val="EAF2F2"/>
+                      </a:solidFill>
+                      <a:prstDash val="solid"/>
+                      <a:round/>
+                      <a:headEnd type="none" w="med" len="med"/>
+                      <a:tailEnd type="none" w="med" len="med"/>
+                    </a:lnL>
+                    <a:lnR w="9525" cap="flat" cmpd="sng" algn="ctr">
+                      <a:solidFill>
+                        <a:srgbClr val="EAF2F2"/>
+                      </a:solidFill>
+                      <a:prstDash val="solid"/>
+                      <a:round/>
+                      <a:headEnd type="none" w="med" len="med"/>
+                      <a:tailEnd type="none" w="med" len="med"/>
+                    </a:lnR>
+                    <a:lnT w="9525" cap="flat" cmpd="sng" algn="ctr">
+                      <a:solidFill>
+                        <a:srgbClr val="EAF2F2"/>
+                      </a:solidFill>
+                      <a:prstDash val="solid"/>
+                      <a:round/>
+                      <a:headEnd type="none" w="med" len="med"/>
+                      <a:tailEnd type="none" w="med" len="med"/>
+                    </a:lnT>
+                    <a:lnB w="9525" cap="flat" cmpd="sng" algn="ctr">
+                      <a:solidFill>
+                        <a:srgbClr val="EAF2F2"/>
+                      </a:solidFill>
+                      <a:prstDash val="solid"/>
+                      <a:round/>
+                      <a:headEnd type="none" w="med" len="med"/>
+                      <a:tailEnd type="none" w="med" len="med"/>
+                    </a:lnB>
+                    <a:solidFill>
+                      <a:schemeClr val="bg2"/>
+                    </a:solidFill>
+                  </a:tcPr>
+                </a:tc>
+              </a:tr>
+              <a:tr h="310896">
+                <a:tc>
+                  <a:txBody>
+                    <a:bodyPr/>
+                    <a:lstStyle/>
+                    <a:p>
+                      <a:pPr indent="0" marL="0">
+                        <a:buNone/>
+                      </a:pPr>
+                      <a:r>
+                        <a:rPr lang="en-US" sz="1250" dirty="0">
+                          <a:solidFill>
+                            <a:schemeClr val="tx1"/>
+                          </a:solidFill>
+                        </a:rPr>
+                        <a:t>Can we take this order?</a:t>
+                      </a:r>
+                      <a:endParaRPr lang="en-US" sz="1250" dirty="0"/>
+                    </a:p>
+                  </a:txBody>
+                  <a:tcPr marL="101600" marR="101600" marT="50800" marB="50800" anchor="ctr">
+                    <a:lnL w="9525" cap="flat" cmpd="sng" algn="ctr">
+                      <a:solidFill>
+                        <a:srgbClr val="EAF2F2"/>
+                      </a:solidFill>
+                      <a:prstDash val="solid"/>
+                      <a:round/>
+                      <a:headEnd type="none" w="med" len="med"/>
+                      <a:tailEnd type="none" w="med" len="med"/>
+                    </a:lnL>
+                    <a:lnR w="9525" cap="flat" cmpd="sng" algn="ctr">
+                      <a:solidFill>
+                        <a:srgbClr val="EAF2F2"/>
+                      </a:solidFill>
+                      <a:prstDash val="solid"/>
+                      <a:round/>
+                      <a:headEnd type="none" w="med" len="med"/>
+                      <a:tailEnd type="none" w="med" len="med"/>
+                    </a:lnR>
+                    <a:lnT w="9525" cap="flat" cmpd="sng" algn="ctr">
+                      <a:solidFill>
+                        <a:srgbClr val="EAF2F2"/>
+                      </a:solidFill>
+                      <a:prstDash val="solid"/>
+                      <a:round/>
+                      <a:headEnd type="none" w="med" len="med"/>
+                      <a:tailEnd type="none" w="med" len="med"/>
+                    </a:lnT>
+                    <a:lnB w="9525" cap="flat" cmpd="sng" algn="ctr">
+                      <a:solidFill>
+                        <a:srgbClr val="EAF2F2"/>
+                      </a:solidFill>
+                      <a:prstDash val="solid"/>
+                      <a:round/>
+                      <a:headEnd type="none" w="med" len="med"/>
+                      <a:tailEnd type="none" w="med" len="med"/>
+                    </a:lnB>
+                    <a:solidFill>
+                      <a:schemeClr val="bg1"/>
+                    </a:solidFill>
+                  </a:tcPr>
+                </a:tc>
+                <a:tc>
+                  <a:txBody>
+                    <a:bodyPr/>
+                    <a:lstStyle/>
+                    <a:p>
+                      <a:pPr algn="ctr" indent="0" marL="0">
+                        <a:buNone/>
+                      </a:pPr>
+                      <a:r>
+                        <a:rPr lang="en-US" sz="1250" dirty="0">
+                          <a:solidFill>
+                            <a:schemeClr val="tx1"/>
+                          </a:solidFill>
+                        </a:rPr>
+                        <a:t>45</a:t>
+                      </a:r>
+                      <a:endParaRPr lang="en-US" sz="1250" dirty="0"/>
+                    </a:p>
+                  </a:txBody>
+                  <a:tcPr marL="101600" marR="101600" marT="50800" marB="50800" anchor="ctr">
+                    <a:lnL w="9525" cap="flat" cmpd="sng" algn="ctr">
+                      <a:solidFill>
+                        <a:srgbClr val="EAF2F2"/>
+                      </a:solidFill>
+                      <a:prstDash val="solid"/>
+                      <a:round/>
+                      <a:headEnd type="none" w="med" len="med"/>
+                      <a:tailEnd type="none" w="med" len="med"/>
+                    </a:lnL>
+                    <a:lnR w="9525" cap="flat" cmpd="sng" algn="ctr">
+                      <a:solidFill>
+                        <a:srgbClr val="EAF2F2"/>
+                      </a:solidFill>
+                      <a:prstDash val="solid"/>
+                      <a:round/>
+                      <a:headEnd type="none" w="med" len="med"/>
+                      <a:tailEnd type="none" w="med" len="med"/>
+                    </a:lnR>
+                    <a:lnT w="9525" cap="flat" cmpd="sng" algn="ctr">
+                      <a:solidFill>
+                        <a:srgbClr val="EAF2F2"/>
+                      </a:solidFill>
+                      <a:prstDash val="solid"/>
+                      <a:round/>
+                      <a:headEnd type="none" w="med" len="med"/>
+                      <a:tailEnd type="none" w="med" len="med"/>
+                    </a:lnT>
+                    <a:lnB w="9525" cap="flat" cmpd="sng" algn="ctr">
+                      <a:solidFill>
+                        <a:srgbClr val="EAF2F2"/>
+                      </a:solidFill>
+                      <a:prstDash val="solid"/>
+                      <a:round/>
+                      <a:headEnd type="none" w="med" len="med"/>
+                      <a:tailEnd type="none" w="med" len="med"/>
+                    </a:lnB>
+                    <a:solidFill>
+                      <a:schemeClr val="bg1"/>
+                    </a:solidFill>
+                  </a:tcPr>
+                </a:tc>
+                <a:tc>
+                  <a:txBody>
+                    <a:bodyPr/>
+                    <a:lstStyle/>
+                    <a:p>
+                      <a:pPr algn="ctr" indent="0" marL="0">
+                        <a:buNone/>
+                      </a:pPr>
+                      <a:r>
+                        <a:rPr lang="en-US" sz="1250" dirty="0">
+                          <a:solidFill>
+                            <a:schemeClr val="tx1"/>
+                          </a:solidFill>
+                        </a:rPr>
+                        <a:t>0.5</a:t>
+                      </a:r>
+                      <a:endParaRPr lang="en-US" sz="1250" dirty="0"/>
+                    </a:p>
+                  </a:txBody>
+                  <a:tcPr marL="101600" marR="101600" marT="50800" marB="50800" anchor="ctr">
+                    <a:lnL w="9525" cap="flat" cmpd="sng" algn="ctr">
+                      <a:solidFill>
+                        <a:srgbClr val="EAF2F2"/>
+                      </a:solidFill>
+                      <a:prstDash val="solid"/>
+                      <a:round/>
+                      <a:headEnd type="none" w="med" len="med"/>
+                      <a:tailEnd type="none" w="med" len="med"/>
+                    </a:lnL>
+                    <a:lnR w="9525" cap="flat" cmpd="sng" algn="ctr">
+                      <a:solidFill>
+                        <a:srgbClr val="EAF2F2"/>
+                      </a:solidFill>
+                      <a:prstDash val="solid"/>
+                      <a:round/>
+                      <a:headEnd type="none" w="med" len="med"/>
+                      <a:tailEnd type="none" w="med" len="med"/>
+                    </a:lnR>
+                    <a:lnT w="9525" cap="flat" cmpd="sng" algn="ctr">
+                      <a:solidFill>
+                        <a:srgbClr val="EAF2F2"/>
+                      </a:solidFill>
+                      <a:prstDash val="solid"/>
+                      <a:round/>
+                      <a:headEnd type="none" w="med" len="med"/>
+                      <a:tailEnd type="none" w="med" len="med"/>
+                    </a:lnT>
+                    <a:lnB w="9525" cap="flat" cmpd="sng" algn="ctr">
+                      <a:solidFill>
+                        <a:srgbClr val="EAF2F2"/>
+                      </a:solidFill>
+                      <a:prstDash val="solid"/>
+                      <a:round/>
+                      <a:headEnd type="none" w="med" len="med"/>
+                      <a:tailEnd type="none" w="med" len="med"/>
+                    </a:lnB>
+                    <a:solidFill>
+                      <a:schemeClr val="bg1"/>
+                    </a:solidFill>
+                  </a:tcPr>
+                </a:tc>
+                <a:tc>
+                  <a:txBody>
+                    <a:bodyPr/>
+                    <a:lstStyle/>
+                    <a:p>
+                      <a:pPr algn="ctr" indent="0" marL="0">
+                        <a:buNone/>
+                      </a:pPr>
+                      <a:r>
+                        <a:rPr lang="en-US" sz="1250" dirty="0">
+                          <a:solidFill>
+                            <a:schemeClr val="tx1"/>
+                          </a:solidFill>
+                        </a:rPr>
+                        <a:t>10 min</a:t>
+                      </a:r>
+                      <a:endParaRPr lang="en-US" sz="1250" dirty="0"/>
+                    </a:p>
+                  </a:txBody>
+                  <a:tcPr marL="101600" marR="101600" marT="50800" marB="50800" anchor="ctr">
+                    <a:lnL w="9525" cap="flat" cmpd="sng" algn="ctr">
+                      <a:solidFill>
+                        <a:srgbClr val="EAF2F2"/>
+                      </a:solidFill>
+                      <a:prstDash val="solid"/>
+                      <a:round/>
+                      <a:headEnd type="none" w="med" len="med"/>
+                      <a:tailEnd type="none" w="med" len="med"/>
+                    </a:lnL>
+                    <a:lnR w="9525" cap="flat" cmpd="sng" algn="ctr">
+                      <a:solidFill>
+                        <a:srgbClr val="EAF2F2"/>
+                      </a:solidFill>
+                      <a:prstDash val="solid"/>
+                      <a:round/>
+                      <a:headEnd type="none" w="med" len="med"/>
+                      <a:tailEnd type="none" w="med" len="med"/>
+                    </a:lnR>
+                    <a:lnT w="9525" cap="flat" cmpd="sng" algn="ctr">
+                      <a:solidFill>
+                        <a:srgbClr val="EAF2F2"/>
+                      </a:solidFill>
+                      <a:prstDash val="solid"/>
+                      <a:round/>
+                      <a:headEnd type="none" w="med" len="med"/>
+                      <a:tailEnd type="none" w="med" len="med"/>
+                    </a:lnT>
+                    <a:lnB w="9525" cap="flat" cmpd="sng" algn="ctr">
+                      <a:solidFill>
+                        <a:srgbClr val="EAF2F2"/>
+                      </a:solidFill>
+                      <a:prstDash val="solid"/>
+                      <a:round/>
+                      <a:headEnd type="none" w="med" len="med"/>
+                      <a:tailEnd type="none" w="med" len="med"/>
+                    </a:lnB>
+                    <a:solidFill>
+                      <a:schemeClr val="bg1"/>
+                    </a:solidFill>
+                  </a:tcPr>
+                </a:tc>
+              </a:tr>
+              <a:tr h="310896">
+                <a:tc>
+                  <a:txBody>
+                    <a:bodyPr/>
+                    <a:lstStyle/>
+                    <a:p>
+                      <a:pPr indent="0" marL="0">
+                        <a:buNone/>
+                      </a:pPr>
+                      <a:r>
+                        <a:rPr lang="en-US" sz="1250" dirty="0">
+                          <a:solidFill>
+                            <a:schemeClr val="tx1"/>
+                          </a:solidFill>
+                        </a:rPr>
+                        <a:t>Why did a stage drop?</a:t>
+                      </a:r>
+                      <a:endParaRPr lang="en-US" sz="1250" dirty="0"/>
+                    </a:p>
+                  </a:txBody>
+                  <a:tcPr marL="101600" marR="101600" marT="50800" marB="50800" anchor="ctr">
+                    <a:lnL w="9525" cap="flat" cmpd="sng" algn="ctr">
+                      <a:solidFill>
+                        <a:srgbClr val="EAF2F2"/>
+                      </a:solidFill>
+                      <a:prstDash val="solid"/>
+                      <a:round/>
+                      <a:headEnd type="none" w="med" len="med"/>
+                      <a:tailEnd type="none" w="med" len="med"/>
+                    </a:lnL>
+                    <a:lnR w="9525" cap="flat" cmpd="sng" algn="ctr">
+                      <a:solidFill>
+                        <a:srgbClr val="EAF2F2"/>
+                      </a:solidFill>
+                      <a:prstDash val="solid"/>
+                      <a:round/>
+                      <a:headEnd type="none" w="med" len="med"/>
+                      <a:tailEnd type="none" w="med" len="med"/>
+                    </a:lnR>
+                    <a:lnT w="9525" cap="flat" cmpd="sng" algn="ctr">
+                      <a:solidFill>
+                        <a:srgbClr val="EAF2F2"/>
+                      </a:solidFill>
+                      <a:prstDash val="solid"/>
+                      <a:round/>
+                      <a:headEnd type="none" w="med" len="med"/>
+                      <a:tailEnd type="none" w="med" len="med"/>
+                    </a:lnT>
+                    <a:lnB w="9525" cap="flat" cmpd="sng" algn="ctr">
+                      <a:solidFill>
+                        <a:srgbClr val="EAF2F2"/>
+                      </a:solidFill>
+                      <a:prstDash val="solid"/>
+                      <a:round/>
+                      <a:headEnd type="none" w="med" len="med"/>
+                      <a:tailEnd type="none" w="med" len="med"/>
+                    </a:lnB>
+                    <a:solidFill>
+                      <a:schemeClr val="bg2"/>
+                    </a:solidFill>
+                  </a:tcPr>
+                </a:tc>
+                <a:tc>
+                  <a:txBody>
+                    <a:bodyPr/>
+                    <a:lstStyle/>
+                    <a:p>
+                      <a:pPr algn="ctr" indent="0" marL="0">
+                        <a:buNone/>
+                      </a:pPr>
+                      <a:r>
+                        <a:rPr lang="en-US" sz="1250" dirty="0">
+                          <a:solidFill>
+                            <a:schemeClr val="tx1"/>
+                          </a:solidFill>
+                        </a:rPr>
+                        <a:t>30</a:t>
+                      </a:r>
+                      <a:endParaRPr lang="en-US" sz="1250" dirty="0"/>
+                    </a:p>
+                  </a:txBody>
+                  <a:tcPr marL="101600" marR="101600" marT="50800" marB="50800" anchor="ctr">
+                    <a:lnL w="9525" cap="flat" cmpd="sng" algn="ctr">
+                      <a:solidFill>
+                        <a:srgbClr val="EAF2F2"/>
+                      </a:solidFill>
+                      <a:prstDash val="solid"/>
+                      <a:round/>
+                      <a:headEnd type="none" w="med" len="med"/>
+                      <a:tailEnd type="none" w="med" len="med"/>
+                    </a:lnL>
+                    <a:lnR w="9525" cap="flat" cmpd="sng" algn="ctr">
+                      <a:solidFill>
+                        <a:srgbClr val="EAF2F2"/>
+                      </a:solidFill>
+                      <a:prstDash val="solid"/>
+                      <a:round/>
+                      <a:headEnd type="none" w="med" len="med"/>
+                      <a:tailEnd type="none" w="med" len="med"/>
+                    </a:lnR>
+                    <a:lnT w="9525" cap="flat" cmpd="sng" algn="ctr">
+                      <a:solidFill>
+                        <a:srgbClr val="EAF2F2"/>
+                      </a:solidFill>
+                      <a:prstDash val="solid"/>
+                      <a:round/>
+                      <a:headEnd type="none" w="med" len="med"/>
+                      <a:tailEnd type="none" w="med" len="med"/>
+                    </a:lnT>
+                    <a:lnB w="9525" cap="flat" cmpd="sng" algn="ctr">
+                      <a:solidFill>
+                        <a:srgbClr val="EAF2F2"/>
+                      </a:solidFill>
+                      <a:prstDash val="solid"/>
+                      <a:round/>
+                      <a:headEnd type="none" w="med" len="med"/>
+                      <a:tailEnd type="none" w="med" len="med"/>
+                    </a:lnB>
+                    <a:solidFill>
+                      <a:schemeClr val="bg2"/>
+                    </a:solidFill>
+                  </a:tcPr>
+                </a:tc>
+                <a:tc>
+                  <a:txBody>
+                    <a:bodyPr/>
+                    <a:lstStyle/>
+                    <a:p>
+                      <a:pPr algn="ctr" indent="0" marL="0">
+                        <a:buNone/>
+                      </a:pPr>
+                      <a:r>
+                        <a:rPr lang="en-US" sz="1250" dirty="0">
+                          <a:solidFill>
+                            <a:schemeClr val="tx1"/>
+                          </a:solidFill>
+                        </a:rPr>
+                        <a:t>0.5</a:t>
+                      </a:r>
+                      <a:endParaRPr lang="en-US" sz="1250" dirty="0"/>
+                    </a:p>
+                  </a:txBody>
+                  <a:tcPr marL="101600" marR="101600" marT="50800" marB="50800" anchor="ctr">
+                    <a:lnL w="9525" cap="flat" cmpd="sng" algn="ctr">
+                      <a:solidFill>
+                        <a:srgbClr val="EAF2F2"/>
+                      </a:solidFill>
+                      <a:prstDash val="solid"/>
+                      <a:round/>
+                      <a:headEnd type="none" w="med" len="med"/>
+                      <a:tailEnd type="none" w="med" len="med"/>
+                    </a:lnL>
+                    <a:lnR w="9525" cap="flat" cmpd="sng" algn="ctr">
+                      <a:solidFill>
+                        <a:srgbClr val="EAF2F2"/>
+                      </a:solidFill>
+                      <a:prstDash val="solid"/>
+                      <a:round/>
+                      <a:headEnd type="none" w="med" len="med"/>
+                      <a:tailEnd type="none" w="med" len="med"/>
+                    </a:lnR>
+                    <a:lnT w="9525" cap="flat" cmpd="sng" algn="ctr">
+                      <a:solidFill>
+                        <a:srgbClr val="EAF2F2"/>
+                      </a:solidFill>
+                      <a:prstDash val="solid"/>
+                      <a:round/>
+                      <a:headEnd type="none" w="med" len="med"/>
+                      <a:tailEnd type="none" w="med" len="med"/>
+                    </a:lnT>
+                    <a:lnB w="9525" cap="flat" cmpd="sng" algn="ctr">
+                      <a:solidFill>
+                        <a:srgbClr val="EAF2F2"/>
+                      </a:solidFill>
+                      <a:prstDash val="solid"/>
+                      <a:round/>
+                      <a:headEnd type="none" w="med" len="med"/>
+                      <a:tailEnd type="none" w="med" len="med"/>
+                    </a:lnB>
+                    <a:solidFill>
+                      <a:schemeClr val="bg2"/>
+                    </a:solidFill>
+                  </a:tcPr>
+                </a:tc>
+                <a:tc>
+                  <a:txBody>
+                    <a:bodyPr/>
+                    <a:lstStyle/>
+                    <a:p>
+                      <a:pPr algn="ctr" indent="0" marL="0">
+                        <a:buNone/>
+                      </a:pPr>
+                      <a:r>
+                        <a:rPr lang="en-US" sz="1250" dirty="0">
+                          <a:solidFill>
+                            <a:schemeClr val="tx1"/>
+                          </a:solidFill>
+                        </a:rPr>
+                        <a:t>5 min</a:t>
+                      </a:r>
+                      <a:endParaRPr lang="en-US" sz="1250" dirty="0"/>
+                    </a:p>
+                  </a:txBody>
+                  <a:tcPr marL="101600" marR="101600" marT="50800" marB="50800" anchor="ctr">
+                    <a:lnL w="9525" cap="flat" cmpd="sng" algn="ctr">
+                      <a:solidFill>
+                        <a:srgbClr val="EAF2F2"/>
+                      </a:solidFill>
+                      <a:prstDash val="solid"/>
+                      <a:round/>
+                      <a:headEnd type="none" w="med" len="med"/>
+                      <a:tailEnd type="none" w="med" len="med"/>
+                    </a:lnL>
+                    <a:lnR w="9525" cap="flat" cmpd="sng" algn="ctr">
+                      <a:solidFill>
+                        <a:srgbClr val="EAF2F2"/>
+                      </a:solidFill>
+                      <a:prstDash val="solid"/>
+                      <a:round/>
+                      <a:headEnd type="none" w="med" len="med"/>
+                      <a:tailEnd type="none" w="med" len="med"/>
+                    </a:lnR>
+                    <a:lnT w="9525" cap="flat" cmpd="sng" algn="ctr">
+                      <a:solidFill>
+                        <a:srgbClr val="EAF2F2"/>
+                      </a:solidFill>
+                      <a:prstDash val="solid"/>
+                      <a:round/>
+                      <a:headEnd type="none" w="med" len="med"/>
+                      <a:tailEnd type="none" w="med" len="med"/>
+                    </a:lnT>
+                    <a:lnB w="9525" cap="flat" cmpd="sng" algn="ctr">
+                      <a:solidFill>
+                        <a:srgbClr val="EAF2F2"/>
+                      </a:solidFill>
+                      <a:prstDash val="solid"/>
+                      <a:round/>
+                      <a:headEnd type="none" w="med" len="med"/>
+                      <a:tailEnd type="none" w="med" len="med"/>
+                    </a:lnB>
+                    <a:solidFill>
+                      <a:schemeClr val="bg2"/>
+                    </a:solidFill>
+                  </a:tcPr>
+                </a:tc>
+              </a:tr>
+              <a:tr h="310896">
+                <a:tc>
+                  <a:txBody>
+                    <a:bodyPr/>
+                    <a:lstStyle/>
+                    <a:p>
+                      <a:pPr indent="0" marL="0">
+                        <a:buNone/>
+                      </a:pPr>
+                      <a:r>
+                        <a:rPr lang="en-US" sz="1250" dirty="0">
+                          <a:solidFill>
+                            <a:schemeClr val="tx1"/>
+                          </a:solidFill>
+                        </a:rPr>
+                        <a:t>Chase-up message</a:t>
+                      </a:r>
+                      <a:endParaRPr lang="en-US" sz="1250" dirty="0"/>
+                    </a:p>
+                  </a:txBody>
+                  <a:tcPr marL="101600" marR="101600" marT="50800" marB="50800" anchor="ctr">
+                    <a:lnL w="9525" cap="flat" cmpd="sng" algn="ctr">
+                      <a:solidFill>
+                        <a:srgbClr val="EAF2F2"/>
+                      </a:solidFill>
+                      <a:prstDash val="solid"/>
+                      <a:round/>
+                      <a:headEnd type="none" w="med" len="med"/>
+                      <a:tailEnd type="none" w="med" len="med"/>
+                    </a:lnL>
+                    <a:lnR w="9525" cap="flat" cmpd="sng" algn="ctr">
+                      <a:solidFill>
+                        <a:srgbClr val="EAF2F2"/>
+                      </a:solidFill>
+                      <a:prstDash val="solid"/>
+                      <a:round/>
+                      <a:headEnd type="none" w="med" len="med"/>
+                      <a:tailEnd type="none" w="med" len="med"/>
+                    </a:lnR>
+                    <a:lnT w="9525" cap="flat" cmpd="sng" algn="ctr">
+                      <a:solidFill>
+                        <a:srgbClr val="EAF2F2"/>
+                      </a:solidFill>
+                      <a:prstDash val="solid"/>
+                      <a:round/>
+                      <a:headEnd type="none" w="med" len="med"/>
+                      <a:tailEnd type="none" w="med" len="med"/>
+                    </a:lnT>
+                    <a:lnB w="9525" cap="flat" cmpd="sng" algn="ctr">
+                      <a:solidFill>
+                        <a:srgbClr val="EAF2F2"/>
+                      </a:solidFill>
+                      <a:prstDash val="solid"/>
+                      <a:round/>
+                      <a:headEnd type="none" w="med" len="med"/>
+                      <a:tailEnd type="none" w="med" len="med"/>
+                    </a:lnB>
+                    <a:solidFill>
+                      <a:schemeClr val="bg1"/>
+                    </a:solidFill>
+                  </a:tcPr>
+                </a:tc>
+                <a:tc>
+                  <a:txBody>
+                    <a:bodyPr/>
+                    <a:lstStyle/>
+                    <a:p>
+                      <a:pPr algn="ctr" indent="0" marL="0">
+                        <a:buNone/>
+                      </a:pPr>
+                      <a:r>
+                        <a:rPr lang="en-US" sz="1250" dirty="0">
+                          <a:solidFill>
+                            <a:schemeClr val="tx1"/>
+                          </a:solidFill>
+                        </a:rPr>
+                        <a:t>10</a:t>
+                      </a:r>
+                      <a:endParaRPr lang="en-US" sz="1250" dirty="0"/>
+                    </a:p>
+                  </a:txBody>
+                  <a:tcPr marL="101600" marR="101600" marT="50800" marB="50800" anchor="ctr">
+                    <a:lnL w="9525" cap="flat" cmpd="sng" algn="ctr">
+                      <a:solidFill>
+                        <a:srgbClr val="EAF2F2"/>
+                      </a:solidFill>
+                      <a:prstDash val="solid"/>
+                      <a:round/>
+                      <a:headEnd type="none" w="med" len="med"/>
+                      <a:tailEnd type="none" w="med" len="med"/>
+                    </a:lnL>
+                    <a:lnR w="9525" cap="flat" cmpd="sng" algn="ctr">
+                      <a:solidFill>
+                        <a:srgbClr val="EAF2F2"/>
+                      </a:solidFill>
+                      <a:prstDash val="solid"/>
+                      <a:round/>
+                      <a:headEnd type="none" w="med" len="med"/>
+                      <a:tailEnd type="none" w="med" len="med"/>
+                    </a:lnR>
+                    <a:lnT w="9525" cap="flat" cmpd="sng" algn="ctr">
+                      <a:solidFill>
+                        <a:srgbClr val="EAF2F2"/>
+                      </a:solidFill>
+                      <a:prstDash val="solid"/>
+                      <a:round/>
+                      <a:headEnd type="none" w="med" len="med"/>
+                      <a:tailEnd type="none" w="med" len="med"/>
+                    </a:lnT>
+                    <a:lnB w="9525" cap="flat" cmpd="sng" algn="ctr">
+                      <a:solidFill>
+                        <a:srgbClr val="EAF2F2"/>
+                      </a:solidFill>
+                      <a:prstDash val="solid"/>
+                      <a:round/>
+                      <a:headEnd type="none" w="med" len="med"/>
+                      <a:tailEnd type="none" w="med" len="med"/>
+                    </a:lnB>
+                    <a:solidFill>
+                      <a:schemeClr val="bg1"/>
+                    </a:solidFill>
+                  </a:tcPr>
+                </a:tc>
+                <a:tc>
+                  <a:txBody>
+                    <a:bodyPr/>
+                    <a:lstStyle/>
+                    <a:p>
+                      <a:pPr algn="ctr" indent="0" marL="0">
+                        <a:buNone/>
+                      </a:pPr>
+                      <a:r>
+                        <a:rPr lang="en-US" sz="1250" dirty="0">
+                          <a:solidFill>
+                            <a:schemeClr val="tx1"/>
+                          </a:solidFill>
+                        </a:rPr>
+                        <a:t>1</a:t>
+                      </a:r>
+                      <a:endParaRPr lang="en-US" sz="1250" dirty="0"/>
+                    </a:p>
+                  </a:txBody>
+                  <a:tcPr marL="101600" marR="101600" marT="50800" marB="50800" anchor="ctr">
+                    <a:lnL w="9525" cap="flat" cmpd="sng" algn="ctr">
+                      <a:solidFill>
+                        <a:srgbClr val="EAF2F2"/>
+                      </a:solidFill>
+                      <a:prstDash val="solid"/>
+                      <a:round/>
+                      <a:headEnd type="none" w="med" len="med"/>
+                      <a:tailEnd type="none" w="med" len="med"/>
+                    </a:lnL>
+                    <a:lnR w="9525" cap="flat" cmpd="sng" algn="ctr">
+                      <a:solidFill>
+                        <a:srgbClr val="EAF2F2"/>
+                      </a:solidFill>
+                      <a:prstDash val="solid"/>
+                      <a:round/>
+                      <a:headEnd type="none" w="med" len="med"/>
+                      <a:tailEnd type="none" w="med" len="med"/>
+                    </a:lnR>
+                    <a:lnT w="9525" cap="flat" cmpd="sng" algn="ctr">
+                      <a:solidFill>
+                        <a:srgbClr val="EAF2F2"/>
+                      </a:solidFill>
+                      <a:prstDash val="solid"/>
+                      <a:round/>
+                      <a:headEnd type="none" w="med" len="med"/>
+                      <a:tailEnd type="none" w="med" len="med"/>
+                    </a:lnT>
+                    <a:lnB w="9525" cap="flat" cmpd="sng" algn="ctr">
+                      <a:solidFill>
+                        <a:srgbClr val="EAF2F2"/>
+                      </a:solidFill>
+                      <a:prstDash val="solid"/>
+                      <a:round/>
+                      <a:headEnd type="none" w="med" len="med"/>
+                      <a:tailEnd type="none" w="med" len="med"/>
+                    </a:lnB>
+                    <a:solidFill>
+                      <a:schemeClr val="bg1"/>
+                    </a:solidFill>
+                  </a:tcPr>
+                </a:tc>
+                <a:tc>
+                  <a:txBody>
+                    <a:bodyPr/>
+                    <a:lstStyle/>
+                    <a:p>
+                      <a:pPr algn="ctr" indent="0" marL="0">
+                        <a:buNone/>
+                      </a:pPr>
+                      <a:r>
+                        <a:rPr lang="en-US" sz="1250" dirty="0">
+                          <a:solidFill>
+                            <a:schemeClr val="tx1"/>
+                          </a:solidFill>
+                        </a:rPr>
+                        <a:t>2 min</a:t>
+                      </a:r>
+                      <a:endParaRPr lang="en-US" sz="1250" dirty="0"/>
+                    </a:p>
+                  </a:txBody>
+                  <a:tcPr marL="101600" marR="101600" marT="50800" marB="50800" anchor="ctr">
+                    <a:lnL w="9525" cap="flat" cmpd="sng" algn="ctr">
+                      <a:solidFill>
+                        <a:srgbClr val="EAF2F2"/>
+                      </a:solidFill>
+                      <a:prstDash val="solid"/>
+                      <a:round/>
+                      <a:headEnd type="none" w="med" len="med"/>
+                      <a:tailEnd type="none" w="med" len="med"/>
+                    </a:lnL>
+                    <a:lnR w="9525" cap="flat" cmpd="sng" algn="ctr">
+                      <a:solidFill>
+                        <a:srgbClr val="EAF2F2"/>
+                      </a:solidFill>
+                      <a:prstDash val="solid"/>
+                      <a:round/>
+                      <a:headEnd type="none" w="med" len="med"/>
+                      <a:tailEnd type="none" w="med" len="med"/>
+                    </a:lnR>
+                    <a:lnT w="9525" cap="flat" cmpd="sng" algn="ctr">
+                      <a:solidFill>
+                        <a:srgbClr val="EAF2F2"/>
+                      </a:solidFill>
+                      <a:prstDash val="solid"/>
+                      <a:round/>
+                      <a:headEnd type="none" w="med" len="med"/>
+                      <a:tailEnd type="none" w="med" len="med"/>
+                    </a:lnT>
+                    <a:lnB w="9525" cap="flat" cmpd="sng" algn="ctr">
+                      <a:solidFill>
+                        <a:srgbClr val="EAF2F2"/>
+                      </a:solidFill>
+                      <a:prstDash val="solid"/>
+                      <a:round/>
+                      <a:headEnd type="none" w="med" len="med"/>
+                      <a:tailEnd type="none" w="med" len="med"/>
+                    </a:lnB>
+                    <a:solidFill>
+                      <a:schemeClr val="bg1"/>
+                    </a:solidFill>
+                  </a:tcPr>
+                </a:tc>
+              </a:tr>
+              <a:tr h="310896">
+                <a:tc>
+                  <a:txBody>
+                    <a:bodyPr/>
+                    <a:lstStyle/>
+                    <a:p>
+                      <a:pPr indent="0" marL="0">
+                        <a:buNone/>
+                      </a:pPr>
+                      <a:r>
+                        <a:rPr lang="en-US" sz="1250" dirty="0">
+                          <a:solidFill>
+                            <a:schemeClr val="tx1"/>
+                          </a:solidFill>
+                        </a:rPr>
+                        <a:t>Re-check a reminder</a:t>
+                      </a:r>
+                      <a:endParaRPr lang="en-US" sz="1250" dirty="0"/>
+                    </a:p>
+                  </a:txBody>
+                  <a:tcPr marL="101600" marR="101600" marT="50800" marB="50800" anchor="ctr">
+                    <a:lnL w="9525" cap="flat" cmpd="sng" algn="ctr">
+                      <a:solidFill>
+                        <a:srgbClr val="EAF2F2"/>
+                      </a:solidFill>
+                      <a:prstDash val="solid"/>
+                      <a:round/>
+                      <a:headEnd type="none" w="med" len="med"/>
+                      <a:tailEnd type="none" w="med" len="med"/>
+                    </a:lnL>
+                    <a:lnR w="9525" cap="flat" cmpd="sng" algn="ctr">
+                      <a:solidFill>
+                        <a:srgbClr val="EAF2F2"/>
+                      </a:solidFill>
+                      <a:prstDash val="solid"/>
+                      <a:round/>
+                      <a:headEnd type="none" w="med" len="med"/>
+                      <a:tailEnd type="none" w="med" len="med"/>
+                    </a:lnR>
+                    <a:lnT w="9525" cap="flat" cmpd="sng" algn="ctr">
+                      <a:solidFill>
+                        <a:srgbClr val="EAF2F2"/>
+                      </a:solidFill>
+                      <a:prstDash val="solid"/>
+                      <a:round/>
+                      <a:headEnd type="none" w="med" len="med"/>
+                      <a:tailEnd type="none" w="med" len="med"/>
+                    </a:lnT>
+                    <a:lnB w="9525" cap="flat" cmpd="sng" algn="ctr">
+                      <a:solidFill>
+                        <a:srgbClr val="EAF2F2"/>
+                      </a:solidFill>
+                      <a:prstDash val="solid"/>
+                      <a:round/>
+                      <a:headEnd type="none" w="med" len="med"/>
+                      <a:tailEnd type="none" w="med" len="med"/>
+                    </a:lnB>
+                    <a:solidFill>
+                      <a:schemeClr val="bg2"/>
+                    </a:solidFill>
+                  </a:tcPr>
+                </a:tc>
+                <a:tc>
+                  <a:txBody>
+                    <a:bodyPr/>
+                    <a:lstStyle/>
+                    <a:p>
+                      <a:pPr algn="ctr" indent="0" marL="0">
+                        <a:buNone/>
+                      </a:pPr>
+                      <a:r>
+                        <a:rPr lang="en-US" sz="1250" dirty="0">
+                          <a:solidFill>
+                            <a:schemeClr val="tx1"/>
+                          </a:solidFill>
+                        </a:rPr>
+                        <a:t>10</a:t>
+                      </a:r>
+                      <a:endParaRPr lang="en-US" sz="1250" dirty="0"/>
+                    </a:p>
+                  </a:txBody>
+                  <a:tcPr marL="101600" marR="101600" marT="50800" marB="50800" anchor="ctr">
+                    <a:lnL w="9525" cap="flat" cmpd="sng" algn="ctr">
+                      <a:solidFill>
+                        <a:srgbClr val="EAF2F2"/>
+                      </a:solidFill>
+                      <a:prstDash val="solid"/>
+                      <a:round/>
+                      <a:headEnd type="none" w="med" len="med"/>
+                      <a:tailEnd type="none" w="med" len="med"/>
+                    </a:lnL>
+                    <a:lnR w="9525" cap="flat" cmpd="sng" algn="ctr">
+                      <a:solidFill>
+                        <a:srgbClr val="EAF2F2"/>
+                      </a:solidFill>
+                      <a:prstDash val="solid"/>
+                      <a:round/>
+                      <a:headEnd type="none" w="med" len="med"/>
+                      <a:tailEnd type="none" w="med" len="med"/>
+                    </a:lnR>
+                    <a:lnT w="9525" cap="flat" cmpd="sng" algn="ctr">
+                      <a:solidFill>
+                        <a:srgbClr val="EAF2F2"/>
+                      </a:solidFill>
+                      <a:prstDash val="solid"/>
+                      <a:round/>
+                      <a:headEnd type="none" w="med" len="med"/>
+                      <a:tailEnd type="none" w="med" len="med"/>
+                    </a:lnT>
+                    <a:lnB w="9525" cap="flat" cmpd="sng" algn="ctr">
+                      <a:solidFill>
+                        <a:srgbClr val="EAF2F2"/>
+                      </a:solidFill>
+                      <a:prstDash val="solid"/>
+                      <a:round/>
+                      <a:headEnd type="none" w="med" len="med"/>
+                      <a:tailEnd type="none" w="med" len="med"/>
+                    </a:lnB>
+                    <a:solidFill>
+                      <a:schemeClr val="bg2"/>
+                    </a:solidFill>
+                  </a:tcPr>
+                </a:tc>
+                <a:tc>
+                  <a:txBody>
+                    <a:bodyPr/>
+                    <a:lstStyle/>
+                    <a:p>
+                      <a:pPr algn="ctr" indent="0" marL="0">
+                        <a:buNone/>
+                      </a:pPr>
+                      <a:r>
+                        <a:rPr lang="en-US" sz="1250" dirty="0">
+                          <a:solidFill>
+                            <a:schemeClr val="tx1"/>
+                          </a:solidFill>
+                        </a:rPr>
+                        <a:t>1</a:t>
+                      </a:r>
+                      <a:endParaRPr lang="en-US" sz="1250" dirty="0"/>
+                    </a:p>
+                  </a:txBody>
+                  <a:tcPr marL="101600" marR="101600" marT="50800" marB="50800" anchor="ctr">
+                    <a:lnL w="9525" cap="flat" cmpd="sng" algn="ctr">
+                      <a:solidFill>
+                        <a:srgbClr val="EAF2F2"/>
+                      </a:solidFill>
+                      <a:prstDash val="solid"/>
+                      <a:round/>
+                      <a:headEnd type="none" w="med" len="med"/>
+                      <a:tailEnd type="none" w="med" len="med"/>
+                    </a:lnL>
+                    <a:lnR w="9525" cap="flat" cmpd="sng" algn="ctr">
+                      <a:solidFill>
+                        <a:srgbClr val="EAF2F2"/>
+                      </a:solidFill>
+                      <a:prstDash val="solid"/>
+                      <a:round/>
+                      <a:headEnd type="none" w="med" len="med"/>
+                      <a:tailEnd type="none" w="med" len="med"/>
+                    </a:lnR>
+                    <a:lnT w="9525" cap="flat" cmpd="sng" algn="ctr">
+                      <a:solidFill>
+                        <a:srgbClr val="EAF2F2"/>
+                      </a:solidFill>
+                      <a:prstDash val="solid"/>
+                      <a:round/>
+                      <a:headEnd type="none" w="med" len="med"/>
+                      <a:tailEnd type="none" w="med" len="med"/>
+                    </a:lnT>
+                    <a:lnB w="9525" cap="flat" cmpd="sng" algn="ctr">
+                      <a:solidFill>
+                        <a:srgbClr val="EAF2F2"/>
+                      </a:solidFill>
+                      <a:prstDash val="solid"/>
+                      <a:round/>
+                      <a:headEnd type="none" w="med" len="med"/>
+                      <a:tailEnd type="none" w="med" len="med"/>
+                    </a:lnB>
+                    <a:solidFill>
+                      <a:schemeClr val="bg2"/>
+                    </a:solidFill>
+                  </a:tcPr>
+                </a:tc>
+                <a:tc>
+                  <a:txBody>
+                    <a:bodyPr/>
+                    <a:lstStyle/>
+                    <a:p>
+                      <a:pPr algn="ctr" indent="0" marL="0">
+                        <a:buNone/>
+                      </a:pPr>
+                      <a:r>
+                        <a:rPr lang="en-US" sz="1250" dirty="0">
+                          <a:solidFill>
+                            <a:schemeClr val="tx1"/>
+                          </a:solidFill>
+                        </a:rPr>
+                        <a:t>0 min</a:t>
+                      </a:r>
+                      <a:endParaRPr lang="en-US" sz="1250" dirty="0"/>
+                    </a:p>
+                  </a:txBody>
+                  <a:tcPr marL="101600" marR="101600" marT="50800" marB="50800" anchor="ctr">
+                    <a:lnL w="9525" cap="flat" cmpd="sng" algn="ctr">
+                      <a:solidFill>
+                        <a:srgbClr val="EAF2F2"/>
+                      </a:solidFill>
+                      <a:prstDash val="solid"/>
+                      <a:round/>
+                      <a:headEnd type="none" w="med" len="med"/>
+                      <a:tailEnd type="none" w="med" len="med"/>
+                    </a:lnL>
+                    <a:lnR w="9525" cap="flat" cmpd="sng" algn="ctr">
+                      <a:solidFill>
+                        <a:srgbClr val="EAF2F2"/>
+                      </a:solidFill>
+                      <a:prstDash val="solid"/>
+                      <a:round/>
+                      <a:headEnd type="none" w="med" len="med"/>
+                      <a:tailEnd type="none" w="med" len="med"/>
+                    </a:lnR>
+                    <a:lnT w="9525" cap="flat" cmpd="sng" algn="ctr">
+                      <a:solidFill>
+                        <a:srgbClr val="EAF2F2"/>
+                      </a:solidFill>
+                      <a:prstDash val="solid"/>
+                      <a:round/>
+                      <a:headEnd type="none" w="med" len="med"/>
+                      <a:tailEnd type="none" w="med" len="med"/>
+                    </a:lnT>
+                    <a:lnB w="9525" cap="flat" cmpd="sng" algn="ctr">
+                      <a:solidFill>
+                        <a:srgbClr val="EAF2F2"/>
+                      </a:solidFill>
+                      <a:prstDash val="solid"/>
+                      <a:round/>
+                      <a:headEnd type="none" w="med" len="med"/>
+                      <a:tailEnd type="none" w="med" len="med"/>
+                    </a:lnB>
+                    <a:solidFill>
+                      <a:schemeClr val="bg2"/>
+                    </a:solidFill>
+                  </a:tcPr>
+                </a:tc>
+              </a:tr>
+              <a:tr h="310896">
+                <a:tc>
+                  <a:txBody>
+                    <a:bodyPr/>
+                    <a:lstStyle/>
+                    <a:p>
+                      <a:pPr indent="0" marL="0">
+                        <a:buNone/>
+                      </a:pPr>
+                      <a:r>
+                        <a:rPr lang="en-US" sz="1250" dirty="0">
+                          <a:solidFill>
+                            <a:schemeClr val="tx1"/>
+                          </a:solidFill>
+                        </a:rPr>
+                        <a:t>Weekly KPI report (share per day)</a:t>
+                      </a:r>
+                      <a:endParaRPr lang="en-US" sz="1250" dirty="0"/>
+                    </a:p>
+                  </a:txBody>
+                  <a:tcPr marL="101600" marR="101600" marT="50800" marB="50800" anchor="ctr">
+                    <a:lnL w="9525" cap="flat" cmpd="sng" algn="ctr">
+                      <a:solidFill>
+                        <a:srgbClr val="EAF2F2"/>
+                      </a:solidFill>
+                      <a:prstDash val="solid"/>
+                      <a:round/>
+                      <a:headEnd type="none" w="med" len="med"/>
+                      <a:tailEnd type="none" w="med" len="med"/>
+                    </a:lnL>
+                    <a:lnR w="9525" cap="flat" cmpd="sng" algn="ctr">
+                      <a:solidFill>
+                        <a:srgbClr val="EAF2F2"/>
+                      </a:solidFill>
+                      <a:prstDash val="solid"/>
+                      <a:round/>
+                      <a:headEnd type="none" w="med" len="med"/>
+                      <a:tailEnd type="none" w="med" len="med"/>
+                    </a:lnR>
+                    <a:lnT w="9525" cap="flat" cmpd="sng" algn="ctr">
+                      <a:solidFill>
+                        <a:srgbClr val="EAF2F2"/>
+                      </a:solidFill>
+                      <a:prstDash val="solid"/>
+                      <a:round/>
+                      <a:headEnd type="none" w="med" len="med"/>
+                      <a:tailEnd type="none" w="med" len="med"/>
+                    </a:lnT>
+                    <a:lnB w="9525" cap="flat" cmpd="sng" algn="ctr">
+                      <a:solidFill>
+                        <a:srgbClr val="EAF2F2"/>
+                      </a:solidFill>
+                      <a:prstDash val="solid"/>
+                      <a:round/>
+                      <a:headEnd type="none" w="med" len="med"/>
+                      <a:tailEnd type="none" w="med" len="med"/>
+                    </a:lnB>
+                    <a:solidFill>
+                      <a:schemeClr val="bg1"/>
+                    </a:solidFill>
+                  </a:tcPr>
+                </a:tc>
+                <a:tc>
+                  <a:txBody>
+                    <a:bodyPr/>
+                    <a:lstStyle/>
+                    <a:p>
+                      <a:pPr algn="ctr" indent="0" marL="0">
+                        <a:buNone/>
+                      </a:pPr>
+                      <a:r>
+                        <a:rPr lang="en-US" sz="1250" dirty="0">
+                          <a:solidFill>
+                            <a:schemeClr val="tx1"/>
+                          </a:solidFill>
+                        </a:rPr>
+                        <a:t>20</a:t>
+                      </a:r>
+                      <a:endParaRPr lang="en-US" sz="1250" dirty="0"/>
+                    </a:p>
+                  </a:txBody>
+                  <a:tcPr marL="101600" marR="101600" marT="50800" marB="50800" anchor="ctr">
+                    <a:lnL w="9525" cap="flat" cmpd="sng" algn="ctr">
+                      <a:solidFill>
+                        <a:srgbClr val="EAF2F2"/>
+                      </a:solidFill>
+                      <a:prstDash val="solid"/>
+                      <a:round/>
+                      <a:headEnd type="none" w="med" len="med"/>
+                      <a:tailEnd type="none" w="med" len="med"/>
+                    </a:lnL>
+                    <a:lnR w="9525" cap="flat" cmpd="sng" algn="ctr">
+                      <a:solidFill>
+                        <a:srgbClr val="EAF2F2"/>
+                      </a:solidFill>
+                      <a:prstDash val="solid"/>
+                      <a:round/>
+                      <a:headEnd type="none" w="med" len="med"/>
+                      <a:tailEnd type="none" w="med" len="med"/>
+                    </a:lnR>
+                    <a:lnT w="9525" cap="flat" cmpd="sng" algn="ctr">
+                      <a:solidFill>
+                        <a:srgbClr val="EAF2F2"/>
+                      </a:solidFill>
+                      <a:prstDash val="solid"/>
+                      <a:round/>
+                      <a:headEnd type="none" w="med" len="med"/>
+                      <a:tailEnd type="none" w="med" len="med"/>
+                    </a:lnT>
+                    <a:lnB w="9525" cap="flat" cmpd="sng" algn="ctr">
+                      <a:solidFill>
+                        <a:srgbClr val="EAF2F2"/>
+                      </a:solidFill>
+                      <a:prstDash val="solid"/>
+                      <a:round/>
+                      <a:headEnd type="none" w="med" len="med"/>
+                      <a:tailEnd type="none" w="med" len="med"/>
+                    </a:lnB>
+                    <a:solidFill>
+                      <a:schemeClr val="bg1"/>
+                    </a:solidFill>
+                  </a:tcPr>
+                </a:tc>
+                <a:tc>
+                  <a:txBody>
+                    <a:bodyPr/>
+                    <a:lstStyle/>
+                    <a:p>
+                      <a:pPr algn="ctr" indent="0" marL="0">
+                        <a:buNone/>
+                      </a:pPr>
+                      <a:r>
+                        <a:rPr lang="en-US" sz="1250" dirty="0">
+                          <a:solidFill>
+                            <a:schemeClr val="tx1"/>
+                          </a:solidFill>
+                        </a:rPr>
+                        <a:t>1</a:t>
+                      </a:r>
+                      <a:endParaRPr lang="en-US" sz="1250" dirty="0"/>
+                    </a:p>
+                  </a:txBody>
+                  <a:tcPr marL="101600" marR="101600" marT="50800" marB="50800" anchor="ctr">
+                    <a:lnL w="9525" cap="flat" cmpd="sng" algn="ctr">
+                      <a:solidFill>
+                        <a:srgbClr val="EAF2F2"/>
+                      </a:solidFill>
+                      <a:prstDash val="solid"/>
+                      <a:round/>
+                      <a:headEnd type="none" w="med" len="med"/>
+                      <a:tailEnd type="none" w="med" len="med"/>
+                    </a:lnL>
+                    <a:lnR w="9525" cap="flat" cmpd="sng" algn="ctr">
+                      <a:solidFill>
+                        <a:srgbClr val="EAF2F2"/>
+                      </a:solidFill>
+                      <a:prstDash val="solid"/>
+                      <a:round/>
+                      <a:headEnd type="none" w="med" len="med"/>
+                      <a:tailEnd type="none" w="med" len="med"/>
+                    </a:lnR>
+                    <a:lnT w="9525" cap="flat" cmpd="sng" algn="ctr">
+                      <a:solidFill>
+                        <a:srgbClr val="EAF2F2"/>
+                      </a:solidFill>
+                      <a:prstDash val="solid"/>
+                      <a:round/>
+                      <a:headEnd type="none" w="med" len="med"/>
+                      <a:tailEnd type="none" w="med" len="med"/>
+                    </a:lnT>
+                    <a:lnB w="9525" cap="flat" cmpd="sng" algn="ctr">
+                      <a:solidFill>
+                        <a:srgbClr val="EAF2F2"/>
+                      </a:solidFill>
+                      <a:prstDash val="solid"/>
+                      <a:round/>
+                      <a:headEnd type="none" w="med" len="med"/>
+                      <a:tailEnd type="none" w="med" len="med"/>
+                    </a:lnB>
+                    <a:solidFill>
+                      <a:schemeClr val="bg1"/>
+                    </a:solidFill>
+                  </a:tcPr>
+                </a:tc>
+                <a:tc>
+                  <a:txBody>
+                    <a:bodyPr/>
+                    <a:lstStyle/>
+                    <a:p>
+                      <a:pPr algn="ctr" indent="0" marL="0">
+                        <a:buNone/>
+                      </a:pPr>
+                      <a:r>
+                        <a:rPr lang="en-US" sz="1250" dirty="0">
+                          <a:solidFill>
+                            <a:schemeClr val="tx1"/>
+                          </a:solidFill>
+                        </a:rPr>
+                        <a:t>5 min</a:t>
+                      </a:r>
+                      <a:endParaRPr lang="en-US" sz="1250" dirty="0"/>
+                    </a:p>
+                  </a:txBody>
+                  <a:tcPr marL="101600" marR="101600" marT="50800" marB="50800" anchor="ctr">
+                    <a:lnL w="9525" cap="flat" cmpd="sng" algn="ctr">
+                      <a:solidFill>
+                        <a:srgbClr val="EAF2F2"/>
+                      </a:solidFill>
+                      <a:prstDash val="solid"/>
+                      <a:round/>
+                      <a:headEnd type="none" w="med" len="med"/>
+                      <a:tailEnd type="none" w="med" len="med"/>
+                    </a:lnL>
+                    <a:lnR w="9525" cap="flat" cmpd="sng" algn="ctr">
+                      <a:solidFill>
+                        <a:srgbClr val="EAF2F2"/>
+                      </a:solidFill>
+                      <a:prstDash val="solid"/>
+                      <a:round/>
+                      <a:headEnd type="none" w="med" len="med"/>
+                      <a:tailEnd type="none" w="med" len="med"/>
+                    </a:lnR>
+                    <a:lnT w="9525" cap="flat" cmpd="sng" algn="ctr">
+                      <a:solidFill>
+                        <a:srgbClr val="EAF2F2"/>
+                      </a:solidFill>
+                      <a:prstDash val="solid"/>
+                      <a:round/>
+                      <a:headEnd type="none" w="med" len="med"/>
+                      <a:tailEnd type="none" w="med" len="med"/>
+                    </a:lnT>
+                    <a:lnB w="9525" cap="flat" cmpd="sng" algn="ctr">
+                      <a:solidFill>
+                        <a:srgbClr val="EAF2F2"/>
+                      </a:solidFill>
+                      <a:prstDash val="solid"/>
+                      <a:round/>
+                      <a:headEnd type="none" w="med" len="med"/>
+                      <a:tailEnd type="none" w="med" len="med"/>
+                    </a:lnB>
+                    <a:solidFill>
+                      <a:schemeClr val="bg1"/>
+                    </a:solidFill>
+                  </a:tcPr>
+                </a:tc>
+              </a:tr>
+            </a:tbl>
+          </a:graphicData>
+        </a:graphic>
+      </p:graphicFrame>
+      <p:sp>
+        <p:nvSpPr>
+          <p:cNvPr id="6" name="Note"/>
+          <p:cNvSpPr txBox="1"/>
+          <p:nvPr/>
+        </p:nvSpPr>
+        <p:spPr>
+          <a:xfrm>
+            <a:off x="548640" y="4251960"/>
+            <a:ext cx="6583680" cy="685800"/>
+          </a:xfrm>
+          <a:prstGeom prst="rect">
+            <a:avLst/>
+          </a:prstGeom>
+          <a:noFill/>
+          <a:ln/>
+        </p:spPr>
+        <p:txBody>
+          <a:bodyPr wrap="square" lIns="0" tIns="0" rIns="0" bIns="0" rtlCol="0" anchor="t"/>
+          <a:lstStyle/>
+          <a:p>
+            <a:pPr algn="l" indent="0" marL="0">
+              <a:buNone/>
+            </a:pPr>
+            <a:r>
+              <a:rPr lang="en-US" sz="1200" dirty="0">
+                <a:solidFill>
+                  <a:schemeClr val="tx1"/>
+                </a:solidFill>
+              </a:rPr>
+              <a:t>Each time is a range (low, likely, high), drawn 10,000 times. Result: 73 hours a month today, 11 with ThreadPilot, so 62 saved (51 to 75), at S$24.6 an hour (planner S$48k a year + CPF).</a:t>
+            </a:r>
+            <a:endParaRPr lang="en-US" sz="1200" dirty="0"/>
+          </a:p>
+        </p:txBody>
+      </p:sp>
+      <p:sp>
+        <p:nvSpPr>
+          <p:cNvPr id="7" name="Label"/>
+          <p:cNvSpPr txBox="1"/>
+          <p:nvPr/>
+        </p:nvSpPr>
+        <p:spPr>
+          <a:xfrm>
+            <a:off x="7452360" y="1234440"/>
+            <a:ext cx="4187952" cy="365760"/>
+          </a:xfrm>
+          <a:prstGeom prst="rect">
+            <a:avLst/>
+          </a:prstGeom>
+          <a:noFill/>
+          <a:ln/>
+        </p:spPr>
+        <p:txBody>
+          <a:bodyPr wrap="square" lIns="0" tIns="0" rIns="0" bIns="0" rtlCol="0" anchor="ctr"/>
+          <a:lstStyle/>
+          <a:p>
+            <a:pPr algn="l" indent="0" marL="0">
+              <a:buNone/>
+            </a:pPr>
+            <a:r>
+              <a:rPr lang="en-US" sz="1500" b="1" dirty="0">
+                <a:solidFill>
+                  <a:schemeClr val="tx2"/>
+                </a:solidFill>
+              </a:rPr>
+              <a:t>2. Lateness avoided (simulated)</a:t>
+            </a:r>
+            <a:endParaRPr lang="en-US" sz="1500" dirty="0"/>
+          </a:p>
+        </p:txBody>
+      </p:sp>
+      <p:sp>
+        <p:nvSpPr>
+          <p:cNvPr id="8" name="Note"/>
+          <p:cNvSpPr txBox="1"/>
+          <p:nvPr/>
+        </p:nvSpPr>
+        <p:spPr>
+          <a:xfrm>
+            <a:off x="7452360" y="1645920"/>
+            <a:ext cx="4187952" cy="1417320"/>
+          </a:xfrm>
+          <a:prstGeom prst="rect">
+            <a:avLst/>
+          </a:prstGeom>
+          <a:noFill/>
+          <a:ln/>
+        </p:spPr>
+        <p:txBody>
+          <a:bodyPr wrap="square" lIns="0" tIns="0" rIns="0" bIns="0" rtlCol="0" anchor="t"/>
+          <a:lstStyle/>
+          <a:p>
+            <a:pPr algn="l" indent="0" marL="0">
+              <a:buNone/>
+            </a:pPr>
+            <a:r>
+              <a:rPr lang="en-US" sz="1200" dirty="0">
+                <a:solidFill>
+                  <a:schemeClr val="tx1"/>
+                </a:solidFill>
+              </a:rPr>
+              <a:t>Same simulated factory, same random problems, run twice: noticed by a weekly check vs by the 07:00 briefing. Over about 88 orders, total lateness fell by 30.5 working days every two months (95%: 18 to 43). Priced at 1% of the order a day late (half of URBN's vendor rate) on an average order of US$5,515: S$72 per order-day.</a:t>
+            </a:r>
+            <a:endParaRPr lang="en-US" sz="1200" dirty="0"/>
+          </a:p>
+        </p:txBody>
+      </p:sp>
+      <p:graphicFrame>
+        <p:nvGraphicFramePr>
+          <p:cNvPr id="31" name="Money table"/>
+          <p:cNvGraphicFramePr>
+            <a:graphicFrameLocks noGrp="1"/>
+          </p:cNvGraphicFramePr>
+          <p:nvPr>
+            <p:extLst>
+              <p:ext uri="{D42A27DB-BD31-4B8C-83A1-F6EECF244321}">
+                <p14:modId xmlns:p14="http://schemas.microsoft.com/office/powerpoint/2010/main" val="1579011935"/>
+              </p:ext>
+            </p:extLst>
+          </p:nvPr>
+        </p:nvGraphicFramePr>
+        <p:xfrm>
+          <a:off x="7452360" y="3154680"/>
+          <a:ext cx="4187952" cy="914400"/>
+        </p:xfrm>
+        <a:graphic>
+          <a:graphicData uri="http://schemas.openxmlformats.org/drawingml/2006/table">
+            <a:tbl>
+              <a:tblPr/>
+              <a:tblGrid>
+                <a:gridCol w="2999232"/>
+                <a:gridCol w="1188720"/>
+              </a:tblGrid>
+              <a:tr h="329184">
+                <a:tc>
+                  <a:txBody>
+                    <a:bodyPr/>
+                    <a:lstStyle/>
+                    <a:p>
+                      <a:pPr algn="l" indent="0" marL="0">
+                        <a:buNone/>
+                      </a:pPr>
+                      <a:r>
+                        <a:rPr lang="en-US" sz="1300" b="1" dirty="0">
+                          <a:solidFill>
+                            <a:schemeClr val="bg1"/>
+                          </a:solidFill>
+                        </a:rPr>
+                        <a:t>A year, likely case</a:t>
+                      </a:r>
+                      <a:endParaRPr lang="en-US" sz="1300" dirty="0"/>
+                    </a:p>
+                  </a:txBody>
+                  <a:tcPr marL="101600" marR="101600" marT="50800" marB="50800" anchor="ctr">
+                    <a:lnL w="9525" cap="flat" cmpd="sng" algn="ctr">
+                      <a:solidFill>
+                        <a:srgbClr val="EAF2F2"/>
+                      </a:solidFill>
+                      <a:prstDash val="solid"/>
+                      <a:round/>
+                      <a:headEnd type="none" w="med" len="med"/>
+                      <a:tailEnd type="none" w="med" len="med"/>
+                    </a:lnL>
+                    <a:lnR w="9525" cap="flat" cmpd="sng" algn="ctr">
+                      <a:solidFill>
+                        <a:srgbClr val="EAF2F2"/>
+                      </a:solidFill>
+                      <a:prstDash val="solid"/>
+                      <a:round/>
+                      <a:headEnd type="none" w="med" len="med"/>
+                      <a:tailEnd type="none" w="med" len="med"/>
+                    </a:lnR>
+                    <a:lnT w="9525" cap="flat" cmpd="sng" algn="ctr">
+                      <a:solidFill>
+                        <a:srgbClr val="EAF2F2"/>
+                      </a:solidFill>
+                      <a:prstDash val="solid"/>
+                      <a:round/>
+                      <a:headEnd type="none" w="med" len="med"/>
+                      <a:tailEnd type="none" w="med" len="med"/>
+                    </a:lnT>
+                    <a:lnB w="9525" cap="flat" cmpd="sng" algn="ctr">
+                      <a:solidFill>
+                        <a:srgbClr val="EAF2F2"/>
+                      </a:solidFill>
+                      <a:prstDash val="solid"/>
+                      <a:round/>
+                      <a:headEnd type="none" w="med" len="med"/>
+                      <a:tailEnd type="none" w="med" len="med"/>
+                    </a:lnB>
+                    <a:solidFill>
+                      <a:schemeClr val="tx2"/>
+                    </a:solidFill>
+                  </a:tcPr>
+                </a:tc>
+                <a:tc>
+                  <a:txBody>
+                    <a:bodyPr/>
+                    <a:lstStyle/>
+                    <a:p>
+                      <a:pPr algn="ctr" indent="0" marL="0">
+                        <a:buNone/>
+                      </a:pPr>
+                      <a:r>
+                        <a:rPr lang="en-US" sz="1300" b="1" dirty="0">
+                          <a:solidFill>
+                            <a:schemeClr val="bg1"/>
+                          </a:solidFill>
+                        </a:rPr>
+                        <a:t>SGD</a:t>
+                      </a:r>
+                      <a:endParaRPr lang="en-US" sz="1300" dirty="0"/>
+                    </a:p>
+                  </a:txBody>
+                  <a:tcPr marL="101600" marR="101600" marT="50800" marB="50800" anchor="ctr">
+                    <a:lnL w="9525" cap="flat" cmpd="sng" algn="ctr">
+                      <a:solidFill>
+                        <a:srgbClr val="EAF2F2"/>
+                      </a:solidFill>
+                      <a:prstDash val="solid"/>
+                      <a:round/>
+                      <a:headEnd type="none" w="med" len="med"/>
+                      <a:tailEnd type="none" w="med" len="med"/>
+                    </a:lnL>
+                    <a:lnR w="9525" cap="flat" cmpd="sng" algn="ctr">
+                      <a:solidFill>
+                        <a:srgbClr val="EAF2F2"/>
+                      </a:solidFill>
+                      <a:prstDash val="solid"/>
+                      <a:round/>
+                      <a:headEnd type="none" w="med" len="med"/>
+                      <a:tailEnd type="none" w="med" len="med"/>
+                    </a:lnR>
+                    <a:lnT w="9525" cap="flat" cmpd="sng" algn="ctr">
+                      <a:solidFill>
+                        <a:srgbClr val="EAF2F2"/>
+                      </a:solidFill>
+                      <a:prstDash val="solid"/>
+                      <a:round/>
+                      <a:headEnd type="none" w="med" len="med"/>
+                      <a:tailEnd type="none" w="med" len="med"/>
+                    </a:lnT>
+                    <a:lnB w="9525" cap="flat" cmpd="sng" algn="ctr">
+                      <a:solidFill>
+                        <a:srgbClr val="EAF2F2"/>
+                      </a:solidFill>
+                      <a:prstDash val="solid"/>
+                      <a:round/>
+                      <a:headEnd type="none" w="med" len="med"/>
+                      <a:tailEnd type="none" w="med" len="med"/>
+                    </a:lnB>
+                    <a:solidFill>
+                      <a:schemeClr val="tx2"/>
+                    </a:solidFill>
+                  </a:tcPr>
+                </a:tc>
+              </a:tr>
+              <a:tr h="329184">
+                <a:tc>
+                  <a:txBody>
+                    <a:bodyPr/>
+                    <a:lstStyle/>
+                    <a:p>
+                      <a:pPr indent="0" marL="0">
+                        <a:buNone/>
+                      </a:pPr>
+                      <a:r>
+                        <a:rPr lang="en-US" sz="1250" dirty="0">
+                          <a:solidFill>
+                            <a:schemeClr val="tx1"/>
+                          </a:solidFill>
+                        </a:rPr>
+                        <a:t>Planner time freed</a:t>
+                      </a:r>
+                      <a:endParaRPr lang="en-US" sz="1250" dirty="0"/>
+                    </a:p>
+                  </a:txBody>
+                  <a:tcPr marL="101600" marR="101600" marT="50800" marB="50800" anchor="ctr">
+                    <a:lnL w="9525" cap="flat" cmpd="sng" algn="ctr">
+                      <a:solidFill>
+                        <a:srgbClr val="EAF2F2"/>
+                      </a:solidFill>
+                      <a:prstDash val="solid"/>
+                      <a:round/>
+                      <a:headEnd type="none" w="med" len="med"/>
+                      <a:tailEnd type="none" w="med" len="med"/>
+                    </a:lnL>
+                    <a:lnR w="9525" cap="flat" cmpd="sng" algn="ctr">
+                      <a:solidFill>
+                        <a:srgbClr val="EAF2F2"/>
+                      </a:solidFill>
+                      <a:prstDash val="solid"/>
+                      <a:round/>
+                      <a:headEnd type="none" w="med" len="med"/>
+                      <a:tailEnd type="none" w="med" len="med"/>
+                    </a:lnR>
+                    <a:lnT w="9525" cap="flat" cmpd="sng" algn="ctr">
+                      <a:solidFill>
+                        <a:srgbClr val="EAF2F2"/>
+                      </a:solidFill>
+                      <a:prstDash val="solid"/>
+                      <a:round/>
+                      <a:headEnd type="none" w="med" len="med"/>
+                      <a:tailEnd type="none" w="med" len="med"/>
+                    </a:lnT>
+                    <a:lnB w="9525" cap="flat" cmpd="sng" algn="ctr">
+                      <a:solidFill>
+                        <a:srgbClr val="EAF2F2"/>
+                      </a:solidFill>
+                      <a:prstDash val="solid"/>
+                      <a:round/>
+                      <a:headEnd type="none" w="med" len="med"/>
+                      <a:tailEnd type="none" w="med" len="med"/>
+                    </a:lnB>
+                    <a:solidFill>
+                      <a:schemeClr val="bg1"/>
+                    </a:solidFill>
+                  </a:tcPr>
+                </a:tc>
+                <a:tc>
+                  <a:txBody>
+                    <a:bodyPr/>
+                    <a:lstStyle/>
+                    <a:p>
+                      <a:pPr algn="ctr" indent="0" marL="0">
+                        <a:buNone/>
+                      </a:pPr>
+                      <a:r>
+                        <a:rPr lang="en-US" sz="1250" dirty="0">
+                          <a:solidFill>
+                            <a:schemeClr val="tx1"/>
+                          </a:solidFill>
+                        </a:rPr>
+                        <a:t>S$18.4k</a:t>
+                      </a:r>
+                      <a:endParaRPr lang="en-US" sz="1250" dirty="0"/>
+                    </a:p>
+                  </a:txBody>
+                  <a:tcPr marL="101600" marR="101600" marT="50800" marB="50800" anchor="ctr">
+                    <a:lnL w="9525" cap="flat" cmpd="sng" algn="ctr">
+                      <a:solidFill>
+                        <a:srgbClr val="EAF2F2"/>
+                      </a:solidFill>
+                      <a:prstDash val="solid"/>
+                      <a:round/>
+                      <a:headEnd type="none" w="med" len="med"/>
+                      <a:tailEnd type="none" w="med" len="med"/>
+                    </a:lnL>
+                    <a:lnR w="9525" cap="flat" cmpd="sng" algn="ctr">
+                      <a:solidFill>
+                        <a:srgbClr val="EAF2F2"/>
+                      </a:solidFill>
+                      <a:prstDash val="solid"/>
+                      <a:round/>
+                      <a:headEnd type="none" w="med" len="med"/>
+                      <a:tailEnd type="none" w="med" len="med"/>
+                    </a:lnR>
+                    <a:lnT w="9525" cap="flat" cmpd="sng" algn="ctr">
+                      <a:solidFill>
+                        <a:srgbClr val="EAF2F2"/>
+                      </a:solidFill>
+                      <a:prstDash val="solid"/>
+                      <a:round/>
+                      <a:headEnd type="none" w="med" len="med"/>
+                      <a:tailEnd type="none" w="med" len="med"/>
+                    </a:lnT>
+                    <a:lnB w="9525" cap="flat" cmpd="sng" algn="ctr">
+                      <a:solidFill>
+                        <a:srgbClr val="EAF2F2"/>
+                      </a:solidFill>
+                      <a:prstDash val="solid"/>
+                      <a:round/>
+                      <a:headEnd type="none" w="med" len="med"/>
+                      <a:tailEnd type="none" w="med" len="med"/>
+                    </a:lnB>
+                    <a:solidFill>
+                      <a:schemeClr val="bg1"/>
+                    </a:solidFill>
+                  </a:tcPr>
+                </a:tc>
+              </a:tr>
+              <a:tr h="329184">
+                <a:tc>
+                  <a:txBody>
+                    <a:bodyPr/>
+                    <a:lstStyle/>
+                    <a:p>
+                      <a:pPr indent="0" marL="0">
+                        <a:buNone/>
+                      </a:pPr>
+                      <a:r>
+                        <a:rPr lang="en-US" sz="1250" dirty="0">
+                          <a:solidFill>
+                            <a:schemeClr val="tx1"/>
+                          </a:solidFill>
+                        </a:rPr>
+                        <a:t>Late penalties avoided</a:t>
+                      </a:r>
+                      <a:endParaRPr lang="en-US" sz="1250" dirty="0"/>
+                    </a:p>
+                  </a:txBody>
+                  <a:tcPr marL="101600" marR="101600" marT="50800" marB="50800" anchor="ctr">
+                    <a:lnL w="9525" cap="flat" cmpd="sng" algn="ctr">
+                      <a:solidFill>
+                        <a:srgbClr val="EAF2F2"/>
+                      </a:solidFill>
+                      <a:prstDash val="solid"/>
+                      <a:round/>
+                      <a:headEnd type="none" w="med" len="med"/>
+                      <a:tailEnd type="none" w="med" len="med"/>
+                    </a:lnL>
+                    <a:lnR w="9525" cap="flat" cmpd="sng" algn="ctr">
+                      <a:solidFill>
+                        <a:srgbClr val="EAF2F2"/>
+                      </a:solidFill>
+                      <a:prstDash val="solid"/>
+                      <a:round/>
+                      <a:headEnd type="none" w="med" len="med"/>
+                      <a:tailEnd type="none" w="med" len="med"/>
+                    </a:lnR>
+                    <a:lnT w="9525" cap="flat" cmpd="sng" algn="ctr">
+                      <a:solidFill>
+                        <a:srgbClr val="EAF2F2"/>
+                      </a:solidFill>
+                      <a:prstDash val="solid"/>
+                      <a:round/>
+                      <a:headEnd type="none" w="med" len="med"/>
+                      <a:tailEnd type="none" w="med" len="med"/>
+                    </a:lnT>
+                    <a:lnB w="9525" cap="flat" cmpd="sng" algn="ctr">
+                      <a:solidFill>
+                        <a:srgbClr val="EAF2F2"/>
+                      </a:solidFill>
+                      <a:prstDash val="solid"/>
+                      <a:round/>
+                      <a:headEnd type="none" w="med" len="med"/>
+                      <a:tailEnd type="none" w="med" len="med"/>
+                    </a:lnB>
+                    <a:solidFill>
+                      <a:schemeClr val="bg2"/>
+                    </a:solidFill>
+                  </a:tcPr>
+                </a:tc>
+                <a:tc>
+                  <a:txBody>
+                    <a:bodyPr/>
+                    <a:lstStyle/>
+                    <a:p>
+                      <a:pPr algn="ctr" indent="0" marL="0">
+                        <a:buNone/>
+                      </a:pPr>
+                      <a:r>
+                        <a:rPr lang="en-US" sz="1250" dirty="0">
+                          <a:solidFill>
+                            <a:schemeClr val="tx1"/>
+                          </a:solidFill>
+                        </a:rPr>
+                        <a:t>S$13.1k</a:t>
+                      </a:r>
+                      <a:endParaRPr lang="en-US" sz="1250" dirty="0"/>
+                    </a:p>
+                  </a:txBody>
+                  <a:tcPr marL="101600" marR="101600" marT="50800" marB="50800" anchor="ctr">
+                    <a:lnL w="9525" cap="flat" cmpd="sng" algn="ctr">
+                      <a:solidFill>
+                        <a:srgbClr val="EAF2F2"/>
+                      </a:solidFill>
+                      <a:prstDash val="solid"/>
+                      <a:round/>
+                      <a:headEnd type="none" w="med" len="med"/>
+                      <a:tailEnd type="none" w="med" len="med"/>
+                    </a:lnL>
+                    <a:lnR w="9525" cap="flat" cmpd="sng" algn="ctr">
+                      <a:solidFill>
+                        <a:srgbClr val="EAF2F2"/>
+                      </a:solidFill>
+                      <a:prstDash val="solid"/>
+                      <a:round/>
+                      <a:headEnd type="none" w="med" len="med"/>
+                      <a:tailEnd type="none" w="med" len="med"/>
+                    </a:lnR>
+                    <a:lnT w="9525" cap="flat" cmpd="sng" algn="ctr">
+                      <a:solidFill>
+                        <a:srgbClr val="EAF2F2"/>
+                      </a:solidFill>
+                      <a:prstDash val="solid"/>
+                      <a:round/>
+                      <a:headEnd type="none" w="med" len="med"/>
+                      <a:tailEnd type="none" w="med" len="med"/>
+                    </a:lnT>
+                    <a:lnB w="9525" cap="flat" cmpd="sng" algn="ctr">
+                      <a:solidFill>
+                        <a:srgbClr val="EAF2F2"/>
+                      </a:solidFill>
+                      <a:prstDash val="solid"/>
+                      <a:round/>
+                      <a:headEnd type="none" w="med" len="med"/>
+                      <a:tailEnd type="none" w="med" len="med"/>
+                    </a:lnB>
+                    <a:solidFill>
+                      <a:schemeClr val="bg2"/>
+                    </a:solidFill>
+                  </a:tcPr>
+                </a:tc>
+              </a:tr>
+              <a:tr h="329184">
+                <a:tc>
+                  <a:txBody>
+                    <a:bodyPr/>
+                    <a:lstStyle/>
+                    <a:p>
+                      <a:pPr indent="0" marL="0">
+                        <a:buNone/>
+                      </a:pPr>
+                      <a:r>
+                        <a:rPr lang="en-US" sz="1250" dirty="0">
+                          <a:solidFill>
+                            <a:schemeClr val="tx1"/>
+                          </a:solidFill>
+                        </a:rPr>
+                        <a:t>Running ThreadPilot</a:t>
+                      </a:r>
+                      <a:endParaRPr lang="en-US" sz="1250" dirty="0"/>
+                    </a:p>
+                  </a:txBody>
+                  <a:tcPr marL="101600" marR="101600" marT="50800" marB="50800" anchor="ctr">
+                    <a:lnL w="9525" cap="flat" cmpd="sng" algn="ctr">
+                      <a:solidFill>
+                        <a:srgbClr val="EAF2F2"/>
+                      </a:solidFill>
+                      <a:prstDash val="solid"/>
+                      <a:round/>
+                      <a:headEnd type="none" w="med" len="med"/>
+                      <a:tailEnd type="none" w="med" len="med"/>
+                    </a:lnL>
+                    <a:lnR w="9525" cap="flat" cmpd="sng" algn="ctr">
+                      <a:solidFill>
+                        <a:srgbClr val="EAF2F2"/>
+                      </a:solidFill>
+                      <a:prstDash val="solid"/>
+                      <a:round/>
+                      <a:headEnd type="none" w="med" len="med"/>
+                      <a:tailEnd type="none" w="med" len="med"/>
+                    </a:lnR>
+                    <a:lnT w="9525" cap="flat" cmpd="sng" algn="ctr">
+                      <a:solidFill>
+                        <a:srgbClr val="EAF2F2"/>
+                      </a:solidFill>
+                      <a:prstDash val="solid"/>
+                      <a:round/>
+                      <a:headEnd type="none" w="med" len="med"/>
+                      <a:tailEnd type="none" w="med" len="med"/>
+                    </a:lnT>
+                    <a:lnB w="9525" cap="flat" cmpd="sng" algn="ctr">
+                      <a:solidFill>
+                        <a:srgbClr val="EAF2F2"/>
+                      </a:solidFill>
+                      <a:prstDash val="solid"/>
+                      <a:round/>
+                      <a:headEnd type="none" w="med" len="med"/>
+                      <a:tailEnd type="none" w="med" len="med"/>
+                    </a:lnB>
+                    <a:solidFill>
+                      <a:schemeClr val="bg1"/>
+                    </a:solidFill>
+                  </a:tcPr>
+                </a:tc>
+                <a:tc>
+                  <a:txBody>
+                    <a:bodyPr/>
+                    <a:lstStyle/>
+                    <a:p>
+                      <a:pPr algn="ctr" indent="0" marL="0">
+                        <a:buNone/>
+                      </a:pPr>
+                      <a:r>
+                        <a:rPr lang="en-US" sz="1250" dirty="0">
+                          <a:solidFill>
+                            <a:schemeClr val="tx1"/>
+                          </a:solidFill>
+                        </a:rPr>
+                        <a:t>−S$1.9k</a:t>
+                      </a:r>
+                      <a:endParaRPr lang="en-US" sz="1250" dirty="0"/>
+                    </a:p>
+                  </a:txBody>
+                  <a:tcPr marL="101600" marR="101600" marT="50800" marB="50800" anchor="ctr">
+                    <a:lnL w="9525" cap="flat" cmpd="sng" algn="ctr">
+                      <a:solidFill>
+                        <a:srgbClr val="EAF2F2"/>
+                      </a:solidFill>
+                      <a:prstDash val="solid"/>
+                      <a:round/>
+                      <a:headEnd type="none" w="med" len="med"/>
+                      <a:tailEnd type="none" w="med" len="med"/>
+                    </a:lnL>
+                    <a:lnR w="9525" cap="flat" cmpd="sng" algn="ctr">
+                      <a:solidFill>
+                        <a:srgbClr val="EAF2F2"/>
+                      </a:solidFill>
+                      <a:prstDash val="solid"/>
+                      <a:round/>
+                      <a:headEnd type="none" w="med" len="med"/>
+                      <a:tailEnd type="none" w="med" len="med"/>
+                    </a:lnR>
+                    <a:lnT w="9525" cap="flat" cmpd="sng" algn="ctr">
+                      <a:solidFill>
+                        <a:srgbClr val="EAF2F2"/>
+                      </a:solidFill>
+                      <a:prstDash val="solid"/>
+                      <a:round/>
+                      <a:headEnd type="none" w="med" len="med"/>
+                      <a:tailEnd type="none" w="med" len="med"/>
+                    </a:lnT>
+                    <a:lnB w="9525" cap="flat" cmpd="sng" algn="ctr">
+                      <a:solidFill>
+                        <a:srgbClr val="EAF2F2"/>
+                      </a:solidFill>
+                      <a:prstDash val="solid"/>
+                      <a:round/>
+                      <a:headEnd type="none" w="med" len="med"/>
+                      <a:tailEnd type="none" w="med" len="med"/>
+                    </a:lnB>
+                    <a:solidFill>
+                      <a:schemeClr val="bg1"/>
+                    </a:solidFill>
+                  </a:tcPr>
+                </a:tc>
+              </a:tr>
+              <a:tr h="329184">
+                <a:tc>
+                  <a:txBody>
+                    <a:bodyPr/>
+                    <a:lstStyle/>
+                    <a:p>
+                      <a:pPr indent="0" marL="0">
+                        <a:buNone/>
+                      </a:pPr>
+                      <a:r>
+                        <a:rPr lang="en-US" sz="1250" b="1" dirty="0">
+                          <a:solidFill>
+                            <a:schemeClr val="tx1"/>
+                          </a:solidFill>
+                        </a:rPr>
+                        <a:t>Net value</a:t>
+                      </a:r>
+                      <a:endParaRPr lang="en-US" sz="1250" dirty="0"/>
+                    </a:p>
+                  </a:txBody>
+                  <a:tcPr marL="101600" marR="101600" marT="50800" marB="50800" anchor="ctr">
+                    <a:lnL w="9525" cap="flat" cmpd="sng" algn="ctr">
+                      <a:solidFill>
+                        <a:srgbClr val="EAF2F2"/>
+                      </a:solidFill>
+                      <a:prstDash val="solid"/>
+                      <a:round/>
+                      <a:headEnd type="none" w="med" len="med"/>
+                      <a:tailEnd type="none" w="med" len="med"/>
+                    </a:lnL>
+                    <a:lnR w="9525" cap="flat" cmpd="sng" algn="ctr">
+                      <a:solidFill>
+                        <a:srgbClr val="EAF2F2"/>
+                      </a:solidFill>
+                      <a:prstDash val="solid"/>
+                      <a:round/>
+                      <a:headEnd type="none" w="med" len="med"/>
+                      <a:tailEnd type="none" w="med" len="med"/>
+                    </a:lnR>
+                    <a:lnT w="9525" cap="flat" cmpd="sng" algn="ctr">
+                      <a:solidFill>
+                        <a:srgbClr val="EAF2F2"/>
+                      </a:solidFill>
+                      <a:prstDash val="solid"/>
+                      <a:round/>
+                      <a:headEnd type="none" w="med" len="med"/>
+                      <a:tailEnd type="none" w="med" len="med"/>
+                    </a:lnT>
+                    <a:lnB w="9525" cap="flat" cmpd="sng" algn="ctr">
+                      <a:solidFill>
+                        <a:srgbClr val="EAF2F2"/>
+                      </a:solidFill>
+                      <a:prstDash val="solid"/>
+                      <a:round/>
+                      <a:headEnd type="none" w="med" len="med"/>
+                      <a:tailEnd type="none" w="med" len="med"/>
+                    </a:lnB>
+                    <a:solidFill>
+                      <a:schemeClr val="bg2"/>
+                    </a:solidFill>
+                  </a:tcPr>
+                </a:tc>
+                <a:tc>
+                  <a:txBody>
+                    <a:bodyPr/>
+                    <a:lstStyle/>
+                    <a:p>
+                      <a:pPr algn="ctr" indent="0" marL="0">
+                        <a:buNone/>
+                      </a:pPr>
+                      <a:r>
+                        <a:rPr lang="en-US" sz="1250" b="1" dirty="0">
+                          <a:solidFill>
+                            <a:schemeClr val="tx1"/>
+                          </a:solidFill>
+                        </a:rPr>
+                        <a:t>S$29.6k</a:t>
+                      </a:r>
+                      <a:endParaRPr lang="en-US" sz="1250" dirty="0"/>
+                    </a:p>
+                  </a:txBody>
+                  <a:tcPr marL="101600" marR="101600" marT="50800" marB="50800" anchor="ctr">
+                    <a:lnL w="9525" cap="flat" cmpd="sng" algn="ctr">
+                      <a:solidFill>
+                        <a:srgbClr val="EAF2F2"/>
+                      </a:solidFill>
+                      <a:prstDash val="solid"/>
+                      <a:round/>
+                      <a:headEnd type="none" w="med" len="med"/>
+                      <a:tailEnd type="none" w="med" len="med"/>
+                    </a:lnL>
+                    <a:lnR w="9525" cap="flat" cmpd="sng" algn="ctr">
+                      <a:solidFill>
+                        <a:srgbClr val="EAF2F2"/>
+                      </a:solidFill>
+                      <a:prstDash val="solid"/>
+                      <a:round/>
+                      <a:headEnd type="none" w="med" len="med"/>
+                      <a:tailEnd type="none" w="med" len="med"/>
+                    </a:lnR>
+                    <a:lnT w="9525" cap="flat" cmpd="sng" algn="ctr">
+                      <a:solidFill>
+                        <a:srgbClr val="EAF2F2"/>
+                      </a:solidFill>
+                      <a:prstDash val="solid"/>
+                      <a:round/>
+                      <a:headEnd type="none" w="med" len="med"/>
+                      <a:tailEnd type="none" w="med" len="med"/>
+                    </a:lnT>
+                    <a:lnB w="9525" cap="flat" cmpd="sng" algn="ctr">
+                      <a:solidFill>
+                        <a:srgbClr val="EAF2F2"/>
+                      </a:solidFill>
+                      <a:prstDash val="solid"/>
+                      <a:round/>
+                      <a:headEnd type="none" w="med" len="med"/>
+                      <a:tailEnd type="none" w="med" len="med"/>
+                    </a:lnB>
+                    <a:solidFill>
+                      <a:schemeClr val="bg2"/>
+                    </a:solidFill>
+                  </a:tcPr>
+                </a:tc>
+              </a:tr>
+            </a:tbl>
+          </a:graphicData>
+        </a:graphic>
+      </p:graphicFrame>
+      <p:sp>
+        <p:nvSpPr>
+          <p:cNvPr id="10" name="Assistant note"/>
+          <p:cNvSpPr txBox="1"/>
+          <p:nvPr/>
+        </p:nvSpPr>
+        <p:spPr>
+          <a:xfrm>
+            <a:off x="7452360" y="4892040"/>
+            <a:ext cx="4187952" cy="274320"/>
+          </a:xfrm>
+          <a:prstGeom prst="rect">
+            <a:avLst/>
+          </a:prstGeom>
+          <a:noFill/>
+          <a:ln/>
+        </p:spPr>
+        <p:txBody>
+          <a:bodyPr wrap="square" lIns="0" tIns="0" rIns="0" bIns="0" rtlCol="0" anchor="t"/>
+          <a:lstStyle/>
+          <a:p>
+            <a:pPr algn="l" indent="0" marL="0">
+              <a:buNone/>
+            </a:pPr>
+            <a:r>
+              <a:rPr lang="en-US" sz="1200" dirty="0">
+                <a:solidFill>
+                  <a:schemeClr val="accent2"/>
+                </a:solidFill>
+              </a:rPr>
+              <a:t>Hiring a full-time assistant instead: about S$49.1k a year.</a:t>
+            </a:r>
+            <a:endParaRPr lang="en-US" sz="1200" dirty="0"/>
+          </a:p>
+        </p:txBody>
+      </p:sp>
+      <p:sp>
+        <p:nvSpPr>
+          <p:cNvPr id="11" name="Banner"/>
+          <p:cNvSpPr/>
+          <p:nvPr/>
+        </p:nvSpPr>
+        <p:spPr>
+          <a:xfrm>
+            <a:off x="548640" y="5577840"/>
+            <a:ext cx="11091672" cy="566928"/>
+          </a:xfrm>
+          <a:prstGeom prst="roundRect">
+            <a:avLst>
+              <a:gd name="adj" fmla="val 12903"/>
+            </a:avLst>
+          </a:prstGeom>
+          <a:solidFill>
+            <a:schemeClr val="tx2"/>
+          </a:solidFill>
+          <a:ln/>
+        </p:spPr>
+      </p:sp>
+      <p:sp>
+        <p:nvSpPr>
+          <p:cNvPr id="12" name="Banner text"/>
+          <p:cNvSpPr txBox="1"/>
+          <p:nvPr/>
+        </p:nvSpPr>
+        <p:spPr>
+          <a:xfrm>
+            <a:off x="777240" y="5577840"/>
+            <a:ext cx="10698480" cy="566928"/>
+          </a:xfrm>
+          <a:prstGeom prst="rect">
+            <a:avLst/>
+          </a:prstGeom>
+          <a:noFill/>
+          <a:ln/>
+        </p:spPr>
+        <p:txBody>
+          <a:bodyPr wrap="square" lIns="0" tIns="0" rIns="0" bIns="0" rtlCol="0" anchor="ctr"/>
+          <a:lstStyle/>
+          <a:p>
+            <a:pPr algn="l" indent="0" marL="0">
+              <a:buNone/>
+            </a:pPr>
+            <a:r>
+              <a:rPr lang="en-US" sz="1400" b="1" dirty="0">
+                <a:solidFill>
+                  <a:schemeClr val="accent3"/>
+                </a:solidFill>
+              </a:rPr>
+              <a:t>Estimates, not measurements: </a:t>
+            </a:r>
+            <a:pPr algn="l" indent="0" marL="0">
+              <a:buNone/>
+            </a:pPr>
+            <a:r>
+              <a:rPr lang="en-US" sz="1400" dirty="0">
+                <a:solidFill>
+                  <a:schemeClr val="bg1"/>
+                </a:solidFill>
+              </a:rPr>
+              <a:t>no planner has been timed and prices are assumed (the data has none). Every input and its source: docs/business_case.md.</a:t>
+            </a:r>
+            <a:endParaRPr lang="en-US" sz="1400" dirty="0"/>
+          </a:p>
+        </p:txBody>
+      </p:sp>
+      <p:sp>
+        <p:nvSpPr>
+          <p:cNvPr id="25" name="Slide Number Placeholder 0"/>
+          <p:cNvSpPr>
+            <a:spLocks noGrp="1"/>
+          </p:cNvSpPr>
+          <p:nvPr>
+            <p:ph type="sldNum" sz="quarter" idx="4294967295"/>
+          </p:nvPr>
+        </p:nvSpPr>
+        <p:spPr>
+          <a:xfrm>
+            <a:off x="11137392" y="6382512"/>
+            <a:ext cx="502920" cy="274320"/>
+          </a:xfrm>
+          <a:prstGeom prst="rect">
+            <a:avLst/>
+          </a:prstGeom>
+          <a:extLst>
+            <a:ext uri="{C572A759-6A51-4108-AA02-DFA0A04FC94B}">
+              <ma14:wrappingTextBoxFlag xmlns:ma14="http://schemas.microsoft.com/office/mac/drawingml/2011/main" val="0"/>
+            </a:ext>
+          </a:extLst>
+        </p:spPr>
+        <p:txBody>
+          <a:bodyPr/>
+          <a:lstStyle>
+            <a:lvl1pPr>
+              <a:defRPr sz="1000">
+                <a:solidFill>
+                  <a:schemeClr val="accent5"/>
+                </a:solidFill>
+              </a:defRPr>
+            </a:lvl1pPr>
+          </a:lstStyle>
+          <a:p>
+            <a:pPr algn="r"/>
+            <a:fld id="{F7021451-1387-4CA6-816F-3879F97B5CBC}" type="slidenum">
+              <a:rPr b="0" lang="en-US"/>
+              <a:t>15</a:t>
+            </a:fld>
+            <a:endParaRPr lang="en-US"/>
+          </a:p>
+        </p:txBody>
+      </p:sp>
+    </p:spTree>
+  </p:cSld>
+  <p:clrMapOvr>
+    <a:masterClrMapping/>
+  </p:clrMapOvr>
+</p:sld>
+</file>
+
 <file path=ppt/slides/slide2.xml><?xml version="1.0" encoding="utf-8"?>
 <p:sld xmlns:a="http://schemas.openxmlformats.org/drawingml/2006/main" xmlns:r="http://schemas.openxmlformats.org/officeDocument/2006/relationships" xmlns:p="http://schemas.openxmlformats.org/presentationml/2006/main">
   <p:cSld name="Slide 2">
@@ -7359,14 +10500,53 @@
       </p:sp>
       <p:sp>
         <p:nvSpPr>
-          <p:cNvPr id="19" name="Note"/>
+          <p:cNvPr id="19" name="Stat net value"/>
           <p:cNvSpPr txBox="1"/>
           <p:nvPr/>
         </p:nvSpPr>
         <p:spPr>
           <a:xfrm>
-            <a:off x="8354568" y="2194560"/>
-            <a:ext cx="3057144" cy="914400"/>
+            <a:off x="8354568" y="2148840"/>
+            <a:ext cx="3057144" cy="731520"/>
+          </a:xfrm>
+          <a:prstGeom prst="rect">
+            <a:avLst/>
+          </a:prstGeom>
+          <a:noFill/>
+          <a:ln/>
+        </p:spPr>
+        <p:txBody>
+          <a:bodyPr wrap="square" lIns="0" tIns="0" rIns="0" bIns="0" rtlCol="0" anchor="ctr"/>
+          <a:lstStyle/>
+          <a:p>
+            <a:pPr algn="l" indent="0" marL="0">
+              <a:buNone/>
+            </a:pPr>
+            <a:r>
+              <a:rPr lang="en-US" sz="4400" b="1" dirty="0">
+                <a:solidFill>
+                  <a:schemeClr val="accent1"/>
+                </a:solidFill>
+                <a:latin typeface="Cambria" pitchFamily="34" charset="0"/>
+                <a:ea typeface="Cambria" pitchFamily="34" charset="-122"/>
+                <a:cs typeface="Cambria" pitchFamily="34" charset="-120"/>
+              </a:rPr>
+              <a:t>≈ S$29.6k</a:t>
+            </a:r>
+            <a:endParaRPr lang="en-US" sz="4400" dirty="0"/>
+          </a:p>
+        </p:txBody>
+      </p:sp>
+      <p:sp>
+        <p:nvSpPr>
+          <p:cNvPr id="20" name="Note"/>
+          <p:cNvSpPr txBox="1"/>
+          <p:nvPr/>
+        </p:nvSpPr>
+        <p:spPr>
+          <a:xfrm>
+            <a:off x="8354568" y="2862072"/>
+            <a:ext cx="3057144" cy="274320"/>
           </a:xfrm>
           <a:prstGeom prst="rect">
             <a:avLst/>
@@ -7382,66 +10562,27 @@
               <a:buNone/>
             </a:pPr>
             <a:r>
-              <a:rPr lang="en-US" sz="1300" dirty="0">
-                <a:solidFill>
-                  <a:schemeClr val="tx1"/>
-                </a:solidFill>
-              </a:rPr>
-              <a:t>In the brief's words: the planner's half hour every morning, plus every “let me check and call you back” during the day.</a:t>
-            </a:r>
-            <a:endParaRPr lang="en-US" sz="1300" dirty="0"/>
+              <a:rPr lang="en-US" sz="1200" dirty="0">
+                <a:solidFill>
+                  <a:schemeClr val="accent5"/>
+                </a:solidFill>
+              </a:rPr>
+              <a:t>net value a year, one factory (estimate)</a:t>
+            </a:r>
+            <a:endParaRPr lang="en-US" sz="1200" dirty="0"/>
           </a:p>
         </p:txBody>
       </p:sp>
       <p:sp>
         <p:nvSpPr>
-          <p:cNvPr id="20" name="Stat 5 of 5"/>
+          <p:cNvPr id="21" name="Value lines"/>
           <p:cNvSpPr txBox="1"/>
           <p:nvPr/>
         </p:nvSpPr>
         <p:spPr>
           <a:xfrm>
             <a:off x="8354568" y="3200400"/>
-            <a:ext cx="3057144" cy="868680"/>
-          </a:xfrm>
-          <a:prstGeom prst="rect">
-            <a:avLst/>
-          </a:prstGeom>
-          <a:noFill/>
-          <a:ln/>
-        </p:spPr>
-        <p:txBody>
-          <a:bodyPr wrap="square" lIns="0" tIns="0" rIns="0" bIns="0" rtlCol="0" anchor="ctr"/>
-          <a:lstStyle/>
-          <a:p>
-            <a:pPr algn="l" indent="0" marL="0">
-              <a:buNone/>
-            </a:pPr>
-            <a:r>
-              <a:rPr lang="en-US" sz="5400" b="1" dirty="0">
-                <a:solidFill>
-                  <a:schemeClr val="accent1"/>
-                </a:solidFill>
-                <a:latin typeface="Cambria" pitchFamily="34" charset="0"/>
-                <a:ea typeface="Cambria" pitchFamily="34" charset="-122"/>
-                <a:cs typeface="Cambria" pitchFamily="34" charset="-120"/>
-              </a:rPr>
-              <a:t>5 / 5</a:t>
-            </a:r>
-            <a:endParaRPr lang="en-US" sz="5400" dirty="0"/>
-          </a:p>
-        </p:txBody>
-      </p:sp>
-      <p:sp>
-        <p:nvSpPr>
-          <p:cNvPr id="21" name="Note"/>
-          <p:cNvSpPr txBox="1"/>
-          <p:nvPr/>
-        </p:nvSpPr>
-        <p:spPr>
-          <a:xfrm>
-            <a:off x="8354568" y="4069080"/>
-            <a:ext cx="3057144" cy="548640"/>
+            <a:ext cx="3057144" cy="1600200"/>
           </a:xfrm>
           <a:prstGeom prst="rect">
             <a:avLst/>
@@ -7454,34 +10595,113 @@
           <a:lstStyle/>
           <a:p>
             <a:pPr algn="l" indent="0" marL="0">
-              <a:buNone/>
-            </a:pPr>
-            <a:r>
-              <a:rPr lang="en-US" sz="1400" dirty="0">
+              <a:spcAft>
+                <a:spcPts val="600"/>
+              </a:spcAft>
+              <a:buNone/>
+            </a:pPr>
+            <a:r>
+              <a:rPr lang="en-US" sz="1200" b="1" dirty="0">
+                <a:solidFill>
+                  <a:schemeClr val="accent1"/>
+                </a:solidFill>
+              </a:rPr>
+              <a:t>+ S$18.4k  </a:t>
+            </a:r>
+            <a:pPr algn="l" indent="0" marL="0">
+              <a:spcAft>
+                <a:spcPts val="600"/>
+              </a:spcAft>
+              <a:buNone/>
+            </a:pPr>
+            <a:r>
+              <a:rPr lang="en-US" sz="1200" dirty="0">
                 <a:solidFill>
                   <a:schemeClr val="tx1"/>
                 </a:solidFill>
               </a:rPr>
-              <a:t>of the brief's daily questions are answered by a tool in our demo.</a:t>
-            </a:r>
-            <a:endParaRPr lang="en-US" sz="1400" dirty="0"/>
+              <a:t>62 planner hours a month freed: the morning report and call-backs (about a third of a person)</a:t>
+            </a:r>
+            <a:endParaRPr lang="en-US" sz="1200" dirty="0"/>
+          </a:p>
+          <a:p>
+            <a:pPr algn="l" indent="0" marL="0">
+              <a:spcAft>
+                <a:spcPts val="600"/>
+              </a:spcAft>
+              <a:buNone/>
+            </a:pPr>
+            <a:r>
+              <a:rPr lang="en-US" sz="1200" b="1" dirty="0">
+                <a:solidFill>
+                  <a:schemeClr val="accent1"/>
+                </a:solidFill>
+              </a:rPr>
+              <a:t>+ S$13.1k  </a:t>
+            </a:r>
+            <a:pPr algn="l" indent="0" marL="0">
+              <a:spcAft>
+                <a:spcPts val="600"/>
+              </a:spcAft>
+              <a:buNone/>
+            </a:pPr>
+            <a:r>
+              <a:rPr lang="en-US" sz="1200" dirty="0">
+                <a:solidFill>
+                  <a:schemeClr val="tx1"/>
+                </a:solidFill>
+              </a:rPr>
+              <a:t>late penalties avoided: about 30 fewer days of lateness every two months (simulated)</a:t>
+            </a:r>
+            <a:endParaRPr lang="en-US" sz="1200" dirty="0"/>
+          </a:p>
+          <a:p>
+            <a:pPr algn="l" indent="0" marL="0">
+              <a:spcAft>
+                <a:spcPts val="600"/>
+              </a:spcAft>
+              <a:buNone/>
+            </a:pPr>
+            <a:r>
+              <a:rPr lang="en-US" sz="1200" b="1" dirty="0">
+                <a:solidFill>
+                  <a:schemeClr val="accent2"/>
+                </a:solidFill>
+              </a:rPr>
+              <a:t>− S$1.9k  </a:t>
+            </a:r>
+            <a:pPr algn="l" indent="0" marL="0">
+              <a:spcAft>
+                <a:spcPts val="600"/>
+              </a:spcAft>
+              <a:buNone/>
+            </a:pPr>
+            <a:r>
+              <a:rPr lang="en-US" sz="1200" dirty="0">
+                <a:solidFill>
+                  <a:schemeClr val="tx1"/>
+                </a:solidFill>
+              </a:rPr>
+              <a:t>running it: OpenAI, CloudBase and upkeep</a:t>
+            </a:r>
+            <a:endParaRPr lang="en-US" sz="1200" dirty="0"/>
           </a:p>
         </p:txBody>
       </p:sp>
       <p:sp>
         <p:nvSpPr>
-          <p:cNvPr id="22" name="Not measured box"/>
+          <p:cNvPr id="22" name="Estimate box"/>
           <p:cNvSpPr/>
           <p:nvPr/>
         </p:nvSpPr>
         <p:spPr>
           <a:xfrm>
-            <a:off x="8354568" y="4617720"/>
-            <a:ext cx="3057144" cy="1325880"/>
+            <a:off x="8354568" y="4846320"/>
+            <a:ext cx="3057144" cy="1097280"/>
           </a:xfrm>
           <a:prstGeom prst="roundRect">
             <a:avLst>
-              <a:gd name="adj" fmla="val 5517"/>
+              <a:gd name="adj" fmla="val 6667"/>
             </a:avLst>
           </a:prstGeom>
           <a:solidFill>
@@ -7492,14 +10712,14 @@
       </p:sp>
       <p:sp>
         <p:nvSpPr>
-          <p:cNvPr id="23" name="Not measured text"/>
+          <p:cNvPr id="23" name="Estimate text"/>
           <p:cNvSpPr txBox="1"/>
           <p:nvPr/>
         </p:nvSpPr>
         <p:spPr>
           <a:xfrm>
-            <a:off x="8491728" y="4617720"/>
-            <a:ext cx="2782824" cy="1325880"/>
+            <a:off x="8491728" y="4846320"/>
+            <a:ext cx="2782824" cy="1097280"/>
           </a:xfrm>
           <a:prstGeom prst="rect">
             <a:avLst/>
@@ -7513,64 +10733,64 @@
           <a:p>
             <a:pPr algn="l" indent="0" marL="0">
               <a:spcAft>
-                <a:spcPts val="400"/>
+                <a:spcPts val="300"/>
               </a:spcAft>
               <a:buNone/>
             </a:pPr>
             <a:r>
-              <a:rPr lang="en-US" sz="1200" b="1" dirty="0">
+              <a:rPr lang="en-US" sz="1150" b="1" dirty="0">
                 <a:solidFill>
                   <a:schemeClr val="accent3"/>
                 </a:solidFill>
               </a:rPr>
-              <a:t>Not measured: </a:t>
+              <a:t>Instead of hiring: </a:t>
             </a:r>
             <a:pPr algn="l" indent="0" marL="0">
               <a:spcAft>
-                <a:spcPts val="400"/>
+                <a:spcPts val="300"/>
               </a:spcAft>
               <a:buNone/>
             </a:pPr>
             <a:r>
-              <a:rPr lang="en-US" sz="1200" dirty="0">
+              <a:rPr lang="en-US" sz="1150" dirty="0">
                 <a:solidFill>
                   <a:schemeClr val="bg1"/>
                 </a:solidFill>
               </a:rPr>
-              <a:t>time saved; no real manager has used it. </a:t>
-            </a:r>
-            <a:endParaRPr lang="en-US" sz="1200" dirty="0"/>
+              <a:t>a full-time assistant for on-call answers costs about S$49.1k a year. </a:t>
+            </a:r>
+            <a:endParaRPr lang="en-US" sz="1150" dirty="0"/>
           </a:p>
           <a:p>
             <a:pPr algn="l" indent="0" marL="0">
               <a:spcAft>
-                <a:spcPts val="400"/>
+                <a:spcPts val="300"/>
               </a:spcAft>
               <a:buNone/>
             </a:pPr>
             <a:r>
-              <a:rPr lang="en-US" sz="1200" b="1" dirty="0">
+              <a:rPr lang="en-US" sz="1150" b="1" dirty="0">
                 <a:solidFill>
                   <a:schemeClr val="accent3"/>
                 </a:solidFill>
               </a:rPr>
-              <a:t>In simulation: </a:t>
+              <a:t>Estimates: </a:t>
             </a:r>
             <a:pPr algn="l" indent="0" marL="0">
               <a:spcAft>
-                <a:spcPts val="400"/>
+                <a:spcPts val="300"/>
               </a:spcAft>
               <a:buNone/>
             </a:pPr>
             <a:r>
-              <a:rPr lang="en-US" sz="1200" dirty="0">
+              <a:rPr lang="en-US" sz="1150" dirty="0">
                 <a:solidFill>
                   <a:schemeClr val="bg1"/>
                 </a:solidFill>
               </a:rPr>
-              <a:t>finding problems through the briefing avoided about 30 working days of lateness per two months (95%: 18 to 43).</a:t>
-            </a:r>
-            <a:endParaRPr lang="en-US" sz="1200" dirty="0"/>
+              <a:t>task times and prices are assumptions; no planner timed yet (backup 15).</a:t>
+            </a:r>
+            <a:endParaRPr lang="en-US" sz="1150" dirty="0"/>
           </a:p>
         </p:txBody>
       </p:sp>
